--- a/05_Outputs/Air Conditioning/English Slides/Air Con Chapter 1 Topic 1.1 - Visual Lecture Deck CLEAN with TA Figures.pptx
+++ b/05_Outputs/Air Conditioning/English Slides/Air Con Chapter 1 Topic 1.1 - Visual Lecture Deck CLEAN with TA Figures.pptx
@@ -3176,7 +3176,7 @@
           <a:lstStyle/>
           <a:p>
             <a:r>
-              <a:rPr sz="3000" b="1">
+              <a:rPr sz="3000" b="1" i="0">
                 <a:solidFill>
                   <a:srgbClr val="11374B"/>
                 </a:solidFill>
@@ -3210,7 +3210,7 @@
           <a:lstStyle/>
           <a:p>
             <a:r>
-              <a:rPr sz="1400" b="0">
+              <a:rPr sz="1400" b="0" i="0">
                 <a:solidFill>
                   <a:srgbClr val="5A6973"/>
                 </a:solidFill>
@@ -3245,7 +3245,7 @@
           <a:p>
             <a:pPr algn="r"/>
             <a:r>
-              <a:rPr sz="1100" b="0">
+              <a:rPr sz="1100" b="0" i="0">
                 <a:solidFill>
                   <a:srgbClr val="78828C"/>
                 </a:solidFill>
@@ -3258,22 +3258,91 @@
       </p:sp>
       <p:sp>
         <p:nvSpPr>
-          <p:cNvPr id="6" name="Rectangle 5"/>
+          <p:cNvPr id="6" name="TextBox 5"/>
+          <p:cNvSpPr txBox="1"/>
+          <p:nvPr/>
+        </p:nvSpPr>
+        <p:spPr>
+          <a:xfrm>
+            <a:off x="365760" y="6446520"/>
+            <a:ext cx="8229600" cy="228600"/>
+          </a:xfrm>
+          <a:prstGeom prst="rect">
+            <a:avLst/>
+          </a:prstGeom>
+          <a:noFill/>
+        </p:spPr>
+        <p:txBody>
+          <a:bodyPr wrap="square">
+            <a:spAutoFit/>
+          </a:bodyPr>
+          <a:lstStyle/>
+          <a:p>
+            <a:r>
+              <a:rPr sz="900" b="0" i="0">
+                <a:solidFill>
+                  <a:srgbClr val="78828C"/>
+                </a:solidFill>
+                <a:latin typeface="Aptos"/>
+              </a:rPr>
+              <a:t>Air Conditioning · Chapter 1 · Topic 1.1</a:t>
+            </a:r>
+          </a:p>
+        </p:txBody>
+      </p:sp>
+      <p:sp>
+        <p:nvSpPr>
+          <p:cNvPr id="7" name="TextBox 6"/>
+          <p:cNvSpPr txBox="1"/>
+          <p:nvPr/>
+        </p:nvSpPr>
+        <p:spPr>
+          <a:xfrm>
+            <a:off x="11292840" y="6446520"/>
+            <a:ext cx="502920" cy="228600"/>
+          </a:xfrm>
+          <a:prstGeom prst="rect">
+            <a:avLst/>
+          </a:prstGeom>
+          <a:noFill/>
+        </p:spPr>
+        <p:txBody>
+          <a:bodyPr wrap="square">
+            <a:spAutoFit/>
+          </a:bodyPr>
+          <a:lstStyle/>
+          <a:p>
+            <a:pPr algn="r"/>
+            <a:r>
+              <a:rPr sz="900" b="0" i="0">
+                <a:solidFill>
+                  <a:srgbClr val="78828C"/>
+                </a:solidFill>
+                <a:latin typeface="Aptos"/>
+              </a:rPr>
+              <a:t>1</a:t>
+            </a:r>
+          </a:p>
+        </p:txBody>
+      </p:sp>
+      <p:sp>
+        <p:nvSpPr>
+          <p:cNvPr id="8" name="Rounded Rectangle 7"/>
           <p:cNvSpPr/>
           <p:nvPr/>
         </p:nvSpPr>
         <p:spPr>
           <a:xfrm>
-            <a:off x="685800" y="1737360"/>
-            <a:ext cx="10835640" cy="4343400"/>
-          </a:xfrm>
-          <a:prstGeom prst="rect">
+            <a:off x="822960" y="1554480"/>
+            <a:ext cx="10561320" cy="4434840"/>
+          </a:xfrm>
+          <a:prstGeom prst="roundRect">
             <a:avLst/>
           </a:prstGeom>
           <a:solidFill>
             <a:srgbClr val="FFFFFF"/>
           </a:solidFill>
-          <a:ln>
+          <a:ln w="12700">
             <a:solidFill>
               <a:srgbClr val="DCE2E8"/>
             </a:solidFill>
@@ -3303,76 +3372,676 @@
       </p:sp>
       <p:sp>
         <p:nvSpPr>
-          <p:cNvPr id="7" name="TextBox 6"/>
-          <p:cNvSpPr txBox="1"/>
-          <p:nvPr/>
-        </p:nvSpPr>
-        <p:spPr>
-          <a:xfrm>
-            <a:off x="1005840" y="2057400"/>
-            <a:ext cx="10149840" cy="3749039"/>
-          </a:xfrm>
-          <a:prstGeom prst="rect">
-            <a:avLst/>
-          </a:prstGeom>
-          <a:noFill/>
-        </p:spPr>
-        <p:txBody>
-          <a:bodyPr wrap="square">
-            <a:spAutoFit/>
-          </a:bodyPr>
-          <a:lstStyle/>
-          <a:p>
-            <a:pPr>
-              <a:spcAft>
-                <a:spcPts val="1200"/>
-              </a:spcAft>
-              <a:defRPr sz="2200">
-                <a:solidFill>
-                  <a:srgbClr val="232D37"/>
-                </a:solidFill>
-                <a:latin typeface="Aptos"/>
-              </a:defRPr>
-            </a:pPr>
-            <a:r>
-              <a:t>occupied space</a:t>
-            </a:r>
-          </a:p>
-        </p:txBody>
-      </p:sp>
-      <p:sp>
-        <p:nvSpPr>
-          <p:cNvPr id="8" name="TextBox 7"/>
-          <p:cNvSpPr txBox="1"/>
-          <p:nvPr/>
-        </p:nvSpPr>
-        <p:spPr>
-          <a:xfrm>
-            <a:off x="365760" y="6446520"/>
-            <a:ext cx="11430000" cy="228600"/>
-          </a:xfrm>
-          <a:prstGeom prst="rect">
-            <a:avLst/>
-          </a:prstGeom>
-          <a:noFill/>
-        </p:spPr>
-        <p:txBody>
-          <a:bodyPr wrap="none">
-            <a:spAutoFit/>
-          </a:bodyPr>
-          <a:lstStyle/>
-          <a:p>
-            <a:r>
-              <a:rPr sz="900">
-                <a:solidFill>
-                  <a:srgbClr val="78828C"/>
-                </a:solidFill>
+          <p:cNvPr id="9" name="Rounded Rectangle 8"/>
+          <p:cNvSpPr/>
+          <p:nvPr/>
+        </p:nvSpPr>
+        <p:spPr>
+          <a:xfrm>
+            <a:off x="3886200" y="2148840"/>
+            <a:ext cx="4389120" cy="2103120"/>
+          </a:xfrm>
+          <a:prstGeom prst="roundRect">
+            <a:avLst/>
+          </a:prstGeom>
+          <a:solidFill>
+            <a:srgbClr val="E6F4F7"/>
+          </a:solidFill>
+          <a:ln w="12700">
+            <a:solidFill>
+              <a:srgbClr val="B4D2DC"/>
+            </a:solidFill>
+          </a:ln>
+        </p:spPr>
+        <p:style>
+          <a:lnRef idx="1">
+            <a:schemeClr val="accent1"/>
+          </a:lnRef>
+          <a:fillRef idx="3">
+            <a:schemeClr val="accent1"/>
+          </a:fillRef>
+          <a:effectRef idx="2">
+            <a:schemeClr val="accent1"/>
+          </a:effectRef>
+          <a:fontRef idx="minor">
+            <a:schemeClr val="lt1"/>
+          </a:fontRef>
+        </p:style>
+        <p:txBody>
+          <a:bodyPr rtlCol="0" anchor="ctr"/>
+          <a:lstStyle/>
+          <a:p>
+            <a:pPr algn="ctr"/>
+          </a:p>
+        </p:txBody>
+      </p:sp>
+      <p:sp>
+        <p:nvSpPr>
+          <p:cNvPr id="10" name="TextBox 9"/>
+          <p:cNvSpPr txBox="1"/>
+          <p:nvPr/>
+        </p:nvSpPr>
+        <p:spPr>
+          <a:xfrm>
+            <a:off x="4343400" y="2788920"/>
+            <a:ext cx="3474720" cy="320040"/>
+          </a:xfrm>
+          <a:prstGeom prst="rect">
+            <a:avLst/>
+          </a:prstGeom>
+          <a:noFill/>
+        </p:spPr>
+        <p:txBody>
+          <a:bodyPr wrap="square">
+            <a:spAutoFit/>
+          </a:bodyPr>
+          <a:lstStyle/>
+          <a:p>
+            <a:pPr algn="ctr"/>
+            <a:r>
+              <a:rPr sz="2400" b="1" i="0">
+                <a:solidFill>
+                  <a:srgbClr val="11374B"/>
+                </a:solidFill>
+                <a:latin typeface="Aptos"/>
               </a:rPr>
-              <a:t>Air Conditioning · Chapter 1 · Topic 1.1</a:t>
-            </a:r>
-          </a:p>
-        </p:txBody>
-      </p:sp>
+              <a:t>Conditioned Space</a:t>
+            </a:r>
+          </a:p>
+        </p:txBody>
+      </p:sp>
+      <p:sp>
+        <p:nvSpPr>
+          <p:cNvPr id="11" name="Oval 10"/>
+          <p:cNvSpPr/>
+          <p:nvPr/>
+        </p:nvSpPr>
+        <p:spPr>
+          <a:xfrm>
+            <a:off x="1828800" y="1828800"/>
+            <a:ext cx="914400" cy="914400"/>
+          </a:xfrm>
+          <a:prstGeom prst="ellipse">
+            <a:avLst/>
+          </a:prstGeom>
+          <a:solidFill>
+            <a:srgbClr val="E76F51"/>
+          </a:solidFill>
+          <a:ln>
+            <a:noFill/>
+          </a:ln>
+        </p:spPr>
+        <p:style>
+          <a:lnRef idx="1">
+            <a:schemeClr val="accent1"/>
+          </a:lnRef>
+          <a:fillRef idx="3">
+            <a:schemeClr val="accent1"/>
+          </a:fillRef>
+          <a:effectRef idx="2">
+            <a:schemeClr val="accent1"/>
+          </a:effectRef>
+          <a:fontRef idx="minor">
+            <a:schemeClr val="lt1"/>
+          </a:fontRef>
+        </p:style>
+        <p:txBody>
+          <a:bodyPr rtlCol="0" anchor="ctr"/>
+          <a:lstStyle/>
+          <a:p>
+            <a:pPr algn="ctr"/>
+          </a:p>
+        </p:txBody>
+      </p:sp>
+      <p:sp>
+        <p:nvSpPr>
+          <p:cNvPr id="12" name="TextBox 11"/>
+          <p:cNvSpPr txBox="1"/>
+          <p:nvPr/>
+        </p:nvSpPr>
+        <p:spPr>
+          <a:xfrm>
+            <a:off x="1828800" y="2084832"/>
+            <a:ext cx="914400" cy="228600"/>
+          </a:xfrm>
+          <a:prstGeom prst="rect">
+            <a:avLst/>
+          </a:prstGeom>
+          <a:noFill/>
+        </p:spPr>
+        <p:txBody>
+          <a:bodyPr wrap="square">
+            <a:spAutoFit/>
+          </a:bodyPr>
+          <a:lstStyle/>
+          <a:p>
+            <a:pPr algn="ctr"/>
+            <a:r>
+              <a:rPr sz="1600" b="1" i="0">
+                <a:solidFill>
+                  <a:srgbClr val="FFFFFF"/>
+                </a:solidFill>
+                <a:latin typeface="Aptos"/>
+              </a:rPr>
+              <a:t>T</a:t>
+            </a:r>
+          </a:p>
+        </p:txBody>
+      </p:sp>
+      <p:sp>
+        <p:nvSpPr>
+          <p:cNvPr id="13" name="TextBox 12"/>
+          <p:cNvSpPr txBox="1"/>
+          <p:nvPr/>
+        </p:nvSpPr>
+        <p:spPr>
+          <a:xfrm>
+            <a:off x="1280160" y="2816352"/>
+            <a:ext cx="2011680" cy="228600"/>
+          </a:xfrm>
+          <a:prstGeom prst="rect">
+            <a:avLst/>
+          </a:prstGeom>
+          <a:noFill/>
+        </p:spPr>
+        <p:txBody>
+          <a:bodyPr wrap="square">
+            <a:spAutoFit/>
+          </a:bodyPr>
+          <a:lstStyle/>
+          <a:p>
+            <a:pPr algn="ctr"/>
+            <a:r>
+              <a:rPr sz="1200" b="1" i="0">
+                <a:solidFill>
+                  <a:srgbClr val="E76F51"/>
+                </a:solidFill>
+                <a:latin typeface="Aptos"/>
+              </a:rPr>
+              <a:t>Temperature</a:t>
+            </a:r>
+          </a:p>
+        </p:txBody>
+      </p:sp>
+      <p:cxnSp>
+        <p:nvCxnSpPr>
+          <p:cNvPr id="14" name="Connector 13"/>
+          <p:cNvCxnSpPr/>
+          <p:nvPr/>
+        </p:nvCxnSpPr>
+        <p:spPr>
+          <a:xfrm>
+            <a:off x="2286000" y="2286000"/>
+            <a:ext cx="3794760" cy="914400"/>
+          </a:xfrm>
+          <a:prstGeom prst="line">
+            <a:avLst/>
+          </a:prstGeom>
+          <a:ln w="25400">
+            <a:solidFill>
+              <a:srgbClr val="E76F51"/>
+            </a:solidFill>
+          </a:ln>
+        </p:spPr>
+        <p:style>
+          <a:lnRef idx="2">
+            <a:schemeClr val="accent1"/>
+          </a:lnRef>
+          <a:fillRef idx="0">
+            <a:schemeClr val="accent1"/>
+          </a:fillRef>
+          <a:effectRef idx="1">
+            <a:schemeClr val="accent1"/>
+          </a:effectRef>
+          <a:fontRef idx="minor">
+            <a:schemeClr val="tx1"/>
+          </a:fontRef>
+        </p:style>
+      </p:cxnSp>
+      <p:sp>
+        <p:nvSpPr>
+          <p:cNvPr id="15" name="Oval 14"/>
+          <p:cNvSpPr/>
+          <p:nvPr/>
+        </p:nvSpPr>
+        <p:spPr>
+          <a:xfrm>
+            <a:off x="9555480" y="1828800"/>
+            <a:ext cx="914400" cy="914400"/>
+          </a:xfrm>
+          <a:prstGeom prst="ellipse">
+            <a:avLst/>
+          </a:prstGeom>
+          <a:solidFill>
+            <a:srgbClr val="457B9D"/>
+          </a:solidFill>
+          <a:ln>
+            <a:noFill/>
+          </a:ln>
+        </p:spPr>
+        <p:style>
+          <a:lnRef idx="1">
+            <a:schemeClr val="accent1"/>
+          </a:lnRef>
+          <a:fillRef idx="3">
+            <a:schemeClr val="accent1"/>
+          </a:fillRef>
+          <a:effectRef idx="2">
+            <a:schemeClr val="accent1"/>
+          </a:effectRef>
+          <a:fontRef idx="minor">
+            <a:schemeClr val="lt1"/>
+          </a:fontRef>
+        </p:style>
+        <p:txBody>
+          <a:bodyPr rtlCol="0" anchor="ctr"/>
+          <a:lstStyle/>
+          <a:p>
+            <a:pPr algn="ctr"/>
+          </a:p>
+        </p:txBody>
+      </p:sp>
+      <p:sp>
+        <p:nvSpPr>
+          <p:cNvPr id="16" name="TextBox 15"/>
+          <p:cNvSpPr txBox="1"/>
+          <p:nvPr/>
+        </p:nvSpPr>
+        <p:spPr>
+          <a:xfrm>
+            <a:off x="9555480" y="2084832"/>
+            <a:ext cx="914400" cy="228600"/>
+          </a:xfrm>
+          <a:prstGeom prst="rect">
+            <a:avLst/>
+          </a:prstGeom>
+          <a:noFill/>
+        </p:spPr>
+        <p:txBody>
+          <a:bodyPr wrap="square">
+            <a:spAutoFit/>
+          </a:bodyPr>
+          <a:lstStyle/>
+          <a:p>
+            <a:pPr algn="ctr"/>
+            <a:r>
+              <a:rPr sz="1600" b="1" i="0">
+                <a:solidFill>
+                  <a:srgbClr val="FFFFFF"/>
+                </a:solidFill>
+                <a:latin typeface="Aptos"/>
+              </a:rPr>
+              <a:t>RH</a:t>
+            </a:r>
+          </a:p>
+        </p:txBody>
+      </p:sp>
+      <p:sp>
+        <p:nvSpPr>
+          <p:cNvPr id="17" name="TextBox 16"/>
+          <p:cNvSpPr txBox="1"/>
+          <p:nvPr/>
+        </p:nvSpPr>
+        <p:spPr>
+          <a:xfrm>
+            <a:off x="9006840" y="2816352"/>
+            <a:ext cx="2011680" cy="228600"/>
+          </a:xfrm>
+          <a:prstGeom prst="rect">
+            <a:avLst/>
+          </a:prstGeom>
+          <a:noFill/>
+        </p:spPr>
+        <p:txBody>
+          <a:bodyPr wrap="square">
+            <a:spAutoFit/>
+          </a:bodyPr>
+          <a:lstStyle/>
+          <a:p>
+            <a:pPr algn="ctr"/>
+            <a:r>
+              <a:rPr sz="1200" b="1" i="0">
+                <a:solidFill>
+                  <a:srgbClr val="457B9D"/>
+                </a:solidFill>
+                <a:latin typeface="Aptos"/>
+              </a:rPr>
+              <a:t>Humidity</a:t>
+            </a:r>
+          </a:p>
+        </p:txBody>
+      </p:sp>
+      <p:cxnSp>
+        <p:nvCxnSpPr>
+          <p:cNvPr id="18" name="Connector 17"/>
+          <p:cNvCxnSpPr/>
+          <p:nvPr/>
+        </p:nvCxnSpPr>
+        <p:spPr>
+          <a:xfrm flipH="1">
+            <a:off x="6080760" y="2286000"/>
+            <a:ext cx="3931920" cy="914400"/>
+          </a:xfrm>
+          <a:prstGeom prst="line">
+            <a:avLst/>
+          </a:prstGeom>
+          <a:ln w="25400">
+            <a:solidFill>
+              <a:srgbClr val="457B9D"/>
+            </a:solidFill>
+          </a:ln>
+        </p:spPr>
+        <p:style>
+          <a:lnRef idx="2">
+            <a:schemeClr val="accent1"/>
+          </a:lnRef>
+          <a:fillRef idx="0">
+            <a:schemeClr val="accent1"/>
+          </a:fillRef>
+          <a:effectRef idx="1">
+            <a:schemeClr val="accent1"/>
+          </a:effectRef>
+          <a:fontRef idx="minor">
+            <a:schemeClr val="tx1"/>
+          </a:fontRef>
+        </p:style>
+      </p:cxnSp>
+      <p:sp>
+        <p:nvSpPr>
+          <p:cNvPr id="19" name="Oval 18"/>
+          <p:cNvSpPr/>
+          <p:nvPr/>
+        </p:nvSpPr>
+        <p:spPr>
+          <a:xfrm>
+            <a:off x="1828800" y="4709160"/>
+            <a:ext cx="914400" cy="914400"/>
+          </a:xfrm>
+          <a:prstGeom prst="ellipse">
+            <a:avLst/>
+          </a:prstGeom>
+          <a:solidFill>
+            <a:srgbClr val="2A9D8F"/>
+          </a:solidFill>
+          <a:ln>
+            <a:noFill/>
+          </a:ln>
+        </p:spPr>
+        <p:style>
+          <a:lnRef idx="1">
+            <a:schemeClr val="accent1"/>
+          </a:lnRef>
+          <a:fillRef idx="3">
+            <a:schemeClr val="accent1"/>
+          </a:fillRef>
+          <a:effectRef idx="2">
+            <a:schemeClr val="accent1"/>
+          </a:effectRef>
+          <a:fontRef idx="minor">
+            <a:schemeClr val="lt1"/>
+          </a:fontRef>
+        </p:style>
+        <p:txBody>
+          <a:bodyPr rtlCol="0" anchor="ctr"/>
+          <a:lstStyle/>
+          <a:p>
+            <a:pPr algn="ctr"/>
+          </a:p>
+        </p:txBody>
+      </p:sp>
+      <p:sp>
+        <p:nvSpPr>
+          <p:cNvPr id="20" name="TextBox 19"/>
+          <p:cNvSpPr txBox="1"/>
+          <p:nvPr/>
+        </p:nvSpPr>
+        <p:spPr>
+          <a:xfrm>
+            <a:off x="1828800" y="4965192"/>
+            <a:ext cx="914400" cy="228600"/>
+          </a:xfrm>
+          <a:prstGeom prst="rect">
+            <a:avLst/>
+          </a:prstGeom>
+          <a:noFill/>
+        </p:spPr>
+        <p:txBody>
+          <a:bodyPr wrap="square">
+            <a:spAutoFit/>
+          </a:bodyPr>
+          <a:lstStyle/>
+          <a:p>
+            <a:pPr algn="ctr"/>
+            <a:r>
+              <a:rPr sz="1600" b="1" i="0">
+                <a:solidFill>
+                  <a:srgbClr val="FFFFFF"/>
+                </a:solidFill>
+                <a:latin typeface="Aptos"/>
+              </a:rPr>
+              <a:t>↻</a:t>
+            </a:r>
+          </a:p>
+        </p:txBody>
+      </p:sp>
+      <p:sp>
+        <p:nvSpPr>
+          <p:cNvPr id="21" name="TextBox 20"/>
+          <p:cNvSpPr txBox="1"/>
+          <p:nvPr/>
+        </p:nvSpPr>
+        <p:spPr>
+          <a:xfrm>
+            <a:off x="1280160" y="5696712"/>
+            <a:ext cx="2011680" cy="228600"/>
+          </a:xfrm>
+          <a:prstGeom prst="rect">
+            <a:avLst/>
+          </a:prstGeom>
+          <a:noFill/>
+        </p:spPr>
+        <p:txBody>
+          <a:bodyPr wrap="square">
+            <a:spAutoFit/>
+          </a:bodyPr>
+          <a:lstStyle/>
+          <a:p>
+            <a:pPr algn="ctr"/>
+            <a:r>
+              <a:rPr sz="1200" b="1" i="0">
+                <a:solidFill>
+                  <a:srgbClr val="2A9D8F"/>
+                </a:solidFill>
+                <a:latin typeface="Aptos"/>
+              </a:rPr>
+              <a:t>Air circulation</a:t>
+            </a:r>
+          </a:p>
+        </p:txBody>
+      </p:sp>
+      <p:cxnSp>
+        <p:nvCxnSpPr>
+          <p:cNvPr id="22" name="Connector 21"/>
+          <p:cNvCxnSpPr/>
+          <p:nvPr/>
+        </p:nvCxnSpPr>
+        <p:spPr>
+          <a:xfrm flipV="1">
+            <a:off x="2286000" y="3200400"/>
+            <a:ext cx="3794760" cy="1965960"/>
+          </a:xfrm>
+          <a:prstGeom prst="line">
+            <a:avLst/>
+          </a:prstGeom>
+          <a:ln w="25400">
+            <a:solidFill>
+              <a:srgbClr val="2A9D8F"/>
+            </a:solidFill>
+          </a:ln>
+        </p:spPr>
+        <p:style>
+          <a:lnRef idx="2">
+            <a:schemeClr val="accent1"/>
+          </a:lnRef>
+          <a:fillRef idx="0">
+            <a:schemeClr val="accent1"/>
+          </a:fillRef>
+          <a:effectRef idx="1">
+            <a:schemeClr val="accent1"/>
+          </a:effectRef>
+          <a:fontRef idx="minor">
+            <a:schemeClr val="tx1"/>
+          </a:fontRef>
+        </p:style>
+      </p:cxnSp>
+      <p:sp>
+        <p:nvSpPr>
+          <p:cNvPr id="23" name="Oval 22"/>
+          <p:cNvSpPr/>
+          <p:nvPr/>
+        </p:nvSpPr>
+        <p:spPr>
+          <a:xfrm>
+            <a:off x="9555480" y="4709160"/>
+            <a:ext cx="914400" cy="914400"/>
+          </a:xfrm>
+          <a:prstGeom prst="ellipse">
+            <a:avLst/>
+          </a:prstGeom>
+          <a:solidFill>
+            <a:srgbClr val="4CAF50"/>
+          </a:solidFill>
+          <a:ln>
+            <a:noFill/>
+          </a:ln>
+        </p:spPr>
+        <p:style>
+          <a:lnRef idx="1">
+            <a:schemeClr val="accent1"/>
+          </a:lnRef>
+          <a:fillRef idx="3">
+            <a:schemeClr val="accent1"/>
+          </a:fillRef>
+          <a:effectRef idx="2">
+            <a:schemeClr val="accent1"/>
+          </a:effectRef>
+          <a:fontRef idx="minor">
+            <a:schemeClr val="lt1"/>
+          </a:fontRef>
+        </p:style>
+        <p:txBody>
+          <a:bodyPr rtlCol="0" anchor="ctr"/>
+          <a:lstStyle/>
+          <a:p>
+            <a:pPr algn="ctr"/>
+          </a:p>
+        </p:txBody>
+      </p:sp>
+      <p:sp>
+        <p:nvSpPr>
+          <p:cNvPr id="24" name="TextBox 23"/>
+          <p:cNvSpPr txBox="1"/>
+          <p:nvPr/>
+        </p:nvSpPr>
+        <p:spPr>
+          <a:xfrm>
+            <a:off x="9555480" y="4965192"/>
+            <a:ext cx="914400" cy="228600"/>
+          </a:xfrm>
+          <a:prstGeom prst="rect">
+            <a:avLst/>
+          </a:prstGeom>
+          <a:noFill/>
+        </p:spPr>
+        <p:txBody>
+          <a:bodyPr wrap="square">
+            <a:spAutoFit/>
+          </a:bodyPr>
+          <a:lstStyle/>
+          <a:p>
+            <a:pPr algn="ctr"/>
+            <a:r>
+              <a:rPr sz="1600" b="1" i="0">
+                <a:solidFill>
+                  <a:srgbClr val="FFFFFF"/>
+                </a:solidFill>
+                <a:latin typeface="Aptos"/>
+              </a:rPr>
+              <a:t>●</a:t>
+            </a:r>
+          </a:p>
+        </p:txBody>
+      </p:sp>
+      <p:sp>
+        <p:nvSpPr>
+          <p:cNvPr id="25" name="TextBox 24"/>
+          <p:cNvSpPr txBox="1"/>
+          <p:nvPr/>
+        </p:nvSpPr>
+        <p:spPr>
+          <a:xfrm>
+            <a:off x="9006840" y="5696712"/>
+            <a:ext cx="2011680" cy="228600"/>
+          </a:xfrm>
+          <a:prstGeom prst="rect">
+            <a:avLst/>
+          </a:prstGeom>
+          <a:noFill/>
+        </p:spPr>
+        <p:txBody>
+          <a:bodyPr wrap="square">
+            <a:spAutoFit/>
+          </a:bodyPr>
+          <a:lstStyle/>
+          <a:p>
+            <a:pPr algn="ctr"/>
+            <a:r>
+              <a:rPr sz="1200" b="1" i="0">
+                <a:solidFill>
+                  <a:srgbClr val="4CAF50"/>
+                </a:solidFill>
+                <a:latin typeface="Aptos"/>
+              </a:rPr>
+              <a:t>Air cleanliness</a:t>
+            </a:r>
+          </a:p>
+        </p:txBody>
+      </p:sp>
+      <p:cxnSp>
+        <p:nvCxnSpPr>
+          <p:cNvPr id="26" name="Connector 25"/>
+          <p:cNvCxnSpPr/>
+          <p:nvPr/>
+        </p:nvCxnSpPr>
+        <p:spPr>
+          <a:xfrm flipH="1" flipV="1">
+            <a:off x="6080760" y="3200400"/>
+            <a:ext cx="3931920" cy="1965960"/>
+          </a:xfrm>
+          <a:prstGeom prst="line">
+            <a:avLst/>
+          </a:prstGeom>
+          <a:ln w="25400">
+            <a:solidFill>
+              <a:srgbClr val="4CAF50"/>
+            </a:solidFill>
+          </a:ln>
+        </p:spPr>
+        <p:style>
+          <a:lnRef idx="2">
+            <a:schemeClr val="accent1"/>
+          </a:lnRef>
+          <a:fillRef idx="0">
+            <a:schemeClr val="accent1"/>
+          </a:fillRef>
+          <a:effectRef idx="1">
+            <a:schemeClr val="accent1"/>
+          </a:effectRef>
+          <a:fontRef idx="minor">
+            <a:schemeClr val="tx1"/>
+          </a:fontRef>
+        </p:style>
+      </p:cxnSp>
     </p:spTree>
   </p:cSld>
   <p:clrMapOvr>
@@ -3465,7 +4134,7 @@
           <a:lstStyle/>
           <a:p>
             <a:r>
-              <a:rPr sz="3000" b="1">
+              <a:rPr sz="3000" b="1" i="0">
                 <a:solidFill>
                   <a:srgbClr val="11374B"/>
                 </a:solidFill>
@@ -3499,7 +4168,7 @@
           <a:lstStyle/>
           <a:p>
             <a:r>
-              <a:rPr sz="1400" b="0">
+              <a:rPr sz="1400" b="0" i="0">
                 <a:solidFill>
                   <a:srgbClr val="5A6973"/>
                 </a:solidFill>
@@ -3534,7 +4203,7 @@
           <a:p>
             <a:pPr algn="r"/>
             <a:r>
-              <a:rPr sz="1100" b="0">
+              <a:rPr sz="1100" b="0" i="0">
                 <a:solidFill>
                   <a:srgbClr val="78828C"/>
                 </a:solidFill>
@@ -3547,14 +4216,83 @@
       </p:sp>
       <p:sp>
         <p:nvSpPr>
-          <p:cNvPr id="6" name="Rectangle 5"/>
+          <p:cNvPr id="6" name="TextBox 5"/>
+          <p:cNvSpPr txBox="1"/>
+          <p:nvPr/>
+        </p:nvSpPr>
+        <p:spPr>
+          <a:xfrm>
+            <a:off x="365760" y="6446520"/>
+            <a:ext cx="8229600" cy="228600"/>
+          </a:xfrm>
+          <a:prstGeom prst="rect">
+            <a:avLst/>
+          </a:prstGeom>
+          <a:noFill/>
+        </p:spPr>
+        <p:txBody>
+          <a:bodyPr wrap="square">
+            <a:spAutoFit/>
+          </a:bodyPr>
+          <a:lstStyle/>
+          <a:p>
+            <a:r>
+              <a:rPr sz="900" b="0" i="0">
+                <a:solidFill>
+                  <a:srgbClr val="78828C"/>
+                </a:solidFill>
+                <a:latin typeface="Aptos"/>
+              </a:rPr>
+              <a:t>Air Conditioning · Chapter 1 · Topic 1.1</a:t>
+            </a:r>
+          </a:p>
+        </p:txBody>
+      </p:sp>
+      <p:sp>
+        <p:nvSpPr>
+          <p:cNvPr id="7" name="TextBox 6"/>
+          <p:cNvSpPr txBox="1"/>
+          <p:nvPr/>
+        </p:nvSpPr>
+        <p:spPr>
+          <a:xfrm>
+            <a:off x="11292840" y="6446520"/>
+            <a:ext cx="502920" cy="228600"/>
+          </a:xfrm>
+          <a:prstGeom prst="rect">
+            <a:avLst/>
+          </a:prstGeom>
+          <a:noFill/>
+        </p:spPr>
+        <p:txBody>
+          <a:bodyPr wrap="square">
+            <a:spAutoFit/>
+          </a:bodyPr>
+          <a:lstStyle/>
+          <a:p>
+            <a:pPr algn="r"/>
+            <a:r>
+              <a:rPr sz="900" b="0" i="0">
+                <a:solidFill>
+                  <a:srgbClr val="78828C"/>
+                </a:solidFill>
+                <a:latin typeface="Aptos"/>
+              </a:rPr>
+              <a:t>10</a:t>
+            </a:r>
+          </a:p>
+        </p:txBody>
+      </p:sp>
+      <p:sp>
+        <p:nvSpPr>
+          <p:cNvPr id="8" name="Rectangle 7"/>
           <p:cNvSpPr/>
           <p:nvPr/>
         </p:nvSpPr>
         <p:spPr>
           <a:xfrm>
-            <a:off x="685800" y="1737360"/>
-            <a:ext cx="10835640" cy="4343400"/>
+            <a:off x="731520" y="1691640"/>
+            <a:ext cx="10744200" cy="4343400"/>
           </a:xfrm>
           <a:prstGeom prst="rect">
             <a:avLst/>
@@ -3562,7 +4300,7 @@
           <a:solidFill>
             <a:srgbClr val="FFFFFF"/>
           </a:solidFill>
-          <a:ln>
+          <a:ln w="12700">
             <a:solidFill>
               <a:srgbClr val="DCE2E8"/>
             </a:solidFill>
@@ -3590,90 +4328,751 @@
           </a:p>
         </p:txBody>
       </p:sp>
-      <p:sp>
-        <p:nvSpPr>
-          <p:cNvPr id="7" name="TextBox 6"/>
-          <p:cNvSpPr txBox="1"/>
-          <p:nvPr/>
-        </p:nvSpPr>
-        <p:spPr>
-          <a:xfrm>
-            <a:off x="1005840" y="2057400"/>
-            <a:ext cx="10149840" cy="3749039"/>
-          </a:xfrm>
-          <a:prstGeom prst="rect">
-            <a:avLst/>
-          </a:prstGeom>
-          <a:noFill/>
-        </p:spPr>
-        <p:txBody>
-          <a:bodyPr wrap="square">
-            <a:spAutoFit/>
-          </a:bodyPr>
-          <a:lstStyle/>
-          <a:p>
-            <a:pPr>
-              <a:spcAft>
-                <a:spcPts val="1200"/>
-              </a:spcAft>
-              <a:defRPr sz="2200">
+      <p:cxnSp>
+        <p:nvCxnSpPr>
+          <p:cNvPr id="9" name="Connector 8"/>
+          <p:cNvCxnSpPr/>
+          <p:nvPr/>
+        </p:nvCxnSpPr>
+        <p:spPr>
+          <a:xfrm>
+            <a:off x="1143000" y="4983479"/>
+            <a:ext cx="6400800" cy="0"/>
+          </a:xfrm>
+          <a:prstGeom prst="line">
+            <a:avLst/>
+          </a:prstGeom>
+          <a:ln w="12700">
+            <a:solidFill>
+              <a:srgbClr val="8C96A0"/>
+            </a:solidFill>
+          </a:ln>
+        </p:spPr>
+        <p:style>
+          <a:lnRef idx="2">
+            <a:schemeClr val="accent1"/>
+          </a:lnRef>
+          <a:fillRef idx="0">
+            <a:schemeClr val="accent1"/>
+          </a:fillRef>
+          <a:effectRef idx="1">
+            <a:schemeClr val="accent1"/>
+          </a:effectRef>
+          <a:fontRef idx="minor">
+            <a:schemeClr val="tx1"/>
+          </a:fontRef>
+        </p:style>
+      </p:cxnSp>
+      <p:cxnSp>
+        <p:nvCxnSpPr>
+          <p:cNvPr id="10" name="Connector 9"/>
+          <p:cNvCxnSpPr/>
+          <p:nvPr/>
+        </p:nvCxnSpPr>
+        <p:spPr>
+          <a:xfrm flipV="1">
+            <a:off x="1143000" y="2331720"/>
+            <a:ext cx="0" cy="2651759"/>
+          </a:xfrm>
+          <a:prstGeom prst="line">
+            <a:avLst/>
+          </a:prstGeom>
+          <a:ln w="12700">
+            <a:solidFill>
+              <a:srgbClr val="8C96A0"/>
+            </a:solidFill>
+          </a:ln>
+        </p:spPr>
+        <p:style>
+          <a:lnRef idx="2">
+            <a:schemeClr val="accent1"/>
+          </a:lnRef>
+          <a:fillRef idx="0">
+            <a:schemeClr val="accent1"/>
+          </a:fillRef>
+          <a:effectRef idx="1">
+            <a:schemeClr val="accent1"/>
+          </a:effectRef>
+          <a:fontRef idx="minor">
+            <a:schemeClr val="tx1"/>
+          </a:fontRef>
+        </p:style>
+      </p:cxnSp>
+      <p:cxnSp>
+        <p:nvCxnSpPr>
+          <p:cNvPr id="11" name="Connector 10"/>
+          <p:cNvCxnSpPr/>
+          <p:nvPr/>
+        </p:nvCxnSpPr>
+        <p:spPr>
+          <a:xfrm flipV="1">
+            <a:off x="1143000" y="4771339"/>
+            <a:ext cx="1600200" cy="79553"/>
+          </a:xfrm>
+          <a:prstGeom prst="line">
+            <a:avLst/>
+          </a:prstGeom>
+          <a:ln w="38100">
+            <a:solidFill>
+              <a:srgbClr val="2A9D8F"/>
+            </a:solidFill>
+          </a:ln>
+        </p:spPr>
+        <p:style>
+          <a:lnRef idx="2">
+            <a:schemeClr val="accent1"/>
+          </a:lnRef>
+          <a:fillRef idx="0">
+            <a:schemeClr val="accent1"/>
+          </a:fillRef>
+          <a:effectRef idx="1">
+            <a:schemeClr val="accent1"/>
+          </a:effectRef>
+          <a:fontRef idx="minor">
+            <a:schemeClr val="tx1"/>
+          </a:fontRef>
+        </p:style>
+      </p:cxnSp>
+      <p:cxnSp>
+        <p:nvCxnSpPr>
+          <p:cNvPr id="12" name="Connector 11"/>
+          <p:cNvCxnSpPr/>
+          <p:nvPr/>
+        </p:nvCxnSpPr>
+        <p:spPr>
+          <a:xfrm flipV="1">
+            <a:off x="2743200" y="4585716"/>
+            <a:ext cx="1600200" cy="185623"/>
+          </a:xfrm>
+          <a:prstGeom prst="line">
+            <a:avLst/>
+          </a:prstGeom>
+          <a:ln w="38100">
+            <a:solidFill>
+              <a:srgbClr val="2A9D8F"/>
+            </a:solidFill>
+          </a:ln>
+        </p:spPr>
+        <p:style>
+          <a:lnRef idx="2">
+            <a:schemeClr val="accent1"/>
+          </a:lnRef>
+          <a:fillRef idx="0">
+            <a:schemeClr val="accent1"/>
+          </a:fillRef>
+          <a:effectRef idx="1">
+            <a:schemeClr val="accent1"/>
+          </a:effectRef>
+          <a:fontRef idx="minor">
+            <a:schemeClr val="tx1"/>
+          </a:fontRef>
+        </p:style>
+      </p:cxnSp>
+      <p:cxnSp>
+        <p:nvCxnSpPr>
+          <p:cNvPr id="13" name="Connector 12"/>
+          <p:cNvCxnSpPr/>
+          <p:nvPr/>
+        </p:nvCxnSpPr>
+        <p:spPr>
+          <a:xfrm flipV="1">
+            <a:off x="4343400" y="2464308"/>
+            <a:ext cx="1792224" cy="2121408"/>
+          </a:xfrm>
+          <a:prstGeom prst="line">
+            <a:avLst/>
+          </a:prstGeom>
+          <a:ln w="38100">
+            <a:solidFill>
+              <a:srgbClr val="2A9D8F"/>
+            </a:solidFill>
+          </a:ln>
+        </p:spPr>
+        <p:style>
+          <a:lnRef idx="2">
+            <a:schemeClr val="accent1"/>
+          </a:lnRef>
+          <a:fillRef idx="0">
+            <a:schemeClr val="accent1"/>
+          </a:fillRef>
+          <a:effectRef idx="1">
+            <a:schemeClr val="accent1"/>
+          </a:effectRef>
+          <a:fontRef idx="minor">
+            <a:schemeClr val="tx1"/>
+          </a:fontRef>
+        </p:style>
+      </p:cxnSp>
+      <p:cxnSp>
+        <p:nvCxnSpPr>
+          <p:cNvPr id="14" name="Connector 13"/>
+          <p:cNvCxnSpPr/>
+          <p:nvPr/>
+        </p:nvCxnSpPr>
+        <p:spPr>
+          <a:xfrm>
+            <a:off x="6135624" y="2464308"/>
+            <a:ext cx="1408176" cy="1060703"/>
+          </a:xfrm>
+          <a:prstGeom prst="line">
+            <a:avLst/>
+          </a:prstGeom>
+          <a:ln w="38100">
+            <a:solidFill>
+              <a:srgbClr val="2A9D8F"/>
+            </a:solidFill>
+          </a:ln>
+        </p:spPr>
+        <p:style>
+          <a:lnRef idx="2">
+            <a:schemeClr val="accent1"/>
+          </a:lnRef>
+          <a:fillRef idx="0">
+            <a:schemeClr val="accent1"/>
+          </a:fillRef>
+          <a:effectRef idx="1">
+            <a:schemeClr val="accent1"/>
+          </a:effectRef>
+          <a:fontRef idx="minor">
+            <a:schemeClr val="tx1"/>
+          </a:fontRef>
+        </p:style>
+      </p:cxnSp>
+      <p:sp>
+        <p:nvSpPr>
+          <p:cNvPr id="15" name="Oval 14"/>
+          <p:cNvSpPr/>
+          <p:nvPr/>
+        </p:nvSpPr>
+        <p:spPr>
+          <a:xfrm>
+            <a:off x="1101852" y="4809744"/>
+            <a:ext cx="82296" cy="82296"/>
+          </a:xfrm>
+          <a:prstGeom prst="ellipse">
+            <a:avLst/>
+          </a:prstGeom>
+          <a:solidFill>
+            <a:srgbClr val="2A9D8F"/>
+          </a:solidFill>
+          <a:ln>
+            <a:noFill/>
+          </a:ln>
+        </p:spPr>
+        <p:style>
+          <a:lnRef idx="1">
+            <a:schemeClr val="accent1"/>
+          </a:lnRef>
+          <a:fillRef idx="3">
+            <a:schemeClr val="accent1"/>
+          </a:fillRef>
+          <a:effectRef idx="2">
+            <a:schemeClr val="accent1"/>
+          </a:effectRef>
+          <a:fontRef idx="minor">
+            <a:schemeClr val="lt1"/>
+          </a:fontRef>
+        </p:style>
+        <p:txBody>
+          <a:bodyPr rtlCol="0" anchor="ctr"/>
+          <a:lstStyle/>
+          <a:p>
+            <a:pPr algn="ctr"/>
+          </a:p>
+        </p:txBody>
+      </p:sp>
+      <p:sp>
+        <p:nvSpPr>
+          <p:cNvPr id="16" name="Oval 15"/>
+          <p:cNvSpPr/>
+          <p:nvPr/>
+        </p:nvSpPr>
+        <p:spPr>
+          <a:xfrm>
+            <a:off x="2702052" y="4730191"/>
+            <a:ext cx="82296" cy="82296"/>
+          </a:xfrm>
+          <a:prstGeom prst="ellipse">
+            <a:avLst/>
+          </a:prstGeom>
+          <a:solidFill>
+            <a:srgbClr val="2A9D8F"/>
+          </a:solidFill>
+          <a:ln>
+            <a:noFill/>
+          </a:ln>
+        </p:spPr>
+        <p:style>
+          <a:lnRef idx="1">
+            <a:schemeClr val="accent1"/>
+          </a:lnRef>
+          <a:fillRef idx="3">
+            <a:schemeClr val="accent1"/>
+          </a:fillRef>
+          <a:effectRef idx="2">
+            <a:schemeClr val="accent1"/>
+          </a:effectRef>
+          <a:fontRef idx="minor">
+            <a:schemeClr val="lt1"/>
+          </a:fontRef>
+        </p:style>
+        <p:txBody>
+          <a:bodyPr rtlCol="0" anchor="ctr"/>
+          <a:lstStyle/>
+          <a:p>
+            <a:pPr algn="ctr"/>
+          </a:p>
+        </p:txBody>
+      </p:sp>
+      <p:sp>
+        <p:nvSpPr>
+          <p:cNvPr id="17" name="Oval 16"/>
+          <p:cNvSpPr/>
+          <p:nvPr/>
+        </p:nvSpPr>
+        <p:spPr>
+          <a:xfrm>
+            <a:off x="4302252" y="4544568"/>
+            <a:ext cx="82296" cy="82296"/>
+          </a:xfrm>
+          <a:prstGeom prst="ellipse">
+            <a:avLst/>
+          </a:prstGeom>
+          <a:solidFill>
+            <a:srgbClr val="2A9D8F"/>
+          </a:solidFill>
+          <a:ln>
+            <a:noFill/>
+          </a:ln>
+        </p:spPr>
+        <p:style>
+          <a:lnRef idx="1">
+            <a:schemeClr val="accent1"/>
+          </a:lnRef>
+          <a:fillRef idx="3">
+            <a:schemeClr val="accent1"/>
+          </a:fillRef>
+          <a:effectRef idx="2">
+            <a:schemeClr val="accent1"/>
+          </a:effectRef>
+          <a:fontRef idx="minor">
+            <a:schemeClr val="lt1"/>
+          </a:fontRef>
+        </p:style>
+        <p:txBody>
+          <a:bodyPr rtlCol="0" anchor="ctr"/>
+          <a:lstStyle/>
+          <a:p>
+            <a:pPr algn="ctr"/>
+          </a:p>
+        </p:txBody>
+      </p:sp>
+      <p:sp>
+        <p:nvSpPr>
+          <p:cNvPr id="18" name="Oval 17"/>
+          <p:cNvSpPr/>
+          <p:nvPr/>
+        </p:nvSpPr>
+        <p:spPr>
+          <a:xfrm>
+            <a:off x="6094476" y="2423160"/>
+            <a:ext cx="82296" cy="82296"/>
+          </a:xfrm>
+          <a:prstGeom prst="ellipse">
+            <a:avLst/>
+          </a:prstGeom>
+          <a:solidFill>
+            <a:srgbClr val="2A9D8F"/>
+          </a:solidFill>
+          <a:ln>
+            <a:noFill/>
+          </a:ln>
+        </p:spPr>
+        <p:style>
+          <a:lnRef idx="1">
+            <a:schemeClr val="accent1"/>
+          </a:lnRef>
+          <a:fillRef idx="3">
+            <a:schemeClr val="accent1"/>
+          </a:fillRef>
+          <a:effectRef idx="2">
+            <a:schemeClr val="accent1"/>
+          </a:effectRef>
+          <a:fontRef idx="minor">
+            <a:schemeClr val="lt1"/>
+          </a:fontRef>
+        </p:style>
+        <p:txBody>
+          <a:bodyPr rtlCol="0" anchor="ctr"/>
+          <a:lstStyle/>
+          <a:p>
+            <a:pPr algn="ctr"/>
+          </a:p>
+        </p:txBody>
+      </p:sp>
+      <p:sp>
+        <p:nvSpPr>
+          <p:cNvPr id="19" name="Oval 18"/>
+          <p:cNvSpPr/>
+          <p:nvPr/>
+        </p:nvSpPr>
+        <p:spPr>
+          <a:xfrm>
+            <a:off x="7502652" y="3483863"/>
+            <a:ext cx="82296" cy="82296"/>
+          </a:xfrm>
+          <a:prstGeom prst="ellipse">
+            <a:avLst/>
+          </a:prstGeom>
+          <a:solidFill>
+            <a:srgbClr val="2A9D8F"/>
+          </a:solidFill>
+          <a:ln>
+            <a:noFill/>
+          </a:ln>
+        </p:spPr>
+        <p:style>
+          <a:lnRef idx="1">
+            <a:schemeClr val="accent1"/>
+          </a:lnRef>
+          <a:fillRef idx="3">
+            <a:schemeClr val="accent1"/>
+          </a:fillRef>
+          <a:effectRef idx="2">
+            <a:schemeClr val="accent1"/>
+          </a:effectRef>
+          <a:fontRef idx="minor">
+            <a:schemeClr val="lt1"/>
+          </a:fontRef>
+        </p:style>
+        <p:txBody>
+          <a:bodyPr rtlCol="0" anchor="ctr"/>
+          <a:lstStyle/>
+          <a:p>
+            <a:pPr algn="ctr"/>
+          </a:p>
+        </p:txBody>
+      </p:sp>
+      <p:sp>
+        <p:nvSpPr>
+          <p:cNvPr id="20" name="TextBox 19"/>
+          <p:cNvSpPr txBox="1"/>
+          <p:nvPr/>
+        </p:nvSpPr>
+        <p:spPr>
+          <a:xfrm>
+            <a:off x="6355080" y="2423160"/>
+            <a:ext cx="1097280" cy="228600"/>
+          </a:xfrm>
+          <a:prstGeom prst="rect">
+            <a:avLst/>
+          </a:prstGeom>
+          <a:noFill/>
+        </p:spPr>
+        <p:txBody>
+          <a:bodyPr wrap="square">
+            <a:spAutoFit/>
+          </a:bodyPr>
+          <a:lstStyle/>
+          <a:p>
+            <a:r>
+              <a:rPr sz="1000" b="1" i="0">
+                <a:solidFill>
+                  <a:srgbClr val="2A9D8F"/>
+                </a:solidFill>
+                <a:latin typeface="Aptos"/>
+              </a:rPr>
+              <a:t>Load</a:t>
+            </a:r>
+          </a:p>
+        </p:txBody>
+      </p:sp>
+      <p:sp>
+        <p:nvSpPr>
+          <p:cNvPr id="21" name="TextBox 20"/>
+          <p:cNvSpPr txBox="1"/>
+          <p:nvPr/>
+        </p:nvSpPr>
+        <p:spPr>
+          <a:xfrm>
+            <a:off x="960120" y="5074920"/>
+            <a:ext cx="640080" cy="182880"/>
+          </a:xfrm>
+          <a:prstGeom prst="rect">
+            <a:avLst/>
+          </a:prstGeom>
+          <a:noFill/>
+        </p:spPr>
+        <p:txBody>
+          <a:bodyPr wrap="square">
+            <a:spAutoFit/>
+          </a:bodyPr>
+          <a:lstStyle/>
+          <a:p>
+            <a:pPr algn="ctr"/>
+            <a:r>
+              <a:rPr sz="900" b="0" i="0">
+                <a:solidFill>
+                  <a:srgbClr val="5A6973"/>
+                </a:solidFill>
+                <a:latin typeface="Aptos"/>
+              </a:rPr>
+              <a:t>18:00</a:t>
+            </a:r>
+          </a:p>
+        </p:txBody>
+      </p:sp>
+      <p:sp>
+        <p:nvSpPr>
+          <p:cNvPr id="22" name="TextBox 21"/>
+          <p:cNvSpPr txBox="1"/>
+          <p:nvPr/>
+        </p:nvSpPr>
+        <p:spPr>
+          <a:xfrm>
+            <a:off x="2971800" y="5074920"/>
+            <a:ext cx="640080" cy="182880"/>
+          </a:xfrm>
+          <a:prstGeom prst="rect">
+            <a:avLst/>
+          </a:prstGeom>
+          <a:noFill/>
+        </p:spPr>
+        <p:txBody>
+          <a:bodyPr wrap="square">
+            <a:spAutoFit/>
+          </a:bodyPr>
+          <a:lstStyle/>
+          <a:p>
+            <a:pPr algn="ctr"/>
+            <a:r>
+              <a:rPr sz="900" b="0" i="0">
+                <a:solidFill>
+                  <a:srgbClr val="5A6973"/>
+                </a:solidFill>
+                <a:latin typeface="Aptos"/>
+              </a:rPr>
+              <a:t>20:00</a:t>
+            </a:r>
+          </a:p>
+        </p:txBody>
+      </p:sp>
+      <p:sp>
+        <p:nvSpPr>
+          <p:cNvPr id="23" name="TextBox 22"/>
+          <p:cNvSpPr txBox="1"/>
+          <p:nvPr/>
+        </p:nvSpPr>
+        <p:spPr>
+          <a:xfrm>
+            <a:off x="4983480" y="5074920"/>
+            <a:ext cx="640080" cy="182880"/>
+          </a:xfrm>
+          <a:prstGeom prst="rect">
+            <a:avLst/>
+          </a:prstGeom>
+          <a:noFill/>
+        </p:spPr>
+        <p:txBody>
+          <a:bodyPr wrap="square">
+            <a:spAutoFit/>
+          </a:bodyPr>
+          <a:lstStyle/>
+          <a:p>
+            <a:pPr algn="ctr"/>
+            <a:r>
+              <a:rPr sz="900" b="0" i="0">
+                <a:solidFill>
+                  <a:srgbClr val="5A6973"/>
+                </a:solidFill>
+                <a:latin typeface="Aptos"/>
+              </a:rPr>
+              <a:t>22:00</a:t>
+            </a:r>
+          </a:p>
+        </p:txBody>
+      </p:sp>
+      <p:sp>
+        <p:nvSpPr>
+          <p:cNvPr id="24" name="TextBox 23"/>
+          <p:cNvSpPr txBox="1"/>
+          <p:nvPr/>
+        </p:nvSpPr>
+        <p:spPr>
+          <a:xfrm>
+            <a:off x="6995160" y="5074920"/>
+            <a:ext cx="640080" cy="182880"/>
+          </a:xfrm>
+          <a:prstGeom prst="rect">
+            <a:avLst/>
+          </a:prstGeom>
+          <a:noFill/>
+        </p:spPr>
+        <p:txBody>
+          <a:bodyPr wrap="square">
+            <a:spAutoFit/>
+          </a:bodyPr>
+          <a:lstStyle/>
+          <a:p>
+            <a:pPr algn="ctr"/>
+            <a:r>
+              <a:rPr sz="900" b="0" i="0">
+                <a:solidFill>
+                  <a:srgbClr val="5A6973"/>
+                </a:solidFill>
+                <a:latin typeface="Aptos"/>
+              </a:rPr>
+              <a:t>24:00</a:t>
+            </a:r>
+          </a:p>
+        </p:txBody>
+      </p:sp>
+      <p:sp>
+        <p:nvSpPr>
+          <p:cNvPr id="25" name="Rounded Rectangle 24"/>
+          <p:cNvSpPr/>
+          <p:nvPr/>
+        </p:nvSpPr>
+        <p:spPr>
+          <a:xfrm>
+            <a:off x="8046720" y="2148840"/>
+            <a:ext cx="2926080" cy="2606040"/>
+          </a:xfrm>
+          <a:prstGeom prst="roundRect">
+            <a:avLst/>
+          </a:prstGeom>
+          <a:solidFill>
+            <a:srgbClr val="F5F9FA"/>
+          </a:solidFill>
+          <a:ln w="12700">
+            <a:solidFill>
+              <a:srgbClr val="DCE2E8"/>
+            </a:solidFill>
+          </a:ln>
+        </p:spPr>
+        <p:style>
+          <a:lnRef idx="1">
+            <a:schemeClr val="accent1"/>
+          </a:lnRef>
+          <a:fillRef idx="3">
+            <a:schemeClr val="accent1"/>
+          </a:fillRef>
+          <a:effectRef idx="2">
+            <a:schemeClr val="accent1"/>
+          </a:effectRef>
+          <a:fontRef idx="minor">
+            <a:schemeClr val="lt1"/>
+          </a:fontRef>
+        </p:style>
+        <p:txBody>
+          <a:bodyPr rtlCol="0" anchor="ctr"/>
+          <a:lstStyle/>
+          <a:p>
+            <a:pPr algn="ctr"/>
+          </a:p>
+        </p:txBody>
+      </p:sp>
+      <p:sp>
+        <p:nvSpPr>
+          <p:cNvPr id="26" name="TextBox 25"/>
+          <p:cNvSpPr txBox="1"/>
+          <p:nvPr/>
+        </p:nvSpPr>
+        <p:spPr>
+          <a:xfrm>
+            <a:off x="8321040" y="2468880"/>
+            <a:ext cx="2377440" cy="320040"/>
+          </a:xfrm>
+          <a:prstGeom prst="rect">
+            <a:avLst/>
+          </a:prstGeom>
+          <a:noFill/>
+        </p:spPr>
+        <p:txBody>
+          <a:bodyPr wrap="square">
+            <a:spAutoFit/>
+          </a:bodyPr>
+          <a:lstStyle/>
+          <a:p>
+            <a:pPr algn="ctr"/>
+            <a:r>
+              <a:rPr sz="1800" b="1" i="0">
+                <a:solidFill>
+                  <a:srgbClr val="2A9D8F"/>
+                </a:solidFill>
+                <a:latin typeface="Aptos"/>
+              </a:rPr>
+              <a:t>Peak around 21:00–22:00</a:t>
+            </a:r>
+          </a:p>
+        </p:txBody>
+      </p:sp>
+      <p:sp>
+        <p:nvSpPr>
+          <p:cNvPr id="27" name="TextBox 26"/>
+          <p:cNvSpPr txBox="1"/>
+          <p:nvPr/>
+        </p:nvSpPr>
+        <p:spPr>
+          <a:xfrm>
+            <a:off x="8321040" y="3154680"/>
+            <a:ext cx="2377440" cy="685800"/>
+          </a:xfrm>
+          <a:prstGeom prst="rect">
+            <a:avLst/>
+          </a:prstGeom>
+          <a:noFill/>
+        </p:spPr>
+        <p:txBody>
+          <a:bodyPr wrap="square">
+            <a:spAutoFit/>
+          </a:bodyPr>
+          <a:lstStyle/>
+          <a:p>
+            <a:pPr algn="ctr"/>
+            <a:r>
+              <a:rPr sz="1500" b="1" i="0">
                 <a:solidFill>
                   <a:srgbClr val="232D37"/>
                 </a:solidFill>
                 <a:latin typeface="Aptos"/>
-              </a:defRPr>
-            </a:pPr>
-            <a:r>
-              <a:t>Peak may occur around 21:00–22:00</a:t>
-            </a:r>
-          </a:p>
-          <a:p>
-            <a:pPr>
-              <a:spcAft>
-                <a:spcPts val="1200"/>
-              </a:spcAft>
-              <a:defRPr sz="2200">
-                <a:solidFill>
-                  <a:srgbClr val="232D37"/>
-                </a:solidFill>
-                <a:latin typeface="Aptos"/>
-              </a:defRPr>
-            </a:pPr>
-            <a:r>
-              <a:t>Dominant loads: occupants, lighting, latent heat, and equipment</a:t>
-            </a:r>
-          </a:p>
-        </p:txBody>
-      </p:sp>
-      <p:sp>
-        <p:nvSpPr>
-          <p:cNvPr id="8" name="TextBox 7"/>
-          <p:cNvSpPr txBox="1"/>
-          <p:nvPr/>
-        </p:nvSpPr>
-        <p:spPr>
-          <a:xfrm>
-            <a:off x="365760" y="6446520"/>
-            <a:ext cx="11430000" cy="228600"/>
-          </a:xfrm>
-          <a:prstGeom prst="rect">
-            <a:avLst/>
-          </a:prstGeom>
-          <a:noFill/>
-        </p:spPr>
-        <p:txBody>
-          <a:bodyPr wrap="none">
-            <a:spAutoFit/>
-          </a:bodyPr>
-          <a:lstStyle/>
-          <a:p>
-            <a:r>
-              <a:rPr sz="900">
-                <a:solidFill>
-                  <a:srgbClr val="78828C"/>
-                </a:solidFill>
               </a:rPr>
-              <a:t>Air Conditioning · Chapter 1 · Topic 1.1</a:t>
+              <a:t>occupants + lighting + latent heat</a:t>
+            </a:r>
+          </a:p>
+        </p:txBody>
+      </p:sp>
+      <p:sp>
+        <p:nvSpPr>
+          <p:cNvPr id="28" name="TextBox 27"/>
+          <p:cNvSpPr txBox="1"/>
+          <p:nvPr/>
+        </p:nvSpPr>
+        <p:spPr>
+          <a:xfrm>
+            <a:off x="8321040" y="4069080"/>
+            <a:ext cx="2377440" cy="411480"/>
+          </a:xfrm>
+          <a:prstGeom prst="rect">
+            <a:avLst/>
+          </a:prstGeom>
+          <a:noFill/>
+        </p:spPr>
+        <p:txBody>
+          <a:bodyPr wrap="square">
+            <a:spAutoFit/>
+          </a:bodyPr>
+          <a:lstStyle/>
+          <a:p>
+            <a:pPr algn="ctr"/>
+            <a:r>
+              <a:rPr sz="1200" b="0" i="0">
+                <a:solidFill>
+                  <a:srgbClr val="5A6973"/>
+                </a:solidFill>
+                <a:latin typeface="Aptos"/>
+              </a:rPr>
+              <a:t>Peak follows use pattern</a:t>
             </a:r>
           </a:p>
         </p:txBody>
@@ -3770,7 +5169,7 @@
           <a:lstStyle/>
           <a:p>
             <a:r>
-              <a:rPr sz="3000" b="1">
+              <a:rPr sz="3000" b="1" i="0">
                 <a:solidFill>
                   <a:srgbClr val="11374B"/>
                 </a:solidFill>
@@ -3804,7 +5203,7 @@
           <a:lstStyle/>
           <a:p>
             <a:r>
-              <a:rPr sz="1400" b="0">
+              <a:rPr sz="1400" b="0" i="0">
                 <a:solidFill>
                   <a:srgbClr val="5A6973"/>
                 </a:solidFill>
@@ -3839,7 +5238,7 @@
           <a:p>
             <a:pPr algn="r"/>
             <a:r>
-              <a:rPr sz="1100" b="0">
+              <a:rPr sz="1100" b="0" i="0">
                 <a:solidFill>
                   <a:srgbClr val="78828C"/>
                 </a:solidFill>
@@ -3852,7 +5251,76 @@
       </p:sp>
       <p:sp>
         <p:nvSpPr>
-          <p:cNvPr id="6" name="Rectangle 5"/>
+          <p:cNvPr id="6" name="TextBox 5"/>
+          <p:cNvSpPr txBox="1"/>
+          <p:nvPr/>
+        </p:nvSpPr>
+        <p:spPr>
+          <a:xfrm>
+            <a:off x="365760" y="6446520"/>
+            <a:ext cx="8229600" cy="228600"/>
+          </a:xfrm>
+          <a:prstGeom prst="rect">
+            <a:avLst/>
+          </a:prstGeom>
+          <a:noFill/>
+        </p:spPr>
+        <p:txBody>
+          <a:bodyPr wrap="square">
+            <a:spAutoFit/>
+          </a:bodyPr>
+          <a:lstStyle/>
+          <a:p>
+            <a:r>
+              <a:rPr sz="900" b="0" i="0">
+                <a:solidFill>
+                  <a:srgbClr val="78828C"/>
+                </a:solidFill>
+                <a:latin typeface="Aptos"/>
+              </a:rPr>
+              <a:t>Air Conditioning · Chapter 1 · Topic 1.1</a:t>
+            </a:r>
+          </a:p>
+        </p:txBody>
+      </p:sp>
+      <p:sp>
+        <p:nvSpPr>
+          <p:cNvPr id="7" name="TextBox 6"/>
+          <p:cNvSpPr txBox="1"/>
+          <p:nvPr/>
+        </p:nvSpPr>
+        <p:spPr>
+          <a:xfrm>
+            <a:off x="11292840" y="6446520"/>
+            <a:ext cx="502920" cy="228600"/>
+          </a:xfrm>
+          <a:prstGeom prst="rect">
+            <a:avLst/>
+          </a:prstGeom>
+          <a:noFill/>
+        </p:spPr>
+        <p:txBody>
+          <a:bodyPr wrap="square">
+            <a:spAutoFit/>
+          </a:bodyPr>
+          <a:lstStyle/>
+          <a:p>
+            <a:pPr algn="r"/>
+            <a:r>
+              <a:rPr sz="900" b="0" i="0">
+                <a:solidFill>
+                  <a:srgbClr val="78828C"/>
+                </a:solidFill>
+                <a:latin typeface="Aptos"/>
+              </a:rPr>
+              <a:t>11</a:t>
+            </a:r>
+          </a:p>
+        </p:txBody>
+      </p:sp>
+      <p:sp>
+        <p:nvSpPr>
+          <p:cNvPr id="8" name="Rectangle 7"/>
           <p:cNvSpPr/>
           <p:nvPr/>
         </p:nvSpPr>
@@ -3867,7 +5335,7 @@
           <a:solidFill>
             <a:srgbClr val="FFFFFF"/>
           </a:solidFill>
-          <a:ln>
+          <a:ln w="12700">
             <a:solidFill>
               <a:srgbClr val="DCE2E8"/>
             </a:solidFill>
@@ -3897,7 +5365,7 @@
       </p:sp>
       <p:sp>
         <p:nvSpPr>
-          <p:cNvPr id="7" name="TextBox 6"/>
+          <p:cNvPr id="9" name="TextBox 8"/>
           <p:cNvSpPr txBox="1"/>
           <p:nvPr/>
         </p:nvSpPr>
@@ -3952,7 +5420,7 @@
       </p:sp>
       <p:sp>
         <p:nvSpPr>
-          <p:cNvPr id="8" name="Rectangle 7"/>
+          <p:cNvPr id="10" name="Rectangle 9"/>
           <p:cNvSpPr/>
           <p:nvPr/>
         </p:nvSpPr>
@@ -3967,7 +5435,7 @@
           <a:solidFill>
             <a:srgbClr val="FFFFFF"/>
           </a:solidFill>
-          <a:ln>
+          <a:ln w="12700">
             <a:solidFill>
               <a:srgbClr val="DCE2E8"/>
             </a:solidFill>
@@ -3997,7 +5465,7 @@
       </p:sp>
       <p:pic>
         <p:nvPicPr>
-          <p:cNvPr id="9" name="Picture 8" descr="fig_07_design_workflow_en.png"/>
+          <p:cNvPr id="11" name="Picture 10" descr="fig_07_design_workflow_en.png"/>
           <p:cNvPicPr>
             <a:picLocks noChangeAspect="1"/>
           </p:cNvPicPr>
@@ -4019,39 +5487,6 @@
           </a:prstGeom>
         </p:spPr>
       </p:pic>
-      <p:sp>
-        <p:nvSpPr>
-          <p:cNvPr id="10" name="TextBox 9"/>
-          <p:cNvSpPr txBox="1"/>
-          <p:nvPr/>
-        </p:nvSpPr>
-        <p:spPr>
-          <a:xfrm>
-            <a:off x="365760" y="6446520"/>
-            <a:ext cx="11430000" cy="228600"/>
-          </a:xfrm>
-          <a:prstGeom prst="rect">
-            <a:avLst/>
-          </a:prstGeom>
-          <a:noFill/>
-        </p:spPr>
-        <p:txBody>
-          <a:bodyPr wrap="none">
-            <a:spAutoFit/>
-          </a:bodyPr>
-          <a:lstStyle/>
-          <a:p>
-            <a:r>
-              <a:rPr sz="900">
-                <a:solidFill>
-                  <a:srgbClr val="78828C"/>
-                </a:solidFill>
-              </a:rPr>
-              <a:t>Air Conditioning · Chapter 1 · Topic 1.1</a:t>
-            </a:r>
-          </a:p>
-        </p:txBody>
-      </p:sp>
     </p:spTree>
   </p:cSld>
   <p:clrMapOvr>
@@ -4144,7 +5579,7 @@
           <a:lstStyle/>
           <a:p>
             <a:r>
-              <a:rPr sz="3000" b="1">
+              <a:rPr sz="3000" b="1" i="0">
                 <a:solidFill>
                   <a:srgbClr val="11374B"/>
                 </a:solidFill>
@@ -4178,7 +5613,7 @@
           <a:lstStyle/>
           <a:p>
             <a:r>
-              <a:rPr sz="1400" b="0">
+              <a:rPr sz="1400" b="0" i="0">
                 <a:solidFill>
                   <a:srgbClr val="5A6973"/>
                 </a:solidFill>
@@ -4213,7 +5648,7 @@
           <a:p>
             <a:pPr algn="r"/>
             <a:r>
-              <a:rPr sz="1100" b="0">
+              <a:rPr sz="1100" b="0" i="0">
                 <a:solidFill>
                   <a:srgbClr val="78828C"/>
                 </a:solidFill>
@@ -4226,7 +5661,76 @@
       </p:sp>
       <p:sp>
         <p:nvSpPr>
-          <p:cNvPr id="6" name="Rectangle 5"/>
+          <p:cNvPr id="6" name="TextBox 5"/>
+          <p:cNvSpPr txBox="1"/>
+          <p:nvPr/>
+        </p:nvSpPr>
+        <p:spPr>
+          <a:xfrm>
+            <a:off x="365760" y="6446520"/>
+            <a:ext cx="8229600" cy="228600"/>
+          </a:xfrm>
+          <a:prstGeom prst="rect">
+            <a:avLst/>
+          </a:prstGeom>
+          <a:noFill/>
+        </p:spPr>
+        <p:txBody>
+          <a:bodyPr wrap="square">
+            <a:spAutoFit/>
+          </a:bodyPr>
+          <a:lstStyle/>
+          <a:p>
+            <a:r>
+              <a:rPr sz="900" b="0" i="0">
+                <a:solidFill>
+                  <a:srgbClr val="78828C"/>
+                </a:solidFill>
+                <a:latin typeface="Aptos"/>
+              </a:rPr>
+              <a:t>Air Conditioning · Chapter 1 · Topic 1.1</a:t>
+            </a:r>
+          </a:p>
+        </p:txBody>
+      </p:sp>
+      <p:sp>
+        <p:nvSpPr>
+          <p:cNvPr id="7" name="TextBox 6"/>
+          <p:cNvSpPr txBox="1"/>
+          <p:nvPr/>
+        </p:nvSpPr>
+        <p:spPr>
+          <a:xfrm>
+            <a:off x="11292840" y="6446520"/>
+            <a:ext cx="502920" cy="228600"/>
+          </a:xfrm>
+          <a:prstGeom prst="rect">
+            <a:avLst/>
+          </a:prstGeom>
+          <a:noFill/>
+        </p:spPr>
+        <p:txBody>
+          <a:bodyPr wrap="square">
+            <a:spAutoFit/>
+          </a:bodyPr>
+          <a:lstStyle/>
+          <a:p>
+            <a:pPr algn="r"/>
+            <a:r>
+              <a:rPr sz="900" b="0" i="0">
+                <a:solidFill>
+                  <a:srgbClr val="78828C"/>
+                </a:solidFill>
+                <a:latin typeface="Aptos"/>
+              </a:rPr>
+              <a:t>12</a:t>
+            </a:r>
+          </a:p>
+        </p:txBody>
+      </p:sp>
+      <p:sp>
+        <p:nvSpPr>
+          <p:cNvPr id="8" name="Rectangle 7"/>
           <p:cNvSpPr/>
           <p:nvPr/>
         </p:nvSpPr>
@@ -4241,7 +5745,7 @@
           <a:solidFill>
             <a:srgbClr val="FFFFFF"/>
           </a:solidFill>
-          <a:ln>
+          <a:ln w="12700">
             <a:solidFill>
               <a:srgbClr val="DCE2E8"/>
             </a:solidFill>
@@ -4271,7 +5775,7 @@
       </p:sp>
       <p:sp>
         <p:nvSpPr>
-          <p:cNvPr id="7" name="TextBox 6"/>
+          <p:cNvPr id="9" name="TextBox 8"/>
           <p:cNvSpPr txBox="1"/>
           <p:nvPr/>
         </p:nvSpPr>
@@ -4326,7 +5830,7 @@
       </p:sp>
       <p:sp>
         <p:nvSpPr>
-          <p:cNvPr id="8" name="Rectangle 7"/>
+          <p:cNvPr id="10" name="Rectangle 9"/>
           <p:cNvSpPr/>
           <p:nvPr/>
         </p:nvSpPr>
@@ -4341,7 +5845,7 @@
           <a:solidFill>
             <a:srgbClr val="FFFFFF"/>
           </a:solidFill>
-          <a:ln>
+          <a:ln w="12700">
             <a:solidFill>
               <a:srgbClr val="DCE2E8"/>
             </a:solidFill>
@@ -4371,7 +5875,7 @@
       </p:sp>
       <p:pic>
         <p:nvPicPr>
-          <p:cNvPr id="9" name="Picture 8" descr="fig_04_circulation_compare_en.png"/>
+          <p:cNvPr id="11" name="Picture 10" descr="fig_04_circulation_compare_en.png"/>
           <p:cNvPicPr>
             <a:picLocks noChangeAspect="1"/>
           </p:cNvPicPr>
@@ -4393,39 +5897,6 @@
           </a:prstGeom>
         </p:spPr>
       </p:pic>
-      <p:sp>
-        <p:nvSpPr>
-          <p:cNvPr id="10" name="TextBox 9"/>
-          <p:cNvSpPr txBox="1"/>
-          <p:nvPr/>
-        </p:nvSpPr>
-        <p:spPr>
-          <a:xfrm>
-            <a:off x="365760" y="6446520"/>
-            <a:ext cx="11430000" cy="228600"/>
-          </a:xfrm>
-          <a:prstGeom prst="rect">
-            <a:avLst/>
-          </a:prstGeom>
-          <a:noFill/>
-        </p:spPr>
-        <p:txBody>
-          <a:bodyPr wrap="none">
-            <a:spAutoFit/>
-          </a:bodyPr>
-          <a:lstStyle/>
-          <a:p>
-            <a:r>
-              <a:rPr sz="900">
-                <a:solidFill>
-                  <a:srgbClr val="78828C"/>
-                </a:solidFill>
-              </a:rPr>
-              <a:t>Air Conditioning · Chapter 1 · Topic 1.1</a:t>
-            </a:r>
-          </a:p>
-        </p:txBody>
-      </p:sp>
     </p:spTree>
   </p:cSld>
   <p:clrMapOvr>
@@ -4518,7 +5989,7 @@
           <a:lstStyle/>
           <a:p>
             <a:r>
-              <a:rPr sz="3000" b="1">
+              <a:rPr sz="3000" b="1" i="0">
                 <a:solidFill>
                   <a:srgbClr val="11374B"/>
                 </a:solidFill>
@@ -4552,7 +6023,7 @@
           <a:lstStyle/>
           <a:p>
             <a:r>
-              <a:rPr sz="1400" b="0">
+              <a:rPr sz="1400" b="0" i="0">
                 <a:solidFill>
                   <a:srgbClr val="5A6973"/>
                 </a:solidFill>
@@ -4587,7 +6058,7 @@
           <a:p>
             <a:pPr algn="r"/>
             <a:r>
-              <a:rPr sz="1100" b="0">
+              <a:rPr sz="1100" b="0" i="0">
                 <a:solidFill>
                   <a:srgbClr val="78828C"/>
                 </a:solidFill>
@@ -4600,14 +6071,83 @@
       </p:sp>
       <p:sp>
         <p:nvSpPr>
-          <p:cNvPr id="6" name="Rectangle 5"/>
+          <p:cNvPr id="6" name="TextBox 5"/>
+          <p:cNvSpPr txBox="1"/>
+          <p:nvPr/>
+        </p:nvSpPr>
+        <p:spPr>
+          <a:xfrm>
+            <a:off x="365760" y="6446520"/>
+            <a:ext cx="8229600" cy="228600"/>
+          </a:xfrm>
+          <a:prstGeom prst="rect">
+            <a:avLst/>
+          </a:prstGeom>
+          <a:noFill/>
+        </p:spPr>
+        <p:txBody>
+          <a:bodyPr wrap="square">
+            <a:spAutoFit/>
+          </a:bodyPr>
+          <a:lstStyle/>
+          <a:p>
+            <a:r>
+              <a:rPr sz="900" b="0" i="0">
+                <a:solidFill>
+                  <a:srgbClr val="78828C"/>
+                </a:solidFill>
+                <a:latin typeface="Aptos"/>
+              </a:rPr>
+              <a:t>Air Conditioning · Chapter 1 · Topic 1.1</a:t>
+            </a:r>
+          </a:p>
+        </p:txBody>
+      </p:sp>
+      <p:sp>
+        <p:nvSpPr>
+          <p:cNvPr id="7" name="TextBox 6"/>
+          <p:cNvSpPr txBox="1"/>
+          <p:nvPr/>
+        </p:nvSpPr>
+        <p:spPr>
+          <a:xfrm>
+            <a:off x="11292840" y="6446520"/>
+            <a:ext cx="502920" cy="228600"/>
+          </a:xfrm>
+          <a:prstGeom prst="rect">
+            <a:avLst/>
+          </a:prstGeom>
+          <a:noFill/>
+        </p:spPr>
+        <p:txBody>
+          <a:bodyPr wrap="square">
+            <a:spAutoFit/>
+          </a:bodyPr>
+          <a:lstStyle/>
+          <a:p>
+            <a:pPr algn="r"/>
+            <a:r>
+              <a:rPr sz="900" b="0" i="0">
+                <a:solidFill>
+                  <a:srgbClr val="78828C"/>
+                </a:solidFill>
+                <a:latin typeface="Aptos"/>
+              </a:rPr>
+              <a:t>13</a:t>
+            </a:r>
+          </a:p>
+        </p:txBody>
+      </p:sp>
+      <p:sp>
+        <p:nvSpPr>
+          <p:cNvPr id="8" name="Rectangle 7"/>
           <p:cNvSpPr/>
           <p:nvPr/>
         </p:nvSpPr>
         <p:spPr>
           <a:xfrm>
-            <a:off x="685800" y="1737360"/>
-            <a:ext cx="10835640" cy="4343400"/>
+            <a:off x="731520" y="1691640"/>
+            <a:ext cx="10744200" cy="4343400"/>
           </a:xfrm>
           <a:prstGeom prst="rect">
             <a:avLst/>
@@ -4615,7 +6155,7 @@
           <a:solidFill>
             <a:srgbClr val="FFFFFF"/>
           </a:solidFill>
-          <a:ln>
+          <a:ln w="12700">
             <a:solidFill>
               <a:srgbClr val="DCE2E8"/>
             </a:solidFill>
@@ -4645,104 +6185,643 @@
       </p:sp>
       <p:sp>
         <p:nvSpPr>
-          <p:cNvPr id="7" name="TextBox 6"/>
-          <p:cNvSpPr txBox="1"/>
-          <p:nvPr/>
-        </p:nvSpPr>
-        <p:spPr>
-          <a:xfrm>
-            <a:off x="1005840" y="2057400"/>
-            <a:ext cx="10149840" cy="3749039"/>
-          </a:xfrm>
-          <a:prstGeom prst="rect">
-            <a:avLst/>
-          </a:prstGeom>
-          <a:noFill/>
-        </p:spPr>
-        <p:txBody>
-          <a:bodyPr wrap="square">
-            <a:spAutoFit/>
-          </a:bodyPr>
-          <a:lstStyle/>
-          <a:p>
-            <a:pPr>
-              <a:spcAft>
-                <a:spcPts val="1200"/>
-              </a:spcAft>
-              <a:defRPr sz="2200">
+          <p:cNvPr id="9" name="TextBox 8"/>
+          <p:cNvSpPr txBox="1"/>
+          <p:nvPr/>
+        </p:nvSpPr>
+        <p:spPr>
+          <a:xfrm>
+            <a:off x="960120" y="1965960"/>
+            <a:ext cx="10241280" cy="320040"/>
+          </a:xfrm>
+          <a:prstGeom prst="rect">
+            <a:avLst/>
+          </a:prstGeom>
+          <a:noFill/>
+        </p:spPr>
+        <p:txBody>
+          <a:bodyPr wrap="square">
+            <a:spAutoFit/>
+          </a:bodyPr>
+          <a:lstStyle/>
+          <a:p>
+            <a:pPr algn="ctr"/>
+            <a:r>
+              <a:rPr sz="2400" b="1" i="0">
+                <a:solidFill>
+                  <a:srgbClr val="11374B"/>
+                </a:solidFill>
+                <a:latin typeface="Aptos"/>
+              </a:rPr>
+              <a:t>Thailand design context</a:t>
+            </a:r>
+          </a:p>
+        </p:txBody>
+      </p:sp>
+      <p:sp>
+        <p:nvSpPr>
+          <p:cNvPr id="10" name="Rounded Rectangle 9"/>
+          <p:cNvSpPr/>
+          <p:nvPr/>
+        </p:nvSpPr>
+        <p:spPr>
+          <a:xfrm>
+            <a:off x="1234440" y="2743200"/>
+            <a:ext cx="2971800" cy="1508760"/>
+          </a:xfrm>
+          <a:prstGeom prst="roundRect">
+            <a:avLst/>
+          </a:prstGeom>
+          <a:solidFill>
+            <a:srgbClr val="FFFFFF"/>
+          </a:solidFill>
+          <a:ln w="12700">
+            <a:solidFill>
+              <a:srgbClr val="DCE2E8"/>
+            </a:solidFill>
+          </a:ln>
+        </p:spPr>
+        <p:style>
+          <a:lnRef idx="1">
+            <a:schemeClr val="accent1"/>
+          </a:lnRef>
+          <a:fillRef idx="3">
+            <a:schemeClr val="accent1"/>
+          </a:fillRef>
+          <a:effectRef idx="2">
+            <a:schemeClr val="accent1"/>
+          </a:effectRef>
+          <a:fontRef idx="minor">
+            <a:schemeClr val="lt1"/>
+          </a:fontRef>
+        </p:style>
+        <p:txBody>
+          <a:bodyPr rtlCol="0" anchor="ctr"/>
+          <a:lstStyle/>
+          <a:p>
+            <a:pPr algn="ctr"/>
+          </a:p>
+        </p:txBody>
+      </p:sp>
+      <p:sp>
+        <p:nvSpPr>
+          <p:cNvPr id="11" name="Oval 10"/>
+          <p:cNvSpPr/>
+          <p:nvPr/>
+        </p:nvSpPr>
+        <p:spPr>
+          <a:xfrm>
+            <a:off x="1399032" y="2907792"/>
+            <a:ext cx="475488" cy="475488"/>
+          </a:xfrm>
+          <a:prstGeom prst="ellipse">
+            <a:avLst/>
+          </a:prstGeom>
+          <a:solidFill>
+            <a:srgbClr val="E76F51"/>
+          </a:solidFill>
+          <a:ln>
+            <a:noFill/>
+          </a:ln>
+        </p:spPr>
+        <p:style>
+          <a:lnRef idx="1">
+            <a:schemeClr val="accent1"/>
+          </a:lnRef>
+          <a:fillRef idx="3">
+            <a:schemeClr val="accent1"/>
+          </a:fillRef>
+          <a:effectRef idx="2">
+            <a:schemeClr val="accent1"/>
+          </a:effectRef>
+          <a:fontRef idx="minor">
+            <a:schemeClr val="lt1"/>
+          </a:fontRef>
+        </p:style>
+        <p:txBody>
+          <a:bodyPr rtlCol="0" anchor="ctr"/>
+          <a:lstStyle/>
+          <a:p>
+            <a:pPr algn="ctr"/>
+          </a:p>
+        </p:txBody>
+      </p:sp>
+      <p:sp>
+        <p:nvSpPr>
+          <p:cNvPr id="12" name="TextBox 11"/>
+          <p:cNvSpPr txBox="1"/>
+          <p:nvPr/>
+        </p:nvSpPr>
+        <p:spPr>
+          <a:xfrm>
+            <a:off x="1399032" y="2962656"/>
+            <a:ext cx="475488" cy="228600"/>
+          </a:xfrm>
+          <a:prstGeom prst="rect">
+            <a:avLst/>
+          </a:prstGeom>
+          <a:noFill/>
+        </p:spPr>
+        <p:txBody>
+          <a:bodyPr wrap="square">
+            <a:spAutoFit/>
+          </a:bodyPr>
+          <a:lstStyle/>
+          <a:p>
+            <a:pPr algn="ctr"/>
+            <a:r>
+              <a:rPr sz="1300" b="1" i="0">
+                <a:solidFill>
+                  <a:srgbClr val="FFFFFF"/>
+                </a:solidFill>
+                <a:latin typeface="Aptos"/>
+              </a:rPr>
+              <a:t>☀</a:t>
+            </a:r>
+          </a:p>
+        </p:txBody>
+      </p:sp>
+      <p:sp>
+        <p:nvSpPr>
+          <p:cNvPr id="13" name="TextBox 12"/>
+          <p:cNvSpPr txBox="1"/>
+          <p:nvPr/>
+        </p:nvSpPr>
+        <p:spPr>
+          <a:xfrm>
+            <a:off x="2011680" y="2926080"/>
+            <a:ext cx="2057400" cy="292608"/>
+          </a:xfrm>
+          <a:prstGeom prst="rect">
+            <a:avLst/>
+          </a:prstGeom>
+          <a:noFill/>
+        </p:spPr>
+        <p:txBody>
+          <a:bodyPr wrap="square">
+            <a:spAutoFit/>
+          </a:bodyPr>
+          <a:lstStyle/>
+          <a:p>
+            <a:r>
+              <a:rPr sz="1300" b="1" i="0">
                 <a:solidFill>
                   <a:srgbClr val="232D37"/>
                 </a:solidFill>
                 <a:latin typeface="Aptos"/>
-              </a:defRPr>
-            </a:pPr>
-            <a:r>
-              <a:t>Thailand context: high outdoor temperature + high humidity</a:t>
-            </a:r>
-          </a:p>
-          <a:p>
-            <a:pPr>
-              <a:spcAft>
-                <a:spcPts val="1200"/>
-              </a:spcAft>
-              <a:defRPr sz="2200">
+              </a:rPr>
+              <a:t>High outdoor temperature</a:t>
+            </a:r>
+          </a:p>
+        </p:txBody>
+      </p:sp>
+      <p:sp>
+        <p:nvSpPr>
+          <p:cNvPr id="14" name="TextBox 13"/>
+          <p:cNvSpPr txBox="1"/>
+          <p:nvPr/>
+        </p:nvSpPr>
+        <p:spPr>
+          <a:xfrm>
+            <a:off x="2011680" y="3273552"/>
+            <a:ext cx="2057400" cy="868680"/>
+          </a:xfrm>
+          <a:prstGeom prst="rect">
+            <a:avLst/>
+          </a:prstGeom>
+          <a:noFill/>
+        </p:spPr>
+        <p:txBody>
+          <a:bodyPr wrap="square">
+            <a:spAutoFit/>
+          </a:bodyPr>
+          <a:lstStyle/>
+          <a:p>
+            <a:r>
+              <a:rPr sz="950" b="0" i="0">
+                <a:solidFill>
+                  <a:srgbClr val="5A6973"/>
+                </a:solidFill>
+                <a:latin typeface="Aptos"/>
+              </a:rPr>
+              <a:t>sensible load</a:t>
+            </a:r>
+          </a:p>
+        </p:txBody>
+      </p:sp>
+      <p:sp>
+        <p:nvSpPr>
+          <p:cNvPr id="15" name="Rounded Rectangle 14"/>
+          <p:cNvSpPr/>
+          <p:nvPr/>
+        </p:nvSpPr>
+        <p:spPr>
+          <a:xfrm>
+            <a:off x="4663440" y="2743200"/>
+            <a:ext cx="2971800" cy="1508760"/>
+          </a:xfrm>
+          <a:prstGeom prst="roundRect">
+            <a:avLst/>
+          </a:prstGeom>
+          <a:solidFill>
+            <a:srgbClr val="FFFFFF"/>
+          </a:solidFill>
+          <a:ln w="12700">
+            <a:solidFill>
+              <a:srgbClr val="DCE2E8"/>
+            </a:solidFill>
+          </a:ln>
+        </p:spPr>
+        <p:style>
+          <a:lnRef idx="1">
+            <a:schemeClr val="accent1"/>
+          </a:lnRef>
+          <a:fillRef idx="3">
+            <a:schemeClr val="accent1"/>
+          </a:fillRef>
+          <a:effectRef idx="2">
+            <a:schemeClr val="accent1"/>
+          </a:effectRef>
+          <a:fontRef idx="minor">
+            <a:schemeClr val="lt1"/>
+          </a:fontRef>
+        </p:style>
+        <p:txBody>
+          <a:bodyPr rtlCol="0" anchor="ctr"/>
+          <a:lstStyle/>
+          <a:p>
+            <a:pPr algn="ctr"/>
+          </a:p>
+        </p:txBody>
+      </p:sp>
+      <p:sp>
+        <p:nvSpPr>
+          <p:cNvPr id="16" name="Oval 15"/>
+          <p:cNvSpPr/>
+          <p:nvPr/>
+        </p:nvSpPr>
+        <p:spPr>
+          <a:xfrm>
+            <a:off x="4828031" y="2907792"/>
+            <a:ext cx="475488" cy="475488"/>
+          </a:xfrm>
+          <a:prstGeom prst="ellipse">
+            <a:avLst/>
+          </a:prstGeom>
+          <a:solidFill>
+            <a:srgbClr val="457B9D"/>
+          </a:solidFill>
+          <a:ln>
+            <a:noFill/>
+          </a:ln>
+        </p:spPr>
+        <p:style>
+          <a:lnRef idx="1">
+            <a:schemeClr val="accent1"/>
+          </a:lnRef>
+          <a:fillRef idx="3">
+            <a:schemeClr val="accent1"/>
+          </a:fillRef>
+          <a:effectRef idx="2">
+            <a:schemeClr val="accent1"/>
+          </a:effectRef>
+          <a:fontRef idx="minor">
+            <a:schemeClr val="lt1"/>
+          </a:fontRef>
+        </p:style>
+        <p:txBody>
+          <a:bodyPr rtlCol="0" anchor="ctr"/>
+          <a:lstStyle/>
+          <a:p>
+            <a:pPr algn="ctr"/>
+          </a:p>
+        </p:txBody>
+      </p:sp>
+      <p:sp>
+        <p:nvSpPr>
+          <p:cNvPr id="17" name="TextBox 16"/>
+          <p:cNvSpPr txBox="1"/>
+          <p:nvPr/>
+        </p:nvSpPr>
+        <p:spPr>
+          <a:xfrm>
+            <a:off x="4828031" y="2962656"/>
+            <a:ext cx="475488" cy="228600"/>
+          </a:xfrm>
+          <a:prstGeom prst="rect">
+            <a:avLst/>
+          </a:prstGeom>
+          <a:noFill/>
+        </p:spPr>
+        <p:txBody>
+          <a:bodyPr wrap="square">
+            <a:spAutoFit/>
+          </a:bodyPr>
+          <a:lstStyle/>
+          <a:p>
+            <a:pPr algn="ctr"/>
+            <a:r>
+              <a:rPr sz="1300" b="1" i="0">
+                <a:solidFill>
+                  <a:srgbClr val="FFFFFF"/>
+                </a:solidFill>
+                <a:latin typeface="Aptos"/>
+              </a:rPr>
+              <a:t>RH</a:t>
+            </a:r>
+          </a:p>
+        </p:txBody>
+      </p:sp>
+      <p:sp>
+        <p:nvSpPr>
+          <p:cNvPr id="18" name="TextBox 17"/>
+          <p:cNvSpPr txBox="1"/>
+          <p:nvPr/>
+        </p:nvSpPr>
+        <p:spPr>
+          <a:xfrm>
+            <a:off x="5440679" y="2926080"/>
+            <a:ext cx="2057400" cy="292608"/>
+          </a:xfrm>
+          <a:prstGeom prst="rect">
+            <a:avLst/>
+          </a:prstGeom>
+          <a:noFill/>
+        </p:spPr>
+        <p:txBody>
+          <a:bodyPr wrap="square">
+            <a:spAutoFit/>
+          </a:bodyPr>
+          <a:lstStyle/>
+          <a:p>
+            <a:r>
+              <a:rPr sz="1300" b="1" i="0">
                 <a:solidFill>
                   <a:srgbClr val="232D37"/>
                 </a:solidFill>
                 <a:latin typeface="Aptos"/>
-              </a:defRPr>
-            </a:pPr>
-            <a:r>
-              <a:t>Main needs: cooling and dehumidification</a:t>
-            </a:r>
-          </a:p>
-          <a:p>
-            <a:pPr>
-              <a:spcAft>
-                <a:spcPts val="1200"/>
-              </a:spcAft>
-              <a:defRPr sz="2200">
+              </a:rPr>
+              <a:t>High humidity</a:t>
+            </a:r>
+          </a:p>
+        </p:txBody>
+      </p:sp>
+      <p:sp>
+        <p:nvSpPr>
+          <p:cNvPr id="19" name="TextBox 18"/>
+          <p:cNvSpPr txBox="1"/>
+          <p:nvPr/>
+        </p:nvSpPr>
+        <p:spPr>
+          <a:xfrm>
+            <a:off x="5440679" y="3273552"/>
+            <a:ext cx="2057400" cy="868680"/>
+          </a:xfrm>
+          <a:prstGeom prst="rect">
+            <a:avLst/>
+          </a:prstGeom>
+          <a:noFill/>
+        </p:spPr>
+        <p:txBody>
+          <a:bodyPr wrap="square">
+            <a:spAutoFit/>
+          </a:bodyPr>
+          <a:lstStyle/>
+          <a:p>
+            <a:r>
+              <a:rPr sz="950" b="0" i="0">
+                <a:solidFill>
+                  <a:srgbClr val="5A6973"/>
+                </a:solidFill>
+                <a:latin typeface="Aptos"/>
+              </a:rPr>
+              <a:t>latent load</a:t>
+            </a:r>
+          </a:p>
+        </p:txBody>
+      </p:sp>
+      <p:sp>
+        <p:nvSpPr>
+          <p:cNvPr id="20" name="Rounded Rectangle 19"/>
+          <p:cNvSpPr/>
+          <p:nvPr/>
+        </p:nvSpPr>
+        <p:spPr>
+          <a:xfrm>
+            <a:off x="8092440" y="2743200"/>
+            <a:ext cx="2971800" cy="1508760"/>
+          </a:xfrm>
+          <a:prstGeom prst="roundRect">
+            <a:avLst/>
+          </a:prstGeom>
+          <a:solidFill>
+            <a:srgbClr val="FFFFFF"/>
+          </a:solidFill>
+          <a:ln w="12700">
+            <a:solidFill>
+              <a:srgbClr val="DCE2E8"/>
+            </a:solidFill>
+          </a:ln>
+        </p:spPr>
+        <p:style>
+          <a:lnRef idx="1">
+            <a:schemeClr val="accent1"/>
+          </a:lnRef>
+          <a:fillRef idx="3">
+            <a:schemeClr val="accent1"/>
+          </a:fillRef>
+          <a:effectRef idx="2">
+            <a:schemeClr val="accent1"/>
+          </a:effectRef>
+          <a:fontRef idx="minor">
+            <a:schemeClr val="lt1"/>
+          </a:fontRef>
+        </p:style>
+        <p:txBody>
+          <a:bodyPr rtlCol="0" anchor="ctr"/>
+          <a:lstStyle/>
+          <a:p>
+            <a:pPr algn="ctr"/>
+          </a:p>
+        </p:txBody>
+      </p:sp>
+      <p:sp>
+        <p:nvSpPr>
+          <p:cNvPr id="21" name="Oval 20"/>
+          <p:cNvSpPr/>
+          <p:nvPr/>
+        </p:nvSpPr>
+        <p:spPr>
+          <a:xfrm>
+            <a:off x="8257031" y="2907792"/>
+            <a:ext cx="475488" cy="475488"/>
+          </a:xfrm>
+          <a:prstGeom prst="ellipse">
+            <a:avLst/>
+          </a:prstGeom>
+          <a:solidFill>
+            <a:srgbClr val="2A9D8F"/>
+          </a:solidFill>
+          <a:ln>
+            <a:noFill/>
+          </a:ln>
+        </p:spPr>
+        <p:style>
+          <a:lnRef idx="1">
+            <a:schemeClr val="accent1"/>
+          </a:lnRef>
+          <a:fillRef idx="3">
+            <a:schemeClr val="accent1"/>
+          </a:fillRef>
+          <a:effectRef idx="2">
+            <a:schemeClr val="accent1"/>
+          </a:effectRef>
+          <a:fontRef idx="minor">
+            <a:schemeClr val="lt1"/>
+          </a:fontRef>
+        </p:style>
+        <p:txBody>
+          <a:bodyPr rtlCol="0" anchor="ctr"/>
+          <a:lstStyle/>
+          <a:p>
+            <a:pPr algn="ctr"/>
+          </a:p>
+        </p:txBody>
+      </p:sp>
+      <p:sp>
+        <p:nvSpPr>
+          <p:cNvPr id="22" name="TextBox 21"/>
+          <p:cNvSpPr txBox="1"/>
+          <p:nvPr/>
+        </p:nvSpPr>
+        <p:spPr>
+          <a:xfrm>
+            <a:off x="8257031" y="2962656"/>
+            <a:ext cx="475488" cy="228600"/>
+          </a:xfrm>
+          <a:prstGeom prst="rect">
+            <a:avLst/>
+          </a:prstGeom>
+          <a:noFill/>
+        </p:spPr>
+        <p:txBody>
+          <a:bodyPr wrap="square">
+            <a:spAutoFit/>
+          </a:bodyPr>
+          <a:lstStyle/>
+          <a:p>
+            <a:pPr algn="ctr"/>
+            <a:r>
+              <a:rPr sz="1300" b="1" i="0">
+                <a:solidFill>
+                  <a:srgbClr val="FFFFFF"/>
+                </a:solidFill>
+                <a:latin typeface="Aptos"/>
+              </a:rPr>
+              <a:t>AC</a:t>
+            </a:r>
+          </a:p>
+        </p:txBody>
+      </p:sp>
+      <p:sp>
+        <p:nvSpPr>
+          <p:cNvPr id="23" name="TextBox 22"/>
+          <p:cNvSpPr txBox="1"/>
+          <p:nvPr/>
+        </p:nvSpPr>
+        <p:spPr>
+          <a:xfrm>
+            <a:off x="8869680" y="2926080"/>
+            <a:ext cx="2057400" cy="292608"/>
+          </a:xfrm>
+          <a:prstGeom prst="rect">
+            <a:avLst/>
+          </a:prstGeom>
+          <a:noFill/>
+        </p:spPr>
+        <p:txBody>
+          <a:bodyPr wrap="square">
+            <a:spAutoFit/>
+          </a:bodyPr>
+          <a:lstStyle/>
+          <a:p>
+            <a:r>
+              <a:rPr sz="1300" b="1" i="0">
                 <a:solidFill>
                   <a:srgbClr val="232D37"/>
                 </a:solidFill>
                 <a:latin typeface="Aptos"/>
-              </a:defRPr>
-            </a:pPr>
-            <a:r>
-              <a:t>Heating and humidification are outside the main scope.</a:t>
-            </a:r>
-          </a:p>
-        </p:txBody>
-      </p:sp>
-      <p:sp>
-        <p:nvSpPr>
-          <p:cNvPr id="8" name="TextBox 7"/>
-          <p:cNvSpPr txBox="1"/>
-          <p:nvPr/>
-        </p:nvSpPr>
-        <p:spPr>
-          <a:xfrm>
-            <a:off x="365760" y="6446520"/>
-            <a:ext cx="11430000" cy="228600"/>
-          </a:xfrm>
-          <a:prstGeom prst="rect">
-            <a:avLst/>
-          </a:prstGeom>
-          <a:noFill/>
-        </p:spPr>
-        <p:txBody>
-          <a:bodyPr wrap="none">
-            <a:spAutoFit/>
-          </a:bodyPr>
-          <a:lstStyle/>
-          <a:p>
-            <a:r>
-              <a:rPr sz="900">
-                <a:solidFill>
-                  <a:srgbClr val="78828C"/>
-                </a:solidFill>
               </a:rPr>
-              <a:t>Air Conditioning · Chapter 1 · Topic 1.1</a:t>
+              <a:t>Cooling + dehumidification</a:t>
+            </a:r>
+          </a:p>
+        </p:txBody>
+      </p:sp>
+      <p:sp>
+        <p:nvSpPr>
+          <p:cNvPr id="24" name="TextBox 23"/>
+          <p:cNvSpPr txBox="1"/>
+          <p:nvPr/>
+        </p:nvSpPr>
+        <p:spPr>
+          <a:xfrm>
+            <a:off x="8869680" y="3273552"/>
+            <a:ext cx="2057400" cy="868680"/>
+          </a:xfrm>
+          <a:prstGeom prst="rect">
+            <a:avLst/>
+          </a:prstGeom>
+          <a:noFill/>
+        </p:spPr>
+        <p:txBody>
+          <a:bodyPr wrap="square">
+            <a:spAutoFit/>
+          </a:bodyPr>
+          <a:lstStyle/>
+          <a:p>
+            <a:r>
+              <a:rPr sz="950" b="0" i="0">
+                <a:solidFill>
+                  <a:srgbClr val="5A6973"/>
+                </a:solidFill>
+                <a:latin typeface="Aptos"/>
+              </a:rPr>
+              <a:t>main course scope</a:t>
+            </a:r>
+          </a:p>
+        </p:txBody>
+      </p:sp>
+      <p:sp>
+        <p:nvSpPr>
+          <p:cNvPr id="25" name="TextBox 24"/>
+          <p:cNvSpPr txBox="1"/>
+          <p:nvPr/>
+        </p:nvSpPr>
+        <p:spPr>
+          <a:xfrm>
+            <a:off x="1828800" y="4892040"/>
+            <a:ext cx="8503920" cy="411480"/>
+          </a:xfrm>
+          <a:prstGeom prst="rect">
+            <a:avLst/>
+          </a:prstGeom>
+          <a:noFill/>
+        </p:spPr>
+        <p:txBody>
+          <a:bodyPr wrap="square">
+            <a:spAutoFit/>
+          </a:bodyPr>
+          <a:lstStyle/>
+          <a:p>
+            <a:pPr algn="ctr"/>
+            <a:r>
+              <a:rPr sz="1800" b="1" i="0">
+                <a:solidFill>
+                  <a:srgbClr val="5A6973"/>
+                </a:solidFill>
+                <a:latin typeface="Aptos"/>
+              </a:rPr>
+              <a:t>Heating and humidification are not the main focus for this course.</a:t>
             </a:r>
           </a:p>
         </p:txBody>
@@ -4839,7 +6918,7 @@
           <a:lstStyle/>
           <a:p>
             <a:r>
-              <a:rPr sz="3000" b="1">
+              <a:rPr sz="3000" b="1" i="0">
                 <a:solidFill>
                   <a:srgbClr val="11374B"/>
                 </a:solidFill>
@@ -4873,7 +6952,7 @@
           <a:lstStyle/>
           <a:p>
             <a:r>
-              <a:rPr sz="1400" b="0">
+              <a:rPr sz="1400" b="0" i="0">
                 <a:solidFill>
                   <a:srgbClr val="5A6973"/>
                 </a:solidFill>
@@ -4908,7 +6987,7 @@
           <a:p>
             <a:pPr algn="r"/>
             <a:r>
-              <a:rPr sz="1100" b="0">
+              <a:rPr sz="1100" b="0" i="0">
                 <a:solidFill>
                   <a:srgbClr val="78828C"/>
                 </a:solidFill>
@@ -4921,22 +7000,91 @@
       </p:sp>
       <p:sp>
         <p:nvSpPr>
-          <p:cNvPr id="6" name="Rectangle 5"/>
+          <p:cNvPr id="6" name="TextBox 5"/>
+          <p:cNvSpPr txBox="1"/>
+          <p:nvPr/>
+        </p:nvSpPr>
+        <p:spPr>
+          <a:xfrm>
+            <a:off x="365760" y="6446520"/>
+            <a:ext cx="8229600" cy="228600"/>
+          </a:xfrm>
+          <a:prstGeom prst="rect">
+            <a:avLst/>
+          </a:prstGeom>
+          <a:noFill/>
+        </p:spPr>
+        <p:txBody>
+          <a:bodyPr wrap="square">
+            <a:spAutoFit/>
+          </a:bodyPr>
+          <a:lstStyle/>
+          <a:p>
+            <a:r>
+              <a:rPr sz="900" b="0" i="0">
+                <a:solidFill>
+                  <a:srgbClr val="78828C"/>
+                </a:solidFill>
+                <a:latin typeface="Aptos"/>
+              </a:rPr>
+              <a:t>Air Conditioning · Chapter 1 · Topic 1.1</a:t>
+            </a:r>
+          </a:p>
+        </p:txBody>
+      </p:sp>
+      <p:sp>
+        <p:nvSpPr>
+          <p:cNvPr id="7" name="TextBox 6"/>
+          <p:cNvSpPr txBox="1"/>
+          <p:nvPr/>
+        </p:nvSpPr>
+        <p:spPr>
+          <a:xfrm>
+            <a:off x="11292840" y="6446520"/>
+            <a:ext cx="502920" cy="228600"/>
+          </a:xfrm>
+          <a:prstGeom prst="rect">
+            <a:avLst/>
+          </a:prstGeom>
+          <a:noFill/>
+        </p:spPr>
+        <p:txBody>
+          <a:bodyPr wrap="square">
+            <a:spAutoFit/>
+          </a:bodyPr>
+          <a:lstStyle/>
+          <a:p>
+            <a:pPr algn="r"/>
+            <a:r>
+              <a:rPr sz="900" b="0" i="0">
+                <a:solidFill>
+                  <a:srgbClr val="78828C"/>
+                </a:solidFill>
+                <a:latin typeface="Aptos"/>
+              </a:rPr>
+              <a:t>14</a:t>
+            </a:r>
+          </a:p>
+        </p:txBody>
+      </p:sp>
+      <p:sp>
+        <p:nvSpPr>
+          <p:cNvPr id="8" name="Rounded Rectangle 7"/>
           <p:cNvSpPr/>
           <p:nvPr/>
         </p:nvSpPr>
         <p:spPr>
           <a:xfrm>
-            <a:off x="685800" y="1737360"/>
-            <a:ext cx="10835640" cy="4343400"/>
-          </a:xfrm>
-          <a:prstGeom prst="rect">
+            <a:off x="1005840" y="1737360"/>
+            <a:ext cx="10149840" cy="4251960"/>
+          </a:xfrm>
+          <a:prstGeom prst="roundRect">
             <a:avLst/>
           </a:prstGeom>
           <a:solidFill>
             <a:srgbClr val="FFFFFF"/>
           </a:solidFill>
-          <a:ln>
+          <a:ln w="12700">
             <a:solidFill>
               <a:srgbClr val="DCE2E8"/>
             </a:solidFill>
@@ -4966,88 +7114,417 @@
       </p:sp>
       <p:sp>
         <p:nvSpPr>
-          <p:cNvPr id="7" name="TextBox 6"/>
-          <p:cNvSpPr txBox="1"/>
-          <p:nvPr/>
-        </p:nvSpPr>
-        <p:spPr>
-          <a:xfrm>
-            <a:off x="1005840" y="2057400"/>
-            <a:ext cx="10149840" cy="3749039"/>
-          </a:xfrm>
-          <a:prstGeom prst="rect">
-            <a:avLst/>
-          </a:prstGeom>
-          <a:noFill/>
-        </p:spPr>
-        <p:txBody>
-          <a:bodyPr wrap="square">
-            <a:spAutoFit/>
-          </a:bodyPr>
-          <a:lstStyle/>
-          <a:p>
-            <a:pPr>
-              <a:spcAft>
-                <a:spcPts val="1200"/>
-              </a:spcAft>
-              <a:defRPr sz="2200">
+          <p:cNvPr id="9" name="TextBox 8"/>
+          <p:cNvSpPr txBox="1"/>
+          <p:nvPr/>
+        </p:nvSpPr>
+        <p:spPr>
+          <a:xfrm>
+            <a:off x="1554480" y="2148840"/>
+            <a:ext cx="9144000" cy="502920"/>
+          </a:xfrm>
+          <a:prstGeom prst="rect">
+            <a:avLst/>
+          </a:prstGeom>
+          <a:noFill/>
+        </p:spPr>
+        <p:txBody>
+          <a:bodyPr wrap="square">
+            <a:spAutoFit/>
+          </a:bodyPr>
+          <a:lstStyle/>
+          <a:p>
+            <a:pPr algn="ctr"/>
+            <a:r>
+              <a:rPr sz="2700" b="1" i="0">
+                <a:solidFill>
+                  <a:srgbClr val="11374B"/>
+                </a:solidFill>
+                <a:latin typeface="Aptos"/>
+              </a:rPr>
+              <a:t>A classroom is 25 °C, but students feel sticky.</a:t>
+            </a:r>
+          </a:p>
+        </p:txBody>
+      </p:sp>
+      <p:sp>
+        <p:nvSpPr>
+          <p:cNvPr id="10" name="TextBox 9"/>
+          <p:cNvSpPr txBox="1"/>
+          <p:nvPr/>
+        </p:nvSpPr>
+        <p:spPr>
+          <a:xfrm>
+            <a:off x="1737360" y="2971800"/>
+            <a:ext cx="8778240" cy="365760"/>
+          </a:xfrm>
+          <a:prstGeom prst="rect">
+            <a:avLst/>
+          </a:prstGeom>
+          <a:noFill/>
+        </p:spPr>
+        <p:txBody>
+          <a:bodyPr wrap="square">
+            <a:spAutoFit/>
+          </a:bodyPr>
+          <a:lstStyle/>
+          <a:p>
+            <a:pPr algn="ctr"/>
+            <a:r>
+              <a:rPr sz="2100" b="1" i="0">
                 <a:solidFill>
                   <a:srgbClr val="232D37"/>
                 </a:solidFill>
                 <a:latin typeface="Aptos"/>
-              </a:defRPr>
-            </a:pPr>
-            <a:r>
-              <a:t>A classroom is 25 °C but students feel sticky. Which parameter is likely the problem?</a:t>
-            </a:r>
-          </a:p>
-          <a:p>
-            <a:pPr>
-              <a:spcAft>
-                <a:spcPts val="1200"/>
-              </a:spcAft>
-              <a:defRPr sz="2200">
-                <a:solidFill>
-                  <a:srgbClr val="232D37"/>
-                </a:solidFill>
-                <a:latin typeface="Aptos"/>
-              </a:defRPr>
-            </a:pPr>
-            <a:r>
-              <a:t>Answer: humidity and/or air movement.</a:t>
-            </a:r>
-          </a:p>
-        </p:txBody>
-      </p:sp>
-      <p:sp>
-        <p:nvSpPr>
-          <p:cNvPr id="8" name="TextBox 7"/>
-          <p:cNvSpPr txBox="1"/>
-          <p:nvPr/>
-        </p:nvSpPr>
-        <p:spPr>
-          <a:xfrm>
-            <a:off x="365760" y="6446520"/>
-            <a:ext cx="11430000" cy="228600"/>
-          </a:xfrm>
-          <a:prstGeom prst="rect">
-            <a:avLst/>
-          </a:prstGeom>
-          <a:noFill/>
-        </p:spPr>
-        <p:txBody>
-          <a:bodyPr wrap="none">
-            <a:spAutoFit/>
-          </a:bodyPr>
-          <a:lstStyle/>
-          <a:p>
-            <a:r>
-              <a:rPr sz="900">
-                <a:solidFill>
-                  <a:srgbClr val="78828C"/>
-                </a:solidFill>
               </a:rPr>
-              <a:t>Air Conditioning · Chapter 1 · Topic 1.1</a:t>
+              <a:t>Which parameter is likely the problem?</a:t>
+            </a:r>
+          </a:p>
+        </p:txBody>
+      </p:sp>
+      <p:sp>
+        <p:nvSpPr>
+          <p:cNvPr id="11" name="Rounded Rectangle 10"/>
+          <p:cNvSpPr/>
+          <p:nvPr/>
+        </p:nvSpPr>
+        <p:spPr>
+          <a:xfrm>
+            <a:off x="1417320" y="3886200"/>
+            <a:ext cx="2057400" cy="777240"/>
+          </a:xfrm>
+          <a:prstGeom prst="roundRect">
+            <a:avLst/>
+          </a:prstGeom>
+          <a:solidFill>
+            <a:srgbClr val="E76F51"/>
+          </a:solidFill>
+          <a:ln>
+            <a:noFill/>
+          </a:ln>
+        </p:spPr>
+        <p:style>
+          <a:lnRef idx="1">
+            <a:schemeClr val="accent1"/>
+          </a:lnRef>
+          <a:fillRef idx="3">
+            <a:schemeClr val="accent1"/>
+          </a:fillRef>
+          <a:effectRef idx="2">
+            <a:schemeClr val="accent1"/>
+          </a:effectRef>
+          <a:fontRef idx="minor">
+            <a:schemeClr val="lt1"/>
+          </a:fontRef>
+        </p:style>
+        <p:txBody>
+          <a:bodyPr rtlCol="0" anchor="ctr"/>
+          <a:lstStyle/>
+          <a:p>
+            <a:pPr algn="ctr"/>
+          </a:p>
+        </p:txBody>
+      </p:sp>
+      <p:sp>
+        <p:nvSpPr>
+          <p:cNvPr id="12" name="TextBox 11"/>
+          <p:cNvSpPr txBox="1"/>
+          <p:nvPr/>
+        </p:nvSpPr>
+        <p:spPr>
+          <a:xfrm>
+            <a:off x="1417320" y="4142232"/>
+            <a:ext cx="2057400" cy="201168"/>
+          </a:xfrm>
+          <a:prstGeom prst="rect">
+            <a:avLst/>
+          </a:prstGeom>
+          <a:noFill/>
+        </p:spPr>
+        <p:txBody>
+          <a:bodyPr wrap="square">
+            <a:spAutoFit/>
+          </a:bodyPr>
+          <a:lstStyle/>
+          <a:p>
+            <a:pPr algn="ctr"/>
+            <a:r>
+              <a:rPr sz="1300" b="1" i="0">
+                <a:solidFill>
+                  <a:srgbClr val="FFFFFF"/>
+                </a:solidFill>
+                <a:latin typeface="Aptos"/>
+              </a:rPr>
+              <a:t>Temperature</a:t>
+            </a:r>
+          </a:p>
+        </p:txBody>
+      </p:sp>
+      <p:sp>
+        <p:nvSpPr>
+          <p:cNvPr id="13" name="Rounded Rectangle 12"/>
+          <p:cNvSpPr/>
+          <p:nvPr/>
+        </p:nvSpPr>
+        <p:spPr>
+          <a:xfrm>
+            <a:off x="3977639" y="3886200"/>
+            <a:ext cx="2057400" cy="777240"/>
+          </a:xfrm>
+          <a:prstGeom prst="roundRect">
+            <a:avLst/>
+          </a:prstGeom>
+          <a:solidFill>
+            <a:srgbClr val="457B9D"/>
+          </a:solidFill>
+          <a:ln>
+            <a:noFill/>
+          </a:ln>
+        </p:spPr>
+        <p:style>
+          <a:lnRef idx="1">
+            <a:schemeClr val="accent1"/>
+          </a:lnRef>
+          <a:fillRef idx="3">
+            <a:schemeClr val="accent1"/>
+          </a:fillRef>
+          <a:effectRef idx="2">
+            <a:schemeClr val="accent1"/>
+          </a:effectRef>
+          <a:fontRef idx="minor">
+            <a:schemeClr val="lt1"/>
+          </a:fontRef>
+        </p:style>
+        <p:txBody>
+          <a:bodyPr rtlCol="0" anchor="ctr"/>
+          <a:lstStyle/>
+          <a:p>
+            <a:pPr algn="ctr"/>
+          </a:p>
+        </p:txBody>
+      </p:sp>
+      <p:sp>
+        <p:nvSpPr>
+          <p:cNvPr id="14" name="TextBox 13"/>
+          <p:cNvSpPr txBox="1"/>
+          <p:nvPr/>
+        </p:nvSpPr>
+        <p:spPr>
+          <a:xfrm>
+            <a:off x="3977639" y="4142232"/>
+            <a:ext cx="2057400" cy="201168"/>
+          </a:xfrm>
+          <a:prstGeom prst="rect">
+            <a:avLst/>
+          </a:prstGeom>
+          <a:noFill/>
+        </p:spPr>
+        <p:txBody>
+          <a:bodyPr wrap="square">
+            <a:spAutoFit/>
+          </a:bodyPr>
+          <a:lstStyle/>
+          <a:p>
+            <a:pPr algn="ctr"/>
+            <a:r>
+              <a:rPr sz="1300" b="1" i="0">
+                <a:solidFill>
+                  <a:srgbClr val="FFFFFF"/>
+                </a:solidFill>
+                <a:latin typeface="Aptos"/>
+              </a:rPr>
+              <a:t>Humidity</a:t>
+            </a:r>
+          </a:p>
+        </p:txBody>
+      </p:sp>
+      <p:sp>
+        <p:nvSpPr>
+          <p:cNvPr id="15" name="Rounded Rectangle 14"/>
+          <p:cNvSpPr/>
+          <p:nvPr/>
+        </p:nvSpPr>
+        <p:spPr>
+          <a:xfrm>
+            <a:off x="6537959" y="3886200"/>
+            <a:ext cx="2057400" cy="777240"/>
+          </a:xfrm>
+          <a:prstGeom prst="roundRect">
+            <a:avLst/>
+          </a:prstGeom>
+          <a:solidFill>
+            <a:srgbClr val="2A9D8F"/>
+          </a:solidFill>
+          <a:ln>
+            <a:noFill/>
+          </a:ln>
+        </p:spPr>
+        <p:style>
+          <a:lnRef idx="1">
+            <a:schemeClr val="accent1"/>
+          </a:lnRef>
+          <a:fillRef idx="3">
+            <a:schemeClr val="accent1"/>
+          </a:fillRef>
+          <a:effectRef idx="2">
+            <a:schemeClr val="accent1"/>
+          </a:effectRef>
+          <a:fontRef idx="minor">
+            <a:schemeClr val="lt1"/>
+          </a:fontRef>
+        </p:style>
+        <p:txBody>
+          <a:bodyPr rtlCol="0" anchor="ctr"/>
+          <a:lstStyle/>
+          <a:p>
+            <a:pPr algn="ctr"/>
+          </a:p>
+        </p:txBody>
+      </p:sp>
+      <p:sp>
+        <p:nvSpPr>
+          <p:cNvPr id="16" name="TextBox 15"/>
+          <p:cNvSpPr txBox="1"/>
+          <p:nvPr/>
+        </p:nvSpPr>
+        <p:spPr>
+          <a:xfrm>
+            <a:off x="6537959" y="4142232"/>
+            <a:ext cx="2057400" cy="201168"/>
+          </a:xfrm>
+          <a:prstGeom prst="rect">
+            <a:avLst/>
+          </a:prstGeom>
+          <a:noFill/>
+        </p:spPr>
+        <p:txBody>
+          <a:bodyPr wrap="square">
+            <a:spAutoFit/>
+          </a:bodyPr>
+          <a:lstStyle/>
+          <a:p>
+            <a:pPr algn="ctr"/>
+            <a:r>
+              <a:rPr sz="1300" b="1" i="0">
+                <a:solidFill>
+                  <a:srgbClr val="FFFFFF"/>
+                </a:solidFill>
+                <a:latin typeface="Aptos"/>
+              </a:rPr>
+              <a:t>Air motion</a:t>
+            </a:r>
+          </a:p>
+        </p:txBody>
+      </p:sp>
+      <p:sp>
+        <p:nvSpPr>
+          <p:cNvPr id="17" name="Rounded Rectangle 16"/>
+          <p:cNvSpPr/>
+          <p:nvPr/>
+        </p:nvSpPr>
+        <p:spPr>
+          <a:xfrm>
+            <a:off x="9098280" y="3886200"/>
+            <a:ext cx="2057400" cy="777240"/>
+          </a:xfrm>
+          <a:prstGeom prst="roundRect">
+            <a:avLst/>
+          </a:prstGeom>
+          <a:solidFill>
+            <a:srgbClr val="4CAF50"/>
+          </a:solidFill>
+          <a:ln>
+            <a:noFill/>
+          </a:ln>
+        </p:spPr>
+        <p:style>
+          <a:lnRef idx="1">
+            <a:schemeClr val="accent1"/>
+          </a:lnRef>
+          <a:fillRef idx="3">
+            <a:schemeClr val="accent1"/>
+          </a:fillRef>
+          <a:effectRef idx="2">
+            <a:schemeClr val="accent1"/>
+          </a:effectRef>
+          <a:fontRef idx="minor">
+            <a:schemeClr val="lt1"/>
+          </a:fontRef>
+        </p:style>
+        <p:txBody>
+          <a:bodyPr rtlCol="0" anchor="ctr"/>
+          <a:lstStyle/>
+          <a:p>
+            <a:pPr algn="ctr"/>
+          </a:p>
+        </p:txBody>
+      </p:sp>
+      <p:sp>
+        <p:nvSpPr>
+          <p:cNvPr id="18" name="TextBox 17"/>
+          <p:cNvSpPr txBox="1"/>
+          <p:nvPr/>
+        </p:nvSpPr>
+        <p:spPr>
+          <a:xfrm>
+            <a:off x="9098280" y="4142232"/>
+            <a:ext cx="2057400" cy="201168"/>
+          </a:xfrm>
+          <a:prstGeom prst="rect">
+            <a:avLst/>
+          </a:prstGeom>
+          <a:noFill/>
+        </p:spPr>
+        <p:txBody>
+          <a:bodyPr wrap="square">
+            <a:spAutoFit/>
+          </a:bodyPr>
+          <a:lstStyle/>
+          <a:p>
+            <a:pPr algn="ctr"/>
+            <a:r>
+              <a:rPr sz="1300" b="1" i="0">
+                <a:solidFill>
+                  <a:srgbClr val="FFFFFF"/>
+                </a:solidFill>
+                <a:latin typeface="Aptos"/>
+              </a:rPr>
+              <a:t>Cleanliness</a:t>
+            </a:r>
+          </a:p>
+        </p:txBody>
+      </p:sp>
+      <p:sp>
+        <p:nvSpPr>
+          <p:cNvPr id="19" name="TextBox 18"/>
+          <p:cNvSpPr txBox="1"/>
+          <p:nvPr/>
+        </p:nvSpPr>
+        <p:spPr>
+          <a:xfrm>
+            <a:off x="1920240" y="5120640"/>
+            <a:ext cx="8321040" cy="320040"/>
+          </a:xfrm>
+          <a:prstGeom prst="rect">
+            <a:avLst/>
+          </a:prstGeom>
+          <a:noFill/>
+        </p:spPr>
+        <p:txBody>
+          <a:bodyPr wrap="square">
+            <a:spAutoFit/>
+          </a:bodyPr>
+          <a:lstStyle/>
+          <a:p>
+            <a:pPr algn="ctr"/>
+            <a:r>
+              <a:rPr sz="1600" b="1" i="0">
+                <a:solidFill>
+                  <a:srgbClr val="5A6973"/>
+                </a:solidFill>
+                <a:latin typeface="Aptos"/>
+              </a:rPr>
+              <a:t>Expected answer: humidity and/or air movement.</a:t>
             </a:r>
           </a:p>
         </p:txBody>
@@ -5144,7 +7621,7 @@
           <a:lstStyle/>
           <a:p>
             <a:r>
-              <a:rPr sz="3000" b="1">
+              <a:rPr sz="3000" b="1" i="0">
                 <a:solidFill>
                   <a:srgbClr val="11374B"/>
                 </a:solidFill>
@@ -5179,7 +7656,7 @@
           <a:p>
             <a:pPr algn="r"/>
             <a:r>
-              <a:rPr sz="1100" b="0">
+              <a:rPr sz="1100" b="0" i="0">
                 <a:solidFill>
                   <a:srgbClr val="78828C"/>
                 </a:solidFill>
@@ -5192,14 +7669,83 @@
       </p:sp>
       <p:sp>
         <p:nvSpPr>
-          <p:cNvPr id="5" name="Rectangle 4"/>
+          <p:cNvPr id="5" name="TextBox 4"/>
+          <p:cNvSpPr txBox="1"/>
+          <p:nvPr/>
+        </p:nvSpPr>
+        <p:spPr>
+          <a:xfrm>
+            <a:off x="365760" y="6446520"/>
+            <a:ext cx="8229600" cy="228600"/>
+          </a:xfrm>
+          <a:prstGeom prst="rect">
+            <a:avLst/>
+          </a:prstGeom>
+          <a:noFill/>
+        </p:spPr>
+        <p:txBody>
+          <a:bodyPr wrap="square">
+            <a:spAutoFit/>
+          </a:bodyPr>
+          <a:lstStyle/>
+          <a:p>
+            <a:r>
+              <a:rPr sz="900" b="0" i="0">
+                <a:solidFill>
+                  <a:srgbClr val="78828C"/>
+                </a:solidFill>
+                <a:latin typeface="Aptos"/>
+              </a:rPr>
+              <a:t>Air Conditioning · Chapter 1 · Topic 1.1</a:t>
+            </a:r>
+          </a:p>
+        </p:txBody>
+      </p:sp>
+      <p:sp>
+        <p:nvSpPr>
+          <p:cNvPr id="6" name="TextBox 5"/>
+          <p:cNvSpPr txBox="1"/>
+          <p:nvPr/>
+        </p:nvSpPr>
+        <p:spPr>
+          <a:xfrm>
+            <a:off x="11292840" y="6446520"/>
+            <a:ext cx="502920" cy="228600"/>
+          </a:xfrm>
+          <a:prstGeom prst="rect">
+            <a:avLst/>
+          </a:prstGeom>
+          <a:noFill/>
+        </p:spPr>
+        <p:txBody>
+          <a:bodyPr wrap="square">
+            <a:spAutoFit/>
+          </a:bodyPr>
+          <a:lstStyle/>
+          <a:p>
+            <a:pPr algn="r"/>
+            <a:r>
+              <a:rPr sz="900" b="0" i="0">
+                <a:solidFill>
+                  <a:srgbClr val="78828C"/>
+                </a:solidFill>
+                <a:latin typeface="Aptos"/>
+              </a:rPr>
+              <a:t>15</a:t>
+            </a:r>
+          </a:p>
+        </p:txBody>
+      </p:sp>
+      <p:sp>
+        <p:nvSpPr>
+          <p:cNvPr id="7" name="Rectangle 6"/>
           <p:cNvSpPr/>
           <p:nvPr/>
         </p:nvSpPr>
         <p:spPr>
           <a:xfrm>
-            <a:off x="685800" y="1737360"/>
-            <a:ext cx="10835640" cy="4343400"/>
+            <a:off x="731520" y="1691640"/>
+            <a:ext cx="10744200" cy="4343400"/>
           </a:xfrm>
           <a:prstGeom prst="rect">
             <a:avLst/>
@@ -5207,7 +7753,7 @@
           <a:solidFill>
             <a:srgbClr val="FFFFFF"/>
           </a:solidFill>
-          <a:ln>
+          <a:ln w="12700">
             <a:solidFill>
               <a:srgbClr val="DCE2E8"/>
             </a:solidFill>
@@ -5237,104 +7783,579 @@
       </p:sp>
       <p:sp>
         <p:nvSpPr>
-          <p:cNvPr id="6" name="TextBox 5"/>
-          <p:cNvSpPr txBox="1"/>
-          <p:nvPr/>
-        </p:nvSpPr>
-        <p:spPr>
-          <a:xfrm>
-            <a:off x="1005840" y="2057400"/>
-            <a:ext cx="10149840" cy="3749039"/>
-          </a:xfrm>
-          <a:prstGeom prst="rect">
-            <a:avLst/>
-          </a:prstGeom>
-          <a:noFill/>
-        </p:spPr>
-        <p:txBody>
-          <a:bodyPr wrap="square">
-            <a:spAutoFit/>
-          </a:bodyPr>
-          <a:lstStyle/>
-          <a:p>
-            <a:pPr>
-              <a:spcAft>
-                <a:spcPts val="1200"/>
-              </a:spcAft>
-              <a:defRPr sz="2200">
+          <p:cNvPr id="8" name="Rounded Rectangle 7"/>
+          <p:cNvSpPr/>
+          <p:nvPr/>
+        </p:nvSpPr>
+        <p:spPr>
+          <a:xfrm>
+            <a:off x="1143000" y="2240280"/>
+            <a:ext cx="2971800" cy="2560320"/>
+          </a:xfrm>
+          <a:prstGeom prst="roundRect">
+            <a:avLst/>
+          </a:prstGeom>
+          <a:solidFill>
+            <a:srgbClr val="F5F9FA"/>
+          </a:solidFill>
+          <a:ln w="12700">
+            <a:solidFill>
+              <a:srgbClr val="DCE2E8"/>
+            </a:solidFill>
+          </a:ln>
+        </p:spPr>
+        <p:style>
+          <a:lnRef idx="1">
+            <a:schemeClr val="accent1"/>
+          </a:lnRef>
+          <a:fillRef idx="3">
+            <a:schemeClr val="accent1"/>
+          </a:fillRef>
+          <a:effectRef idx="2">
+            <a:schemeClr val="accent1"/>
+          </a:effectRef>
+          <a:fontRef idx="minor">
+            <a:schemeClr val="lt1"/>
+          </a:fontRef>
+        </p:style>
+        <p:txBody>
+          <a:bodyPr rtlCol="0" anchor="ctr"/>
+          <a:lstStyle/>
+          <a:p>
+            <a:pPr algn="ctr"/>
+          </a:p>
+        </p:txBody>
+      </p:sp>
+      <p:sp>
+        <p:nvSpPr>
+          <p:cNvPr id="9" name="Oval 8"/>
+          <p:cNvSpPr/>
+          <p:nvPr/>
+        </p:nvSpPr>
+        <p:spPr>
+          <a:xfrm>
+            <a:off x="2212848" y="2514600"/>
+            <a:ext cx="822960" cy="822960"/>
+          </a:xfrm>
+          <a:prstGeom prst="ellipse">
+            <a:avLst/>
+          </a:prstGeom>
+          <a:solidFill>
+            <a:srgbClr val="2A9D8F"/>
+          </a:solidFill>
+          <a:ln>
+            <a:noFill/>
+          </a:ln>
+        </p:spPr>
+        <p:style>
+          <a:lnRef idx="1">
+            <a:schemeClr val="accent1"/>
+          </a:lnRef>
+          <a:fillRef idx="3">
+            <a:schemeClr val="accent1"/>
+          </a:fillRef>
+          <a:effectRef idx="2">
+            <a:schemeClr val="accent1"/>
+          </a:effectRef>
+          <a:fontRef idx="minor">
+            <a:schemeClr val="lt1"/>
+          </a:fontRef>
+        </p:style>
+        <p:txBody>
+          <a:bodyPr rtlCol="0" anchor="ctr"/>
+          <a:lstStyle/>
+          <a:p>
+            <a:pPr algn="ctr"/>
+          </a:p>
+        </p:txBody>
+      </p:sp>
+      <p:sp>
+        <p:nvSpPr>
+          <p:cNvPr id="10" name="TextBox 9"/>
+          <p:cNvSpPr txBox="1"/>
+          <p:nvPr/>
+        </p:nvSpPr>
+        <p:spPr>
+          <a:xfrm>
+            <a:off x="2212848" y="2743200"/>
+            <a:ext cx="822960" cy="228600"/>
+          </a:xfrm>
+          <a:prstGeom prst="rect">
+            <a:avLst/>
+          </a:prstGeom>
+          <a:noFill/>
+        </p:spPr>
+        <p:txBody>
+          <a:bodyPr wrap="square">
+            <a:spAutoFit/>
+          </a:bodyPr>
+          <a:lstStyle/>
+          <a:p>
+            <a:pPr algn="ctr"/>
+            <a:r>
+              <a:rPr sz="1800" b="1" i="0">
+                <a:solidFill>
+                  <a:srgbClr val="FFFFFF"/>
+                </a:solidFill>
+                <a:latin typeface="Aptos"/>
+              </a:rPr>
+              <a:t>1</a:t>
+            </a:r>
+          </a:p>
+        </p:txBody>
+      </p:sp>
+      <p:sp>
+        <p:nvSpPr>
+          <p:cNvPr id="11" name="TextBox 10"/>
+          <p:cNvSpPr txBox="1"/>
+          <p:nvPr/>
+        </p:nvSpPr>
+        <p:spPr>
+          <a:xfrm>
+            <a:off x="1371600" y="3566160"/>
+            <a:ext cx="2514600" cy="329184"/>
+          </a:xfrm>
+          <a:prstGeom prst="rect">
+            <a:avLst/>
+          </a:prstGeom>
+          <a:noFill/>
+        </p:spPr>
+        <p:txBody>
+          <a:bodyPr wrap="square">
+            <a:spAutoFit/>
+          </a:bodyPr>
+          <a:lstStyle/>
+          <a:p>
+            <a:pPr algn="ctr"/>
+            <a:r>
+              <a:rPr sz="1500" b="1" i="0">
                 <a:solidFill>
                   <a:srgbClr val="232D37"/>
                 </a:solidFill>
                 <a:latin typeface="Aptos"/>
-              </a:defRPr>
-            </a:pPr>
-            <a:r>
-              <a:t>AC = simultaneous control of temperature + humidity + circulation + cleanliness</a:t>
-            </a:r>
-          </a:p>
-          <a:p>
-            <a:pPr>
-              <a:spcAft>
-                <a:spcPts val="1200"/>
-              </a:spcAft>
-              <a:defRPr sz="2200">
+              </a:rPr>
+              <a:t>AC = simultaneous control</a:t>
+            </a:r>
+          </a:p>
+        </p:txBody>
+      </p:sp>
+      <p:sp>
+        <p:nvSpPr>
+          <p:cNvPr id="12" name="TextBox 11"/>
+          <p:cNvSpPr txBox="1"/>
+          <p:nvPr/>
+        </p:nvSpPr>
+        <p:spPr>
+          <a:xfrm>
+            <a:off x="1463040" y="3977639"/>
+            <a:ext cx="2331720" cy="502920"/>
+          </a:xfrm>
+          <a:prstGeom prst="rect">
+            <a:avLst/>
+          </a:prstGeom>
+          <a:noFill/>
+        </p:spPr>
+        <p:txBody>
+          <a:bodyPr wrap="square">
+            <a:spAutoFit/>
+          </a:bodyPr>
+          <a:lstStyle/>
+          <a:p>
+            <a:pPr algn="ctr"/>
+            <a:r>
+              <a:rPr sz="1050" b="0" i="0">
+                <a:solidFill>
+                  <a:srgbClr val="5A6973"/>
+                </a:solidFill>
+                <a:latin typeface="Aptos"/>
+              </a:rPr>
+              <a:t>Temperature + humidity + circulation + cleanliness</a:t>
+            </a:r>
+          </a:p>
+        </p:txBody>
+      </p:sp>
+      <p:sp>
+        <p:nvSpPr>
+          <p:cNvPr id="13" name="Rounded Rectangle 12"/>
+          <p:cNvSpPr/>
+          <p:nvPr/>
+        </p:nvSpPr>
+        <p:spPr>
+          <a:xfrm>
+            <a:off x="4572000" y="2240280"/>
+            <a:ext cx="2971800" cy="2560320"/>
+          </a:xfrm>
+          <a:prstGeom prst="roundRect">
+            <a:avLst/>
+          </a:prstGeom>
+          <a:solidFill>
+            <a:srgbClr val="F5F9FA"/>
+          </a:solidFill>
+          <a:ln w="12700">
+            <a:solidFill>
+              <a:srgbClr val="DCE2E8"/>
+            </a:solidFill>
+          </a:ln>
+        </p:spPr>
+        <p:style>
+          <a:lnRef idx="1">
+            <a:schemeClr val="accent1"/>
+          </a:lnRef>
+          <a:fillRef idx="3">
+            <a:schemeClr val="accent1"/>
+          </a:fillRef>
+          <a:effectRef idx="2">
+            <a:schemeClr val="accent1"/>
+          </a:effectRef>
+          <a:fontRef idx="minor">
+            <a:schemeClr val="lt1"/>
+          </a:fontRef>
+        </p:style>
+        <p:txBody>
+          <a:bodyPr rtlCol="0" anchor="ctr"/>
+          <a:lstStyle/>
+          <a:p>
+            <a:pPr algn="ctr"/>
+          </a:p>
+        </p:txBody>
+      </p:sp>
+      <p:sp>
+        <p:nvSpPr>
+          <p:cNvPr id="14" name="Oval 13"/>
+          <p:cNvSpPr/>
+          <p:nvPr/>
+        </p:nvSpPr>
+        <p:spPr>
+          <a:xfrm>
+            <a:off x="5641848" y="2514600"/>
+            <a:ext cx="822960" cy="822960"/>
+          </a:xfrm>
+          <a:prstGeom prst="ellipse">
+            <a:avLst/>
+          </a:prstGeom>
+          <a:solidFill>
+            <a:srgbClr val="457B9D"/>
+          </a:solidFill>
+          <a:ln>
+            <a:noFill/>
+          </a:ln>
+        </p:spPr>
+        <p:style>
+          <a:lnRef idx="1">
+            <a:schemeClr val="accent1"/>
+          </a:lnRef>
+          <a:fillRef idx="3">
+            <a:schemeClr val="accent1"/>
+          </a:fillRef>
+          <a:effectRef idx="2">
+            <a:schemeClr val="accent1"/>
+          </a:effectRef>
+          <a:fontRef idx="minor">
+            <a:schemeClr val="lt1"/>
+          </a:fontRef>
+        </p:style>
+        <p:txBody>
+          <a:bodyPr rtlCol="0" anchor="ctr"/>
+          <a:lstStyle/>
+          <a:p>
+            <a:pPr algn="ctr"/>
+          </a:p>
+        </p:txBody>
+      </p:sp>
+      <p:sp>
+        <p:nvSpPr>
+          <p:cNvPr id="15" name="TextBox 14"/>
+          <p:cNvSpPr txBox="1"/>
+          <p:nvPr/>
+        </p:nvSpPr>
+        <p:spPr>
+          <a:xfrm>
+            <a:off x="5641848" y="2743200"/>
+            <a:ext cx="822960" cy="228600"/>
+          </a:xfrm>
+          <a:prstGeom prst="rect">
+            <a:avLst/>
+          </a:prstGeom>
+          <a:noFill/>
+        </p:spPr>
+        <p:txBody>
+          <a:bodyPr wrap="square">
+            <a:spAutoFit/>
+          </a:bodyPr>
+          <a:lstStyle/>
+          <a:p>
+            <a:pPr algn="ctr"/>
+            <a:r>
+              <a:rPr sz="1800" b="1" i="0">
+                <a:solidFill>
+                  <a:srgbClr val="FFFFFF"/>
+                </a:solidFill>
+                <a:latin typeface="Aptos"/>
+              </a:rPr>
+              <a:t>2</a:t>
+            </a:r>
+          </a:p>
+        </p:txBody>
+      </p:sp>
+      <p:sp>
+        <p:nvSpPr>
+          <p:cNvPr id="16" name="TextBox 15"/>
+          <p:cNvSpPr txBox="1"/>
+          <p:nvPr/>
+        </p:nvSpPr>
+        <p:spPr>
+          <a:xfrm>
+            <a:off x="4800600" y="3566160"/>
+            <a:ext cx="2514600" cy="329184"/>
+          </a:xfrm>
+          <a:prstGeom prst="rect">
+            <a:avLst/>
+          </a:prstGeom>
+          <a:noFill/>
+        </p:spPr>
+        <p:txBody>
+          <a:bodyPr wrap="square">
+            <a:spAutoFit/>
+          </a:bodyPr>
+          <a:lstStyle/>
+          <a:p>
+            <a:pPr algn="ctr"/>
+            <a:r>
+              <a:rPr sz="1500" b="1" i="0">
                 <a:solidFill>
                   <a:srgbClr val="232D37"/>
                 </a:solidFill>
                 <a:latin typeface="Aptos"/>
-              </a:defRPr>
-            </a:pPr>
-            <a:r>
-              <a:t>Comfort AC is for humans; process AC is for materials or production.</a:t>
-            </a:r>
-          </a:p>
-          <a:p>
-            <a:pPr>
-              <a:spcAft>
-                <a:spcPts val="1200"/>
-              </a:spcAft>
-              <a:defRPr sz="2200">
+              </a:rPr>
+              <a:t>Purpose defines target</a:t>
+            </a:r>
+          </a:p>
+        </p:txBody>
+      </p:sp>
+      <p:sp>
+        <p:nvSpPr>
+          <p:cNvPr id="17" name="TextBox 16"/>
+          <p:cNvSpPr txBox="1"/>
+          <p:nvPr/>
+        </p:nvSpPr>
+        <p:spPr>
+          <a:xfrm>
+            <a:off x="4892040" y="3977639"/>
+            <a:ext cx="2331720" cy="502920"/>
+          </a:xfrm>
+          <a:prstGeom prst="rect">
+            <a:avLst/>
+          </a:prstGeom>
+          <a:noFill/>
+        </p:spPr>
+        <p:txBody>
+          <a:bodyPr wrap="square">
+            <a:spAutoFit/>
+          </a:bodyPr>
+          <a:lstStyle/>
+          <a:p>
+            <a:pPr algn="ctr"/>
+            <a:r>
+              <a:rPr sz="1050" b="0" i="0">
+                <a:solidFill>
+                  <a:srgbClr val="5A6973"/>
+                </a:solidFill>
+                <a:latin typeface="Aptos"/>
+              </a:rPr>
+              <a:t>Comfort for people or process conditions for materials</a:t>
+            </a:r>
+          </a:p>
+        </p:txBody>
+      </p:sp>
+      <p:sp>
+        <p:nvSpPr>
+          <p:cNvPr id="18" name="Rounded Rectangle 17"/>
+          <p:cNvSpPr/>
+          <p:nvPr/>
+        </p:nvSpPr>
+        <p:spPr>
+          <a:xfrm>
+            <a:off x="8001000" y="2240280"/>
+            <a:ext cx="2971800" cy="2560320"/>
+          </a:xfrm>
+          <a:prstGeom prst="roundRect">
+            <a:avLst/>
+          </a:prstGeom>
+          <a:solidFill>
+            <a:srgbClr val="F5F9FA"/>
+          </a:solidFill>
+          <a:ln w="12700">
+            <a:solidFill>
+              <a:srgbClr val="DCE2E8"/>
+            </a:solidFill>
+          </a:ln>
+        </p:spPr>
+        <p:style>
+          <a:lnRef idx="1">
+            <a:schemeClr val="accent1"/>
+          </a:lnRef>
+          <a:fillRef idx="3">
+            <a:schemeClr val="accent1"/>
+          </a:fillRef>
+          <a:effectRef idx="2">
+            <a:schemeClr val="accent1"/>
+          </a:effectRef>
+          <a:fontRef idx="minor">
+            <a:schemeClr val="lt1"/>
+          </a:fontRef>
+        </p:style>
+        <p:txBody>
+          <a:bodyPr rtlCol="0" anchor="ctr"/>
+          <a:lstStyle/>
+          <a:p>
+            <a:pPr algn="ctr"/>
+          </a:p>
+        </p:txBody>
+      </p:sp>
+      <p:sp>
+        <p:nvSpPr>
+          <p:cNvPr id="19" name="Oval 18"/>
+          <p:cNvSpPr/>
+          <p:nvPr/>
+        </p:nvSpPr>
+        <p:spPr>
+          <a:xfrm>
+            <a:off x="9070848" y="2514600"/>
+            <a:ext cx="822960" cy="822960"/>
+          </a:xfrm>
+          <a:prstGeom prst="ellipse">
+            <a:avLst/>
+          </a:prstGeom>
+          <a:solidFill>
+            <a:srgbClr val="E76F51"/>
+          </a:solidFill>
+          <a:ln>
+            <a:noFill/>
+          </a:ln>
+        </p:spPr>
+        <p:style>
+          <a:lnRef idx="1">
+            <a:schemeClr val="accent1"/>
+          </a:lnRef>
+          <a:fillRef idx="3">
+            <a:schemeClr val="accent1"/>
+          </a:fillRef>
+          <a:effectRef idx="2">
+            <a:schemeClr val="accent1"/>
+          </a:effectRef>
+          <a:fontRef idx="minor">
+            <a:schemeClr val="lt1"/>
+          </a:fontRef>
+        </p:style>
+        <p:txBody>
+          <a:bodyPr rtlCol="0" anchor="ctr"/>
+          <a:lstStyle/>
+          <a:p>
+            <a:pPr algn="ctr"/>
+          </a:p>
+        </p:txBody>
+      </p:sp>
+      <p:sp>
+        <p:nvSpPr>
+          <p:cNvPr id="20" name="TextBox 19"/>
+          <p:cNvSpPr txBox="1"/>
+          <p:nvPr/>
+        </p:nvSpPr>
+        <p:spPr>
+          <a:xfrm>
+            <a:off x="9070848" y="2743200"/>
+            <a:ext cx="822960" cy="228600"/>
+          </a:xfrm>
+          <a:prstGeom prst="rect">
+            <a:avLst/>
+          </a:prstGeom>
+          <a:noFill/>
+        </p:spPr>
+        <p:txBody>
+          <a:bodyPr wrap="square">
+            <a:spAutoFit/>
+          </a:bodyPr>
+          <a:lstStyle/>
+          <a:p>
+            <a:pPr algn="ctr"/>
+            <a:r>
+              <a:rPr sz="1800" b="1" i="0">
+                <a:solidFill>
+                  <a:srgbClr val="FFFFFF"/>
+                </a:solidFill>
+                <a:latin typeface="Aptos"/>
+              </a:rPr>
+              <a:t>3</a:t>
+            </a:r>
+          </a:p>
+        </p:txBody>
+      </p:sp>
+      <p:sp>
+        <p:nvSpPr>
+          <p:cNvPr id="21" name="TextBox 20"/>
+          <p:cNvSpPr txBox="1"/>
+          <p:nvPr/>
+        </p:nvSpPr>
+        <p:spPr>
+          <a:xfrm>
+            <a:off x="8229600" y="3566160"/>
+            <a:ext cx="2514600" cy="329184"/>
+          </a:xfrm>
+          <a:prstGeom prst="rect">
+            <a:avLst/>
+          </a:prstGeom>
+          <a:noFill/>
+        </p:spPr>
+        <p:txBody>
+          <a:bodyPr wrap="square">
+            <a:spAutoFit/>
+          </a:bodyPr>
+          <a:lstStyle/>
+          <a:p>
+            <a:pPr algn="ctr"/>
+            <a:r>
+              <a:rPr sz="1500" b="1" i="0">
                 <a:solidFill>
                   <a:srgbClr val="232D37"/>
                 </a:solidFill>
                 <a:latin typeface="Aptos"/>
-              </a:defRPr>
-            </a:pPr>
-            <a:r>
-              <a:t>Building survey provides inputs for load calculation and system selection.</a:t>
-            </a:r>
-          </a:p>
-        </p:txBody>
-      </p:sp>
-      <p:sp>
-        <p:nvSpPr>
-          <p:cNvPr id="7" name="TextBox 6"/>
-          <p:cNvSpPr txBox="1"/>
-          <p:nvPr/>
-        </p:nvSpPr>
-        <p:spPr>
-          <a:xfrm>
-            <a:off x="365760" y="6446520"/>
-            <a:ext cx="11430000" cy="228600"/>
-          </a:xfrm>
-          <a:prstGeom prst="rect">
-            <a:avLst/>
-          </a:prstGeom>
-          <a:noFill/>
-        </p:spPr>
-        <p:txBody>
-          <a:bodyPr wrap="none">
-            <a:spAutoFit/>
-          </a:bodyPr>
-          <a:lstStyle/>
-          <a:p>
-            <a:r>
-              <a:rPr sz="900">
-                <a:solidFill>
-                  <a:srgbClr val="78828C"/>
-                </a:solidFill>
               </a:rPr>
-              <a:t>Air Conditioning · Chapter 1 · Topic 1.1</a:t>
+              <a:t>Survey before design</a:t>
+            </a:r>
+          </a:p>
+        </p:txBody>
+      </p:sp>
+      <p:sp>
+        <p:nvSpPr>
+          <p:cNvPr id="22" name="TextBox 21"/>
+          <p:cNvSpPr txBox="1"/>
+          <p:nvPr/>
+        </p:nvSpPr>
+        <p:spPr>
+          <a:xfrm>
+            <a:off x="8321040" y="3977639"/>
+            <a:ext cx="2331720" cy="502920"/>
+          </a:xfrm>
+          <a:prstGeom prst="rect">
+            <a:avLst/>
+          </a:prstGeom>
+          <a:noFill/>
+        </p:spPr>
+        <p:txBody>
+          <a:bodyPr wrap="square">
+            <a:spAutoFit/>
+          </a:bodyPr>
+          <a:lstStyle/>
+          <a:p>
+            <a:pPr algn="ctr"/>
+            <a:r>
+              <a:rPr sz="1050" b="0" i="0">
+                <a:solidFill>
+                  <a:srgbClr val="5A6973"/>
+                </a:solidFill>
+                <a:latin typeface="Aptos"/>
+              </a:rPr>
+              <a:t>Survey data become load-calculation inputs</a:t>
             </a:r>
           </a:p>
         </p:txBody>
@@ -5431,7 +8452,7 @@
           <a:lstStyle/>
           <a:p>
             <a:r>
-              <a:rPr sz="3000" b="1">
+              <a:rPr sz="3000" b="1" i="0">
                 <a:solidFill>
                   <a:srgbClr val="11374B"/>
                 </a:solidFill>
@@ -5465,7 +8486,7 @@
           <a:lstStyle/>
           <a:p>
             <a:r>
-              <a:rPr sz="1400" b="0">
+              <a:rPr sz="1400" b="0" i="0">
                 <a:solidFill>
                   <a:srgbClr val="5A6973"/>
                 </a:solidFill>
@@ -5500,7 +8521,7 @@
           <a:p>
             <a:pPr algn="r"/>
             <a:r>
-              <a:rPr sz="1100" b="0">
+              <a:rPr sz="1100" b="0" i="0">
                 <a:solidFill>
                   <a:srgbClr val="78828C"/>
                 </a:solidFill>
@@ -5513,22 +8534,91 @@
       </p:sp>
       <p:sp>
         <p:nvSpPr>
-          <p:cNvPr id="6" name="Rectangle 5"/>
+          <p:cNvPr id="6" name="TextBox 5"/>
+          <p:cNvSpPr txBox="1"/>
+          <p:nvPr/>
+        </p:nvSpPr>
+        <p:spPr>
+          <a:xfrm>
+            <a:off x="365760" y="6446520"/>
+            <a:ext cx="8229600" cy="228600"/>
+          </a:xfrm>
+          <a:prstGeom prst="rect">
+            <a:avLst/>
+          </a:prstGeom>
+          <a:noFill/>
+        </p:spPr>
+        <p:txBody>
+          <a:bodyPr wrap="square">
+            <a:spAutoFit/>
+          </a:bodyPr>
+          <a:lstStyle/>
+          <a:p>
+            <a:r>
+              <a:rPr sz="900" b="0" i="0">
+                <a:solidFill>
+                  <a:srgbClr val="78828C"/>
+                </a:solidFill>
+                <a:latin typeface="Aptos"/>
+              </a:rPr>
+              <a:t>Air Conditioning · Chapter 1 · Topic 1.1</a:t>
+            </a:r>
+          </a:p>
+        </p:txBody>
+      </p:sp>
+      <p:sp>
+        <p:nvSpPr>
+          <p:cNvPr id="7" name="TextBox 6"/>
+          <p:cNvSpPr txBox="1"/>
+          <p:nvPr/>
+        </p:nvSpPr>
+        <p:spPr>
+          <a:xfrm>
+            <a:off x="11292840" y="6446520"/>
+            <a:ext cx="502920" cy="228600"/>
+          </a:xfrm>
+          <a:prstGeom prst="rect">
+            <a:avLst/>
+          </a:prstGeom>
+          <a:noFill/>
+        </p:spPr>
+        <p:txBody>
+          <a:bodyPr wrap="square">
+            <a:spAutoFit/>
+          </a:bodyPr>
+          <a:lstStyle/>
+          <a:p>
+            <a:pPr algn="r"/>
+            <a:r>
+              <a:rPr sz="900" b="0" i="0">
+                <a:solidFill>
+                  <a:srgbClr val="78828C"/>
+                </a:solidFill>
+                <a:latin typeface="Aptos"/>
+              </a:rPr>
+              <a:t>2</a:t>
+            </a:r>
+          </a:p>
+        </p:txBody>
+      </p:sp>
+      <p:sp>
+        <p:nvSpPr>
+          <p:cNvPr id="8" name="Rounded Rectangle 7"/>
           <p:cNvSpPr/>
           <p:nvPr/>
         </p:nvSpPr>
         <p:spPr>
           <a:xfrm>
-            <a:off x="685800" y="1737360"/>
-            <a:ext cx="10835640" cy="4343400"/>
-          </a:xfrm>
-          <a:prstGeom prst="rect">
+            <a:off x="731520" y="1691640"/>
+            <a:ext cx="5166360" cy="4343400"/>
+          </a:xfrm>
+          <a:prstGeom prst="roundRect">
             <a:avLst/>
           </a:prstGeom>
           <a:solidFill>
             <a:srgbClr val="FFFFFF"/>
           </a:solidFill>
-          <a:ln>
+          <a:ln w="12700">
             <a:solidFill>
               <a:srgbClr val="DCE2E8"/>
             </a:solidFill>
@@ -5558,88 +8648,542 @@
       </p:sp>
       <p:sp>
         <p:nvSpPr>
-          <p:cNvPr id="7" name="TextBox 6"/>
-          <p:cNvSpPr txBox="1"/>
-          <p:nvPr/>
-        </p:nvSpPr>
-        <p:spPr>
-          <a:xfrm>
-            <a:off x="1005840" y="2057400"/>
-            <a:ext cx="10149840" cy="3749039"/>
-          </a:xfrm>
-          <a:prstGeom prst="rect">
-            <a:avLst/>
-          </a:prstGeom>
-          <a:noFill/>
-        </p:spPr>
-        <p:txBody>
-          <a:bodyPr wrap="square">
-            <a:spAutoFit/>
-          </a:bodyPr>
-          <a:lstStyle/>
-          <a:p>
-            <a:pPr>
-              <a:spcAft>
-                <a:spcPts val="1200"/>
-              </a:spcAft>
-              <a:defRPr sz="2200">
+          <p:cNvPr id="9" name="Rounded Rectangle 8"/>
+          <p:cNvSpPr/>
+          <p:nvPr/>
+        </p:nvSpPr>
+        <p:spPr>
+          <a:xfrm>
+            <a:off x="6309360" y="1691640"/>
+            <a:ext cx="5166360" cy="4343400"/>
+          </a:xfrm>
+          <a:prstGeom prst="roundRect">
+            <a:avLst/>
+          </a:prstGeom>
+          <a:solidFill>
+            <a:srgbClr val="FFFFFF"/>
+          </a:solidFill>
+          <a:ln w="12700">
+            <a:solidFill>
+              <a:srgbClr val="DCE2E8"/>
+            </a:solidFill>
+          </a:ln>
+        </p:spPr>
+        <p:style>
+          <a:lnRef idx="1">
+            <a:schemeClr val="accent1"/>
+          </a:lnRef>
+          <a:fillRef idx="3">
+            <a:schemeClr val="accent1"/>
+          </a:fillRef>
+          <a:effectRef idx="2">
+            <a:schemeClr val="accent1"/>
+          </a:effectRef>
+          <a:fontRef idx="minor">
+            <a:schemeClr val="lt1"/>
+          </a:fontRef>
+        </p:style>
+        <p:txBody>
+          <a:bodyPr rtlCol="0" anchor="ctr"/>
+          <a:lstStyle/>
+          <a:p>
+            <a:pPr algn="ctr"/>
+          </a:p>
+        </p:txBody>
+      </p:sp>
+      <p:sp>
+        <p:nvSpPr>
+          <p:cNvPr id="10" name="TextBox 9"/>
+          <p:cNvSpPr txBox="1"/>
+          <p:nvPr/>
+        </p:nvSpPr>
+        <p:spPr>
+          <a:xfrm>
+            <a:off x="1051560" y="1938528"/>
+            <a:ext cx="4480560" cy="320040"/>
+          </a:xfrm>
+          <a:prstGeom prst="rect">
+            <a:avLst/>
+          </a:prstGeom>
+          <a:noFill/>
+        </p:spPr>
+        <p:txBody>
+          <a:bodyPr wrap="square">
+            <a:spAutoFit/>
+          </a:bodyPr>
+          <a:lstStyle/>
+          <a:p>
+            <a:pPr algn="ctr"/>
+            <a:r>
+              <a:rPr sz="2200" b="1" i="0">
+                <a:solidFill>
+                  <a:srgbClr val="457B9D"/>
+                </a:solidFill>
+                <a:latin typeface="Aptos"/>
+              </a:rPr>
+              <a:t>Cooling only</a:t>
+            </a:r>
+          </a:p>
+        </p:txBody>
+      </p:sp>
+      <p:sp>
+        <p:nvSpPr>
+          <p:cNvPr id="11" name="TextBox 10"/>
+          <p:cNvSpPr txBox="1"/>
+          <p:nvPr/>
+        </p:nvSpPr>
+        <p:spPr>
+          <a:xfrm>
+            <a:off x="6629400" y="1938528"/>
+            <a:ext cx="4480560" cy="320040"/>
+          </a:xfrm>
+          <a:prstGeom prst="rect">
+            <a:avLst/>
+          </a:prstGeom>
+          <a:noFill/>
+        </p:spPr>
+        <p:txBody>
+          <a:bodyPr wrap="square">
+            <a:spAutoFit/>
+          </a:bodyPr>
+          <a:lstStyle/>
+          <a:p>
+            <a:pPr algn="ctr"/>
+            <a:r>
+              <a:rPr sz="2200" b="1" i="0">
+                <a:solidFill>
+                  <a:srgbClr val="2A9D8F"/>
+                </a:solidFill>
+                <a:latin typeface="Aptos"/>
+              </a:rPr>
+              <a:t>Air conditioning</a:t>
+            </a:r>
+          </a:p>
+        </p:txBody>
+      </p:sp>
+      <p:sp>
+        <p:nvSpPr>
+          <p:cNvPr id="12" name="Down Arrow 11"/>
+          <p:cNvSpPr/>
+          <p:nvPr/>
+        </p:nvSpPr>
+        <p:spPr>
+          <a:xfrm>
+            <a:off x="2697480" y="2697480"/>
+            <a:ext cx="1143000" cy="1143000"/>
+          </a:xfrm>
+          <a:prstGeom prst="downArrow">
+            <a:avLst/>
+          </a:prstGeom>
+          <a:solidFill>
+            <a:srgbClr val="457B9D"/>
+          </a:solidFill>
+          <a:ln>
+            <a:noFill/>
+          </a:ln>
+        </p:spPr>
+        <p:style>
+          <a:lnRef idx="1">
+            <a:schemeClr val="accent1"/>
+          </a:lnRef>
+          <a:fillRef idx="3">
+            <a:schemeClr val="accent1"/>
+          </a:fillRef>
+          <a:effectRef idx="2">
+            <a:schemeClr val="accent1"/>
+          </a:effectRef>
+          <a:fontRef idx="minor">
+            <a:schemeClr val="lt1"/>
+          </a:fontRef>
+        </p:style>
+        <p:txBody>
+          <a:bodyPr rtlCol="0" anchor="ctr"/>
+          <a:lstStyle/>
+          <a:p>
+            <a:pPr algn="ctr"/>
+          </a:p>
+        </p:txBody>
+      </p:sp>
+      <p:sp>
+        <p:nvSpPr>
+          <p:cNvPr id="13" name="TextBox 12"/>
+          <p:cNvSpPr txBox="1"/>
+          <p:nvPr/>
+        </p:nvSpPr>
+        <p:spPr>
+          <a:xfrm>
+            <a:off x="1234440" y="4160520"/>
+            <a:ext cx="4160520" cy="640080"/>
+          </a:xfrm>
+          <a:prstGeom prst="rect">
+            <a:avLst/>
+          </a:prstGeom>
+          <a:noFill/>
+        </p:spPr>
+        <p:txBody>
+          <a:bodyPr wrap="square">
+            <a:spAutoFit/>
+          </a:bodyPr>
+          <a:lstStyle/>
+          <a:p>
+            <a:pPr algn="ctr"/>
+            <a:r>
+              <a:rPr sz="1900" b="1" i="0">
                 <a:solidFill>
                   <a:srgbClr val="232D37"/>
                 </a:solidFill>
                 <a:latin typeface="Aptos"/>
-              </a:defRPr>
-            </a:pPr>
-            <a:r>
-              <a:t>Air conditioning controls the indoor environment, not only air temperature.</a:t>
-            </a:r>
-          </a:p>
-          <a:p>
-            <a:pPr>
-              <a:spcAft>
-                <a:spcPts val="1200"/>
-              </a:spcAft>
-              <a:defRPr sz="2200">
+              </a:rPr>
+              <a:t>One variable:
+lower air temperature</a:t>
+            </a:r>
+          </a:p>
+        </p:txBody>
+      </p:sp>
+      <p:sp>
+        <p:nvSpPr>
+          <p:cNvPr id="14" name="Oval 13"/>
+          <p:cNvSpPr/>
+          <p:nvPr/>
+        </p:nvSpPr>
+        <p:spPr>
+          <a:xfrm>
+            <a:off x="6995160" y="2743200"/>
+            <a:ext cx="731520" cy="731520"/>
+          </a:xfrm>
+          <a:prstGeom prst="ellipse">
+            <a:avLst/>
+          </a:prstGeom>
+          <a:solidFill>
+            <a:srgbClr val="E76F51"/>
+          </a:solidFill>
+          <a:ln>
+            <a:noFill/>
+          </a:ln>
+        </p:spPr>
+        <p:style>
+          <a:lnRef idx="1">
+            <a:schemeClr val="accent1"/>
+          </a:lnRef>
+          <a:fillRef idx="3">
+            <a:schemeClr val="accent1"/>
+          </a:fillRef>
+          <a:effectRef idx="2">
+            <a:schemeClr val="accent1"/>
+          </a:effectRef>
+          <a:fontRef idx="minor">
+            <a:schemeClr val="lt1"/>
+          </a:fontRef>
+        </p:style>
+        <p:txBody>
+          <a:bodyPr rtlCol="0" anchor="ctr"/>
+          <a:lstStyle/>
+          <a:p>
+            <a:pPr algn="ctr"/>
+          </a:p>
+        </p:txBody>
+      </p:sp>
+      <p:sp>
+        <p:nvSpPr>
+          <p:cNvPr id="15" name="TextBox 14"/>
+          <p:cNvSpPr txBox="1"/>
+          <p:nvPr/>
+        </p:nvSpPr>
+        <p:spPr>
+          <a:xfrm>
+            <a:off x="6995160" y="2971800"/>
+            <a:ext cx="731520" cy="182880"/>
+          </a:xfrm>
+          <a:prstGeom prst="rect">
+            <a:avLst/>
+          </a:prstGeom>
+          <a:noFill/>
+        </p:spPr>
+        <p:txBody>
+          <a:bodyPr wrap="square">
+            <a:spAutoFit/>
+          </a:bodyPr>
+          <a:lstStyle/>
+          <a:p>
+            <a:pPr algn="ctr"/>
+            <a:r>
+              <a:rPr sz="1000" b="1" i="0">
+                <a:solidFill>
+                  <a:srgbClr val="FFFFFF"/>
+                </a:solidFill>
+                <a:latin typeface="Aptos"/>
+              </a:rPr>
+              <a:t>T</a:t>
+            </a:r>
+          </a:p>
+        </p:txBody>
+      </p:sp>
+      <p:sp>
+        <p:nvSpPr>
+          <p:cNvPr id="16" name="Oval 15"/>
+          <p:cNvSpPr/>
+          <p:nvPr/>
+        </p:nvSpPr>
+        <p:spPr>
+          <a:xfrm>
+            <a:off x="7955280" y="2743200"/>
+            <a:ext cx="731520" cy="731520"/>
+          </a:xfrm>
+          <a:prstGeom prst="ellipse">
+            <a:avLst/>
+          </a:prstGeom>
+          <a:solidFill>
+            <a:srgbClr val="457B9D"/>
+          </a:solidFill>
+          <a:ln>
+            <a:noFill/>
+          </a:ln>
+        </p:spPr>
+        <p:style>
+          <a:lnRef idx="1">
+            <a:schemeClr val="accent1"/>
+          </a:lnRef>
+          <a:fillRef idx="3">
+            <a:schemeClr val="accent1"/>
+          </a:fillRef>
+          <a:effectRef idx="2">
+            <a:schemeClr val="accent1"/>
+          </a:effectRef>
+          <a:fontRef idx="minor">
+            <a:schemeClr val="lt1"/>
+          </a:fontRef>
+        </p:style>
+        <p:txBody>
+          <a:bodyPr rtlCol="0" anchor="ctr"/>
+          <a:lstStyle/>
+          <a:p>
+            <a:pPr algn="ctr"/>
+          </a:p>
+        </p:txBody>
+      </p:sp>
+      <p:sp>
+        <p:nvSpPr>
+          <p:cNvPr id="17" name="TextBox 16"/>
+          <p:cNvSpPr txBox="1"/>
+          <p:nvPr/>
+        </p:nvSpPr>
+        <p:spPr>
+          <a:xfrm>
+            <a:off x="7955280" y="2971800"/>
+            <a:ext cx="731520" cy="182880"/>
+          </a:xfrm>
+          <a:prstGeom prst="rect">
+            <a:avLst/>
+          </a:prstGeom>
+          <a:noFill/>
+        </p:spPr>
+        <p:txBody>
+          <a:bodyPr wrap="square">
+            <a:spAutoFit/>
+          </a:bodyPr>
+          <a:lstStyle/>
+          <a:p>
+            <a:pPr algn="ctr"/>
+            <a:r>
+              <a:rPr sz="1000" b="1" i="0">
+                <a:solidFill>
+                  <a:srgbClr val="FFFFFF"/>
+                </a:solidFill>
+                <a:latin typeface="Aptos"/>
+              </a:rPr>
+              <a:t>RH</a:t>
+            </a:r>
+          </a:p>
+        </p:txBody>
+      </p:sp>
+      <p:sp>
+        <p:nvSpPr>
+          <p:cNvPr id="18" name="Oval 17"/>
+          <p:cNvSpPr/>
+          <p:nvPr/>
+        </p:nvSpPr>
+        <p:spPr>
+          <a:xfrm>
+            <a:off x="8915400" y="2743200"/>
+            <a:ext cx="731520" cy="731520"/>
+          </a:xfrm>
+          <a:prstGeom prst="ellipse">
+            <a:avLst/>
+          </a:prstGeom>
+          <a:solidFill>
+            <a:srgbClr val="2A9D8F"/>
+          </a:solidFill>
+          <a:ln>
+            <a:noFill/>
+          </a:ln>
+        </p:spPr>
+        <p:style>
+          <a:lnRef idx="1">
+            <a:schemeClr val="accent1"/>
+          </a:lnRef>
+          <a:fillRef idx="3">
+            <a:schemeClr val="accent1"/>
+          </a:fillRef>
+          <a:effectRef idx="2">
+            <a:schemeClr val="accent1"/>
+          </a:effectRef>
+          <a:fontRef idx="minor">
+            <a:schemeClr val="lt1"/>
+          </a:fontRef>
+        </p:style>
+        <p:txBody>
+          <a:bodyPr rtlCol="0" anchor="ctr"/>
+          <a:lstStyle/>
+          <a:p>
+            <a:pPr algn="ctr"/>
+          </a:p>
+        </p:txBody>
+      </p:sp>
+      <p:sp>
+        <p:nvSpPr>
+          <p:cNvPr id="19" name="TextBox 18"/>
+          <p:cNvSpPr txBox="1"/>
+          <p:nvPr/>
+        </p:nvSpPr>
+        <p:spPr>
+          <a:xfrm>
+            <a:off x="8915400" y="2971800"/>
+            <a:ext cx="731520" cy="182880"/>
+          </a:xfrm>
+          <a:prstGeom prst="rect">
+            <a:avLst/>
+          </a:prstGeom>
+          <a:noFill/>
+        </p:spPr>
+        <p:txBody>
+          <a:bodyPr wrap="square">
+            <a:spAutoFit/>
+          </a:bodyPr>
+          <a:lstStyle/>
+          <a:p>
+            <a:pPr algn="ctr"/>
+            <a:r>
+              <a:rPr sz="1000" b="1" i="0">
+                <a:solidFill>
+                  <a:srgbClr val="FFFFFF"/>
+                </a:solidFill>
+                <a:latin typeface="Aptos"/>
+              </a:rPr>
+              <a:t>Air</a:t>
+            </a:r>
+          </a:p>
+        </p:txBody>
+      </p:sp>
+      <p:sp>
+        <p:nvSpPr>
+          <p:cNvPr id="20" name="Oval 19"/>
+          <p:cNvSpPr/>
+          <p:nvPr/>
+        </p:nvSpPr>
+        <p:spPr>
+          <a:xfrm>
+            <a:off x="9875520" y="2743200"/>
+            <a:ext cx="731520" cy="731520"/>
+          </a:xfrm>
+          <a:prstGeom prst="ellipse">
+            <a:avLst/>
+          </a:prstGeom>
+          <a:solidFill>
+            <a:srgbClr val="4CAF50"/>
+          </a:solidFill>
+          <a:ln>
+            <a:noFill/>
+          </a:ln>
+        </p:spPr>
+        <p:style>
+          <a:lnRef idx="1">
+            <a:schemeClr val="accent1"/>
+          </a:lnRef>
+          <a:fillRef idx="3">
+            <a:schemeClr val="accent1"/>
+          </a:fillRef>
+          <a:effectRef idx="2">
+            <a:schemeClr val="accent1"/>
+          </a:effectRef>
+          <a:fontRef idx="minor">
+            <a:schemeClr val="lt1"/>
+          </a:fontRef>
+        </p:style>
+        <p:txBody>
+          <a:bodyPr rtlCol="0" anchor="ctr"/>
+          <a:lstStyle/>
+          <a:p>
+            <a:pPr algn="ctr"/>
+          </a:p>
+        </p:txBody>
+      </p:sp>
+      <p:sp>
+        <p:nvSpPr>
+          <p:cNvPr id="21" name="TextBox 20"/>
+          <p:cNvSpPr txBox="1"/>
+          <p:nvPr/>
+        </p:nvSpPr>
+        <p:spPr>
+          <a:xfrm>
+            <a:off x="9875520" y="2971800"/>
+            <a:ext cx="731520" cy="182880"/>
+          </a:xfrm>
+          <a:prstGeom prst="rect">
+            <a:avLst/>
+          </a:prstGeom>
+          <a:noFill/>
+        </p:spPr>
+        <p:txBody>
+          <a:bodyPr wrap="square">
+            <a:spAutoFit/>
+          </a:bodyPr>
+          <a:lstStyle/>
+          <a:p>
+            <a:pPr algn="ctr"/>
+            <a:r>
+              <a:rPr sz="1000" b="1" i="0">
+                <a:solidFill>
+                  <a:srgbClr val="FFFFFF"/>
+                </a:solidFill>
+                <a:latin typeface="Aptos"/>
+              </a:rPr>
+              <a:t>Clean</a:t>
+            </a:r>
+          </a:p>
+        </p:txBody>
+      </p:sp>
+      <p:sp>
+        <p:nvSpPr>
+          <p:cNvPr id="22" name="TextBox 21"/>
+          <p:cNvSpPr txBox="1"/>
+          <p:nvPr/>
+        </p:nvSpPr>
+        <p:spPr>
+          <a:xfrm>
+            <a:off x="6903720" y="4160520"/>
+            <a:ext cx="3840480" cy="640080"/>
+          </a:xfrm>
+          <a:prstGeom prst="rect">
+            <a:avLst/>
+          </a:prstGeom>
+          <a:noFill/>
+        </p:spPr>
+        <p:txBody>
+          <a:bodyPr wrap="square">
+            <a:spAutoFit/>
+          </a:bodyPr>
+          <a:lstStyle/>
+          <a:p>
+            <a:pPr algn="ctr"/>
+            <a:r>
+              <a:rPr sz="1900" b="1" i="0">
                 <a:solidFill>
                   <a:srgbClr val="232D37"/>
                 </a:solidFill>
                 <a:latin typeface="Aptos"/>
-              </a:defRPr>
-            </a:pPr>
-            <a:r>
-              <a:t>Core idea: cooling is only one part of air conditioning.</a:t>
-            </a:r>
-          </a:p>
-        </p:txBody>
-      </p:sp>
-      <p:sp>
-        <p:nvSpPr>
-          <p:cNvPr id="8" name="TextBox 7"/>
-          <p:cNvSpPr txBox="1"/>
-          <p:nvPr/>
-        </p:nvSpPr>
-        <p:spPr>
-          <a:xfrm>
-            <a:off x="365760" y="6446520"/>
-            <a:ext cx="11430000" cy="228600"/>
-          </a:xfrm>
-          <a:prstGeom prst="rect">
-            <a:avLst/>
-          </a:prstGeom>
-          <a:noFill/>
-        </p:spPr>
-        <p:txBody>
-          <a:bodyPr wrap="none">
-            <a:spAutoFit/>
-          </a:bodyPr>
-          <a:lstStyle/>
-          <a:p>
-            <a:r>
-              <a:rPr sz="900">
-                <a:solidFill>
-                  <a:srgbClr val="78828C"/>
-                </a:solidFill>
               </a:rPr>
-              <a:t>Air Conditioning · Chapter 1 · Topic 1.1</a:t>
+              <a:t>Four variables:
+controlled together</a:t>
             </a:r>
           </a:p>
         </p:txBody>
@@ -5736,7 +9280,7 @@
           <a:lstStyle/>
           <a:p>
             <a:r>
-              <a:rPr sz="3000" b="1">
+              <a:rPr sz="3000" b="1" i="0">
                 <a:solidFill>
                   <a:srgbClr val="11374B"/>
                 </a:solidFill>
@@ -5770,7 +9314,7 @@
           <a:lstStyle/>
           <a:p>
             <a:r>
-              <a:rPr sz="1400" b="0">
+              <a:rPr sz="1400" b="0" i="0">
                 <a:solidFill>
                   <a:srgbClr val="5A6973"/>
                 </a:solidFill>
@@ -5805,7 +9349,7 @@
           <a:p>
             <a:pPr algn="r"/>
             <a:r>
-              <a:rPr sz="1100" b="0">
+              <a:rPr sz="1100" b="0" i="0">
                 <a:solidFill>
                   <a:srgbClr val="78828C"/>
                 </a:solidFill>
@@ -5818,7 +9362,76 @@
       </p:sp>
       <p:sp>
         <p:nvSpPr>
-          <p:cNvPr id="6" name="Rectangle 5"/>
+          <p:cNvPr id="6" name="TextBox 5"/>
+          <p:cNvSpPr txBox="1"/>
+          <p:nvPr/>
+        </p:nvSpPr>
+        <p:spPr>
+          <a:xfrm>
+            <a:off x="365760" y="6446520"/>
+            <a:ext cx="8229600" cy="228600"/>
+          </a:xfrm>
+          <a:prstGeom prst="rect">
+            <a:avLst/>
+          </a:prstGeom>
+          <a:noFill/>
+        </p:spPr>
+        <p:txBody>
+          <a:bodyPr wrap="square">
+            <a:spAutoFit/>
+          </a:bodyPr>
+          <a:lstStyle/>
+          <a:p>
+            <a:r>
+              <a:rPr sz="900" b="0" i="0">
+                <a:solidFill>
+                  <a:srgbClr val="78828C"/>
+                </a:solidFill>
+                <a:latin typeface="Aptos"/>
+              </a:rPr>
+              <a:t>Air Conditioning · Chapter 1 · Topic 1.1</a:t>
+            </a:r>
+          </a:p>
+        </p:txBody>
+      </p:sp>
+      <p:sp>
+        <p:nvSpPr>
+          <p:cNvPr id="7" name="TextBox 6"/>
+          <p:cNvSpPr txBox="1"/>
+          <p:nvPr/>
+        </p:nvSpPr>
+        <p:spPr>
+          <a:xfrm>
+            <a:off x="11292840" y="6446520"/>
+            <a:ext cx="502920" cy="228600"/>
+          </a:xfrm>
+          <a:prstGeom prst="rect">
+            <a:avLst/>
+          </a:prstGeom>
+          <a:noFill/>
+        </p:spPr>
+        <p:txBody>
+          <a:bodyPr wrap="square">
+            <a:spAutoFit/>
+          </a:bodyPr>
+          <a:lstStyle/>
+          <a:p>
+            <a:pPr algn="r"/>
+            <a:r>
+              <a:rPr sz="900" b="0" i="0">
+                <a:solidFill>
+                  <a:srgbClr val="78828C"/>
+                </a:solidFill>
+                <a:latin typeface="Aptos"/>
+              </a:rPr>
+              <a:t>3</a:t>
+            </a:r>
+          </a:p>
+        </p:txBody>
+      </p:sp>
+      <p:sp>
+        <p:nvSpPr>
+          <p:cNvPr id="8" name="Rectangle 7"/>
           <p:cNvSpPr/>
           <p:nvPr/>
         </p:nvSpPr>
@@ -5833,7 +9446,7 @@
           <a:solidFill>
             <a:srgbClr val="FFFFFF"/>
           </a:solidFill>
-          <a:ln>
+          <a:ln w="12700">
             <a:solidFill>
               <a:srgbClr val="DCE2E8"/>
             </a:solidFill>
@@ -5863,7 +9476,7 @@
       </p:sp>
       <p:sp>
         <p:nvSpPr>
-          <p:cNvPr id="7" name="TextBox 6"/>
+          <p:cNvPr id="9" name="TextBox 8"/>
           <p:cNvSpPr txBox="1"/>
           <p:nvPr/>
         </p:nvSpPr>
@@ -5950,7 +9563,7 @@
       </p:sp>
       <p:sp>
         <p:nvSpPr>
-          <p:cNvPr id="8" name="Rectangle 7"/>
+          <p:cNvPr id="10" name="Rectangle 9"/>
           <p:cNvSpPr/>
           <p:nvPr/>
         </p:nvSpPr>
@@ -5965,7 +9578,7 @@
           <a:solidFill>
             <a:srgbClr val="FFFFFF"/>
           </a:solidFill>
-          <a:ln>
+          <a:ln w="12700">
             <a:solidFill>
               <a:srgbClr val="DCE2E8"/>
             </a:solidFill>
@@ -5995,7 +9608,7 @@
       </p:sp>
       <p:pic>
         <p:nvPicPr>
-          <p:cNvPr id="9" name="Picture 8" descr="fig_01_four_params_en.png"/>
+          <p:cNvPr id="11" name="Picture 10" descr="fig_01_four_params_en.png"/>
           <p:cNvPicPr>
             <a:picLocks noChangeAspect="1"/>
           </p:cNvPicPr>
@@ -6017,39 +9630,6 @@
           </a:prstGeom>
         </p:spPr>
       </p:pic>
-      <p:sp>
-        <p:nvSpPr>
-          <p:cNvPr id="10" name="TextBox 9"/>
-          <p:cNvSpPr txBox="1"/>
-          <p:nvPr/>
-        </p:nvSpPr>
-        <p:spPr>
-          <a:xfrm>
-            <a:off x="365760" y="6446520"/>
-            <a:ext cx="11430000" cy="228600"/>
-          </a:xfrm>
-          <a:prstGeom prst="rect">
-            <a:avLst/>
-          </a:prstGeom>
-          <a:noFill/>
-        </p:spPr>
-        <p:txBody>
-          <a:bodyPr wrap="none">
-            <a:spAutoFit/>
-          </a:bodyPr>
-          <a:lstStyle/>
-          <a:p>
-            <a:r>
-              <a:rPr sz="900">
-                <a:solidFill>
-                  <a:srgbClr val="78828C"/>
-                </a:solidFill>
-              </a:rPr>
-              <a:t>Air Conditioning · Chapter 1 · Topic 1.1</a:t>
-            </a:r>
-          </a:p>
-        </p:txBody>
-      </p:sp>
     </p:spTree>
   </p:cSld>
   <p:clrMapOvr>
@@ -6142,7 +9722,7 @@
           <a:lstStyle/>
           <a:p>
             <a:r>
-              <a:rPr sz="3000" b="1">
+              <a:rPr sz="3000" b="1" i="0">
                 <a:solidFill>
                   <a:srgbClr val="11374B"/>
                 </a:solidFill>
@@ -6176,7 +9756,7 @@
           <a:lstStyle/>
           <a:p>
             <a:r>
-              <a:rPr sz="1400" b="0">
+              <a:rPr sz="1400" b="0" i="0">
                 <a:solidFill>
                   <a:srgbClr val="5A6973"/>
                 </a:solidFill>
@@ -6211,7 +9791,7 @@
           <a:p>
             <a:pPr algn="r"/>
             <a:r>
-              <a:rPr sz="1100" b="0">
+              <a:rPr sz="1100" b="0" i="0">
                 <a:solidFill>
                   <a:srgbClr val="78828C"/>
                 </a:solidFill>
@@ -6224,7 +9804,76 @@
       </p:sp>
       <p:sp>
         <p:nvSpPr>
-          <p:cNvPr id="6" name="Rectangle 5"/>
+          <p:cNvPr id="6" name="TextBox 5"/>
+          <p:cNvSpPr txBox="1"/>
+          <p:nvPr/>
+        </p:nvSpPr>
+        <p:spPr>
+          <a:xfrm>
+            <a:off x="365760" y="6446520"/>
+            <a:ext cx="8229600" cy="228600"/>
+          </a:xfrm>
+          <a:prstGeom prst="rect">
+            <a:avLst/>
+          </a:prstGeom>
+          <a:noFill/>
+        </p:spPr>
+        <p:txBody>
+          <a:bodyPr wrap="square">
+            <a:spAutoFit/>
+          </a:bodyPr>
+          <a:lstStyle/>
+          <a:p>
+            <a:r>
+              <a:rPr sz="900" b="0" i="0">
+                <a:solidFill>
+                  <a:srgbClr val="78828C"/>
+                </a:solidFill>
+                <a:latin typeface="Aptos"/>
+              </a:rPr>
+              <a:t>Air Conditioning · Chapter 1 · Topic 1.1</a:t>
+            </a:r>
+          </a:p>
+        </p:txBody>
+      </p:sp>
+      <p:sp>
+        <p:nvSpPr>
+          <p:cNvPr id="7" name="TextBox 6"/>
+          <p:cNvSpPr txBox="1"/>
+          <p:nvPr/>
+        </p:nvSpPr>
+        <p:spPr>
+          <a:xfrm>
+            <a:off x="11292840" y="6446520"/>
+            <a:ext cx="502920" cy="228600"/>
+          </a:xfrm>
+          <a:prstGeom prst="rect">
+            <a:avLst/>
+          </a:prstGeom>
+          <a:noFill/>
+        </p:spPr>
+        <p:txBody>
+          <a:bodyPr wrap="square">
+            <a:spAutoFit/>
+          </a:bodyPr>
+          <a:lstStyle/>
+          <a:p>
+            <a:pPr algn="r"/>
+            <a:r>
+              <a:rPr sz="900" b="0" i="0">
+                <a:solidFill>
+                  <a:srgbClr val="78828C"/>
+                </a:solidFill>
+                <a:latin typeface="Aptos"/>
+              </a:rPr>
+              <a:t>4</a:t>
+            </a:r>
+          </a:p>
+        </p:txBody>
+      </p:sp>
+      <p:sp>
+        <p:nvSpPr>
+          <p:cNvPr id="8" name="Rectangle 7"/>
           <p:cNvSpPr/>
           <p:nvPr/>
         </p:nvSpPr>
@@ -6239,7 +9888,7 @@
           <a:solidFill>
             <a:srgbClr val="FFFFFF"/>
           </a:solidFill>
-          <a:ln>
+          <a:ln w="12700">
             <a:solidFill>
               <a:srgbClr val="DCE2E8"/>
             </a:solidFill>
@@ -6269,7 +9918,7 @@
       </p:sp>
       <p:sp>
         <p:nvSpPr>
-          <p:cNvPr id="7" name="TextBox 6"/>
+          <p:cNvPr id="9" name="TextBox 8"/>
           <p:cNvSpPr txBox="1"/>
           <p:nvPr/>
         </p:nvSpPr>
@@ -6324,7 +9973,7 @@
       </p:sp>
       <p:sp>
         <p:nvSpPr>
-          <p:cNvPr id="8" name="Rectangle 7"/>
+          <p:cNvPr id="10" name="Rectangle 9"/>
           <p:cNvSpPr/>
           <p:nvPr/>
         </p:nvSpPr>
@@ -6339,7 +9988,7 @@
           <a:solidFill>
             <a:srgbClr val="FFFFFF"/>
           </a:solidFill>
-          <a:ln>
+          <a:ln w="12700">
             <a:solidFill>
               <a:srgbClr val="DCE2E8"/>
             </a:solidFill>
@@ -6369,7 +10018,7 @@
       </p:sp>
       <p:pic>
         <p:nvPicPr>
-          <p:cNvPr id="9" name="Picture 8" descr="fig_05_air_processing_en.png"/>
+          <p:cNvPr id="11" name="Picture 10" descr="fig_05_air_processing_en.png"/>
           <p:cNvPicPr>
             <a:picLocks noChangeAspect="1"/>
           </p:cNvPicPr>
@@ -6391,39 +10040,6 @@
           </a:prstGeom>
         </p:spPr>
       </p:pic>
-      <p:sp>
-        <p:nvSpPr>
-          <p:cNvPr id="10" name="TextBox 9"/>
-          <p:cNvSpPr txBox="1"/>
-          <p:nvPr/>
-        </p:nvSpPr>
-        <p:spPr>
-          <a:xfrm>
-            <a:off x="365760" y="6446520"/>
-            <a:ext cx="11430000" cy="228600"/>
-          </a:xfrm>
-          <a:prstGeom prst="rect">
-            <a:avLst/>
-          </a:prstGeom>
-          <a:noFill/>
-        </p:spPr>
-        <p:txBody>
-          <a:bodyPr wrap="none">
-            <a:spAutoFit/>
-          </a:bodyPr>
-          <a:lstStyle/>
-          <a:p>
-            <a:r>
-              <a:rPr sz="900">
-                <a:solidFill>
-                  <a:srgbClr val="78828C"/>
-                </a:solidFill>
-              </a:rPr>
-              <a:t>Air Conditioning · Chapter 1 · Topic 1.1</a:t>
-            </a:r>
-          </a:p>
-        </p:txBody>
-      </p:sp>
     </p:spTree>
   </p:cSld>
   <p:clrMapOvr>
@@ -6516,7 +10132,7 @@
           <a:lstStyle/>
           <a:p>
             <a:r>
-              <a:rPr sz="3000" b="1">
+              <a:rPr sz="3000" b="1" i="0">
                 <a:solidFill>
                   <a:srgbClr val="11374B"/>
                 </a:solidFill>
@@ -6550,7 +10166,7 @@
           <a:lstStyle/>
           <a:p>
             <a:r>
-              <a:rPr sz="1400" b="0">
+              <a:rPr sz="1400" b="0" i="0">
                 <a:solidFill>
                   <a:srgbClr val="5A6973"/>
                 </a:solidFill>
@@ -6585,7 +10201,7 @@
           <a:p>
             <a:pPr algn="r"/>
             <a:r>
-              <a:rPr sz="1100" b="0">
+              <a:rPr sz="1100" b="0" i="0">
                 <a:solidFill>
                   <a:srgbClr val="78828C"/>
                 </a:solidFill>
@@ -6598,7 +10214,76 @@
       </p:sp>
       <p:sp>
         <p:nvSpPr>
-          <p:cNvPr id="6" name="Rectangle 5"/>
+          <p:cNvPr id="6" name="TextBox 5"/>
+          <p:cNvSpPr txBox="1"/>
+          <p:nvPr/>
+        </p:nvSpPr>
+        <p:spPr>
+          <a:xfrm>
+            <a:off x="365760" y="6446520"/>
+            <a:ext cx="8229600" cy="228600"/>
+          </a:xfrm>
+          <a:prstGeom prst="rect">
+            <a:avLst/>
+          </a:prstGeom>
+          <a:noFill/>
+        </p:spPr>
+        <p:txBody>
+          <a:bodyPr wrap="square">
+            <a:spAutoFit/>
+          </a:bodyPr>
+          <a:lstStyle/>
+          <a:p>
+            <a:r>
+              <a:rPr sz="900" b="0" i="0">
+                <a:solidFill>
+                  <a:srgbClr val="78828C"/>
+                </a:solidFill>
+                <a:latin typeface="Aptos"/>
+              </a:rPr>
+              <a:t>Air Conditioning · Chapter 1 · Topic 1.1</a:t>
+            </a:r>
+          </a:p>
+        </p:txBody>
+      </p:sp>
+      <p:sp>
+        <p:nvSpPr>
+          <p:cNvPr id="7" name="TextBox 6"/>
+          <p:cNvSpPr txBox="1"/>
+          <p:nvPr/>
+        </p:nvSpPr>
+        <p:spPr>
+          <a:xfrm>
+            <a:off x="11292840" y="6446520"/>
+            <a:ext cx="502920" cy="228600"/>
+          </a:xfrm>
+          <a:prstGeom prst="rect">
+            <a:avLst/>
+          </a:prstGeom>
+          <a:noFill/>
+        </p:spPr>
+        <p:txBody>
+          <a:bodyPr wrap="square">
+            <a:spAutoFit/>
+          </a:bodyPr>
+          <a:lstStyle/>
+          <a:p>
+            <a:pPr algn="r"/>
+            <a:r>
+              <a:rPr sz="900" b="0" i="0">
+                <a:solidFill>
+                  <a:srgbClr val="78828C"/>
+                </a:solidFill>
+                <a:latin typeface="Aptos"/>
+              </a:rPr>
+              <a:t>5</a:t>
+            </a:r>
+          </a:p>
+        </p:txBody>
+      </p:sp>
+      <p:sp>
+        <p:nvSpPr>
+          <p:cNvPr id="8" name="Rectangle 7"/>
           <p:cNvSpPr/>
           <p:nvPr/>
         </p:nvSpPr>
@@ -6613,7 +10298,7 @@
           <a:solidFill>
             <a:srgbClr val="FFFFFF"/>
           </a:solidFill>
-          <a:ln>
+          <a:ln w="12700">
             <a:solidFill>
               <a:srgbClr val="DCE2E8"/>
             </a:solidFill>
@@ -6643,7 +10328,7 @@
       </p:sp>
       <p:sp>
         <p:nvSpPr>
-          <p:cNvPr id="7" name="TextBox 6"/>
+          <p:cNvPr id="9" name="TextBox 8"/>
           <p:cNvSpPr txBox="1"/>
           <p:nvPr/>
         </p:nvSpPr>
@@ -6698,7 +10383,7 @@
       </p:sp>
       <p:sp>
         <p:nvSpPr>
-          <p:cNvPr id="8" name="Rectangle 7"/>
+          <p:cNvPr id="10" name="Rectangle 9"/>
           <p:cNvSpPr/>
           <p:nvPr/>
         </p:nvSpPr>
@@ -6713,7 +10398,7 @@
           <a:solidFill>
             <a:srgbClr val="FFFFFF"/>
           </a:solidFill>
-          <a:ln>
+          <a:ln w="12700">
             <a:solidFill>
               <a:srgbClr val="DCE2E8"/>
             </a:solidFill>
@@ -6743,7 +10428,7 @@
       </p:sp>
       <p:pic>
         <p:nvPicPr>
-          <p:cNvPr id="9" name="Picture 8" descr="fig_06_classification_en.png"/>
+          <p:cNvPr id="11" name="Picture 10" descr="fig_06_classification_en.png"/>
           <p:cNvPicPr>
             <a:picLocks noChangeAspect="1"/>
           </p:cNvPicPr>
@@ -6765,39 +10450,6 @@
           </a:prstGeom>
         </p:spPr>
       </p:pic>
-      <p:sp>
-        <p:nvSpPr>
-          <p:cNvPr id="10" name="TextBox 9"/>
-          <p:cNvSpPr txBox="1"/>
-          <p:nvPr/>
-        </p:nvSpPr>
-        <p:spPr>
-          <a:xfrm>
-            <a:off x="365760" y="6446520"/>
-            <a:ext cx="11430000" cy="228600"/>
-          </a:xfrm>
-          <a:prstGeom prst="rect">
-            <a:avLst/>
-          </a:prstGeom>
-          <a:noFill/>
-        </p:spPr>
-        <p:txBody>
-          <a:bodyPr wrap="none">
-            <a:spAutoFit/>
-          </a:bodyPr>
-          <a:lstStyle/>
-          <a:p>
-            <a:r>
-              <a:rPr sz="900">
-                <a:solidFill>
-                  <a:srgbClr val="78828C"/>
-                </a:solidFill>
-              </a:rPr>
-              <a:t>Air Conditioning · Chapter 1 · Topic 1.1</a:t>
-            </a:r>
-          </a:p>
-        </p:txBody>
-      </p:sp>
     </p:spTree>
   </p:cSld>
   <p:clrMapOvr>
@@ -6890,7 +10542,7 @@
           <a:lstStyle/>
           <a:p>
             <a:r>
-              <a:rPr sz="3000" b="1">
+              <a:rPr sz="3000" b="1" i="0">
                 <a:solidFill>
                   <a:srgbClr val="11374B"/>
                 </a:solidFill>
@@ -6924,7 +10576,7 @@
           <a:lstStyle/>
           <a:p>
             <a:r>
-              <a:rPr sz="1400" b="0">
+              <a:rPr sz="1400" b="0" i="0">
                 <a:solidFill>
                   <a:srgbClr val="5A6973"/>
                 </a:solidFill>
@@ -6959,7 +10611,7 @@
           <a:p>
             <a:pPr algn="r"/>
             <a:r>
-              <a:rPr sz="1100" b="0">
+              <a:rPr sz="1100" b="0" i="0">
                 <a:solidFill>
                   <a:srgbClr val="78828C"/>
                 </a:solidFill>
@@ -6972,7 +10624,76 @@
       </p:sp>
       <p:sp>
         <p:nvSpPr>
-          <p:cNvPr id="6" name="Rectangle 5"/>
+          <p:cNvPr id="6" name="TextBox 5"/>
+          <p:cNvSpPr txBox="1"/>
+          <p:nvPr/>
+        </p:nvSpPr>
+        <p:spPr>
+          <a:xfrm>
+            <a:off x="365760" y="6446520"/>
+            <a:ext cx="8229600" cy="228600"/>
+          </a:xfrm>
+          <a:prstGeom prst="rect">
+            <a:avLst/>
+          </a:prstGeom>
+          <a:noFill/>
+        </p:spPr>
+        <p:txBody>
+          <a:bodyPr wrap="square">
+            <a:spAutoFit/>
+          </a:bodyPr>
+          <a:lstStyle/>
+          <a:p>
+            <a:r>
+              <a:rPr sz="900" b="0" i="0">
+                <a:solidFill>
+                  <a:srgbClr val="78828C"/>
+                </a:solidFill>
+                <a:latin typeface="Aptos"/>
+              </a:rPr>
+              <a:t>Air Conditioning · Chapter 1 · Topic 1.1</a:t>
+            </a:r>
+          </a:p>
+        </p:txBody>
+      </p:sp>
+      <p:sp>
+        <p:nvSpPr>
+          <p:cNvPr id="7" name="TextBox 6"/>
+          <p:cNvSpPr txBox="1"/>
+          <p:nvPr/>
+        </p:nvSpPr>
+        <p:spPr>
+          <a:xfrm>
+            <a:off x="11292840" y="6446520"/>
+            <a:ext cx="502920" cy="228600"/>
+          </a:xfrm>
+          <a:prstGeom prst="rect">
+            <a:avLst/>
+          </a:prstGeom>
+          <a:noFill/>
+        </p:spPr>
+        <p:txBody>
+          <a:bodyPr wrap="square">
+            <a:spAutoFit/>
+          </a:bodyPr>
+          <a:lstStyle/>
+          <a:p>
+            <a:pPr algn="r"/>
+            <a:r>
+              <a:rPr sz="900" b="0" i="0">
+                <a:solidFill>
+                  <a:srgbClr val="78828C"/>
+                </a:solidFill>
+                <a:latin typeface="Aptos"/>
+              </a:rPr>
+              <a:t>6</a:t>
+            </a:r>
+          </a:p>
+        </p:txBody>
+      </p:sp>
+      <p:sp>
+        <p:nvSpPr>
+          <p:cNvPr id="8" name="Rectangle 7"/>
           <p:cNvSpPr/>
           <p:nvPr/>
         </p:nvSpPr>
@@ -6987,7 +10708,7 @@
           <a:solidFill>
             <a:srgbClr val="FFFFFF"/>
           </a:solidFill>
-          <a:ln>
+          <a:ln w="12700">
             <a:solidFill>
               <a:srgbClr val="DCE2E8"/>
             </a:solidFill>
@@ -7017,7 +10738,7 @@
       </p:sp>
       <p:sp>
         <p:nvSpPr>
-          <p:cNvPr id="7" name="TextBox 6"/>
+          <p:cNvPr id="9" name="TextBox 8"/>
           <p:cNvSpPr txBox="1"/>
           <p:nvPr/>
         </p:nvSpPr>
@@ -7104,7 +10825,7 @@
       </p:sp>
       <p:sp>
         <p:nvSpPr>
-          <p:cNvPr id="8" name="Rectangle 7"/>
+          <p:cNvPr id="10" name="Rectangle 9"/>
           <p:cNvSpPr/>
           <p:nvPr/>
         </p:nvSpPr>
@@ -7119,7 +10840,7 @@
           <a:solidFill>
             <a:srgbClr val="FFFFFF"/>
           </a:solidFill>
-          <a:ln>
+          <a:ln w="12700">
             <a:solidFill>
               <a:srgbClr val="DCE2E8"/>
             </a:solidFill>
@@ -7149,7 +10870,7 @@
       </p:sp>
       <p:pic>
         <p:nvPicPr>
-          <p:cNvPr id="9" name="Picture 8" descr="fig_02_temp_comfort_en.png"/>
+          <p:cNvPr id="11" name="Picture 10" descr="fig_02_temp_comfort_en.png"/>
           <p:cNvPicPr>
             <a:picLocks noChangeAspect="1"/>
           </p:cNvPicPr>
@@ -7171,39 +10892,6 @@
           </a:prstGeom>
         </p:spPr>
       </p:pic>
-      <p:sp>
-        <p:nvSpPr>
-          <p:cNvPr id="10" name="TextBox 9"/>
-          <p:cNvSpPr txBox="1"/>
-          <p:nvPr/>
-        </p:nvSpPr>
-        <p:spPr>
-          <a:xfrm>
-            <a:off x="365760" y="6446520"/>
-            <a:ext cx="11430000" cy="228600"/>
-          </a:xfrm>
-          <a:prstGeom prst="rect">
-            <a:avLst/>
-          </a:prstGeom>
-          <a:noFill/>
-        </p:spPr>
-        <p:txBody>
-          <a:bodyPr wrap="none">
-            <a:spAutoFit/>
-          </a:bodyPr>
-          <a:lstStyle/>
-          <a:p>
-            <a:r>
-              <a:rPr sz="900">
-                <a:solidFill>
-                  <a:srgbClr val="78828C"/>
-                </a:solidFill>
-              </a:rPr>
-              <a:t>Air Conditioning · Chapter 1 · Topic 1.1</a:t>
-            </a:r>
-          </a:p>
-        </p:txBody>
-      </p:sp>
     </p:spTree>
   </p:cSld>
   <p:clrMapOvr>
@@ -7296,7 +10984,7 @@
           <a:lstStyle/>
           <a:p>
             <a:r>
-              <a:rPr sz="3000" b="1">
+              <a:rPr sz="3000" b="1" i="0">
                 <a:solidFill>
                   <a:srgbClr val="11374B"/>
                 </a:solidFill>
@@ -7330,7 +11018,7 @@
           <a:lstStyle/>
           <a:p>
             <a:r>
-              <a:rPr sz="1400" b="0">
+              <a:rPr sz="1400" b="0" i="0">
                 <a:solidFill>
                   <a:srgbClr val="5A6973"/>
                 </a:solidFill>
@@ -7365,7 +11053,7 @@
           <a:p>
             <a:pPr algn="r"/>
             <a:r>
-              <a:rPr sz="1100" b="0">
+              <a:rPr sz="1100" b="0" i="0">
                 <a:solidFill>
                   <a:srgbClr val="78828C"/>
                 </a:solidFill>
@@ -7378,7 +11066,76 @@
       </p:sp>
       <p:sp>
         <p:nvSpPr>
-          <p:cNvPr id="6" name="Rectangle 5"/>
+          <p:cNvPr id="6" name="TextBox 5"/>
+          <p:cNvSpPr txBox="1"/>
+          <p:nvPr/>
+        </p:nvSpPr>
+        <p:spPr>
+          <a:xfrm>
+            <a:off x="365760" y="6446520"/>
+            <a:ext cx="8229600" cy="228600"/>
+          </a:xfrm>
+          <a:prstGeom prst="rect">
+            <a:avLst/>
+          </a:prstGeom>
+          <a:noFill/>
+        </p:spPr>
+        <p:txBody>
+          <a:bodyPr wrap="square">
+            <a:spAutoFit/>
+          </a:bodyPr>
+          <a:lstStyle/>
+          <a:p>
+            <a:r>
+              <a:rPr sz="900" b="0" i="0">
+                <a:solidFill>
+                  <a:srgbClr val="78828C"/>
+                </a:solidFill>
+                <a:latin typeface="Aptos"/>
+              </a:rPr>
+              <a:t>Air Conditioning · Chapter 1 · Topic 1.1</a:t>
+            </a:r>
+          </a:p>
+        </p:txBody>
+      </p:sp>
+      <p:sp>
+        <p:nvSpPr>
+          <p:cNvPr id="7" name="TextBox 6"/>
+          <p:cNvSpPr txBox="1"/>
+          <p:nvPr/>
+        </p:nvSpPr>
+        <p:spPr>
+          <a:xfrm>
+            <a:off x="11292840" y="6446520"/>
+            <a:ext cx="502920" cy="228600"/>
+          </a:xfrm>
+          <a:prstGeom prst="rect">
+            <a:avLst/>
+          </a:prstGeom>
+          <a:noFill/>
+        </p:spPr>
+        <p:txBody>
+          <a:bodyPr wrap="square">
+            <a:spAutoFit/>
+          </a:bodyPr>
+          <a:lstStyle/>
+          <a:p>
+            <a:pPr algn="r"/>
+            <a:r>
+              <a:rPr sz="900" b="0" i="0">
+                <a:solidFill>
+                  <a:srgbClr val="78828C"/>
+                </a:solidFill>
+                <a:latin typeface="Aptos"/>
+              </a:rPr>
+              <a:t>7</a:t>
+            </a:r>
+          </a:p>
+        </p:txBody>
+      </p:sp>
+      <p:sp>
+        <p:nvSpPr>
+          <p:cNvPr id="8" name="Rectangle 7"/>
           <p:cNvSpPr/>
           <p:nvPr/>
         </p:nvSpPr>
@@ -7393,7 +11150,7 @@
           <a:solidFill>
             <a:srgbClr val="FFFFFF"/>
           </a:solidFill>
-          <a:ln>
+          <a:ln w="12700">
             <a:solidFill>
               <a:srgbClr val="DCE2E8"/>
             </a:solidFill>
@@ -7423,7 +11180,7 @@
       </p:sp>
       <p:sp>
         <p:nvSpPr>
-          <p:cNvPr id="7" name="TextBox 6"/>
+          <p:cNvPr id="9" name="TextBox 8"/>
           <p:cNvSpPr txBox="1"/>
           <p:nvPr/>
         </p:nvSpPr>
@@ -7494,7 +11251,7 @@
       </p:sp>
       <p:sp>
         <p:nvSpPr>
-          <p:cNvPr id="8" name="Rectangle 7"/>
+          <p:cNvPr id="10" name="Rectangle 9"/>
           <p:cNvSpPr/>
           <p:nvPr/>
         </p:nvSpPr>
@@ -7509,7 +11266,7 @@
           <a:solidFill>
             <a:srgbClr val="FFFFFF"/>
           </a:solidFill>
-          <a:ln>
+          <a:ln w="12700">
             <a:solidFill>
               <a:srgbClr val="DCE2E8"/>
             </a:solidFill>
@@ -7539,7 +11296,7 @@
       </p:sp>
       <p:pic>
         <p:nvPicPr>
-          <p:cNvPr id="9" name="Picture 8" descr="fig_03_humidity_en.png"/>
+          <p:cNvPr id="11" name="Picture 10" descr="fig_03_humidity_en.png"/>
           <p:cNvPicPr>
             <a:picLocks noChangeAspect="1"/>
           </p:cNvPicPr>
@@ -7561,39 +11318,6 @@
           </a:prstGeom>
         </p:spPr>
       </p:pic>
-      <p:sp>
-        <p:nvSpPr>
-          <p:cNvPr id="10" name="TextBox 9"/>
-          <p:cNvSpPr txBox="1"/>
-          <p:nvPr/>
-        </p:nvSpPr>
-        <p:spPr>
-          <a:xfrm>
-            <a:off x="365760" y="6446520"/>
-            <a:ext cx="11430000" cy="228600"/>
-          </a:xfrm>
-          <a:prstGeom prst="rect">
-            <a:avLst/>
-          </a:prstGeom>
-          <a:noFill/>
-        </p:spPr>
-        <p:txBody>
-          <a:bodyPr wrap="none">
-            <a:spAutoFit/>
-          </a:bodyPr>
-          <a:lstStyle/>
-          <a:p>
-            <a:r>
-              <a:rPr sz="900">
-                <a:solidFill>
-                  <a:srgbClr val="78828C"/>
-                </a:solidFill>
-              </a:rPr>
-              <a:t>Air Conditioning · Chapter 1 · Topic 1.1</a:t>
-            </a:r>
-          </a:p>
-        </p:txBody>
-      </p:sp>
     </p:spTree>
   </p:cSld>
   <p:clrMapOvr>
@@ -7686,7 +11410,7 @@
           <a:lstStyle/>
           <a:p>
             <a:r>
-              <a:rPr sz="3000" b="1">
+              <a:rPr sz="3000" b="1" i="0">
                 <a:solidFill>
                   <a:srgbClr val="11374B"/>
                 </a:solidFill>
@@ -7720,7 +11444,7 @@
           <a:lstStyle/>
           <a:p>
             <a:r>
-              <a:rPr sz="1400" b="0">
+              <a:rPr sz="1400" b="0" i="0">
                 <a:solidFill>
                   <a:srgbClr val="5A6973"/>
                 </a:solidFill>
@@ -7755,7 +11479,7 @@
           <a:p>
             <a:pPr algn="r"/>
             <a:r>
-              <a:rPr sz="1100" b="0">
+              <a:rPr sz="1100" b="0" i="0">
                 <a:solidFill>
                   <a:srgbClr val="78828C"/>
                 </a:solidFill>
@@ -7768,14 +11492,83 @@
       </p:sp>
       <p:sp>
         <p:nvSpPr>
-          <p:cNvPr id="6" name="Rectangle 5"/>
+          <p:cNvPr id="6" name="TextBox 5"/>
+          <p:cNvSpPr txBox="1"/>
+          <p:nvPr/>
+        </p:nvSpPr>
+        <p:spPr>
+          <a:xfrm>
+            <a:off x="365760" y="6446520"/>
+            <a:ext cx="8229600" cy="228600"/>
+          </a:xfrm>
+          <a:prstGeom prst="rect">
+            <a:avLst/>
+          </a:prstGeom>
+          <a:noFill/>
+        </p:spPr>
+        <p:txBody>
+          <a:bodyPr wrap="square">
+            <a:spAutoFit/>
+          </a:bodyPr>
+          <a:lstStyle/>
+          <a:p>
+            <a:r>
+              <a:rPr sz="900" b="0" i="0">
+                <a:solidFill>
+                  <a:srgbClr val="78828C"/>
+                </a:solidFill>
+                <a:latin typeface="Aptos"/>
+              </a:rPr>
+              <a:t>Air Conditioning · Chapter 1 · Topic 1.1</a:t>
+            </a:r>
+          </a:p>
+        </p:txBody>
+      </p:sp>
+      <p:sp>
+        <p:nvSpPr>
+          <p:cNvPr id="7" name="TextBox 6"/>
+          <p:cNvSpPr txBox="1"/>
+          <p:nvPr/>
+        </p:nvSpPr>
+        <p:spPr>
+          <a:xfrm>
+            <a:off x="11292840" y="6446520"/>
+            <a:ext cx="502920" cy="228600"/>
+          </a:xfrm>
+          <a:prstGeom prst="rect">
+            <a:avLst/>
+          </a:prstGeom>
+          <a:noFill/>
+        </p:spPr>
+        <p:txBody>
+          <a:bodyPr wrap="square">
+            <a:spAutoFit/>
+          </a:bodyPr>
+          <a:lstStyle/>
+          <a:p>
+            <a:pPr algn="r"/>
+            <a:r>
+              <a:rPr sz="900" b="0" i="0">
+                <a:solidFill>
+                  <a:srgbClr val="78828C"/>
+                </a:solidFill>
+                <a:latin typeface="Aptos"/>
+              </a:rPr>
+              <a:t>8</a:t>
+            </a:r>
+          </a:p>
+        </p:txBody>
+      </p:sp>
+      <p:sp>
+        <p:nvSpPr>
+          <p:cNvPr id="8" name="Rectangle 7"/>
           <p:cNvSpPr/>
           <p:nvPr/>
         </p:nvSpPr>
         <p:spPr>
           <a:xfrm>
-            <a:off x="685800" y="1737360"/>
-            <a:ext cx="10835640" cy="4343400"/>
+            <a:off x="731520" y="1691640"/>
+            <a:ext cx="10744200" cy="4343400"/>
           </a:xfrm>
           <a:prstGeom prst="rect">
             <a:avLst/>
@@ -7783,7 +11576,7 @@
           <a:solidFill>
             <a:srgbClr val="FFFFFF"/>
           </a:solidFill>
-          <a:ln>
+          <a:ln w="12700">
             <a:solidFill>
               <a:srgbClr val="DCE2E8"/>
             </a:solidFill>
@@ -7813,14 +11606,48 @@
       </p:sp>
       <p:sp>
         <p:nvSpPr>
-          <p:cNvPr id="7" name="TextBox 6"/>
-          <p:cNvSpPr txBox="1"/>
-          <p:nvPr/>
-        </p:nvSpPr>
-        <p:spPr>
-          <a:xfrm>
-            <a:off x="1005840" y="2057400"/>
-            <a:ext cx="10149840" cy="3749039"/>
+          <p:cNvPr id="9" name="TextBox 8"/>
+          <p:cNvSpPr txBox="1"/>
+          <p:nvPr/>
+        </p:nvSpPr>
+        <p:spPr>
+          <a:xfrm>
+            <a:off x="1005840" y="1965960"/>
+            <a:ext cx="3657600" cy="365760"/>
+          </a:xfrm>
+          <a:prstGeom prst="rect">
+            <a:avLst/>
+          </a:prstGeom>
+          <a:noFill/>
+        </p:spPr>
+        <p:txBody>
+          <a:bodyPr wrap="square">
+            <a:spAutoFit/>
+          </a:bodyPr>
+          <a:lstStyle/>
+          <a:p>
+            <a:r>
+              <a:rPr sz="2000" b="1" i="0">
+                <a:solidFill>
+                  <a:srgbClr val="11374B"/>
+                </a:solidFill>
+                <a:latin typeface="Aptos"/>
+              </a:rPr>
+              <a:t>Average load ≠ design load</a:t>
+            </a:r>
+          </a:p>
+        </p:txBody>
+      </p:sp>
+      <p:sp>
+        <p:nvSpPr>
+          <p:cNvPr id="10" name="TextBox 9"/>
+          <p:cNvSpPr txBox="1"/>
+          <p:nvPr/>
+        </p:nvSpPr>
+        <p:spPr>
+          <a:xfrm>
+            <a:off x="1005840" y="2514600"/>
+            <a:ext cx="3931920" cy="2377440"/>
           </a:xfrm>
           <a:prstGeom prst="rect">
             <a:avLst/>
@@ -7835,9 +11662,9 @@
           <a:p>
             <a:pPr>
               <a:spcAft>
-                <a:spcPts val="1200"/>
+                <a:spcPts val="1000"/>
               </a:spcAft>
-              <a:defRPr sz="2200">
+              <a:defRPr sz="1700">
                 <a:solidFill>
                   <a:srgbClr val="232D37"/>
                 </a:solidFill>
@@ -7845,40 +11672,664 @@
               </a:defRPr>
             </a:pPr>
             <a:r>
-              <a:t>Air conditioners are sized for the maximum expected load, not the average load.</a:t>
-            </a:r>
-          </a:p>
-        </p:txBody>
-      </p:sp>
-      <p:sp>
-        <p:nvSpPr>
-          <p:cNvPr id="8" name="TextBox 7"/>
-          <p:cNvSpPr txBox="1"/>
-          <p:nvPr/>
-        </p:nvSpPr>
-        <p:spPr>
-          <a:xfrm>
-            <a:off x="365760" y="6446520"/>
-            <a:ext cx="11430000" cy="228600"/>
-          </a:xfrm>
-          <a:prstGeom prst="rect">
-            <a:avLst/>
-          </a:prstGeom>
-          <a:noFill/>
-        </p:spPr>
-        <p:txBody>
-          <a:bodyPr wrap="none">
-            <a:spAutoFit/>
-          </a:bodyPr>
-          <a:lstStyle/>
-          <a:p>
-            <a:r>
-              <a:rPr sz="900">
-                <a:solidFill>
-                  <a:srgbClr val="78828C"/>
-                </a:solidFill>
+              <a:t>Equipment must cover the maximum expected load.</a:t>
+            </a:r>
+          </a:p>
+          <a:p>
+            <a:pPr>
+              <a:spcAft>
+                <a:spcPts val="1000"/>
+              </a:spcAft>
+              <a:defRPr sz="1700">
+                <a:solidFill>
+                  <a:srgbClr val="232D37"/>
+                </a:solidFill>
+                <a:latin typeface="Aptos"/>
+              </a:defRPr>
+            </a:pPr>
+            <a:r>
+              <a:t>Average load can understate the required capacity.</a:t>
+            </a:r>
+          </a:p>
+        </p:txBody>
+      </p:sp>
+      <p:cxnSp>
+        <p:nvCxnSpPr>
+          <p:cNvPr id="11" name="Connector 10"/>
+          <p:cNvCxnSpPr/>
+          <p:nvPr/>
+        </p:nvCxnSpPr>
+        <p:spPr>
+          <a:xfrm>
+            <a:off x="5486400" y="4983479"/>
+            <a:ext cx="4937760" cy="0"/>
+          </a:xfrm>
+          <a:prstGeom prst="line">
+            <a:avLst/>
+          </a:prstGeom>
+          <a:ln w="12700">
+            <a:solidFill>
+              <a:srgbClr val="8C96A0"/>
+            </a:solidFill>
+          </a:ln>
+        </p:spPr>
+        <p:style>
+          <a:lnRef idx="2">
+            <a:schemeClr val="accent1"/>
+          </a:lnRef>
+          <a:fillRef idx="0">
+            <a:schemeClr val="accent1"/>
+          </a:fillRef>
+          <a:effectRef idx="1">
+            <a:schemeClr val="accent1"/>
+          </a:effectRef>
+          <a:fontRef idx="minor">
+            <a:schemeClr val="tx1"/>
+          </a:fontRef>
+        </p:style>
+      </p:cxnSp>
+      <p:cxnSp>
+        <p:nvCxnSpPr>
+          <p:cNvPr id="12" name="Connector 11"/>
+          <p:cNvCxnSpPr/>
+          <p:nvPr/>
+        </p:nvCxnSpPr>
+        <p:spPr>
+          <a:xfrm flipV="1">
+            <a:off x="5486400" y="2331720"/>
+            <a:ext cx="0" cy="2651759"/>
+          </a:xfrm>
+          <a:prstGeom prst="line">
+            <a:avLst/>
+          </a:prstGeom>
+          <a:ln w="12700">
+            <a:solidFill>
+              <a:srgbClr val="8C96A0"/>
+            </a:solidFill>
+          </a:ln>
+        </p:spPr>
+        <p:style>
+          <a:lnRef idx="2">
+            <a:schemeClr val="accent1"/>
+          </a:lnRef>
+          <a:fillRef idx="0">
+            <a:schemeClr val="accent1"/>
+          </a:fillRef>
+          <a:effectRef idx="1">
+            <a:schemeClr val="accent1"/>
+          </a:effectRef>
+          <a:fontRef idx="minor">
+            <a:schemeClr val="tx1"/>
+          </a:fontRef>
+        </p:style>
+      </p:cxnSp>
+      <p:cxnSp>
+        <p:nvCxnSpPr>
+          <p:cNvPr id="13" name="Connector 12"/>
+          <p:cNvCxnSpPr/>
+          <p:nvPr/>
+        </p:nvCxnSpPr>
+        <p:spPr>
+          <a:xfrm flipV="1">
+            <a:off x="5486400" y="4055363"/>
+            <a:ext cx="987552" cy="397764"/>
+          </a:xfrm>
+          <a:prstGeom prst="line">
+            <a:avLst/>
+          </a:prstGeom>
+          <a:ln w="38100">
+            <a:solidFill>
+              <a:srgbClr val="E76F51"/>
+            </a:solidFill>
+          </a:ln>
+        </p:spPr>
+        <p:style>
+          <a:lnRef idx="2">
+            <a:schemeClr val="accent1"/>
+          </a:lnRef>
+          <a:fillRef idx="0">
+            <a:schemeClr val="accent1"/>
+          </a:fillRef>
+          <a:effectRef idx="1">
+            <a:schemeClr val="accent1"/>
+          </a:effectRef>
+          <a:fontRef idx="minor">
+            <a:schemeClr val="tx1"/>
+          </a:fontRef>
+        </p:style>
+      </p:cxnSp>
+      <p:cxnSp>
+        <p:nvCxnSpPr>
+          <p:cNvPr id="14" name="Connector 13"/>
+          <p:cNvCxnSpPr/>
+          <p:nvPr/>
+        </p:nvCxnSpPr>
+        <p:spPr>
+          <a:xfrm flipV="1">
+            <a:off x="6473952" y="3525011"/>
+            <a:ext cx="987552" cy="530352"/>
+          </a:xfrm>
+          <a:prstGeom prst="line">
+            <a:avLst/>
+          </a:prstGeom>
+          <a:ln w="38100">
+            <a:solidFill>
+              <a:srgbClr val="E76F51"/>
+            </a:solidFill>
+          </a:ln>
+        </p:spPr>
+        <p:style>
+          <a:lnRef idx="2">
+            <a:schemeClr val="accent1"/>
+          </a:lnRef>
+          <a:fillRef idx="0">
+            <a:schemeClr val="accent1"/>
+          </a:fillRef>
+          <a:effectRef idx="1">
+            <a:schemeClr val="accent1"/>
+          </a:effectRef>
+          <a:fontRef idx="minor">
+            <a:schemeClr val="tx1"/>
+          </a:fontRef>
+        </p:style>
+      </p:cxnSp>
+      <p:cxnSp>
+        <p:nvCxnSpPr>
+          <p:cNvPr id="15" name="Connector 14"/>
+          <p:cNvCxnSpPr/>
+          <p:nvPr/>
+        </p:nvCxnSpPr>
+        <p:spPr>
+          <a:xfrm flipV="1">
+            <a:off x="7461504" y="2464308"/>
+            <a:ext cx="987552" cy="1060703"/>
+          </a:xfrm>
+          <a:prstGeom prst="line">
+            <a:avLst/>
+          </a:prstGeom>
+          <a:ln w="38100">
+            <a:solidFill>
+              <a:srgbClr val="E76F51"/>
+            </a:solidFill>
+          </a:ln>
+        </p:spPr>
+        <p:style>
+          <a:lnRef idx="2">
+            <a:schemeClr val="accent1"/>
+          </a:lnRef>
+          <a:fillRef idx="0">
+            <a:schemeClr val="accent1"/>
+          </a:fillRef>
+          <a:effectRef idx="1">
+            <a:schemeClr val="accent1"/>
+          </a:effectRef>
+          <a:fontRef idx="minor">
+            <a:schemeClr val="tx1"/>
+          </a:fontRef>
+        </p:style>
+      </p:cxnSp>
+      <p:cxnSp>
+        <p:nvCxnSpPr>
+          <p:cNvPr id="16" name="Connector 15"/>
+          <p:cNvCxnSpPr/>
+          <p:nvPr/>
+        </p:nvCxnSpPr>
+        <p:spPr>
+          <a:xfrm>
+            <a:off x="8449056" y="2464308"/>
+            <a:ext cx="987552" cy="662940"/>
+          </a:xfrm>
+          <a:prstGeom prst="line">
+            <a:avLst/>
+          </a:prstGeom>
+          <a:ln w="38100">
+            <a:solidFill>
+              <a:srgbClr val="E76F51"/>
+            </a:solidFill>
+          </a:ln>
+        </p:spPr>
+        <p:style>
+          <a:lnRef idx="2">
+            <a:schemeClr val="accent1"/>
+          </a:lnRef>
+          <a:fillRef idx="0">
+            <a:schemeClr val="accent1"/>
+          </a:fillRef>
+          <a:effectRef idx="1">
+            <a:schemeClr val="accent1"/>
+          </a:effectRef>
+          <a:fontRef idx="minor">
+            <a:schemeClr val="tx1"/>
+          </a:fontRef>
+        </p:style>
+      </p:cxnSp>
+      <p:cxnSp>
+        <p:nvCxnSpPr>
+          <p:cNvPr id="17" name="Connector 16"/>
+          <p:cNvCxnSpPr/>
+          <p:nvPr/>
+        </p:nvCxnSpPr>
+        <p:spPr>
+          <a:xfrm>
+            <a:off x="9436608" y="3127248"/>
+            <a:ext cx="987552" cy="928115"/>
+          </a:xfrm>
+          <a:prstGeom prst="line">
+            <a:avLst/>
+          </a:prstGeom>
+          <a:ln w="38100">
+            <a:solidFill>
+              <a:srgbClr val="E76F51"/>
+            </a:solidFill>
+          </a:ln>
+        </p:spPr>
+        <p:style>
+          <a:lnRef idx="2">
+            <a:schemeClr val="accent1"/>
+          </a:lnRef>
+          <a:fillRef idx="0">
+            <a:schemeClr val="accent1"/>
+          </a:fillRef>
+          <a:effectRef idx="1">
+            <a:schemeClr val="accent1"/>
+          </a:effectRef>
+          <a:fontRef idx="minor">
+            <a:schemeClr val="tx1"/>
+          </a:fontRef>
+        </p:style>
+      </p:cxnSp>
+      <p:sp>
+        <p:nvSpPr>
+          <p:cNvPr id="18" name="Oval 17"/>
+          <p:cNvSpPr/>
+          <p:nvPr/>
+        </p:nvSpPr>
+        <p:spPr>
+          <a:xfrm>
+            <a:off x="5445252" y="4411979"/>
+            <a:ext cx="82296" cy="82296"/>
+          </a:xfrm>
+          <a:prstGeom prst="ellipse">
+            <a:avLst/>
+          </a:prstGeom>
+          <a:solidFill>
+            <a:srgbClr val="E76F51"/>
+          </a:solidFill>
+          <a:ln>
+            <a:noFill/>
+          </a:ln>
+        </p:spPr>
+        <p:style>
+          <a:lnRef idx="1">
+            <a:schemeClr val="accent1"/>
+          </a:lnRef>
+          <a:fillRef idx="3">
+            <a:schemeClr val="accent1"/>
+          </a:fillRef>
+          <a:effectRef idx="2">
+            <a:schemeClr val="accent1"/>
+          </a:effectRef>
+          <a:fontRef idx="minor">
+            <a:schemeClr val="lt1"/>
+          </a:fontRef>
+        </p:style>
+        <p:txBody>
+          <a:bodyPr rtlCol="0" anchor="ctr"/>
+          <a:lstStyle/>
+          <a:p>
+            <a:pPr algn="ctr"/>
+          </a:p>
+        </p:txBody>
+      </p:sp>
+      <p:sp>
+        <p:nvSpPr>
+          <p:cNvPr id="19" name="Oval 18"/>
+          <p:cNvSpPr/>
+          <p:nvPr/>
+        </p:nvSpPr>
+        <p:spPr>
+          <a:xfrm>
+            <a:off x="6432804" y="4014215"/>
+            <a:ext cx="82296" cy="82296"/>
+          </a:xfrm>
+          <a:prstGeom prst="ellipse">
+            <a:avLst/>
+          </a:prstGeom>
+          <a:solidFill>
+            <a:srgbClr val="E76F51"/>
+          </a:solidFill>
+          <a:ln>
+            <a:noFill/>
+          </a:ln>
+        </p:spPr>
+        <p:style>
+          <a:lnRef idx="1">
+            <a:schemeClr val="accent1"/>
+          </a:lnRef>
+          <a:fillRef idx="3">
+            <a:schemeClr val="accent1"/>
+          </a:fillRef>
+          <a:effectRef idx="2">
+            <a:schemeClr val="accent1"/>
+          </a:effectRef>
+          <a:fontRef idx="minor">
+            <a:schemeClr val="lt1"/>
+          </a:fontRef>
+        </p:style>
+        <p:txBody>
+          <a:bodyPr rtlCol="0" anchor="ctr"/>
+          <a:lstStyle/>
+          <a:p>
+            <a:pPr algn="ctr"/>
+          </a:p>
+        </p:txBody>
+      </p:sp>
+      <p:sp>
+        <p:nvSpPr>
+          <p:cNvPr id="20" name="Oval 19"/>
+          <p:cNvSpPr/>
+          <p:nvPr/>
+        </p:nvSpPr>
+        <p:spPr>
+          <a:xfrm>
+            <a:off x="7420356" y="3483863"/>
+            <a:ext cx="82296" cy="82296"/>
+          </a:xfrm>
+          <a:prstGeom prst="ellipse">
+            <a:avLst/>
+          </a:prstGeom>
+          <a:solidFill>
+            <a:srgbClr val="E76F51"/>
+          </a:solidFill>
+          <a:ln>
+            <a:noFill/>
+          </a:ln>
+        </p:spPr>
+        <p:style>
+          <a:lnRef idx="1">
+            <a:schemeClr val="accent1"/>
+          </a:lnRef>
+          <a:fillRef idx="3">
+            <a:schemeClr val="accent1"/>
+          </a:fillRef>
+          <a:effectRef idx="2">
+            <a:schemeClr val="accent1"/>
+          </a:effectRef>
+          <a:fontRef idx="minor">
+            <a:schemeClr val="lt1"/>
+          </a:fontRef>
+        </p:style>
+        <p:txBody>
+          <a:bodyPr rtlCol="0" anchor="ctr"/>
+          <a:lstStyle/>
+          <a:p>
+            <a:pPr algn="ctr"/>
+          </a:p>
+        </p:txBody>
+      </p:sp>
+      <p:sp>
+        <p:nvSpPr>
+          <p:cNvPr id="21" name="Oval 20"/>
+          <p:cNvSpPr/>
+          <p:nvPr/>
+        </p:nvSpPr>
+        <p:spPr>
+          <a:xfrm>
+            <a:off x="8407908" y="2423160"/>
+            <a:ext cx="82296" cy="82296"/>
+          </a:xfrm>
+          <a:prstGeom prst="ellipse">
+            <a:avLst/>
+          </a:prstGeom>
+          <a:solidFill>
+            <a:srgbClr val="E76F51"/>
+          </a:solidFill>
+          <a:ln>
+            <a:noFill/>
+          </a:ln>
+        </p:spPr>
+        <p:style>
+          <a:lnRef idx="1">
+            <a:schemeClr val="accent1"/>
+          </a:lnRef>
+          <a:fillRef idx="3">
+            <a:schemeClr val="accent1"/>
+          </a:fillRef>
+          <a:effectRef idx="2">
+            <a:schemeClr val="accent1"/>
+          </a:effectRef>
+          <a:fontRef idx="minor">
+            <a:schemeClr val="lt1"/>
+          </a:fontRef>
+        </p:style>
+        <p:txBody>
+          <a:bodyPr rtlCol="0" anchor="ctr"/>
+          <a:lstStyle/>
+          <a:p>
+            <a:pPr algn="ctr"/>
+          </a:p>
+        </p:txBody>
+      </p:sp>
+      <p:sp>
+        <p:nvSpPr>
+          <p:cNvPr id="22" name="Oval 21"/>
+          <p:cNvSpPr/>
+          <p:nvPr/>
+        </p:nvSpPr>
+        <p:spPr>
+          <a:xfrm>
+            <a:off x="9395460" y="3086100"/>
+            <a:ext cx="82296" cy="82296"/>
+          </a:xfrm>
+          <a:prstGeom prst="ellipse">
+            <a:avLst/>
+          </a:prstGeom>
+          <a:solidFill>
+            <a:srgbClr val="E76F51"/>
+          </a:solidFill>
+          <a:ln>
+            <a:noFill/>
+          </a:ln>
+        </p:spPr>
+        <p:style>
+          <a:lnRef idx="1">
+            <a:schemeClr val="accent1"/>
+          </a:lnRef>
+          <a:fillRef idx="3">
+            <a:schemeClr val="accent1"/>
+          </a:fillRef>
+          <a:effectRef idx="2">
+            <a:schemeClr val="accent1"/>
+          </a:effectRef>
+          <a:fontRef idx="minor">
+            <a:schemeClr val="lt1"/>
+          </a:fontRef>
+        </p:style>
+        <p:txBody>
+          <a:bodyPr rtlCol="0" anchor="ctr"/>
+          <a:lstStyle/>
+          <a:p>
+            <a:pPr algn="ctr"/>
+          </a:p>
+        </p:txBody>
+      </p:sp>
+      <p:sp>
+        <p:nvSpPr>
+          <p:cNvPr id="23" name="Oval 22"/>
+          <p:cNvSpPr/>
+          <p:nvPr/>
+        </p:nvSpPr>
+        <p:spPr>
+          <a:xfrm>
+            <a:off x="10383012" y="4014215"/>
+            <a:ext cx="82296" cy="82296"/>
+          </a:xfrm>
+          <a:prstGeom prst="ellipse">
+            <a:avLst/>
+          </a:prstGeom>
+          <a:solidFill>
+            <a:srgbClr val="E76F51"/>
+          </a:solidFill>
+          <a:ln>
+            <a:noFill/>
+          </a:ln>
+        </p:spPr>
+        <p:style>
+          <a:lnRef idx="1">
+            <a:schemeClr val="accent1"/>
+          </a:lnRef>
+          <a:fillRef idx="3">
+            <a:schemeClr val="accent1"/>
+          </a:fillRef>
+          <a:effectRef idx="2">
+            <a:schemeClr val="accent1"/>
+          </a:effectRef>
+          <a:fontRef idx="minor">
+            <a:schemeClr val="lt1"/>
+          </a:fontRef>
+        </p:style>
+        <p:txBody>
+          <a:bodyPr rtlCol="0" anchor="ctr"/>
+          <a:lstStyle/>
+          <a:p>
+            <a:pPr algn="ctr"/>
+          </a:p>
+        </p:txBody>
+      </p:sp>
+      <p:sp>
+        <p:nvSpPr>
+          <p:cNvPr id="24" name="TextBox 23"/>
+          <p:cNvSpPr txBox="1"/>
+          <p:nvPr/>
+        </p:nvSpPr>
+        <p:spPr>
+          <a:xfrm>
+            <a:off x="9235440" y="2423160"/>
+            <a:ext cx="1097280" cy="228600"/>
+          </a:xfrm>
+          <a:prstGeom prst="rect">
+            <a:avLst/>
+          </a:prstGeom>
+          <a:noFill/>
+        </p:spPr>
+        <p:txBody>
+          <a:bodyPr wrap="square">
+            <a:spAutoFit/>
+          </a:bodyPr>
+          <a:lstStyle/>
+          <a:p>
+            <a:r>
+              <a:rPr sz="1000" b="1" i="0">
+                <a:solidFill>
+                  <a:srgbClr val="E76F51"/>
+                </a:solidFill>
+                <a:latin typeface="Aptos"/>
               </a:rPr>
-              <a:t>Air Conditioning · Chapter 1 · Topic 1.1</a:t>
+              <a:t>Peak</a:t>
+            </a:r>
+          </a:p>
+        </p:txBody>
+      </p:sp>
+      <p:cxnSp>
+        <p:nvCxnSpPr>
+          <p:cNvPr id="25" name="Connector 24"/>
+          <p:cNvCxnSpPr/>
+          <p:nvPr/>
+        </p:nvCxnSpPr>
+        <p:spPr>
+          <a:xfrm>
+            <a:off x="5486400" y="4069080"/>
+            <a:ext cx="4937760" cy="0"/>
+          </a:xfrm>
+          <a:prstGeom prst="line">
+            <a:avLst/>
+          </a:prstGeom>
+          <a:ln w="25400">
+            <a:solidFill>
+              <a:srgbClr val="457B9D"/>
+            </a:solidFill>
+          </a:ln>
+        </p:spPr>
+        <p:style>
+          <a:lnRef idx="2">
+            <a:schemeClr val="accent1"/>
+          </a:lnRef>
+          <a:fillRef idx="0">
+            <a:schemeClr val="accent1"/>
+          </a:fillRef>
+          <a:effectRef idx="1">
+            <a:schemeClr val="accent1"/>
+          </a:effectRef>
+          <a:fontRef idx="minor">
+            <a:schemeClr val="tx1"/>
+          </a:fontRef>
+        </p:style>
+      </p:cxnSp>
+      <p:sp>
+        <p:nvSpPr>
+          <p:cNvPr id="26" name="TextBox 25"/>
+          <p:cNvSpPr txBox="1"/>
+          <p:nvPr/>
+        </p:nvSpPr>
+        <p:spPr>
+          <a:xfrm>
+            <a:off x="9646920" y="4133087"/>
+            <a:ext cx="640080" cy="201168"/>
+          </a:xfrm>
+          <a:prstGeom prst="rect">
+            <a:avLst/>
+          </a:prstGeom>
+          <a:noFill/>
+        </p:spPr>
+        <p:txBody>
+          <a:bodyPr wrap="square">
+            <a:spAutoFit/>
+          </a:bodyPr>
+          <a:lstStyle/>
+          <a:p>
+            <a:r>
+              <a:rPr sz="1000" b="1" i="0">
+                <a:solidFill>
+                  <a:srgbClr val="457B9D"/>
+                </a:solidFill>
+                <a:latin typeface="Aptos"/>
+              </a:rPr>
+              <a:t>Avg</a:t>
+            </a:r>
+          </a:p>
+        </p:txBody>
+      </p:sp>
+      <p:sp>
+        <p:nvSpPr>
+          <p:cNvPr id="27" name="TextBox 26"/>
+          <p:cNvSpPr txBox="1"/>
+          <p:nvPr/>
+        </p:nvSpPr>
+        <p:spPr>
+          <a:xfrm>
+            <a:off x="5486400" y="5166360"/>
+            <a:ext cx="4937760" cy="228600"/>
+          </a:xfrm>
+          <a:prstGeom prst="rect">
+            <a:avLst/>
+          </a:prstGeom>
+          <a:noFill/>
+        </p:spPr>
+        <p:txBody>
+          <a:bodyPr wrap="square">
+            <a:spAutoFit/>
+          </a:bodyPr>
+          <a:lstStyle/>
+          <a:p>
+            <a:pPr algn="ctr"/>
+            <a:r>
+              <a:rPr sz="1100" b="0" i="0">
+                <a:solidFill>
+                  <a:srgbClr val="5A6973"/>
+                </a:solidFill>
+                <a:latin typeface="Aptos"/>
+              </a:rPr>
+              <a:t>Time of day →</a:t>
             </a:r>
           </a:p>
         </p:txBody>
@@ -7975,7 +12426,7 @@
           <a:lstStyle/>
           <a:p>
             <a:r>
-              <a:rPr sz="3000" b="1">
+              <a:rPr sz="3000" b="1" i="0">
                 <a:solidFill>
                   <a:srgbClr val="11374B"/>
                 </a:solidFill>
@@ -8009,7 +12460,7 @@
           <a:lstStyle/>
           <a:p>
             <a:r>
-              <a:rPr sz="1400" b="0">
+              <a:rPr sz="1400" b="0" i="0">
                 <a:solidFill>
                   <a:srgbClr val="5A6973"/>
                 </a:solidFill>
@@ -8044,7 +12495,7 @@
           <a:p>
             <a:pPr algn="r"/>
             <a:r>
-              <a:rPr sz="1100" b="0">
+              <a:rPr sz="1100" b="0" i="0">
                 <a:solidFill>
                   <a:srgbClr val="78828C"/>
                 </a:solidFill>
@@ -8057,14 +12508,83 @@
       </p:sp>
       <p:sp>
         <p:nvSpPr>
-          <p:cNvPr id="6" name="Rectangle 5"/>
+          <p:cNvPr id="6" name="TextBox 5"/>
+          <p:cNvSpPr txBox="1"/>
+          <p:nvPr/>
+        </p:nvSpPr>
+        <p:spPr>
+          <a:xfrm>
+            <a:off x="365760" y="6446520"/>
+            <a:ext cx="8229600" cy="228600"/>
+          </a:xfrm>
+          <a:prstGeom prst="rect">
+            <a:avLst/>
+          </a:prstGeom>
+          <a:noFill/>
+        </p:spPr>
+        <p:txBody>
+          <a:bodyPr wrap="square">
+            <a:spAutoFit/>
+          </a:bodyPr>
+          <a:lstStyle/>
+          <a:p>
+            <a:r>
+              <a:rPr sz="900" b="0" i="0">
+                <a:solidFill>
+                  <a:srgbClr val="78828C"/>
+                </a:solidFill>
+                <a:latin typeface="Aptos"/>
+              </a:rPr>
+              <a:t>Air Conditioning · Chapter 1 · Topic 1.1</a:t>
+            </a:r>
+          </a:p>
+        </p:txBody>
+      </p:sp>
+      <p:sp>
+        <p:nvSpPr>
+          <p:cNvPr id="7" name="TextBox 6"/>
+          <p:cNvSpPr txBox="1"/>
+          <p:nvPr/>
+        </p:nvSpPr>
+        <p:spPr>
+          <a:xfrm>
+            <a:off x="11292840" y="6446520"/>
+            <a:ext cx="502920" cy="228600"/>
+          </a:xfrm>
+          <a:prstGeom prst="rect">
+            <a:avLst/>
+          </a:prstGeom>
+          <a:noFill/>
+        </p:spPr>
+        <p:txBody>
+          <a:bodyPr wrap="square">
+            <a:spAutoFit/>
+          </a:bodyPr>
+          <a:lstStyle/>
+          <a:p>
+            <a:pPr algn="r"/>
+            <a:r>
+              <a:rPr sz="900" b="0" i="0">
+                <a:solidFill>
+                  <a:srgbClr val="78828C"/>
+                </a:solidFill>
+                <a:latin typeface="Aptos"/>
+              </a:rPr>
+              <a:t>9</a:t>
+            </a:r>
+          </a:p>
+        </p:txBody>
+      </p:sp>
+      <p:sp>
+        <p:nvSpPr>
+          <p:cNvPr id="8" name="Rectangle 7"/>
           <p:cNvSpPr/>
           <p:nvPr/>
         </p:nvSpPr>
         <p:spPr>
           <a:xfrm>
-            <a:off x="685800" y="1737360"/>
-            <a:ext cx="10835640" cy="4343400"/>
+            <a:off x="731520" y="1691640"/>
+            <a:ext cx="10744200" cy="4343400"/>
           </a:xfrm>
           <a:prstGeom prst="rect">
             <a:avLst/>
@@ -8072,7 +12592,7 @@
           <a:solidFill>
             <a:srgbClr val="FFFFFF"/>
           </a:solidFill>
-          <a:ln>
+          <a:ln w="12700">
             <a:solidFill>
               <a:srgbClr val="DCE2E8"/>
             </a:solidFill>
@@ -8100,90 +12620,829 @@
           </a:p>
         </p:txBody>
       </p:sp>
-      <p:sp>
-        <p:nvSpPr>
-          <p:cNvPr id="7" name="TextBox 6"/>
-          <p:cNvSpPr txBox="1"/>
-          <p:nvPr/>
-        </p:nvSpPr>
-        <p:spPr>
-          <a:xfrm>
-            <a:off x="1005840" y="2057400"/>
-            <a:ext cx="10149840" cy="3749039"/>
-          </a:xfrm>
-          <a:prstGeom prst="rect">
-            <a:avLst/>
-          </a:prstGeom>
-          <a:noFill/>
-        </p:spPr>
-        <p:txBody>
-          <a:bodyPr wrap="square">
-            <a:spAutoFit/>
-          </a:bodyPr>
-          <a:lstStyle/>
-          <a:p>
-            <a:pPr>
-              <a:spcAft>
-                <a:spcPts val="1200"/>
-              </a:spcAft>
-              <a:defRPr sz="2200">
+      <p:cxnSp>
+        <p:nvCxnSpPr>
+          <p:cNvPr id="9" name="Connector 8"/>
+          <p:cNvCxnSpPr/>
+          <p:nvPr/>
+        </p:nvCxnSpPr>
+        <p:spPr>
+          <a:xfrm>
+            <a:off x="1143000" y="4983479"/>
+            <a:ext cx="6400800" cy="0"/>
+          </a:xfrm>
+          <a:prstGeom prst="line">
+            <a:avLst/>
+          </a:prstGeom>
+          <a:ln w="12700">
+            <a:solidFill>
+              <a:srgbClr val="8C96A0"/>
+            </a:solidFill>
+          </a:ln>
+        </p:spPr>
+        <p:style>
+          <a:lnRef idx="2">
+            <a:schemeClr val="accent1"/>
+          </a:lnRef>
+          <a:fillRef idx="0">
+            <a:schemeClr val="accent1"/>
+          </a:fillRef>
+          <a:effectRef idx="1">
+            <a:schemeClr val="accent1"/>
+          </a:effectRef>
+          <a:fontRef idx="minor">
+            <a:schemeClr val="tx1"/>
+          </a:fontRef>
+        </p:style>
+      </p:cxnSp>
+      <p:cxnSp>
+        <p:nvCxnSpPr>
+          <p:cNvPr id="10" name="Connector 9"/>
+          <p:cNvCxnSpPr/>
+          <p:nvPr/>
+        </p:nvCxnSpPr>
+        <p:spPr>
+          <a:xfrm flipV="1">
+            <a:off x="1143000" y="2331720"/>
+            <a:ext cx="0" cy="2651759"/>
+          </a:xfrm>
+          <a:prstGeom prst="line">
+            <a:avLst/>
+          </a:prstGeom>
+          <a:ln w="12700">
+            <a:solidFill>
+              <a:srgbClr val="8C96A0"/>
+            </a:solidFill>
+          </a:ln>
+        </p:spPr>
+        <p:style>
+          <a:lnRef idx="2">
+            <a:schemeClr val="accent1"/>
+          </a:lnRef>
+          <a:fillRef idx="0">
+            <a:schemeClr val="accent1"/>
+          </a:fillRef>
+          <a:effectRef idx="1">
+            <a:schemeClr val="accent1"/>
+          </a:effectRef>
+          <a:fontRef idx="minor">
+            <a:schemeClr val="tx1"/>
+          </a:fontRef>
+        </p:style>
+      </p:cxnSp>
+      <p:cxnSp>
+        <p:nvCxnSpPr>
+          <p:cNvPr id="11" name="Connector 10"/>
+          <p:cNvCxnSpPr/>
+          <p:nvPr/>
+        </p:nvCxnSpPr>
+        <p:spPr>
+          <a:xfrm flipV="1">
+            <a:off x="1143000" y="4187952"/>
+            <a:ext cx="1408176" cy="397764"/>
+          </a:xfrm>
+          <a:prstGeom prst="line">
+            <a:avLst/>
+          </a:prstGeom>
+          <a:ln w="38100">
+            <a:solidFill>
+              <a:srgbClr val="E76F51"/>
+            </a:solidFill>
+          </a:ln>
+        </p:spPr>
+        <p:style>
+          <a:lnRef idx="2">
+            <a:schemeClr val="accent1"/>
+          </a:lnRef>
+          <a:fillRef idx="0">
+            <a:schemeClr val="accent1"/>
+          </a:fillRef>
+          <a:effectRef idx="1">
+            <a:schemeClr val="accent1"/>
+          </a:effectRef>
+          <a:fontRef idx="minor">
+            <a:schemeClr val="tx1"/>
+          </a:fontRef>
+        </p:style>
+      </p:cxnSp>
+      <p:cxnSp>
+        <p:nvCxnSpPr>
+          <p:cNvPr id="12" name="Connector 11"/>
+          <p:cNvCxnSpPr/>
+          <p:nvPr/>
+        </p:nvCxnSpPr>
+        <p:spPr>
+          <a:xfrm flipV="1">
+            <a:off x="2551176" y="3392424"/>
+            <a:ext cx="1472184" cy="795528"/>
+          </a:xfrm>
+          <a:prstGeom prst="line">
+            <a:avLst/>
+          </a:prstGeom>
+          <a:ln w="38100">
+            <a:solidFill>
+              <a:srgbClr val="E76F51"/>
+            </a:solidFill>
+          </a:ln>
+        </p:spPr>
+        <p:style>
+          <a:lnRef idx="2">
+            <a:schemeClr val="accent1"/>
+          </a:lnRef>
+          <a:fillRef idx="0">
+            <a:schemeClr val="accent1"/>
+          </a:fillRef>
+          <a:effectRef idx="1">
+            <a:schemeClr val="accent1"/>
+          </a:effectRef>
+          <a:fontRef idx="minor">
+            <a:schemeClr val="tx1"/>
+          </a:fontRef>
+        </p:style>
+      </p:cxnSp>
+      <p:cxnSp>
+        <p:nvCxnSpPr>
+          <p:cNvPr id="13" name="Connector 12"/>
+          <p:cNvCxnSpPr/>
+          <p:nvPr/>
+        </p:nvCxnSpPr>
+        <p:spPr>
+          <a:xfrm flipV="1">
+            <a:off x="4023360" y="2543860"/>
+            <a:ext cx="1280160" cy="848564"/>
+          </a:xfrm>
+          <a:prstGeom prst="line">
+            <a:avLst/>
+          </a:prstGeom>
+          <a:ln w="38100">
+            <a:solidFill>
+              <a:srgbClr val="E76F51"/>
+            </a:solidFill>
+          </a:ln>
+        </p:spPr>
+        <p:style>
+          <a:lnRef idx="2">
+            <a:schemeClr val="accent1"/>
+          </a:lnRef>
+          <a:fillRef idx="0">
+            <a:schemeClr val="accent1"/>
+          </a:fillRef>
+          <a:effectRef idx="1">
+            <a:schemeClr val="accent1"/>
+          </a:effectRef>
+          <a:fontRef idx="minor">
+            <a:schemeClr val="tx1"/>
+          </a:fontRef>
+        </p:style>
+      </p:cxnSp>
+      <p:cxnSp>
+        <p:nvCxnSpPr>
+          <p:cNvPr id="14" name="Connector 13"/>
+          <p:cNvCxnSpPr/>
+          <p:nvPr/>
+        </p:nvCxnSpPr>
+        <p:spPr>
+          <a:xfrm>
+            <a:off x="5303520" y="2543860"/>
+            <a:ext cx="1280160" cy="715975"/>
+          </a:xfrm>
+          <a:prstGeom prst="line">
+            <a:avLst/>
+          </a:prstGeom>
+          <a:ln w="38100">
+            <a:solidFill>
+              <a:srgbClr val="E76F51"/>
+            </a:solidFill>
+          </a:ln>
+        </p:spPr>
+        <p:style>
+          <a:lnRef idx="2">
+            <a:schemeClr val="accent1"/>
+          </a:lnRef>
+          <a:fillRef idx="0">
+            <a:schemeClr val="accent1"/>
+          </a:fillRef>
+          <a:effectRef idx="1">
+            <a:schemeClr val="accent1"/>
+          </a:effectRef>
+          <a:fontRef idx="minor">
+            <a:schemeClr val="tx1"/>
+          </a:fontRef>
+        </p:style>
+      </p:cxnSp>
+      <p:cxnSp>
+        <p:nvCxnSpPr>
+          <p:cNvPr id="15" name="Connector 14"/>
+          <p:cNvCxnSpPr/>
+          <p:nvPr/>
+        </p:nvCxnSpPr>
+        <p:spPr>
+          <a:xfrm>
+            <a:off x="6583680" y="3259835"/>
+            <a:ext cx="960120" cy="1193292"/>
+          </a:xfrm>
+          <a:prstGeom prst="line">
+            <a:avLst/>
+          </a:prstGeom>
+          <a:ln w="38100">
+            <a:solidFill>
+              <a:srgbClr val="E76F51"/>
+            </a:solidFill>
+          </a:ln>
+        </p:spPr>
+        <p:style>
+          <a:lnRef idx="2">
+            <a:schemeClr val="accent1"/>
+          </a:lnRef>
+          <a:fillRef idx="0">
+            <a:schemeClr val="accent1"/>
+          </a:fillRef>
+          <a:effectRef idx="1">
+            <a:schemeClr val="accent1"/>
+          </a:effectRef>
+          <a:fontRef idx="minor">
+            <a:schemeClr val="tx1"/>
+          </a:fontRef>
+        </p:style>
+      </p:cxnSp>
+      <p:sp>
+        <p:nvSpPr>
+          <p:cNvPr id="16" name="Oval 15"/>
+          <p:cNvSpPr/>
+          <p:nvPr/>
+        </p:nvSpPr>
+        <p:spPr>
+          <a:xfrm>
+            <a:off x="1101852" y="4544568"/>
+            <a:ext cx="82296" cy="82296"/>
+          </a:xfrm>
+          <a:prstGeom prst="ellipse">
+            <a:avLst/>
+          </a:prstGeom>
+          <a:solidFill>
+            <a:srgbClr val="E76F51"/>
+          </a:solidFill>
+          <a:ln>
+            <a:noFill/>
+          </a:ln>
+        </p:spPr>
+        <p:style>
+          <a:lnRef idx="1">
+            <a:schemeClr val="accent1"/>
+          </a:lnRef>
+          <a:fillRef idx="3">
+            <a:schemeClr val="accent1"/>
+          </a:fillRef>
+          <a:effectRef idx="2">
+            <a:schemeClr val="accent1"/>
+          </a:effectRef>
+          <a:fontRef idx="minor">
+            <a:schemeClr val="lt1"/>
+          </a:fontRef>
+        </p:style>
+        <p:txBody>
+          <a:bodyPr rtlCol="0" anchor="ctr"/>
+          <a:lstStyle/>
+          <a:p>
+            <a:pPr algn="ctr"/>
+          </a:p>
+        </p:txBody>
+      </p:sp>
+      <p:sp>
+        <p:nvSpPr>
+          <p:cNvPr id="17" name="Oval 16"/>
+          <p:cNvSpPr/>
+          <p:nvPr/>
+        </p:nvSpPr>
+        <p:spPr>
+          <a:xfrm>
+            <a:off x="2510028" y="4146804"/>
+            <a:ext cx="82296" cy="82296"/>
+          </a:xfrm>
+          <a:prstGeom prst="ellipse">
+            <a:avLst/>
+          </a:prstGeom>
+          <a:solidFill>
+            <a:srgbClr val="E76F51"/>
+          </a:solidFill>
+          <a:ln>
+            <a:noFill/>
+          </a:ln>
+        </p:spPr>
+        <p:style>
+          <a:lnRef idx="1">
+            <a:schemeClr val="accent1"/>
+          </a:lnRef>
+          <a:fillRef idx="3">
+            <a:schemeClr val="accent1"/>
+          </a:fillRef>
+          <a:effectRef idx="2">
+            <a:schemeClr val="accent1"/>
+          </a:effectRef>
+          <a:fontRef idx="minor">
+            <a:schemeClr val="lt1"/>
+          </a:fontRef>
+        </p:style>
+        <p:txBody>
+          <a:bodyPr rtlCol="0" anchor="ctr"/>
+          <a:lstStyle/>
+          <a:p>
+            <a:pPr algn="ctr"/>
+          </a:p>
+        </p:txBody>
+      </p:sp>
+      <p:sp>
+        <p:nvSpPr>
+          <p:cNvPr id="18" name="Oval 17"/>
+          <p:cNvSpPr/>
+          <p:nvPr/>
+        </p:nvSpPr>
+        <p:spPr>
+          <a:xfrm>
+            <a:off x="3982212" y="3351276"/>
+            <a:ext cx="82296" cy="82296"/>
+          </a:xfrm>
+          <a:prstGeom prst="ellipse">
+            <a:avLst/>
+          </a:prstGeom>
+          <a:solidFill>
+            <a:srgbClr val="E76F51"/>
+          </a:solidFill>
+          <a:ln>
+            <a:noFill/>
+          </a:ln>
+        </p:spPr>
+        <p:style>
+          <a:lnRef idx="1">
+            <a:schemeClr val="accent1"/>
+          </a:lnRef>
+          <a:fillRef idx="3">
+            <a:schemeClr val="accent1"/>
+          </a:fillRef>
+          <a:effectRef idx="2">
+            <a:schemeClr val="accent1"/>
+          </a:effectRef>
+          <a:fontRef idx="minor">
+            <a:schemeClr val="lt1"/>
+          </a:fontRef>
+        </p:style>
+        <p:txBody>
+          <a:bodyPr rtlCol="0" anchor="ctr"/>
+          <a:lstStyle/>
+          <a:p>
+            <a:pPr algn="ctr"/>
+          </a:p>
+        </p:txBody>
+      </p:sp>
+      <p:sp>
+        <p:nvSpPr>
+          <p:cNvPr id="19" name="Oval 18"/>
+          <p:cNvSpPr/>
+          <p:nvPr/>
+        </p:nvSpPr>
+        <p:spPr>
+          <a:xfrm>
+            <a:off x="5262372" y="2502712"/>
+            <a:ext cx="82296" cy="82296"/>
+          </a:xfrm>
+          <a:prstGeom prst="ellipse">
+            <a:avLst/>
+          </a:prstGeom>
+          <a:solidFill>
+            <a:srgbClr val="E76F51"/>
+          </a:solidFill>
+          <a:ln>
+            <a:noFill/>
+          </a:ln>
+        </p:spPr>
+        <p:style>
+          <a:lnRef idx="1">
+            <a:schemeClr val="accent1"/>
+          </a:lnRef>
+          <a:fillRef idx="3">
+            <a:schemeClr val="accent1"/>
+          </a:fillRef>
+          <a:effectRef idx="2">
+            <a:schemeClr val="accent1"/>
+          </a:effectRef>
+          <a:fontRef idx="minor">
+            <a:schemeClr val="lt1"/>
+          </a:fontRef>
+        </p:style>
+        <p:txBody>
+          <a:bodyPr rtlCol="0" anchor="ctr"/>
+          <a:lstStyle/>
+          <a:p>
+            <a:pPr algn="ctr"/>
+          </a:p>
+        </p:txBody>
+      </p:sp>
+      <p:sp>
+        <p:nvSpPr>
+          <p:cNvPr id="20" name="Oval 19"/>
+          <p:cNvSpPr/>
+          <p:nvPr/>
+        </p:nvSpPr>
+        <p:spPr>
+          <a:xfrm>
+            <a:off x="6542532" y="3218687"/>
+            <a:ext cx="82296" cy="82296"/>
+          </a:xfrm>
+          <a:prstGeom prst="ellipse">
+            <a:avLst/>
+          </a:prstGeom>
+          <a:solidFill>
+            <a:srgbClr val="E76F51"/>
+          </a:solidFill>
+          <a:ln>
+            <a:noFill/>
+          </a:ln>
+        </p:spPr>
+        <p:style>
+          <a:lnRef idx="1">
+            <a:schemeClr val="accent1"/>
+          </a:lnRef>
+          <a:fillRef idx="3">
+            <a:schemeClr val="accent1"/>
+          </a:fillRef>
+          <a:effectRef idx="2">
+            <a:schemeClr val="accent1"/>
+          </a:effectRef>
+          <a:fontRef idx="minor">
+            <a:schemeClr val="lt1"/>
+          </a:fontRef>
+        </p:style>
+        <p:txBody>
+          <a:bodyPr rtlCol="0" anchor="ctr"/>
+          <a:lstStyle/>
+          <a:p>
+            <a:pPr algn="ctr"/>
+          </a:p>
+        </p:txBody>
+      </p:sp>
+      <p:sp>
+        <p:nvSpPr>
+          <p:cNvPr id="21" name="Oval 20"/>
+          <p:cNvSpPr/>
+          <p:nvPr/>
+        </p:nvSpPr>
+        <p:spPr>
+          <a:xfrm>
+            <a:off x="7502652" y="4411979"/>
+            <a:ext cx="82296" cy="82296"/>
+          </a:xfrm>
+          <a:prstGeom prst="ellipse">
+            <a:avLst/>
+          </a:prstGeom>
+          <a:solidFill>
+            <a:srgbClr val="E76F51"/>
+          </a:solidFill>
+          <a:ln>
+            <a:noFill/>
+          </a:ln>
+        </p:spPr>
+        <p:style>
+          <a:lnRef idx="1">
+            <a:schemeClr val="accent1"/>
+          </a:lnRef>
+          <a:fillRef idx="3">
+            <a:schemeClr val="accent1"/>
+          </a:fillRef>
+          <a:effectRef idx="2">
+            <a:schemeClr val="accent1"/>
+          </a:effectRef>
+          <a:fontRef idx="minor">
+            <a:schemeClr val="lt1"/>
+          </a:fontRef>
+        </p:style>
+        <p:txBody>
+          <a:bodyPr rtlCol="0" anchor="ctr"/>
+          <a:lstStyle/>
+          <a:p>
+            <a:pPr algn="ctr"/>
+          </a:p>
+        </p:txBody>
+      </p:sp>
+      <p:sp>
+        <p:nvSpPr>
+          <p:cNvPr id="22" name="TextBox 21"/>
+          <p:cNvSpPr txBox="1"/>
+          <p:nvPr/>
+        </p:nvSpPr>
+        <p:spPr>
+          <a:xfrm>
+            <a:off x="6355080" y="2423160"/>
+            <a:ext cx="1097280" cy="228600"/>
+          </a:xfrm>
+          <a:prstGeom prst="rect">
+            <a:avLst/>
+          </a:prstGeom>
+          <a:noFill/>
+        </p:spPr>
+        <p:txBody>
+          <a:bodyPr wrap="square">
+            <a:spAutoFit/>
+          </a:bodyPr>
+          <a:lstStyle/>
+          <a:p>
+            <a:r>
+              <a:rPr sz="1000" b="1" i="0">
+                <a:solidFill>
+                  <a:srgbClr val="E76F51"/>
+                </a:solidFill>
+                <a:latin typeface="Aptos"/>
+              </a:rPr>
+              <a:t>Load</a:t>
+            </a:r>
+          </a:p>
+        </p:txBody>
+      </p:sp>
+      <p:sp>
+        <p:nvSpPr>
+          <p:cNvPr id="23" name="TextBox 22"/>
+          <p:cNvSpPr txBox="1"/>
+          <p:nvPr/>
+        </p:nvSpPr>
+        <p:spPr>
+          <a:xfrm>
+            <a:off x="960120" y="5074920"/>
+            <a:ext cx="640080" cy="182880"/>
+          </a:xfrm>
+          <a:prstGeom prst="rect">
+            <a:avLst/>
+          </a:prstGeom>
+          <a:noFill/>
+        </p:spPr>
+        <p:txBody>
+          <a:bodyPr wrap="square">
+            <a:spAutoFit/>
+          </a:bodyPr>
+          <a:lstStyle/>
+          <a:p>
+            <a:pPr algn="ctr"/>
+            <a:r>
+              <a:rPr sz="900" b="0" i="0">
+                <a:solidFill>
+                  <a:srgbClr val="5A6973"/>
+                </a:solidFill>
+                <a:latin typeface="Aptos"/>
+              </a:rPr>
+              <a:t>08:00</a:t>
+            </a:r>
+          </a:p>
+        </p:txBody>
+      </p:sp>
+      <p:sp>
+        <p:nvSpPr>
+          <p:cNvPr id="24" name="TextBox 23"/>
+          <p:cNvSpPr txBox="1"/>
+          <p:nvPr/>
+        </p:nvSpPr>
+        <p:spPr>
+          <a:xfrm>
+            <a:off x="2971800" y="5074920"/>
+            <a:ext cx="640080" cy="182880"/>
+          </a:xfrm>
+          <a:prstGeom prst="rect">
+            <a:avLst/>
+          </a:prstGeom>
+          <a:noFill/>
+        </p:spPr>
+        <p:txBody>
+          <a:bodyPr wrap="square">
+            <a:spAutoFit/>
+          </a:bodyPr>
+          <a:lstStyle/>
+          <a:p>
+            <a:pPr algn="ctr"/>
+            <a:r>
+              <a:rPr sz="900" b="0" i="0">
+                <a:solidFill>
+                  <a:srgbClr val="5A6973"/>
+                </a:solidFill>
+                <a:latin typeface="Aptos"/>
+              </a:rPr>
+              <a:t>12:00</a:t>
+            </a:r>
+          </a:p>
+        </p:txBody>
+      </p:sp>
+      <p:sp>
+        <p:nvSpPr>
+          <p:cNvPr id="25" name="TextBox 24"/>
+          <p:cNvSpPr txBox="1"/>
+          <p:nvPr/>
+        </p:nvSpPr>
+        <p:spPr>
+          <a:xfrm>
+            <a:off x="4983480" y="5074920"/>
+            <a:ext cx="640080" cy="182880"/>
+          </a:xfrm>
+          <a:prstGeom prst="rect">
+            <a:avLst/>
+          </a:prstGeom>
+          <a:noFill/>
+        </p:spPr>
+        <p:txBody>
+          <a:bodyPr wrap="square">
+            <a:spAutoFit/>
+          </a:bodyPr>
+          <a:lstStyle/>
+          <a:p>
+            <a:pPr algn="ctr"/>
+            <a:r>
+              <a:rPr sz="900" b="0" i="0">
+                <a:solidFill>
+                  <a:srgbClr val="5A6973"/>
+                </a:solidFill>
+                <a:latin typeface="Aptos"/>
+              </a:rPr>
+              <a:t>16:00</a:t>
+            </a:r>
+          </a:p>
+        </p:txBody>
+      </p:sp>
+      <p:sp>
+        <p:nvSpPr>
+          <p:cNvPr id="26" name="TextBox 25"/>
+          <p:cNvSpPr txBox="1"/>
+          <p:nvPr/>
+        </p:nvSpPr>
+        <p:spPr>
+          <a:xfrm>
+            <a:off x="6995160" y="5074920"/>
+            <a:ext cx="640080" cy="182880"/>
+          </a:xfrm>
+          <a:prstGeom prst="rect">
+            <a:avLst/>
+          </a:prstGeom>
+          <a:noFill/>
+        </p:spPr>
+        <p:txBody>
+          <a:bodyPr wrap="square">
+            <a:spAutoFit/>
+          </a:bodyPr>
+          <a:lstStyle/>
+          <a:p>
+            <a:pPr algn="ctr"/>
+            <a:r>
+              <a:rPr sz="900" b="0" i="0">
+                <a:solidFill>
+                  <a:srgbClr val="5A6973"/>
+                </a:solidFill>
+                <a:latin typeface="Aptos"/>
+              </a:rPr>
+              <a:t>20:00</a:t>
+            </a:r>
+          </a:p>
+        </p:txBody>
+      </p:sp>
+      <p:sp>
+        <p:nvSpPr>
+          <p:cNvPr id="27" name="Rounded Rectangle 26"/>
+          <p:cNvSpPr/>
+          <p:nvPr/>
+        </p:nvSpPr>
+        <p:spPr>
+          <a:xfrm>
+            <a:off x="8046720" y="2148840"/>
+            <a:ext cx="2926080" cy="2606040"/>
+          </a:xfrm>
+          <a:prstGeom prst="roundRect">
+            <a:avLst/>
+          </a:prstGeom>
+          <a:solidFill>
+            <a:srgbClr val="F5F9FA"/>
+          </a:solidFill>
+          <a:ln w="12700">
+            <a:solidFill>
+              <a:srgbClr val="DCE2E8"/>
+            </a:solidFill>
+          </a:ln>
+        </p:spPr>
+        <p:style>
+          <a:lnRef idx="1">
+            <a:schemeClr val="accent1"/>
+          </a:lnRef>
+          <a:fillRef idx="3">
+            <a:schemeClr val="accent1"/>
+          </a:fillRef>
+          <a:effectRef idx="2">
+            <a:schemeClr val="accent1"/>
+          </a:effectRef>
+          <a:fontRef idx="minor">
+            <a:schemeClr val="lt1"/>
+          </a:fontRef>
+        </p:style>
+        <p:txBody>
+          <a:bodyPr rtlCol="0" anchor="ctr"/>
+          <a:lstStyle/>
+          <a:p>
+            <a:pPr algn="ctr"/>
+          </a:p>
+        </p:txBody>
+      </p:sp>
+      <p:sp>
+        <p:nvSpPr>
+          <p:cNvPr id="28" name="TextBox 27"/>
+          <p:cNvSpPr txBox="1"/>
+          <p:nvPr/>
+        </p:nvSpPr>
+        <p:spPr>
+          <a:xfrm>
+            <a:off x="8321040" y="2468880"/>
+            <a:ext cx="2377440" cy="320040"/>
+          </a:xfrm>
+          <a:prstGeom prst="rect">
+            <a:avLst/>
+          </a:prstGeom>
+          <a:noFill/>
+        </p:spPr>
+        <p:txBody>
+          <a:bodyPr wrap="square">
+            <a:spAutoFit/>
+          </a:bodyPr>
+          <a:lstStyle/>
+          <a:p>
+            <a:pPr algn="ctr"/>
+            <a:r>
+              <a:rPr sz="1800" b="1" i="0">
+                <a:solidFill>
+                  <a:srgbClr val="E76F51"/>
+                </a:solidFill>
+                <a:latin typeface="Aptos"/>
+              </a:rPr>
+              <a:t>Peak around 15:00–16:00</a:t>
+            </a:r>
+          </a:p>
+        </p:txBody>
+      </p:sp>
+      <p:sp>
+        <p:nvSpPr>
+          <p:cNvPr id="29" name="TextBox 28"/>
+          <p:cNvSpPr txBox="1"/>
+          <p:nvPr/>
+        </p:nvSpPr>
+        <p:spPr>
+          <a:xfrm>
+            <a:off x="8321040" y="3154680"/>
+            <a:ext cx="2377440" cy="685800"/>
+          </a:xfrm>
+          <a:prstGeom prst="rect">
+            <a:avLst/>
+          </a:prstGeom>
+          <a:noFill/>
+        </p:spPr>
+        <p:txBody>
+          <a:bodyPr wrap="square">
+            <a:spAutoFit/>
+          </a:bodyPr>
+          <a:lstStyle/>
+          <a:p>
+            <a:pPr algn="ctr"/>
+            <a:r>
+              <a:rPr sz="1500" b="1" i="0">
                 <a:solidFill>
                   <a:srgbClr val="232D37"/>
                 </a:solidFill>
                 <a:latin typeface="Aptos"/>
-              </a:defRPr>
-            </a:pPr>
-            <a:r>
-              <a:t>Solar gain + envelope thermal lag + occupants + lighting + equipment</a:t>
-            </a:r>
-          </a:p>
-          <a:p>
-            <a:pPr>
-              <a:spcAft>
-                <a:spcPts val="1200"/>
-              </a:spcAft>
-              <a:defRPr sz="2200">
-                <a:solidFill>
-                  <a:srgbClr val="232D37"/>
-                </a:solidFill>
-                <a:latin typeface="Aptos"/>
-              </a:defRPr>
-            </a:pPr>
-            <a:r>
-              <a:t>Typical office peak: around 15:00–16:00</a:t>
-            </a:r>
-          </a:p>
-        </p:txBody>
-      </p:sp>
-      <p:sp>
-        <p:nvSpPr>
-          <p:cNvPr id="8" name="TextBox 7"/>
-          <p:cNvSpPr txBox="1"/>
-          <p:nvPr/>
-        </p:nvSpPr>
-        <p:spPr>
-          <a:xfrm>
-            <a:off x="365760" y="6446520"/>
-            <a:ext cx="11430000" cy="228600"/>
-          </a:xfrm>
-          <a:prstGeom prst="rect">
-            <a:avLst/>
-          </a:prstGeom>
-          <a:noFill/>
-        </p:spPr>
-        <p:txBody>
-          <a:bodyPr wrap="none">
-            <a:spAutoFit/>
-          </a:bodyPr>
-          <a:lstStyle/>
-          <a:p>
-            <a:r>
-              <a:rPr sz="900">
-                <a:solidFill>
-                  <a:srgbClr val="78828C"/>
-                </a:solidFill>
               </a:rPr>
-              <a:t>Air Conditioning · Chapter 1 · Topic 1.1</a:t>
+              <a:t>solar + thermal lag + internal gains</a:t>
+            </a:r>
+          </a:p>
+        </p:txBody>
+      </p:sp>
+      <p:sp>
+        <p:nvSpPr>
+          <p:cNvPr id="30" name="TextBox 29"/>
+          <p:cNvSpPr txBox="1"/>
+          <p:nvPr/>
+        </p:nvSpPr>
+        <p:spPr>
+          <a:xfrm>
+            <a:off x="8321040" y="4069080"/>
+            <a:ext cx="2377440" cy="411480"/>
+          </a:xfrm>
+          <a:prstGeom prst="rect">
+            <a:avLst/>
+          </a:prstGeom>
+          <a:noFill/>
+        </p:spPr>
+        <p:txBody>
+          <a:bodyPr wrap="square">
+            <a:spAutoFit/>
+          </a:bodyPr>
+          <a:lstStyle/>
+          <a:p>
+            <a:pPr algn="ctr"/>
+            <a:r>
+              <a:rPr sz="1200" b="0" i="0">
+                <a:solidFill>
+                  <a:srgbClr val="5A6973"/>
+                </a:solidFill>
+                <a:latin typeface="Aptos"/>
+              </a:rPr>
+              <a:t>Peak follows use pattern</a:t>
             </a:r>
           </a:p>
         </p:txBody>

--- a/05_Outputs/Air Conditioning/English Slides/Air Con Chapter 1 Topic 1.1 - Visual Lecture Deck CLEAN with TA Figures.pptx
+++ b/05_Outputs/Air Conditioning/English Slides/Air Con Chapter 1 Topic 1.1 - Visual Lecture Deck CLEAN with TA Figures.pptx
@@ -3119,7 +3119,7 @@
         <p:spPr>
           <a:xfrm>
             <a:off x="0" y="0"/>
-            <a:ext cx="12191999" cy="201168"/>
+            <a:ext cx="12191999" cy="182880"/>
           </a:xfrm>
           <a:prstGeom prst="rect">
             <a:avLst/>
@@ -3155,62 +3155,182 @@
       </p:sp>
       <p:sp>
         <p:nvSpPr>
-          <p:cNvPr id="3" name="TextBox 2"/>
-          <p:cNvSpPr txBox="1"/>
-          <p:nvPr/>
-        </p:nvSpPr>
-        <p:spPr>
-          <a:xfrm>
-            <a:off x="502920" y="457200"/>
-            <a:ext cx="11064240" cy="640080"/>
-          </a:xfrm>
-          <a:prstGeom prst="rect">
-            <a:avLst/>
-          </a:prstGeom>
-          <a:noFill/>
-        </p:spPr>
-        <p:txBody>
-          <a:bodyPr wrap="square">
-            <a:spAutoFit/>
-          </a:bodyPr>
-          <a:lstStyle/>
-          <a:p>
-            <a:r>
-              <a:rPr sz="3000" b="1" i="0">
+          <p:cNvPr id="3" name="Right Triangle 2"/>
+          <p:cNvSpPr/>
+          <p:nvPr/>
+        </p:nvSpPr>
+        <p:spPr>
+          <a:xfrm>
+            <a:off x="8778240" y="182880"/>
+            <a:ext cx="3429000" cy="2194560"/>
+          </a:xfrm>
+          <a:prstGeom prst="rtTriangle">
+            <a:avLst/>
+          </a:prstGeom>
+          <a:solidFill>
+            <a:srgbClr val="E7F4F7"/>
+          </a:solidFill>
+          <a:ln>
+            <a:noFill/>
+          </a:ln>
+        </p:spPr>
+        <p:style>
+          <a:lnRef idx="1">
+            <a:schemeClr val="accent1"/>
+          </a:lnRef>
+          <a:fillRef idx="3">
+            <a:schemeClr val="accent1"/>
+          </a:fillRef>
+          <a:effectRef idx="2">
+            <a:schemeClr val="accent1"/>
+          </a:effectRef>
+          <a:fontRef idx="minor">
+            <a:schemeClr val="lt1"/>
+          </a:fontRef>
+        </p:style>
+        <p:txBody>
+          <a:bodyPr rtlCol="0" anchor="ctr"/>
+          <a:lstStyle/>
+          <a:p>
+            <a:pPr algn="ctr"/>
+          </a:p>
+        </p:txBody>
+      </p:sp>
+      <p:sp>
+        <p:nvSpPr>
+          <p:cNvPr id="4" name="Right Triangle 3"/>
+          <p:cNvSpPr/>
+          <p:nvPr/>
+        </p:nvSpPr>
+        <p:spPr>
+          <a:xfrm>
+            <a:off x="9646920" y="4160520"/>
+            <a:ext cx="2560320" cy="2514600"/>
+          </a:xfrm>
+          <a:prstGeom prst="rtTriangle">
+            <a:avLst/>
+          </a:prstGeom>
+          <a:solidFill>
+            <a:srgbClr val="FFEFE6"/>
+          </a:solidFill>
+          <a:ln>
+            <a:noFill/>
+          </a:ln>
+        </p:spPr>
+        <p:style>
+          <a:lnRef idx="1">
+            <a:schemeClr val="accent1"/>
+          </a:lnRef>
+          <a:fillRef idx="3">
+            <a:schemeClr val="accent1"/>
+          </a:fillRef>
+          <a:effectRef idx="2">
+            <a:schemeClr val="accent1"/>
+          </a:effectRef>
+          <a:fontRef idx="minor">
+            <a:schemeClr val="lt1"/>
+          </a:fontRef>
+        </p:style>
+        <p:txBody>
+          <a:bodyPr rtlCol="0" anchor="ctr"/>
+          <a:lstStyle/>
+          <a:p>
+            <a:pPr algn="ctr"/>
+          </a:p>
+        </p:txBody>
+      </p:sp>
+      <p:sp>
+        <p:nvSpPr>
+          <p:cNvPr id="5" name="TextBox 4"/>
+          <p:cNvSpPr txBox="1"/>
+          <p:nvPr/>
+        </p:nvSpPr>
+        <p:spPr>
+          <a:xfrm>
+            <a:off x="621792" y="749808"/>
+            <a:ext cx="5394960" cy="320040"/>
+          </a:xfrm>
+          <a:prstGeom prst="rect">
+            <a:avLst/>
+          </a:prstGeom>
+          <a:noFill/>
+        </p:spPr>
+        <p:txBody>
+          <a:bodyPr wrap="square">
+            <a:spAutoFit/>
+          </a:bodyPr>
+          <a:lstStyle/>
+          <a:p>
+            <a:r>
+              <a:rPr sz="1300" b="1" i="0">
+                <a:solidFill>
+                  <a:srgbClr val="2A9D8F"/>
+                </a:solidFill>
+                <a:latin typeface="Aptos"/>
+              </a:rPr>
+              <a:t>AIR CONDITIONING · CHAPTER 1</a:t>
+            </a:r>
+          </a:p>
+        </p:txBody>
+      </p:sp>
+      <p:sp>
+        <p:nvSpPr>
+          <p:cNvPr id="6" name="TextBox 5"/>
+          <p:cNvSpPr txBox="1"/>
+          <p:nvPr/>
+        </p:nvSpPr>
+        <p:spPr>
+          <a:xfrm>
+            <a:off x="594360" y="1170432"/>
+            <a:ext cx="5760720" cy="868680"/>
+          </a:xfrm>
+          <a:prstGeom prst="rect">
+            <a:avLst/>
+          </a:prstGeom>
+          <a:noFill/>
+        </p:spPr>
+        <p:txBody>
+          <a:bodyPr wrap="square">
+            <a:spAutoFit/>
+          </a:bodyPr>
+          <a:lstStyle/>
+          <a:p>
+            <a:r>
+              <a:rPr sz="3700" b="1" i="0">
                 <a:solidFill>
                   <a:srgbClr val="11374B"/>
                 </a:solidFill>
                 <a:latin typeface="Aptos"/>
               </a:rPr>
-              <a:t>1.1 | Air Conditioning</a:t>
-            </a:r>
-          </a:p>
-        </p:txBody>
-      </p:sp>
-      <p:sp>
-        <p:nvSpPr>
-          <p:cNvPr id="4" name="TextBox 3"/>
-          <p:cNvSpPr txBox="1"/>
-          <p:nvPr/>
-        </p:nvSpPr>
-        <p:spPr>
-          <a:xfrm>
-            <a:off x="530352" y="1060704"/>
-            <a:ext cx="10972800" cy="365760"/>
-          </a:xfrm>
-          <a:prstGeom prst="rect">
-            <a:avLst/>
-          </a:prstGeom>
-          <a:noFill/>
-        </p:spPr>
-        <p:txBody>
-          <a:bodyPr wrap="square">
-            <a:spAutoFit/>
-          </a:bodyPr>
-          <a:lstStyle/>
-          <a:p>
-            <a:r>
-              <a:rPr sz="1400" b="0" i="0">
+              <a:t>1.1 Air Conditioning</a:t>
+            </a:r>
+          </a:p>
+        </p:txBody>
+      </p:sp>
+      <p:sp>
+        <p:nvSpPr>
+          <p:cNvPr id="7" name="TextBox 6"/>
+          <p:cNvSpPr txBox="1"/>
+          <p:nvPr/>
+        </p:nvSpPr>
+        <p:spPr>
+          <a:xfrm>
+            <a:off x="621792" y="1975104"/>
+            <a:ext cx="5669280" cy="384048"/>
+          </a:xfrm>
+          <a:prstGeom prst="rect">
+            <a:avLst/>
+          </a:prstGeom>
+          <a:noFill/>
+        </p:spPr>
+        <p:txBody>
+          <a:bodyPr wrap="square">
+            <a:spAutoFit/>
+          </a:bodyPr>
+          <a:lstStyle/>
+          <a:p>
+            <a:r>
+              <a:rPr sz="1800" b="0" i="0">
                 <a:solidFill>
                   <a:srgbClr val="5A6973"/>
                 </a:solidFill>
@@ -3223,118 +3343,128 @@
       </p:sp>
       <p:sp>
         <p:nvSpPr>
-          <p:cNvPr id="5" name="TextBox 4"/>
-          <p:cNvSpPr txBox="1"/>
-          <p:nvPr/>
-        </p:nvSpPr>
-        <p:spPr>
-          <a:xfrm>
-            <a:off x="11292840" y="502920"/>
-            <a:ext cx="548640" cy="274320"/>
-          </a:xfrm>
-          <a:prstGeom prst="rect">
-            <a:avLst/>
-          </a:prstGeom>
-          <a:noFill/>
-        </p:spPr>
-        <p:txBody>
-          <a:bodyPr wrap="square">
-            <a:spAutoFit/>
-          </a:bodyPr>
-          <a:lstStyle/>
-          <a:p>
-            <a:pPr algn="r"/>
-            <a:r>
-              <a:rPr sz="1100" b="0" i="0">
-                <a:solidFill>
-                  <a:srgbClr val="78828C"/>
-                </a:solidFill>
-                <a:latin typeface="Aptos"/>
-              </a:rPr>
-              <a:t>1</a:t>
-            </a:r>
-          </a:p>
-        </p:txBody>
-      </p:sp>
-      <p:sp>
-        <p:nvSpPr>
-          <p:cNvPr id="6" name="TextBox 5"/>
-          <p:cNvSpPr txBox="1"/>
-          <p:nvPr/>
-        </p:nvSpPr>
-        <p:spPr>
-          <a:xfrm>
-            <a:off x="365760" y="6446520"/>
-            <a:ext cx="8229600" cy="228600"/>
-          </a:xfrm>
-          <a:prstGeom prst="rect">
-            <a:avLst/>
-          </a:prstGeom>
-          <a:noFill/>
-        </p:spPr>
-        <p:txBody>
-          <a:bodyPr wrap="square">
-            <a:spAutoFit/>
-          </a:bodyPr>
-          <a:lstStyle/>
-          <a:p>
-            <a:r>
-              <a:rPr sz="900" b="0" i="0">
-                <a:solidFill>
-                  <a:srgbClr val="78828C"/>
-                </a:solidFill>
-                <a:latin typeface="Aptos"/>
-              </a:rPr>
-              <a:t>Air Conditioning · Chapter 1 · Topic 1.1</a:t>
-            </a:r>
-          </a:p>
-        </p:txBody>
-      </p:sp>
-      <p:sp>
-        <p:nvSpPr>
-          <p:cNvPr id="7" name="TextBox 6"/>
-          <p:cNvSpPr txBox="1"/>
-          <p:nvPr/>
-        </p:nvSpPr>
-        <p:spPr>
-          <a:xfrm>
-            <a:off x="11292840" y="6446520"/>
-            <a:ext cx="502920" cy="228600"/>
-          </a:xfrm>
-          <a:prstGeom prst="rect">
-            <a:avLst/>
-          </a:prstGeom>
-          <a:noFill/>
-        </p:spPr>
-        <p:txBody>
-          <a:bodyPr wrap="square">
-            <a:spAutoFit/>
-          </a:bodyPr>
-          <a:lstStyle/>
-          <a:p>
-            <a:pPr algn="r"/>
-            <a:r>
-              <a:rPr sz="900" b="0" i="0">
-                <a:solidFill>
-                  <a:srgbClr val="78828C"/>
-                </a:solidFill>
-                <a:latin typeface="Aptos"/>
-              </a:rPr>
-              <a:t>1</a:t>
-            </a:r>
-          </a:p>
-        </p:txBody>
-      </p:sp>
-      <p:sp>
-        <p:nvSpPr>
-          <p:cNvPr id="8" name="Rounded Rectangle 7"/>
+          <p:cNvPr id="8" name="TextBox 7"/>
+          <p:cNvSpPr txBox="1"/>
+          <p:nvPr/>
+        </p:nvSpPr>
+        <p:spPr>
+          <a:xfrm>
+            <a:off x="640080" y="2578608"/>
+            <a:ext cx="5257800" cy="749808"/>
+          </a:xfrm>
+          <a:prstGeom prst="rect">
+            <a:avLst/>
+          </a:prstGeom>
+          <a:noFill/>
+        </p:spPr>
+        <p:txBody>
+          <a:bodyPr wrap="square">
+            <a:spAutoFit/>
+          </a:bodyPr>
+          <a:lstStyle/>
+          <a:p>
+            <a:r>
+              <a:rPr sz="2000" b="1" i="0">
+                <a:solidFill>
+                  <a:srgbClr val="232D37"/>
+                </a:solidFill>
+                <a:latin typeface="Aptos"/>
+              </a:rPr>
+              <a:t>Air conditioning is not simply cooling. It is the simultaneous control of the indoor environment.</a:t>
+            </a:r>
+          </a:p>
+        </p:txBody>
+      </p:sp>
+      <p:sp>
+        <p:nvSpPr>
+          <p:cNvPr id="9" name="Rounded Rectangle 8"/>
           <p:cNvSpPr/>
           <p:nvPr/>
         </p:nvSpPr>
         <p:spPr>
           <a:xfrm>
-            <a:off x="822960" y="1554480"/>
-            <a:ext cx="10561320" cy="4434840"/>
+            <a:off x="658368" y="3749039"/>
+            <a:ext cx="5074920" cy="658368"/>
+          </a:xfrm>
+          <a:prstGeom prst="roundRect">
+            <a:avLst/>
+          </a:prstGeom>
+          <a:solidFill>
+            <a:srgbClr val="E6F4F7"/>
+          </a:solidFill>
+          <a:ln w="12700">
+            <a:solidFill>
+              <a:srgbClr val="B9D9E0"/>
+            </a:solidFill>
+          </a:ln>
+        </p:spPr>
+        <p:style>
+          <a:lnRef idx="1">
+            <a:schemeClr val="accent1"/>
+          </a:lnRef>
+          <a:fillRef idx="3">
+            <a:schemeClr val="accent1"/>
+          </a:fillRef>
+          <a:effectRef idx="2">
+            <a:schemeClr val="accent1"/>
+          </a:effectRef>
+          <a:fontRef idx="minor">
+            <a:schemeClr val="lt1"/>
+          </a:fontRef>
+        </p:style>
+        <p:txBody>
+          <a:bodyPr rtlCol="0" anchor="ctr"/>
+          <a:lstStyle/>
+          <a:p>
+            <a:pPr algn="ctr"/>
+          </a:p>
+        </p:txBody>
+      </p:sp>
+      <p:sp>
+        <p:nvSpPr>
+          <p:cNvPr id="10" name="TextBox 9"/>
+          <p:cNvSpPr txBox="1"/>
+          <p:nvPr/>
+        </p:nvSpPr>
+        <p:spPr>
+          <a:xfrm>
+            <a:off x="914400" y="3931920"/>
+            <a:ext cx="4572000" cy="228600"/>
+          </a:xfrm>
+          <a:prstGeom prst="rect">
+            <a:avLst/>
+          </a:prstGeom>
+          <a:noFill/>
+        </p:spPr>
+        <p:txBody>
+          <a:bodyPr wrap="square">
+            <a:spAutoFit/>
+          </a:bodyPr>
+          <a:lstStyle/>
+          <a:p>
+            <a:pPr algn="ctr"/>
+            <a:r>
+              <a:rPr sz="1400" b="1" i="0">
+                <a:solidFill>
+                  <a:srgbClr val="11374B"/>
+                </a:solidFill>
+                <a:latin typeface="Aptos"/>
+              </a:rPr>
+              <a:t>Teaching focus: cooling-mode AC for Thailand</a:t>
+            </a:r>
+          </a:p>
+        </p:txBody>
+      </p:sp>
+      <p:sp>
+        <p:nvSpPr>
+          <p:cNvPr id="11" name="Rounded Rectangle 10"/>
+          <p:cNvSpPr/>
+          <p:nvPr/>
+        </p:nvSpPr>
+        <p:spPr>
+          <a:xfrm>
+            <a:off x="6400800" y="1051560"/>
+            <a:ext cx="4983480" cy="4434840"/>
           </a:xfrm>
           <a:prstGeom prst="roundRect">
             <a:avLst/>
@@ -3372,24 +3502,24 @@
       </p:sp>
       <p:sp>
         <p:nvSpPr>
-          <p:cNvPr id="9" name="Rounded Rectangle 8"/>
+          <p:cNvPr id="12" name="Rounded Rectangle 11"/>
           <p:cNvSpPr/>
           <p:nvPr/>
         </p:nvSpPr>
         <p:spPr>
           <a:xfrm>
-            <a:off x="3886200" y="2148840"/>
-            <a:ext cx="4389120" cy="2103120"/>
+            <a:off x="7178040" y="2057400"/>
+            <a:ext cx="3429000" cy="2057400"/>
           </a:xfrm>
           <a:prstGeom prst="roundRect">
             <a:avLst/>
           </a:prstGeom>
           <a:solidFill>
-            <a:srgbClr val="E6F4F7"/>
+            <a:srgbClr val="ECF7F9"/>
           </a:solidFill>
           <a:ln w="12700">
             <a:solidFill>
-              <a:srgbClr val="B4D2DC"/>
+              <a:srgbClr val="B2D2DB"/>
             </a:solidFill>
           </a:ln>
         </p:spPr>
@@ -3417,29 +3547,29 @@
       </p:sp>
       <p:sp>
         <p:nvSpPr>
-          <p:cNvPr id="10" name="TextBox 9"/>
-          <p:cNvSpPr txBox="1"/>
-          <p:nvPr/>
-        </p:nvSpPr>
-        <p:spPr>
-          <a:xfrm>
-            <a:off x="4343400" y="2788920"/>
-            <a:ext cx="3474720" cy="320040"/>
-          </a:xfrm>
-          <a:prstGeom prst="rect">
-            <a:avLst/>
-          </a:prstGeom>
-          <a:noFill/>
-        </p:spPr>
-        <p:txBody>
-          <a:bodyPr wrap="square">
-            <a:spAutoFit/>
-          </a:bodyPr>
-          <a:lstStyle/>
-          <a:p>
-            <a:pPr algn="ctr"/>
-            <a:r>
-              <a:rPr sz="2400" b="1" i="0">
+          <p:cNvPr id="13" name="TextBox 12"/>
+          <p:cNvSpPr txBox="1"/>
+          <p:nvPr/>
+        </p:nvSpPr>
+        <p:spPr>
+          <a:xfrm>
+            <a:off x="7516368" y="2697480"/>
+            <a:ext cx="2743200" cy="320040"/>
+          </a:xfrm>
+          <a:prstGeom prst="rect">
+            <a:avLst/>
+          </a:prstGeom>
+          <a:noFill/>
+        </p:spPr>
+        <p:txBody>
+          <a:bodyPr wrap="square">
+            <a:spAutoFit/>
+          </a:bodyPr>
+          <a:lstStyle/>
+          <a:p>
+            <a:pPr algn="ctr"/>
+            <a:r>
+              <a:rPr sz="2300" b="1" i="0">
                 <a:solidFill>
                   <a:srgbClr val="11374B"/>
                 </a:solidFill>
@@ -3452,14 +3582,345 @@
       </p:sp>
       <p:sp>
         <p:nvSpPr>
-          <p:cNvPr id="11" name="Oval 10"/>
+          <p:cNvPr id="14" name="TextBox 13"/>
+          <p:cNvSpPr txBox="1"/>
+          <p:nvPr/>
+        </p:nvSpPr>
+        <p:spPr>
+          <a:xfrm>
+            <a:off x="7616952" y="3145536"/>
+            <a:ext cx="2514600" cy="274320"/>
+          </a:xfrm>
+          <a:prstGeom prst="rect">
+            <a:avLst/>
+          </a:prstGeom>
+          <a:noFill/>
+        </p:spPr>
+        <p:txBody>
+          <a:bodyPr wrap="square">
+            <a:spAutoFit/>
+          </a:bodyPr>
+          <a:lstStyle/>
+          <a:p>
+            <a:pPr algn="ctr"/>
+            <a:r>
+              <a:rPr sz="1200" b="0" i="0">
+                <a:solidFill>
+                  <a:srgbClr val="5A6973"/>
+                </a:solidFill>
+                <a:latin typeface="Aptos"/>
+              </a:rPr>
+              <a:t>controlled indoor air</a:t>
+            </a:r>
+          </a:p>
+        </p:txBody>
+      </p:sp>
+      <p:cxnSp>
+        <p:nvCxnSpPr>
+          <p:cNvPr id="15" name="Connector 14"/>
+          <p:cNvCxnSpPr/>
+          <p:nvPr/>
+        </p:nvCxnSpPr>
+        <p:spPr>
+          <a:xfrm>
+            <a:off x="6812280" y="1828800"/>
+            <a:ext cx="4160520" cy="0"/>
+          </a:xfrm>
+          <a:prstGeom prst="line">
+            <a:avLst/>
+          </a:prstGeom>
+          <a:ln w="22860">
+            <a:solidFill>
+              <a:srgbClr val="2A9D8F"/>
+            </a:solidFill>
+          </a:ln>
+        </p:spPr>
+        <p:style>
+          <a:lnRef idx="2">
+            <a:schemeClr val="accent1"/>
+          </a:lnRef>
+          <a:fillRef idx="0">
+            <a:schemeClr val="accent1"/>
+          </a:fillRef>
+          <a:effectRef idx="1">
+            <a:schemeClr val="accent1"/>
+          </a:effectRef>
+          <a:fontRef idx="minor">
+            <a:schemeClr val="tx1"/>
+          </a:fontRef>
+        </p:style>
+      </p:cxnSp>
+      <p:cxnSp>
+        <p:nvCxnSpPr>
+          <p:cNvPr id="16" name="Connector 15"/>
+          <p:cNvCxnSpPr/>
+          <p:nvPr/>
+        </p:nvCxnSpPr>
+        <p:spPr>
+          <a:xfrm>
+            <a:off x="6812280" y="2148840"/>
+            <a:ext cx="4160520" cy="0"/>
+          </a:xfrm>
+          <a:prstGeom prst="line">
+            <a:avLst/>
+          </a:prstGeom>
+          <a:ln w="22860">
+            <a:solidFill>
+              <a:srgbClr val="2A9D8F"/>
+            </a:solidFill>
+          </a:ln>
+        </p:spPr>
+        <p:style>
+          <a:lnRef idx="2">
+            <a:schemeClr val="accent1"/>
+          </a:lnRef>
+          <a:fillRef idx="0">
+            <a:schemeClr val="accent1"/>
+          </a:fillRef>
+          <a:effectRef idx="1">
+            <a:schemeClr val="accent1"/>
+          </a:effectRef>
+          <a:fontRef idx="minor">
+            <a:schemeClr val="tx1"/>
+          </a:fontRef>
+        </p:style>
+      </p:cxnSp>
+      <p:cxnSp>
+        <p:nvCxnSpPr>
+          <p:cNvPr id="17" name="Connector 16"/>
+          <p:cNvCxnSpPr/>
+          <p:nvPr/>
+        </p:nvCxnSpPr>
+        <p:spPr>
+          <a:xfrm>
+            <a:off x="6812280" y="4389120"/>
+            <a:ext cx="4160520" cy="0"/>
+          </a:xfrm>
+          <a:prstGeom prst="line">
+            <a:avLst/>
+          </a:prstGeom>
+          <a:ln w="22860">
+            <a:solidFill>
+              <a:srgbClr val="2A9D8F"/>
+            </a:solidFill>
+          </a:ln>
+        </p:spPr>
+        <p:style>
+          <a:lnRef idx="2">
+            <a:schemeClr val="accent1"/>
+          </a:lnRef>
+          <a:fillRef idx="0">
+            <a:schemeClr val="accent1"/>
+          </a:fillRef>
+          <a:effectRef idx="1">
+            <a:schemeClr val="accent1"/>
+          </a:effectRef>
+          <a:fontRef idx="minor">
+            <a:schemeClr val="tx1"/>
+          </a:fontRef>
+        </p:style>
+      </p:cxnSp>
+      <p:cxnSp>
+        <p:nvCxnSpPr>
+          <p:cNvPr id="18" name="Connector 17"/>
+          <p:cNvCxnSpPr/>
+          <p:nvPr/>
+        </p:nvCxnSpPr>
+        <p:spPr>
+          <a:xfrm>
+            <a:off x="6812280" y="4709160"/>
+            <a:ext cx="4160520" cy="0"/>
+          </a:xfrm>
+          <a:prstGeom prst="line">
+            <a:avLst/>
+          </a:prstGeom>
+          <a:ln w="22860">
+            <a:solidFill>
+              <a:srgbClr val="2A9D8F"/>
+            </a:solidFill>
+          </a:ln>
+        </p:spPr>
+        <p:style>
+          <a:lnRef idx="2">
+            <a:schemeClr val="accent1"/>
+          </a:lnRef>
+          <a:fillRef idx="0">
+            <a:schemeClr val="accent1"/>
+          </a:fillRef>
+          <a:effectRef idx="1">
+            <a:schemeClr val="accent1"/>
+          </a:effectRef>
+          <a:fontRef idx="minor">
+            <a:schemeClr val="tx1"/>
+          </a:fontRef>
+        </p:style>
+      </p:cxnSp>
+      <p:sp>
+        <p:nvSpPr>
+          <p:cNvPr id="19" name="Rectangle 18"/>
           <p:cNvSpPr/>
           <p:nvPr/>
         </p:nvSpPr>
         <p:spPr>
           <a:xfrm>
-            <a:off x="1828800" y="1828800"/>
-            <a:ext cx="914400" cy="914400"/>
+            <a:off x="6656832" y="1828800"/>
+            <a:ext cx="228600" cy="2880360"/>
+          </a:xfrm>
+          <a:prstGeom prst="rect">
+            <a:avLst/>
+          </a:prstGeom>
+          <a:solidFill>
+            <a:srgbClr val="2A9D8F"/>
+          </a:solidFill>
+          <a:ln>
+            <a:noFill/>
+          </a:ln>
+        </p:spPr>
+        <p:style>
+          <a:lnRef idx="1">
+            <a:schemeClr val="accent1"/>
+          </a:lnRef>
+          <a:fillRef idx="3">
+            <a:schemeClr val="accent1"/>
+          </a:fillRef>
+          <a:effectRef idx="2">
+            <a:schemeClr val="accent1"/>
+          </a:effectRef>
+          <a:fontRef idx="minor">
+            <a:schemeClr val="lt1"/>
+          </a:fontRef>
+        </p:style>
+        <p:txBody>
+          <a:bodyPr rtlCol="0" anchor="ctr"/>
+          <a:lstStyle/>
+          <a:p>
+            <a:pPr algn="ctr"/>
+          </a:p>
+        </p:txBody>
+      </p:sp>
+      <p:sp>
+        <p:nvSpPr>
+          <p:cNvPr id="20" name="Rectangle 19"/>
+          <p:cNvSpPr/>
+          <p:nvPr/>
+        </p:nvSpPr>
+        <p:spPr>
+          <a:xfrm>
+            <a:off x="10917936" y="1828800"/>
+            <a:ext cx="228600" cy="2880360"/>
+          </a:xfrm>
+          <a:prstGeom prst="rect">
+            <a:avLst/>
+          </a:prstGeom>
+          <a:solidFill>
+            <a:srgbClr val="457B9D"/>
+          </a:solidFill>
+          <a:ln>
+            <a:noFill/>
+          </a:ln>
+        </p:spPr>
+        <p:style>
+          <a:lnRef idx="1">
+            <a:schemeClr val="accent1"/>
+          </a:lnRef>
+          <a:fillRef idx="3">
+            <a:schemeClr val="accent1"/>
+          </a:fillRef>
+          <a:effectRef idx="2">
+            <a:schemeClr val="accent1"/>
+          </a:effectRef>
+          <a:fontRef idx="minor">
+            <a:schemeClr val="lt1"/>
+          </a:fontRef>
+        </p:style>
+        <p:txBody>
+          <a:bodyPr rtlCol="0" anchor="ctr"/>
+          <a:lstStyle/>
+          <a:p>
+            <a:pPr algn="ctr"/>
+          </a:p>
+        </p:txBody>
+      </p:sp>
+      <p:sp>
+        <p:nvSpPr>
+          <p:cNvPr id="21" name="TextBox 20"/>
+          <p:cNvSpPr txBox="1"/>
+          <p:nvPr/>
+        </p:nvSpPr>
+        <p:spPr>
+          <a:xfrm>
+            <a:off x="6446520" y="4956048"/>
+            <a:ext cx="685800" cy="201168"/>
+          </a:xfrm>
+          <a:prstGeom prst="rect">
+            <a:avLst/>
+          </a:prstGeom>
+          <a:noFill/>
+        </p:spPr>
+        <p:txBody>
+          <a:bodyPr wrap="square">
+            <a:spAutoFit/>
+          </a:bodyPr>
+          <a:lstStyle/>
+          <a:p>
+            <a:pPr algn="ctr"/>
+            <a:r>
+              <a:rPr sz="800" b="1" i="0">
+                <a:solidFill>
+                  <a:srgbClr val="2A9D8F"/>
+                </a:solidFill>
+                <a:latin typeface="Aptos"/>
+              </a:rPr>
+              <a:t>Supply</a:t>
+            </a:r>
+          </a:p>
+        </p:txBody>
+      </p:sp>
+      <p:sp>
+        <p:nvSpPr>
+          <p:cNvPr id="22" name="TextBox 21"/>
+          <p:cNvSpPr txBox="1"/>
+          <p:nvPr/>
+        </p:nvSpPr>
+        <p:spPr>
+          <a:xfrm>
+            <a:off x="10698480" y="4956048"/>
+            <a:ext cx="685800" cy="201168"/>
+          </a:xfrm>
+          <a:prstGeom prst="rect">
+            <a:avLst/>
+          </a:prstGeom>
+          <a:noFill/>
+        </p:spPr>
+        <p:txBody>
+          <a:bodyPr wrap="square">
+            <a:spAutoFit/>
+          </a:bodyPr>
+          <a:lstStyle/>
+          <a:p>
+            <a:pPr algn="ctr"/>
+            <a:r>
+              <a:rPr sz="800" b="1" i="0">
+                <a:solidFill>
+                  <a:srgbClr val="457B9D"/>
+                </a:solidFill>
+                <a:latin typeface="Aptos"/>
+              </a:rPr>
+              <a:t>Return</a:t>
+            </a:r>
+          </a:p>
+        </p:txBody>
+      </p:sp>
+      <p:sp>
+        <p:nvSpPr>
+          <p:cNvPr id="23" name="Oval 22"/>
+          <p:cNvSpPr/>
+          <p:nvPr/>
+        </p:nvSpPr>
+        <p:spPr>
+          <a:xfrm>
+            <a:off x="5989320" y="1325880"/>
+            <a:ext cx="749808" cy="749808"/>
           </a:xfrm>
           <a:prstGeom prst="ellipse">
             <a:avLst/>
@@ -3495,29 +3956,29 @@
       </p:sp>
       <p:sp>
         <p:nvSpPr>
-          <p:cNvPr id="12" name="TextBox 11"/>
-          <p:cNvSpPr txBox="1"/>
-          <p:nvPr/>
-        </p:nvSpPr>
-        <p:spPr>
-          <a:xfrm>
-            <a:off x="1828800" y="2084832"/>
-            <a:ext cx="914400" cy="228600"/>
-          </a:xfrm>
-          <a:prstGeom prst="rect">
-            <a:avLst/>
-          </a:prstGeom>
-          <a:noFill/>
-        </p:spPr>
-        <p:txBody>
-          <a:bodyPr wrap="square">
-            <a:spAutoFit/>
-          </a:bodyPr>
-          <a:lstStyle/>
-          <a:p>
-            <a:pPr algn="ctr"/>
-            <a:r>
-              <a:rPr sz="1600" b="1" i="0">
+          <p:cNvPr id="24" name="TextBox 23"/>
+          <p:cNvSpPr txBox="1"/>
+          <p:nvPr/>
+        </p:nvSpPr>
+        <p:spPr>
+          <a:xfrm>
+            <a:off x="5989320" y="1536192"/>
+            <a:ext cx="749808" cy="201168"/>
+          </a:xfrm>
+          <a:prstGeom prst="rect">
+            <a:avLst/>
+          </a:prstGeom>
+          <a:noFill/>
+        </p:spPr>
+        <p:txBody>
+          <a:bodyPr wrap="square">
+            <a:spAutoFit/>
+          </a:bodyPr>
+          <a:lstStyle/>
+          <a:p>
+            <a:pPr algn="ctr"/>
+            <a:r>
+              <a:rPr sz="1300" b="1" i="0">
                 <a:solidFill>
                   <a:srgbClr val="FFFFFF"/>
                 </a:solidFill>
@@ -3530,29 +3991,29 @@
       </p:sp>
       <p:sp>
         <p:nvSpPr>
-          <p:cNvPr id="13" name="TextBox 12"/>
-          <p:cNvSpPr txBox="1"/>
-          <p:nvPr/>
-        </p:nvSpPr>
-        <p:spPr>
-          <a:xfrm>
-            <a:off x="1280160" y="2816352"/>
-            <a:ext cx="2011680" cy="228600"/>
-          </a:xfrm>
-          <a:prstGeom prst="rect">
-            <a:avLst/>
-          </a:prstGeom>
-          <a:noFill/>
-        </p:spPr>
-        <p:txBody>
-          <a:bodyPr wrap="square">
-            <a:spAutoFit/>
-          </a:bodyPr>
-          <a:lstStyle/>
-          <a:p>
-            <a:pPr algn="ctr"/>
-            <a:r>
-              <a:rPr sz="1200" b="1" i="0">
+          <p:cNvPr id="25" name="TextBox 24"/>
+          <p:cNvSpPr txBox="1"/>
+          <p:nvPr/>
+        </p:nvSpPr>
+        <p:spPr>
+          <a:xfrm>
+            <a:off x="5605272" y="2130552"/>
+            <a:ext cx="1554480" cy="237744"/>
+          </a:xfrm>
+          <a:prstGeom prst="rect">
+            <a:avLst/>
+          </a:prstGeom>
+          <a:noFill/>
+        </p:spPr>
+        <p:txBody>
+          <a:bodyPr wrap="square">
+            <a:spAutoFit/>
+          </a:bodyPr>
+          <a:lstStyle/>
+          <a:p>
+            <a:pPr algn="ctr"/>
+            <a:r>
+              <a:rPr sz="950" b="1" i="0">
                 <a:solidFill>
                   <a:srgbClr val="E76F51"/>
                 </a:solidFill>
@@ -3565,19 +4026,19 @@
       </p:sp>
       <p:cxnSp>
         <p:nvCxnSpPr>
-          <p:cNvPr id="14" name="Connector 13"/>
+          <p:cNvPr id="26" name="Connector 25"/>
           <p:cNvCxnSpPr/>
           <p:nvPr/>
         </p:nvCxnSpPr>
         <p:spPr>
           <a:xfrm>
-            <a:off x="2286000" y="2286000"/>
-            <a:ext cx="3794760" cy="914400"/>
+            <a:off x="6364224" y="1700784"/>
+            <a:ext cx="2523744" cy="1389888"/>
           </a:xfrm>
           <a:prstGeom prst="line">
             <a:avLst/>
           </a:prstGeom>
-          <a:ln w="25400">
+          <a:ln w="16510">
             <a:solidFill>
               <a:srgbClr val="E76F51"/>
             </a:solidFill>
@@ -3600,14 +4061,14 @@
       </p:cxnSp>
       <p:sp>
         <p:nvSpPr>
-          <p:cNvPr id="15" name="Oval 14"/>
+          <p:cNvPr id="27" name="Oval 26"/>
           <p:cNvSpPr/>
           <p:nvPr/>
         </p:nvSpPr>
         <p:spPr>
           <a:xfrm>
-            <a:off x="9555480" y="1828800"/>
-            <a:ext cx="914400" cy="914400"/>
+            <a:off x="10927080" y="1325880"/>
+            <a:ext cx="749808" cy="749808"/>
           </a:xfrm>
           <a:prstGeom prst="ellipse">
             <a:avLst/>
@@ -3643,29 +4104,29 @@
       </p:sp>
       <p:sp>
         <p:nvSpPr>
-          <p:cNvPr id="16" name="TextBox 15"/>
-          <p:cNvSpPr txBox="1"/>
-          <p:nvPr/>
-        </p:nvSpPr>
-        <p:spPr>
-          <a:xfrm>
-            <a:off x="9555480" y="2084832"/>
-            <a:ext cx="914400" cy="228600"/>
-          </a:xfrm>
-          <a:prstGeom prst="rect">
-            <a:avLst/>
-          </a:prstGeom>
-          <a:noFill/>
-        </p:spPr>
-        <p:txBody>
-          <a:bodyPr wrap="square">
-            <a:spAutoFit/>
-          </a:bodyPr>
-          <a:lstStyle/>
-          <a:p>
-            <a:pPr algn="ctr"/>
-            <a:r>
-              <a:rPr sz="1600" b="1" i="0">
+          <p:cNvPr id="28" name="TextBox 27"/>
+          <p:cNvSpPr txBox="1"/>
+          <p:nvPr/>
+        </p:nvSpPr>
+        <p:spPr>
+          <a:xfrm>
+            <a:off x="10927080" y="1536192"/>
+            <a:ext cx="749808" cy="201168"/>
+          </a:xfrm>
+          <a:prstGeom prst="rect">
+            <a:avLst/>
+          </a:prstGeom>
+          <a:noFill/>
+        </p:spPr>
+        <p:txBody>
+          <a:bodyPr wrap="square">
+            <a:spAutoFit/>
+          </a:bodyPr>
+          <a:lstStyle/>
+          <a:p>
+            <a:pPr algn="ctr"/>
+            <a:r>
+              <a:rPr sz="1300" b="1" i="0">
                 <a:solidFill>
                   <a:srgbClr val="FFFFFF"/>
                 </a:solidFill>
@@ -3678,29 +4139,29 @@
       </p:sp>
       <p:sp>
         <p:nvSpPr>
-          <p:cNvPr id="17" name="TextBox 16"/>
-          <p:cNvSpPr txBox="1"/>
-          <p:nvPr/>
-        </p:nvSpPr>
-        <p:spPr>
-          <a:xfrm>
-            <a:off x="9006840" y="2816352"/>
-            <a:ext cx="2011680" cy="228600"/>
-          </a:xfrm>
-          <a:prstGeom prst="rect">
-            <a:avLst/>
-          </a:prstGeom>
-          <a:noFill/>
-        </p:spPr>
-        <p:txBody>
-          <a:bodyPr wrap="square">
-            <a:spAutoFit/>
-          </a:bodyPr>
-          <a:lstStyle/>
-          <a:p>
-            <a:pPr algn="ctr"/>
-            <a:r>
-              <a:rPr sz="1200" b="1" i="0">
+          <p:cNvPr id="29" name="TextBox 28"/>
+          <p:cNvSpPr txBox="1"/>
+          <p:nvPr/>
+        </p:nvSpPr>
+        <p:spPr>
+          <a:xfrm>
+            <a:off x="10543032" y="2130552"/>
+            <a:ext cx="1554480" cy="237744"/>
+          </a:xfrm>
+          <a:prstGeom prst="rect">
+            <a:avLst/>
+          </a:prstGeom>
+          <a:noFill/>
+        </p:spPr>
+        <p:txBody>
+          <a:bodyPr wrap="square">
+            <a:spAutoFit/>
+          </a:bodyPr>
+          <a:lstStyle/>
+          <a:p>
+            <a:pPr algn="ctr"/>
+            <a:r>
+              <a:rPr sz="950" b="1" i="0">
                 <a:solidFill>
                   <a:srgbClr val="457B9D"/>
                 </a:solidFill>
@@ -3713,19 +4174,19 @@
       </p:sp>
       <p:cxnSp>
         <p:nvCxnSpPr>
-          <p:cNvPr id="18" name="Connector 17"/>
+          <p:cNvPr id="30" name="Connector 29"/>
           <p:cNvCxnSpPr/>
           <p:nvPr/>
         </p:nvCxnSpPr>
         <p:spPr>
           <a:xfrm flipH="1">
-            <a:off x="6080760" y="2286000"/>
-            <a:ext cx="3931920" cy="914400"/>
+            <a:off x="8887968" y="1700784"/>
+            <a:ext cx="2414016" cy="1389888"/>
           </a:xfrm>
           <a:prstGeom prst="line">
             <a:avLst/>
           </a:prstGeom>
-          <a:ln w="25400">
+          <a:ln w="16510">
             <a:solidFill>
               <a:srgbClr val="457B9D"/>
             </a:solidFill>
@@ -3748,14 +4209,14 @@
       </p:cxnSp>
       <p:sp>
         <p:nvSpPr>
-          <p:cNvPr id="19" name="Oval 18"/>
+          <p:cNvPr id="31" name="Oval 30"/>
           <p:cNvSpPr/>
           <p:nvPr/>
         </p:nvSpPr>
         <p:spPr>
           <a:xfrm>
-            <a:off x="1828800" y="4709160"/>
-            <a:ext cx="914400" cy="914400"/>
+            <a:off x="5989320" y="4709160"/>
+            <a:ext cx="749808" cy="749808"/>
           </a:xfrm>
           <a:prstGeom prst="ellipse">
             <a:avLst/>
@@ -3791,29 +4252,29 @@
       </p:sp>
       <p:sp>
         <p:nvSpPr>
-          <p:cNvPr id="20" name="TextBox 19"/>
-          <p:cNvSpPr txBox="1"/>
-          <p:nvPr/>
-        </p:nvSpPr>
-        <p:spPr>
-          <a:xfrm>
-            <a:off x="1828800" y="4965192"/>
-            <a:ext cx="914400" cy="228600"/>
-          </a:xfrm>
-          <a:prstGeom prst="rect">
-            <a:avLst/>
-          </a:prstGeom>
-          <a:noFill/>
-        </p:spPr>
-        <p:txBody>
-          <a:bodyPr wrap="square">
-            <a:spAutoFit/>
-          </a:bodyPr>
-          <a:lstStyle/>
-          <a:p>
-            <a:pPr algn="ctr"/>
-            <a:r>
-              <a:rPr sz="1600" b="1" i="0">
+          <p:cNvPr id="32" name="TextBox 31"/>
+          <p:cNvSpPr txBox="1"/>
+          <p:nvPr/>
+        </p:nvSpPr>
+        <p:spPr>
+          <a:xfrm>
+            <a:off x="5989320" y="4919472"/>
+            <a:ext cx="749808" cy="201168"/>
+          </a:xfrm>
+          <a:prstGeom prst="rect">
+            <a:avLst/>
+          </a:prstGeom>
+          <a:noFill/>
+        </p:spPr>
+        <p:txBody>
+          <a:bodyPr wrap="square">
+            <a:spAutoFit/>
+          </a:bodyPr>
+          <a:lstStyle/>
+          <a:p>
+            <a:pPr algn="ctr"/>
+            <a:r>
+              <a:rPr sz="1300" b="1" i="0">
                 <a:solidFill>
                   <a:srgbClr val="FFFFFF"/>
                 </a:solidFill>
@@ -3826,29 +4287,29 @@
       </p:sp>
       <p:sp>
         <p:nvSpPr>
-          <p:cNvPr id="21" name="TextBox 20"/>
-          <p:cNvSpPr txBox="1"/>
-          <p:nvPr/>
-        </p:nvSpPr>
-        <p:spPr>
-          <a:xfrm>
-            <a:off x="1280160" y="5696712"/>
-            <a:ext cx="2011680" cy="228600"/>
-          </a:xfrm>
-          <a:prstGeom prst="rect">
-            <a:avLst/>
-          </a:prstGeom>
-          <a:noFill/>
-        </p:spPr>
-        <p:txBody>
-          <a:bodyPr wrap="square">
-            <a:spAutoFit/>
-          </a:bodyPr>
-          <a:lstStyle/>
-          <a:p>
-            <a:pPr algn="ctr"/>
-            <a:r>
-              <a:rPr sz="1200" b="1" i="0">
+          <p:cNvPr id="33" name="TextBox 32"/>
+          <p:cNvSpPr txBox="1"/>
+          <p:nvPr/>
+        </p:nvSpPr>
+        <p:spPr>
+          <a:xfrm>
+            <a:off x="5605272" y="5513832"/>
+            <a:ext cx="1554480" cy="237744"/>
+          </a:xfrm>
+          <a:prstGeom prst="rect">
+            <a:avLst/>
+          </a:prstGeom>
+          <a:noFill/>
+        </p:spPr>
+        <p:txBody>
+          <a:bodyPr wrap="square">
+            <a:spAutoFit/>
+          </a:bodyPr>
+          <a:lstStyle/>
+          <a:p>
+            <a:pPr algn="ctr"/>
+            <a:r>
+              <a:rPr sz="950" b="1" i="0">
                 <a:solidFill>
                   <a:srgbClr val="2A9D8F"/>
                 </a:solidFill>
@@ -3861,19 +4322,19 @@
       </p:sp>
       <p:cxnSp>
         <p:nvCxnSpPr>
-          <p:cNvPr id="22" name="Connector 21"/>
+          <p:cNvPr id="34" name="Connector 33"/>
           <p:cNvCxnSpPr/>
           <p:nvPr/>
         </p:nvCxnSpPr>
         <p:spPr>
           <a:xfrm flipV="1">
-            <a:off x="2286000" y="3200400"/>
-            <a:ext cx="3794760" cy="1965960"/>
+            <a:off x="6364224" y="3090672"/>
+            <a:ext cx="2523744" cy="1993392"/>
           </a:xfrm>
           <a:prstGeom prst="line">
             <a:avLst/>
           </a:prstGeom>
-          <a:ln w="25400">
+          <a:ln w="16510">
             <a:solidFill>
               <a:srgbClr val="2A9D8F"/>
             </a:solidFill>
@@ -3896,14 +4357,14 @@
       </p:cxnSp>
       <p:sp>
         <p:nvSpPr>
-          <p:cNvPr id="23" name="Oval 22"/>
+          <p:cNvPr id="35" name="Oval 34"/>
           <p:cNvSpPr/>
           <p:nvPr/>
         </p:nvSpPr>
         <p:spPr>
           <a:xfrm>
-            <a:off x="9555480" y="4709160"/>
-            <a:ext cx="914400" cy="914400"/>
+            <a:off x="10927080" y="4709160"/>
+            <a:ext cx="749808" cy="749808"/>
           </a:xfrm>
           <a:prstGeom prst="ellipse">
             <a:avLst/>
@@ -3939,29 +4400,29 @@
       </p:sp>
       <p:sp>
         <p:nvSpPr>
-          <p:cNvPr id="24" name="TextBox 23"/>
-          <p:cNvSpPr txBox="1"/>
-          <p:nvPr/>
-        </p:nvSpPr>
-        <p:spPr>
-          <a:xfrm>
-            <a:off x="9555480" y="4965192"/>
-            <a:ext cx="914400" cy="228600"/>
-          </a:xfrm>
-          <a:prstGeom prst="rect">
-            <a:avLst/>
-          </a:prstGeom>
-          <a:noFill/>
-        </p:spPr>
-        <p:txBody>
-          <a:bodyPr wrap="square">
-            <a:spAutoFit/>
-          </a:bodyPr>
-          <a:lstStyle/>
-          <a:p>
-            <a:pPr algn="ctr"/>
-            <a:r>
-              <a:rPr sz="1600" b="1" i="0">
+          <p:cNvPr id="36" name="TextBox 35"/>
+          <p:cNvSpPr txBox="1"/>
+          <p:nvPr/>
+        </p:nvSpPr>
+        <p:spPr>
+          <a:xfrm>
+            <a:off x="10927080" y="4919472"/>
+            <a:ext cx="749808" cy="201168"/>
+          </a:xfrm>
+          <a:prstGeom prst="rect">
+            <a:avLst/>
+          </a:prstGeom>
+          <a:noFill/>
+        </p:spPr>
+        <p:txBody>
+          <a:bodyPr wrap="square">
+            <a:spAutoFit/>
+          </a:bodyPr>
+          <a:lstStyle/>
+          <a:p>
+            <a:pPr algn="ctr"/>
+            <a:r>
+              <a:rPr sz="1300" b="1" i="0">
                 <a:solidFill>
                   <a:srgbClr val="FFFFFF"/>
                 </a:solidFill>
@@ -3974,29 +4435,29 @@
       </p:sp>
       <p:sp>
         <p:nvSpPr>
-          <p:cNvPr id="25" name="TextBox 24"/>
-          <p:cNvSpPr txBox="1"/>
-          <p:nvPr/>
-        </p:nvSpPr>
-        <p:spPr>
-          <a:xfrm>
-            <a:off x="9006840" y="5696712"/>
-            <a:ext cx="2011680" cy="228600"/>
-          </a:xfrm>
-          <a:prstGeom prst="rect">
-            <a:avLst/>
-          </a:prstGeom>
-          <a:noFill/>
-        </p:spPr>
-        <p:txBody>
-          <a:bodyPr wrap="square">
-            <a:spAutoFit/>
-          </a:bodyPr>
-          <a:lstStyle/>
-          <a:p>
-            <a:pPr algn="ctr"/>
-            <a:r>
-              <a:rPr sz="1200" b="1" i="0">
+          <p:cNvPr id="37" name="TextBox 36"/>
+          <p:cNvSpPr txBox="1"/>
+          <p:nvPr/>
+        </p:nvSpPr>
+        <p:spPr>
+          <a:xfrm>
+            <a:off x="10543032" y="5513832"/>
+            <a:ext cx="1554480" cy="237744"/>
+          </a:xfrm>
+          <a:prstGeom prst="rect">
+            <a:avLst/>
+          </a:prstGeom>
+          <a:noFill/>
+        </p:spPr>
+        <p:txBody>
+          <a:bodyPr wrap="square">
+            <a:spAutoFit/>
+          </a:bodyPr>
+          <a:lstStyle/>
+          <a:p>
+            <a:pPr algn="ctr"/>
+            <a:r>
+              <a:rPr sz="950" b="1" i="0">
                 <a:solidFill>
                   <a:srgbClr val="4CAF50"/>
                 </a:solidFill>
@@ -4009,19 +4470,19 @@
       </p:sp>
       <p:cxnSp>
         <p:nvCxnSpPr>
-          <p:cNvPr id="26" name="Connector 25"/>
+          <p:cNvPr id="38" name="Connector 37"/>
           <p:cNvCxnSpPr/>
           <p:nvPr/>
         </p:nvCxnSpPr>
         <p:spPr>
           <a:xfrm flipH="1" flipV="1">
-            <a:off x="6080760" y="3200400"/>
-            <a:ext cx="3931920" cy="1965960"/>
+            <a:off x="8887968" y="3090672"/>
+            <a:ext cx="2414016" cy="1993392"/>
           </a:xfrm>
           <a:prstGeom prst="line">
             <a:avLst/>
           </a:prstGeom>
-          <a:ln w="25400">
+          <a:ln w="16510">
             <a:solidFill>
               <a:srgbClr val="4CAF50"/>
             </a:solidFill>
@@ -4042,6 +4503,513 @@
           </a:fontRef>
         </p:style>
       </p:cxnSp>
+      <p:sp>
+        <p:nvSpPr>
+          <p:cNvPr id="39" name="Oval 38"/>
+          <p:cNvSpPr/>
+          <p:nvPr/>
+        </p:nvSpPr>
+        <p:spPr>
+          <a:xfrm>
+            <a:off x="685800" y="5074920"/>
+            <a:ext cx="384048" cy="384048"/>
+          </a:xfrm>
+          <a:prstGeom prst="ellipse">
+            <a:avLst/>
+          </a:prstGeom>
+          <a:solidFill>
+            <a:srgbClr val="2A9D8F"/>
+          </a:solidFill>
+          <a:ln>
+            <a:noFill/>
+          </a:ln>
+        </p:spPr>
+        <p:style>
+          <a:lnRef idx="1">
+            <a:schemeClr val="accent1"/>
+          </a:lnRef>
+          <a:fillRef idx="3">
+            <a:schemeClr val="accent1"/>
+          </a:fillRef>
+          <a:effectRef idx="2">
+            <a:schemeClr val="accent1"/>
+          </a:effectRef>
+          <a:fontRef idx="minor">
+            <a:schemeClr val="lt1"/>
+          </a:fontRef>
+        </p:style>
+        <p:txBody>
+          <a:bodyPr rtlCol="0" anchor="ctr"/>
+          <a:lstStyle/>
+          <a:p>
+            <a:pPr algn="ctr"/>
+          </a:p>
+        </p:txBody>
+      </p:sp>
+      <p:sp>
+        <p:nvSpPr>
+          <p:cNvPr id="40" name="TextBox 39"/>
+          <p:cNvSpPr txBox="1"/>
+          <p:nvPr/>
+        </p:nvSpPr>
+        <p:spPr>
+          <a:xfrm>
+            <a:off x="685800" y="5184648"/>
+            <a:ext cx="384048" cy="100584"/>
+          </a:xfrm>
+          <a:prstGeom prst="rect">
+            <a:avLst/>
+          </a:prstGeom>
+          <a:noFill/>
+        </p:spPr>
+        <p:txBody>
+          <a:bodyPr wrap="square">
+            <a:spAutoFit/>
+          </a:bodyPr>
+          <a:lstStyle/>
+          <a:p>
+            <a:pPr algn="ctr"/>
+            <a:r>
+              <a:rPr sz="800" b="1" i="0">
+                <a:solidFill>
+                  <a:srgbClr val="FFFFFF"/>
+                </a:solidFill>
+                <a:latin typeface="Aptos"/>
+              </a:rPr>
+              <a:t>1</a:t>
+            </a:r>
+          </a:p>
+        </p:txBody>
+      </p:sp>
+      <p:sp>
+        <p:nvSpPr>
+          <p:cNvPr id="41" name="TextBox 40"/>
+          <p:cNvSpPr txBox="1"/>
+          <p:nvPr/>
+        </p:nvSpPr>
+        <p:spPr>
+          <a:xfrm>
+            <a:off x="1161288" y="5001768"/>
+            <a:ext cx="1097280" cy="219456"/>
+          </a:xfrm>
+          <a:prstGeom prst="rect">
+            <a:avLst/>
+          </a:prstGeom>
+          <a:noFill/>
+        </p:spPr>
+        <p:txBody>
+          <a:bodyPr wrap="square">
+            <a:spAutoFit/>
+          </a:bodyPr>
+          <a:lstStyle/>
+          <a:p>
+            <a:r>
+              <a:rPr sz="1100" b="1" i="0">
+                <a:solidFill>
+                  <a:srgbClr val="232D37"/>
+                </a:solidFill>
+                <a:latin typeface="Aptos"/>
+              </a:rPr>
+              <a:t>Comfort</a:t>
+            </a:r>
+          </a:p>
+        </p:txBody>
+      </p:sp>
+      <p:sp>
+        <p:nvSpPr>
+          <p:cNvPr id="42" name="TextBox 41"/>
+          <p:cNvSpPr txBox="1"/>
+          <p:nvPr/>
+        </p:nvSpPr>
+        <p:spPr>
+          <a:xfrm>
+            <a:off x="1161288" y="5276088"/>
+            <a:ext cx="1188720" cy="219456"/>
+          </a:xfrm>
+          <a:prstGeom prst="rect">
+            <a:avLst/>
+          </a:prstGeom>
+          <a:noFill/>
+        </p:spPr>
+        <p:txBody>
+          <a:bodyPr wrap="square">
+            <a:spAutoFit/>
+          </a:bodyPr>
+          <a:lstStyle/>
+          <a:p>
+            <a:r>
+              <a:rPr sz="750" b="0" i="0">
+                <a:solidFill>
+                  <a:srgbClr val="5A6973"/>
+                </a:solidFill>
+                <a:latin typeface="Aptos"/>
+              </a:rPr>
+              <a:t>human thermal comfort</a:t>
+            </a:r>
+          </a:p>
+        </p:txBody>
+      </p:sp>
+      <p:sp>
+        <p:nvSpPr>
+          <p:cNvPr id="43" name="Oval 42"/>
+          <p:cNvSpPr/>
+          <p:nvPr/>
+        </p:nvSpPr>
+        <p:spPr>
+          <a:xfrm>
+            <a:off x="2377440" y="5074920"/>
+            <a:ext cx="384048" cy="384048"/>
+          </a:xfrm>
+          <a:prstGeom prst="ellipse">
+            <a:avLst/>
+          </a:prstGeom>
+          <a:solidFill>
+            <a:srgbClr val="457B9D"/>
+          </a:solidFill>
+          <a:ln>
+            <a:noFill/>
+          </a:ln>
+        </p:spPr>
+        <p:style>
+          <a:lnRef idx="1">
+            <a:schemeClr val="accent1"/>
+          </a:lnRef>
+          <a:fillRef idx="3">
+            <a:schemeClr val="accent1"/>
+          </a:fillRef>
+          <a:effectRef idx="2">
+            <a:schemeClr val="accent1"/>
+          </a:effectRef>
+          <a:fontRef idx="minor">
+            <a:schemeClr val="lt1"/>
+          </a:fontRef>
+        </p:style>
+        <p:txBody>
+          <a:bodyPr rtlCol="0" anchor="ctr"/>
+          <a:lstStyle/>
+          <a:p>
+            <a:pPr algn="ctr"/>
+          </a:p>
+        </p:txBody>
+      </p:sp>
+      <p:sp>
+        <p:nvSpPr>
+          <p:cNvPr id="44" name="TextBox 43"/>
+          <p:cNvSpPr txBox="1"/>
+          <p:nvPr/>
+        </p:nvSpPr>
+        <p:spPr>
+          <a:xfrm>
+            <a:off x="2377440" y="5184648"/>
+            <a:ext cx="384048" cy="100584"/>
+          </a:xfrm>
+          <a:prstGeom prst="rect">
+            <a:avLst/>
+          </a:prstGeom>
+          <a:noFill/>
+        </p:spPr>
+        <p:txBody>
+          <a:bodyPr wrap="square">
+            <a:spAutoFit/>
+          </a:bodyPr>
+          <a:lstStyle/>
+          <a:p>
+            <a:pPr algn="ctr"/>
+            <a:r>
+              <a:rPr sz="800" b="1" i="0">
+                <a:solidFill>
+                  <a:srgbClr val="FFFFFF"/>
+                </a:solidFill>
+                <a:latin typeface="Aptos"/>
+              </a:rPr>
+              <a:t>2</a:t>
+            </a:r>
+          </a:p>
+        </p:txBody>
+      </p:sp>
+      <p:sp>
+        <p:nvSpPr>
+          <p:cNvPr id="45" name="TextBox 44"/>
+          <p:cNvSpPr txBox="1"/>
+          <p:nvPr/>
+        </p:nvSpPr>
+        <p:spPr>
+          <a:xfrm>
+            <a:off x="2852928" y="5001768"/>
+            <a:ext cx="1097280" cy="219456"/>
+          </a:xfrm>
+          <a:prstGeom prst="rect">
+            <a:avLst/>
+          </a:prstGeom>
+          <a:noFill/>
+        </p:spPr>
+        <p:txBody>
+          <a:bodyPr wrap="square">
+            <a:spAutoFit/>
+          </a:bodyPr>
+          <a:lstStyle/>
+          <a:p>
+            <a:r>
+              <a:rPr sz="1100" b="1" i="0">
+                <a:solidFill>
+                  <a:srgbClr val="232D37"/>
+                </a:solidFill>
+                <a:latin typeface="Aptos"/>
+              </a:rPr>
+              <a:t>Process</a:t>
+            </a:r>
+          </a:p>
+        </p:txBody>
+      </p:sp>
+      <p:sp>
+        <p:nvSpPr>
+          <p:cNvPr id="46" name="TextBox 45"/>
+          <p:cNvSpPr txBox="1"/>
+          <p:nvPr/>
+        </p:nvSpPr>
+        <p:spPr>
+          <a:xfrm>
+            <a:off x="2852928" y="5276088"/>
+            <a:ext cx="1188720" cy="219456"/>
+          </a:xfrm>
+          <a:prstGeom prst="rect">
+            <a:avLst/>
+          </a:prstGeom>
+          <a:noFill/>
+        </p:spPr>
+        <p:txBody>
+          <a:bodyPr wrap="square">
+            <a:spAutoFit/>
+          </a:bodyPr>
+          <a:lstStyle/>
+          <a:p>
+            <a:r>
+              <a:rPr sz="750" b="0" i="0">
+                <a:solidFill>
+                  <a:srgbClr val="5A6973"/>
+                </a:solidFill>
+                <a:latin typeface="Aptos"/>
+              </a:rPr>
+              <a:t>material / product need</a:t>
+            </a:r>
+          </a:p>
+        </p:txBody>
+      </p:sp>
+      <p:sp>
+        <p:nvSpPr>
+          <p:cNvPr id="47" name="Oval 46"/>
+          <p:cNvSpPr/>
+          <p:nvPr/>
+        </p:nvSpPr>
+        <p:spPr>
+          <a:xfrm>
+            <a:off x="4069080" y="5074920"/>
+            <a:ext cx="384048" cy="384048"/>
+          </a:xfrm>
+          <a:prstGeom prst="ellipse">
+            <a:avLst/>
+          </a:prstGeom>
+          <a:solidFill>
+            <a:srgbClr val="E76F51"/>
+          </a:solidFill>
+          <a:ln>
+            <a:noFill/>
+          </a:ln>
+        </p:spPr>
+        <p:style>
+          <a:lnRef idx="1">
+            <a:schemeClr val="accent1"/>
+          </a:lnRef>
+          <a:fillRef idx="3">
+            <a:schemeClr val="accent1"/>
+          </a:fillRef>
+          <a:effectRef idx="2">
+            <a:schemeClr val="accent1"/>
+          </a:effectRef>
+          <a:fontRef idx="minor">
+            <a:schemeClr val="lt1"/>
+          </a:fontRef>
+        </p:style>
+        <p:txBody>
+          <a:bodyPr rtlCol="0" anchor="ctr"/>
+          <a:lstStyle/>
+          <a:p>
+            <a:pPr algn="ctr"/>
+          </a:p>
+        </p:txBody>
+      </p:sp>
+      <p:sp>
+        <p:nvSpPr>
+          <p:cNvPr id="48" name="TextBox 47"/>
+          <p:cNvSpPr txBox="1"/>
+          <p:nvPr/>
+        </p:nvSpPr>
+        <p:spPr>
+          <a:xfrm>
+            <a:off x="4069080" y="5184648"/>
+            <a:ext cx="384048" cy="100584"/>
+          </a:xfrm>
+          <a:prstGeom prst="rect">
+            <a:avLst/>
+          </a:prstGeom>
+          <a:noFill/>
+        </p:spPr>
+        <p:txBody>
+          <a:bodyPr wrap="square">
+            <a:spAutoFit/>
+          </a:bodyPr>
+          <a:lstStyle/>
+          <a:p>
+            <a:pPr algn="ctr"/>
+            <a:r>
+              <a:rPr sz="800" b="1" i="0">
+                <a:solidFill>
+                  <a:srgbClr val="FFFFFF"/>
+                </a:solidFill>
+                <a:latin typeface="Aptos"/>
+              </a:rPr>
+              <a:t>3</a:t>
+            </a:r>
+          </a:p>
+        </p:txBody>
+      </p:sp>
+      <p:sp>
+        <p:nvSpPr>
+          <p:cNvPr id="49" name="TextBox 48"/>
+          <p:cNvSpPr txBox="1"/>
+          <p:nvPr/>
+        </p:nvSpPr>
+        <p:spPr>
+          <a:xfrm>
+            <a:off x="4544568" y="5001768"/>
+            <a:ext cx="1097280" cy="219456"/>
+          </a:xfrm>
+          <a:prstGeom prst="rect">
+            <a:avLst/>
+          </a:prstGeom>
+          <a:noFill/>
+        </p:spPr>
+        <p:txBody>
+          <a:bodyPr wrap="square">
+            <a:spAutoFit/>
+          </a:bodyPr>
+          <a:lstStyle/>
+          <a:p>
+            <a:r>
+              <a:rPr sz="1100" b="1" i="0">
+                <a:solidFill>
+                  <a:srgbClr val="232D37"/>
+                </a:solidFill>
+                <a:latin typeface="Aptos"/>
+              </a:rPr>
+              <a:t>Survey</a:t>
+            </a:r>
+          </a:p>
+        </p:txBody>
+      </p:sp>
+      <p:sp>
+        <p:nvSpPr>
+          <p:cNvPr id="50" name="TextBox 49"/>
+          <p:cNvSpPr txBox="1"/>
+          <p:nvPr/>
+        </p:nvSpPr>
+        <p:spPr>
+          <a:xfrm>
+            <a:off x="4544568" y="5276088"/>
+            <a:ext cx="1188720" cy="219456"/>
+          </a:xfrm>
+          <a:prstGeom prst="rect">
+            <a:avLst/>
+          </a:prstGeom>
+          <a:noFill/>
+        </p:spPr>
+        <p:txBody>
+          <a:bodyPr wrap="square">
+            <a:spAutoFit/>
+          </a:bodyPr>
+          <a:lstStyle/>
+          <a:p>
+            <a:r>
+              <a:rPr sz="750" b="0" i="0">
+                <a:solidFill>
+                  <a:srgbClr val="5A6973"/>
+                </a:solidFill>
+                <a:latin typeface="Aptos"/>
+              </a:rPr>
+              <a:t>data before design</a:t>
+            </a:r>
+          </a:p>
+        </p:txBody>
+      </p:sp>
+      <p:sp>
+        <p:nvSpPr>
+          <p:cNvPr id="51" name="TextBox 50"/>
+          <p:cNvSpPr txBox="1"/>
+          <p:nvPr/>
+        </p:nvSpPr>
+        <p:spPr>
+          <a:xfrm>
+            <a:off x="594360" y="6446520"/>
+            <a:ext cx="7315200" cy="201168"/>
+          </a:xfrm>
+          <a:prstGeom prst="rect">
+            <a:avLst/>
+          </a:prstGeom>
+          <a:noFill/>
+        </p:spPr>
+        <p:txBody>
+          <a:bodyPr wrap="square">
+            <a:spAutoFit/>
+          </a:bodyPr>
+          <a:lstStyle/>
+          <a:p>
+            <a:r>
+              <a:rPr sz="900" b="0" i="0">
+                <a:solidFill>
+                  <a:srgbClr val="78828C"/>
+                </a:solidFill>
+                <a:latin typeface="Aptos"/>
+              </a:rPr>
+              <a:t>Air Conditioning · Chapter 1 · Topic 1.1</a:t>
+            </a:r>
+          </a:p>
+        </p:txBody>
+      </p:sp>
+      <p:sp>
+        <p:nvSpPr>
+          <p:cNvPr id="52" name="TextBox 51"/>
+          <p:cNvSpPr txBox="1"/>
+          <p:nvPr/>
+        </p:nvSpPr>
+        <p:spPr>
+          <a:xfrm>
+            <a:off x="11292840" y="6446520"/>
+            <a:ext cx="502920" cy="201168"/>
+          </a:xfrm>
+          <a:prstGeom prst="rect">
+            <a:avLst/>
+          </a:prstGeom>
+          <a:noFill/>
+        </p:spPr>
+        <p:txBody>
+          <a:bodyPr wrap="square">
+            <a:spAutoFit/>
+          </a:bodyPr>
+          <a:lstStyle/>
+          <a:p>
+            <a:pPr algn="r"/>
+            <a:r>
+              <a:rPr sz="900" b="0" i="0">
+                <a:solidFill>
+                  <a:srgbClr val="78828C"/>
+                </a:solidFill>
+                <a:latin typeface="Aptos"/>
+              </a:rPr>
+              <a:t>1</a:t>
+            </a:r>
+          </a:p>
+        </p:txBody>
+      </p:sp>
     </p:spTree>
   </p:cSld>
   <p:clrMapOvr>

--- a/05_Outputs/Air Conditioning/English Slides/Air Con Chapter 1 Topic 1.1 - Visual Lecture Deck CLEAN with TA Figures.pptx
+++ b/05_Outputs/Air Conditioning/English Slides/Air Con Chapter 1 Topic 1.1 - Visual Lecture Deck CLEAN with TA Figures.pptx
@@ -3110,16 +3110,83 @@
         <p:nvPr/>
       </p:nvGrpSpPr>
       <p:grpSpPr/>
-      <p:sp>
-        <p:nvSpPr>
-          <p:cNvPr id="2" name="Rectangle 1"/>
+      <p:pic>
+        <p:nvPicPr>
+          <p:cNvPr id="2" name="Picture 1" descr="conditioned-space-engineering-infographic.png"/>
+          <p:cNvPicPr>
+            <a:picLocks noChangeAspect="1"/>
+          </p:cNvPicPr>
+          <p:nvPr/>
+        </p:nvPicPr>
+        <p:blipFill>
+          <a:blip r:embed="rId2"/>
+          <a:stretch>
+            <a:fillRect/>
+          </a:stretch>
+        </p:blipFill>
+        <p:spPr>
+          <a:xfrm>
+            <a:off x="1107556" y="941832"/>
+            <a:ext cx="9992127" cy="5623560"/>
+          </a:xfrm>
+          <a:prstGeom prst="rect">
+            <a:avLst/>
+          </a:prstGeom>
+        </p:spPr>
+      </p:pic>
+      <p:sp>
+        <p:nvSpPr>
+          <p:cNvPr id="3" name="Rectangle 2"/>
           <p:cNvSpPr/>
           <p:nvPr/>
         </p:nvSpPr>
         <p:spPr>
           <a:xfrm>
             <a:off x="0" y="0"/>
-            <a:ext cx="12191999" cy="182880"/>
+            <a:ext cx="12191999" cy="749808"/>
+          </a:xfrm>
+          <a:prstGeom prst="rect">
+            <a:avLst/>
+          </a:prstGeom>
+          <a:solidFill>
+            <a:srgbClr val="F8FAFC"/>
+          </a:solidFill>
+          <a:ln>
+            <a:noFill/>
+          </a:ln>
+        </p:spPr>
+        <p:style>
+          <a:lnRef idx="1">
+            <a:schemeClr val="accent1"/>
+          </a:lnRef>
+          <a:fillRef idx="3">
+            <a:schemeClr val="accent1"/>
+          </a:fillRef>
+          <a:effectRef idx="2">
+            <a:schemeClr val="accent1"/>
+          </a:effectRef>
+          <a:fontRef idx="minor">
+            <a:schemeClr val="lt1"/>
+          </a:fontRef>
+        </p:style>
+        <p:txBody>
+          <a:bodyPr rtlCol="0" anchor="ctr"/>
+          <a:lstStyle/>
+          <a:p>
+            <a:pPr algn="ctr"/>
+          </a:p>
+        </p:txBody>
+      </p:sp>
+      <p:sp>
+        <p:nvSpPr>
+          <p:cNvPr id="4" name="Rectangle 3"/>
+          <p:cNvSpPr/>
+          <p:nvPr/>
+        </p:nvSpPr>
+        <p:spPr>
+          <a:xfrm>
+            <a:off x="0" y="0"/>
+            <a:ext cx="12191999" cy="164592"/>
           </a:xfrm>
           <a:prstGeom prst="rect">
             <a:avLst/>
@@ -3155,114 +3222,28 @@
       </p:sp>
       <p:sp>
         <p:nvSpPr>
-          <p:cNvPr id="3" name="Right Triangle 2"/>
-          <p:cNvSpPr/>
-          <p:nvPr/>
-        </p:nvSpPr>
-        <p:spPr>
-          <a:xfrm>
-            <a:off x="8778240" y="182880"/>
-            <a:ext cx="3429000" cy="2194560"/>
-          </a:xfrm>
-          <a:prstGeom prst="rtTriangle">
-            <a:avLst/>
-          </a:prstGeom>
-          <a:solidFill>
-            <a:srgbClr val="E7F4F7"/>
-          </a:solidFill>
-          <a:ln>
-            <a:noFill/>
-          </a:ln>
-        </p:spPr>
-        <p:style>
-          <a:lnRef idx="1">
-            <a:schemeClr val="accent1"/>
-          </a:lnRef>
-          <a:fillRef idx="3">
-            <a:schemeClr val="accent1"/>
-          </a:fillRef>
-          <a:effectRef idx="2">
-            <a:schemeClr val="accent1"/>
-          </a:effectRef>
-          <a:fontRef idx="minor">
-            <a:schemeClr val="lt1"/>
-          </a:fontRef>
-        </p:style>
-        <p:txBody>
-          <a:bodyPr rtlCol="0" anchor="ctr"/>
-          <a:lstStyle/>
-          <a:p>
-            <a:pPr algn="ctr"/>
-          </a:p>
-        </p:txBody>
-      </p:sp>
-      <p:sp>
-        <p:nvSpPr>
-          <p:cNvPr id="4" name="Right Triangle 3"/>
-          <p:cNvSpPr/>
-          <p:nvPr/>
-        </p:nvSpPr>
-        <p:spPr>
-          <a:xfrm>
-            <a:off x="9646920" y="4160520"/>
-            <a:ext cx="2560320" cy="2514600"/>
-          </a:xfrm>
-          <a:prstGeom prst="rtTriangle">
-            <a:avLst/>
-          </a:prstGeom>
-          <a:solidFill>
-            <a:srgbClr val="FFEFE6"/>
-          </a:solidFill>
-          <a:ln>
-            <a:noFill/>
-          </a:ln>
-        </p:spPr>
-        <p:style>
-          <a:lnRef idx="1">
-            <a:schemeClr val="accent1"/>
-          </a:lnRef>
-          <a:fillRef idx="3">
-            <a:schemeClr val="accent1"/>
-          </a:fillRef>
-          <a:effectRef idx="2">
-            <a:schemeClr val="accent1"/>
-          </a:effectRef>
-          <a:fontRef idx="minor">
-            <a:schemeClr val="lt1"/>
-          </a:fontRef>
-        </p:style>
-        <p:txBody>
-          <a:bodyPr rtlCol="0" anchor="ctr"/>
-          <a:lstStyle/>
-          <a:p>
-            <a:pPr algn="ctr"/>
-          </a:p>
-        </p:txBody>
-      </p:sp>
-      <p:sp>
-        <p:nvSpPr>
           <p:cNvPr id="5" name="TextBox 4"/>
           <p:cNvSpPr txBox="1"/>
           <p:nvPr/>
         </p:nvSpPr>
         <p:spPr>
           <a:xfrm>
-            <a:off x="621792" y="749808"/>
-            <a:ext cx="5394960" cy="320040"/>
-          </a:xfrm>
-          <a:prstGeom prst="rect">
-            <a:avLst/>
-          </a:prstGeom>
-          <a:noFill/>
-        </p:spPr>
-        <p:txBody>
-          <a:bodyPr wrap="square">
-            <a:spAutoFit/>
-          </a:bodyPr>
-          <a:lstStyle/>
-          <a:p>
-            <a:r>
-              <a:rPr sz="1300" b="1" i="0">
+            <a:off x="502920" y="256032"/>
+            <a:ext cx="5394960" cy="274320"/>
+          </a:xfrm>
+          <a:prstGeom prst="rect">
+            <a:avLst/>
+          </a:prstGeom>
+          <a:noFill/>
+        </p:spPr>
+        <p:txBody>
+          <a:bodyPr wrap="square">
+            <a:spAutoFit/>
+          </a:bodyPr>
+          <a:lstStyle/>
+          <a:p>
+            <a:r>
+              <a:rPr sz="1050" b="1">
                 <a:solidFill>
                   <a:srgbClr val="2A9D8F"/>
                 </a:solidFill>
@@ -3281,22 +3262,22 @@
         </p:nvSpPr>
         <p:spPr>
           <a:xfrm>
-            <a:off x="594360" y="1170432"/>
-            <a:ext cx="5760720" cy="868680"/>
-          </a:xfrm>
-          <a:prstGeom prst="rect">
-            <a:avLst/>
-          </a:prstGeom>
-          <a:noFill/>
-        </p:spPr>
-        <p:txBody>
-          <a:bodyPr wrap="square">
-            <a:spAutoFit/>
-          </a:bodyPr>
-          <a:lstStyle/>
-          <a:p>
-            <a:r>
-              <a:rPr sz="3700" b="1" i="0">
+            <a:off x="502920" y="438912"/>
+            <a:ext cx="6035040" cy="320040"/>
+          </a:xfrm>
+          <a:prstGeom prst="rect">
+            <a:avLst/>
+          </a:prstGeom>
+          <a:noFill/>
+        </p:spPr>
+        <p:txBody>
+          <a:bodyPr wrap="square">
+            <a:spAutoFit/>
+          </a:bodyPr>
+          <a:lstStyle/>
+          <a:p>
+            <a:r>
+              <a:rPr sz="1800" b="1">
                 <a:solidFill>
                   <a:srgbClr val="11374B"/>
                 </a:solidFill>
@@ -3315,22 +3296,23 @@
         </p:nvSpPr>
         <p:spPr>
           <a:xfrm>
-            <a:off x="621792" y="1975104"/>
-            <a:ext cx="5669280" cy="384048"/>
-          </a:xfrm>
-          <a:prstGeom prst="rect">
-            <a:avLst/>
-          </a:prstGeom>
-          <a:noFill/>
-        </p:spPr>
-        <p:txBody>
-          <a:bodyPr wrap="square">
-            <a:spAutoFit/>
-          </a:bodyPr>
-          <a:lstStyle/>
-          <a:p>
-            <a:r>
-              <a:rPr sz="1800" b="0" i="0">
+            <a:off x="6400800" y="438912"/>
+            <a:ext cx="5257800" cy="274320"/>
+          </a:xfrm>
+          <a:prstGeom prst="rect">
+            <a:avLst/>
+          </a:prstGeom>
+          <a:noFill/>
+        </p:spPr>
+        <p:txBody>
+          <a:bodyPr wrap="square">
+            <a:spAutoFit/>
+          </a:bodyPr>
+          <a:lstStyle/>
+          <a:p>
+            <a:pPr algn="r"/>
+            <a:r>
+              <a:rPr sz="1200" b="0">
                 <a:solidFill>
                   <a:srgbClr val="5A6973"/>
                 </a:solidFill>
@@ -3349,1622 +3331,22 @@
         </p:nvSpPr>
         <p:spPr>
           <a:xfrm>
-            <a:off x="640080" y="2578608"/>
-            <a:ext cx="5257800" cy="749808"/>
-          </a:xfrm>
-          <a:prstGeom prst="rect">
-            <a:avLst/>
-          </a:prstGeom>
-          <a:noFill/>
-        </p:spPr>
-        <p:txBody>
-          <a:bodyPr wrap="square">
-            <a:spAutoFit/>
-          </a:bodyPr>
-          <a:lstStyle/>
-          <a:p>
-            <a:r>
-              <a:rPr sz="2000" b="1" i="0">
-                <a:solidFill>
-                  <a:srgbClr val="232D37"/>
-                </a:solidFill>
-                <a:latin typeface="Aptos"/>
-              </a:rPr>
-              <a:t>Air conditioning is not simply cooling. It is the simultaneous control of the indoor environment.</a:t>
-            </a:r>
-          </a:p>
-        </p:txBody>
-      </p:sp>
-      <p:sp>
-        <p:nvSpPr>
-          <p:cNvPr id="9" name="Rounded Rectangle 8"/>
-          <p:cNvSpPr/>
-          <p:nvPr/>
-        </p:nvSpPr>
-        <p:spPr>
-          <a:xfrm>
-            <a:off x="658368" y="3749039"/>
-            <a:ext cx="5074920" cy="658368"/>
-          </a:xfrm>
-          <a:prstGeom prst="roundRect">
-            <a:avLst/>
-          </a:prstGeom>
-          <a:solidFill>
-            <a:srgbClr val="E6F4F7"/>
-          </a:solidFill>
-          <a:ln w="12700">
-            <a:solidFill>
-              <a:srgbClr val="B9D9E0"/>
-            </a:solidFill>
-          </a:ln>
-        </p:spPr>
-        <p:style>
-          <a:lnRef idx="1">
-            <a:schemeClr val="accent1"/>
-          </a:lnRef>
-          <a:fillRef idx="3">
-            <a:schemeClr val="accent1"/>
-          </a:fillRef>
-          <a:effectRef idx="2">
-            <a:schemeClr val="accent1"/>
-          </a:effectRef>
-          <a:fontRef idx="minor">
-            <a:schemeClr val="lt1"/>
-          </a:fontRef>
-        </p:style>
-        <p:txBody>
-          <a:bodyPr rtlCol="0" anchor="ctr"/>
-          <a:lstStyle/>
-          <a:p>
-            <a:pPr algn="ctr"/>
-          </a:p>
-        </p:txBody>
-      </p:sp>
-      <p:sp>
-        <p:nvSpPr>
-          <p:cNvPr id="10" name="TextBox 9"/>
-          <p:cNvSpPr txBox="1"/>
-          <p:nvPr/>
-        </p:nvSpPr>
-        <p:spPr>
-          <a:xfrm>
-            <a:off x="914400" y="3931920"/>
-            <a:ext cx="4572000" cy="228600"/>
-          </a:xfrm>
-          <a:prstGeom prst="rect">
-            <a:avLst/>
-          </a:prstGeom>
-          <a:noFill/>
-        </p:spPr>
-        <p:txBody>
-          <a:bodyPr wrap="square">
-            <a:spAutoFit/>
-          </a:bodyPr>
-          <a:lstStyle/>
-          <a:p>
-            <a:pPr algn="ctr"/>
-            <a:r>
-              <a:rPr sz="1400" b="1" i="0">
-                <a:solidFill>
-                  <a:srgbClr val="11374B"/>
-                </a:solidFill>
-                <a:latin typeface="Aptos"/>
-              </a:rPr>
-              <a:t>Teaching focus: cooling-mode AC for Thailand</a:t>
-            </a:r>
-          </a:p>
-        </p:txBody>
-      </p:sp>
-      <p:sp>
-        <p:nvSpPr>
-          <p:cNvPr id="11" name="Rounded Rectangle 10"/>
-          <p:cNvSpPr/>
-          <p:nvPr/>
-        </p:nvSpPr>
-        <p:spPr>
-          <a:xfrm>
-            <a:off x="6400800" y="1051560"/>
-            <a:ext cx="4983480" cy="4434840"/>
-          </a:xfrm>
-          <a:prstGeom prst="roundRect">
-            <a:avLst/>
-          </a:prstGeom>
-          <a:solidFill>
-            <a:srgbClr val="FFFFFF"/>
-          </a:solidFill>
-          <a:ln w="12700">
-            <a:solidFill>
-              <a:srgbClr val="DCE2E8"/>
-            </a:solidFill>
-          </a:ln>
-        </p:spPr>
-        <p:style>
-          <a:lnRef idx="1">
-            <a:schemeClr val="accent1"/>
-          </a:lnRef>
-          <a:fillRef idx="3">
-            <a:schemeClr val="accent1"/>
-          </a:fillRef>
-          <a:effectRef idx="2">
-            <a:schemeClr val="accent1"/>
-          </a:effectRef>
-          <a:fontRef idx="minor">
-            <a:schemeClr val="lt1"/>
-          </a:fontRef>
-        </p:style>
-        <p:txBody>
-          <a:bodyPr rtlCol="0" anchor="ctr"/>
-          <a:lstStyle/>
-          <a:p>
-            <a:pPr algn="ctr"/>
-          </a:p>
-        </p:txBody>
-      </p:sp>
-      <p:sp>
-        <p:nvSpPr>
-          <p:cNvPr id="12" name="Rounded Rectangle 11"/>
-          <p:cNvSpPr/>
-          <p:nvPr/>
-        </p:nvSpPr>
-        <p:spPr>
-          <a:xfrm>
-            <a:off x="7178040" y="2057400"/>
-            <a:ext cx="3429000" cy="2057400"/>
-          </a:xfrm>
-          <a:prstGeom prst="roundRect">
-            <a:avLst/>
-          </a:prstGeom>
-          <a:solidFill>
-            <a:srgbClr val="ECF7F9"/>
-          </a:solidFill>
-          <a:ln w="12700">
-            <a:solidFill>
-              <a:srgbClr val="B2D2DB"/>
-            </a:solidFill>
-          </a:ln>
-        </p:spPr>
-        <p:style>
-          <a:lnRef idx="1">
-            <a:schemeClr val="accent1"/>
-          </a:lnRef>
-          <a:fillRef idx="3">
-            <a:schemeClr val="accent1"/>
-          </a:fillRef>
-          <a:effectRef idx="2">
-            <a:schemeClr val="accent1"/>
-          </a:effectRef>
-          <a:fontRef idx="minor">
-            <a:schemeClr val="lt1"/>
-          </a:fontRef>
-        </p:style>
-        <p:txBody>
-          <a:bodyPr rtlCol="0" anchor="ctr"/>
-          <a:lstStyle/>
-          <a:p>
-            <a:pPr algn="ctr"/>
-          </a:p>
-        </p:txBody>
-      </p:sp>
-      <p:sp>
-        <p:nvSpPr>
-          <p:cNvPr id="13" name="TextBox 12"/>
-          <p:cNvSpPr txBox="1"/>
-          <p:nvPr/>
-        </p:nvSpPr>
-        <p:spPr>
-          <a:xfrm>
-            <a:off x="7516368" y="2697480"/>
-            <a:ext cx="2743200" cy="320040"/>
-          </a:xfrm>
-          <a:prstGeom prst="rect">
-            <a:avLst/>
-          </a:prstGeom>
-          <a:noFill/>
-        </p:spPr>
-        <p:txBody>
-          <a:bodyPr wrap="square">
-            <a:spAutoFit/>
-          </a:bodyPr>
-          <a:lstStyle/>
-          <a:p>
-            <a:pPr algn="ctr"/>
-            <a:r>
-              <a:rPr sz="2300" b="1" i="0">
-                <a:solidFill>
-                  <a:srgbClr val="11374B"/>
-                </a:solidFill>
-                <a:latin typeface="Aptos"/>
-              </a:rPr>
-              <a:t>Conditioned Space</a:t>
-            </a:r>
-          </a:p>
-        </p:txBody>
-      </p:sp>
-      <p:sp>
-        <p:nvSpPr>
-          <p:cNvPr id="14" name="TextBox 13"/>
-          <p:cNvSpPr txBox="1"/>
-          <p:nvPr/>
-        </p:nvSpPr>
-        <p:spPr>
-          <a:xfrm>
-            <a:off x="7616952" y="3145536"/>
-            <a:ext cx="2514600" cy="274320"/>
-          </a:xfrm>
-          <a:prstGeom prst="rect">
-            <a:avLst/>
-          </a:prstGeom>
-          <a:noFill/>
-        </p:spPr>
-        <p:txBody>
-          <a:bodyPr wrap="square">
-            <a:spAutoFit/>
-          </a:bodyPr>
-          <a:lstStyle/>
-          <a:p>
-            <a:pPr algn="ctr"/>
-            <a:r>
-              <a:rPr sz="1200" b="0" i="0">
-                <a:solidFill>
-                  <a:srgbClr val="5A6973"/>
-                </a:solidFill>
-                <a:latin typeface="Aptos"/>
-              </a:rPr>
-              <a:t>controlled indoor air</a:t>
-            </a:r>
-          </a:p>
-        </p:txBody>
-      </p:sp>
-      <p:cxnSp>
-        <p:nvCxnSpPr>
-          <p:cNvPr id="15" name="Connector 14"/>
-          <p:cNvCxnSpPr/>
-          <p:nvPr/>
-        </p:nvCxnSpPr>
-        <p:spPr>
-          <a:xfrm>
-            <a:off x="6812280" y="1828800"/>
-            <a:ext cx="4160520" cy="0"/>
-          </a:xfrm>
-          <a:prstGeom prst="line">
-            <a:avLst/>
-          </a:prstGeom>
-          <a:ln w="22860">
-            <a:solidFill>
-              <a:srgbClr val="2A9D8F"/>
-            </a:solidFill>
-          </a:ln>
-        </p:spPr>
-        <p:style>
-          <a:lnRef idx="2">
-            <a:schemeClr val="accent1"/>
-          </a:lnRef>
-          <a:fillRef idx="0">
-            <a:schemeClr val="accent1"/>
-          </a:fillRef>
-          <a:effectRef idx="1">
-            <a:schemeClr val="accent1"/>
-          </a:effectRef>
-          <a:fontRef idx="minor">
-            <a:schemeClr val="tx1"/>
-          </a:fontRef>
-        </p:style>
-      </p:cxnSp>
-      <p:cxnSp>
-        <p:nvCxnSpPr>
-          <p:cNvPr id="16" name="Connector 15"/>
-          <p:cNvCxnSpPr/>
-          <p:nvPr/>
-        </p:nvCxnSpPr>
-        <p:spPr>
-          <a:xfrm>
-            <a:off x="6812280" y="2148840"/>
-            <a:ext cx="4160520" cy="0"/>
-          </a:xfrm>
-          <a:prstGeom prst="line">
-            <a:avLst/>
-          </a:prstGeom>
-          <a:ln w="22860">
-            <a:solidFill>
-              <a:srgbClr val="2A9D8F"/>
-            </a:solidFill>
-          </a:ln>
-        </p:spPr>
-        <p:style>
-          <a:lnRef idx="2">
-            <a:schemeClr val="accent1"/>
-          </a:lnRef>
-          <a:fillRef idx="0">
-            <a:schemeClr val="accent1"/>
-          </a:fillRef>
-          <a:effectRef idx="1">
-            <a:schemeClr val="accent1"/>
-          </a:effectRef>
-          <a:fontRef idx="minor">
-            <a:schemeClr val="tx1"/>
-          </a:fontRef>
-        </p:style>
-      </p:cxnSp>
-      <p:cxnSp>
-        <p:nvCxnSpPr>
-          <p:cNvPr id="17" name="Connector 16"/>
-          <p:cNvCxnSpPr/>
-          <p:nvPr/>
-        </p:nvCxnSpPr>
-        <p:spPr>
-          <a:xfrm>
-            <a:off x="6812280" y="4389120"/>
-            <a:ext cx="4160520" cy="0"/>
-          </a:xfrm>
-          <a:prstGeom prst="line">
-            <a:avLst/>
-          </a:prstGeom>
-          <a:ln w="22860">
-            <a:solidFill>
-              <a:srgbClr val="2A9D8F"/>
-            </a:solidFill>
-          </a:ln>
-        </p:spPr>
-        <p:style>
-          <a:lnRef idx="2">
-            <a:schemeClr val="accent1"/>
-          </a:lnRef>
-          <a:fillRef idx="0">
-            <a:schemeClr val="accent1"/>
-          </a:fillRef>
-          <a:effectRef idx="1">
-            <a:schemeClr val="accent1"/>
-          </a:effectRef>
-          <a:fontRef idx="minor">
-            <a:schemeClr val="tx1"/>
-          </a:fontRef>
-        </p:style>
-      </p:cxnSp>
-      <p:cxnSp>
-        <p:nvCxnSpPr>
-          <p:cNvPr id="18" name="Connector 17"/>
-          <p:cNvCxnSpPr/>
-          <p:nvPr/>
-        </p:nvCxnSpPr>
-        <p:spPr>
-          <a:xfrm>
-            <a:off x="6812280" y="4709160"/>
-            <a:ext cx="4160520" cy="0"/>
-          </a:xfrm>
-          <a:prstGeom prst="line">
-            <a:avLst/>
-          </a:prstGeom>
-          <a:ln w="22860">
-            <a:solidFill>
-              <a:srgbClr val="2A9D8F"/>
-            </a:solidFill>
-          </a:ln>
-        </p:spPr>
-        <p:style>
-          <a:lnRef idx="2">
-            <a:schemeClr val="accent1"/>
-          </a:lnRef>
-          <a:fillRef idx="0">
-            <a:schemeClr val="accent1"/>
-          </a:fillRef>
-          <a:effectRef idx="1">
-            <a:schemeClr val="accent1"/>
-          </a:effectRef>
-          <a:fontRef idx="minor">
-            <a:schemeClr val="tx1"/>
-          </a:fontRef>
-        </p:style>
-      </p:cxnSp>
-      <p:sp>
-        <p:nvSpPr>
-          <p:cNvPr id="19" name="Rectangle 18"/>
-          <p:cNvSpPr/>
-          <p:nvPr/>
-        </p:nvSpPr>
-        <p:spPr>
-          <a:xfrm>
-            <a:off x="6656832" y="1828800"/>
-            <a:ext cx="228600" cy="2880360"/>
-          </a:xfrm>
-          <a:prstGeom prst="rect">
-            <a:avLst/>
-          </a:prstGeom>
-          <a:solidFill>
-            <a:srgbClr val="2A9D8F"/>
-          </a:solidFill>
-          <a:ln>
-            <a:noFill/>
-          </a:ln>
-        </p:spPr>
-        <p:style>
-          <a:lnRef idx="1">
-            <a:schemeClr val="accent1"/>
-          </a:lnRef>
-          <a:fillRef idx="3">
-            <a:schemeClr val="accent1"/>
-          </a:fillRef>
-          <a:effectRef idx="2">
-            <a:schemeClr val="accent1"/>
-          </a:effectRef>
-          <a:fontRef idx="minor">
-            <a:schemeClr val="lt1"/>
-          </a:fontRef>
-        </p:style>
-        <p:txBody>
-          <a:bodyPr rtlCol="0" anchor="ctr"/>
-          <a:lstStyle/>
-          <a:p>
-            <a:pPr algn="ctr"/>
-          </a:p>
-        </p:txBody>
-      </p:sp>
-      <p:sp>
-        <p:nvSpPr>
-          <p:cNvPr id="20" name="Rectangle 19"/>
-          <p:cNvSpPr/>
-          <p:nvPr/>
-        </p:nvSpPr>
-        <p:spPr>
-          <a:xfrm>
-            <a:off x="10917936" y="1828800"/>
-            <a:ext cx="228600" cy="2880360"/>
-          </a:xfrm>
-          <a:prstGeom prst="rect">
-            <a:avLst/>
-          </a:prstGeom>
-          <a:solidFill>
-            <a:srgbClr val="457B9D"/>
-          </a:solidFill>
-          <a:ln>
-            <a:noFill/>
-          </a:ln>
-        </p:spPr>
-        <p:style>
-          <a:lnRef idx="1">
-            <a:schemeClr val="accent1"/>
-          </a:lnRef>
-          <a:fillRef idx="3">
-            <a:schemeClr val="accent1"/>
-          </a:fillRef>
-          <a:effectRef idx="2">
-            <a:schemeClr val="accent1"/>
-          </a:effectRef>
-          <a:fontRef idx="minor">
-            <a:schemeClr val="lt1"/>
-          </a:fontRef>
-        </p:style>
-        <p:txBody>
-          <a:bodyPr rtlCol="0" anchor="ctr"/>
-          <a:lstStyle/>
-          <a:p>
-            <a:pPr algn="ctr"/>
-          </a:p>
-        </p:txBody>
-      </p:sp>
-      <p:sp>
-        <p:nvSpPr>
-          <p:cNvPr id="21" name="TextBox 20"/>
-          <p:cNvSpPr txBox="1"/>
-          <p:nvPr/>
-        </p:nvSpPr>
-        <p:spPr>
-          <a:xfrm>
-            <a:off x="6446520" y="4956048"/>
-            <a:ext cx="685800" cy="201168"/>
-          </a:xfrm>
-          <a:prstGeom prst="rect">
-            <a:avLst/>
-          </a:prstGeom>
-          <a:noFill/>
-        </p:spPr>
-        <p:txBody>
-          <a:bodyPr wrap="square">
-            <a:spAutoFit/>
-          </a:bodyPr>
-          <a:lstStyle/>
-          <a:p>
-            <a:pPr algn="ctr"/>
-            <a:r>
-              <a:rPr sz="800" b="1" i="0">
-                <a:solidFill>
-                  <a:srgbClr val="2A9D8F"/>
-                </a:solidFill>
-                <a:latin typeface="Aptos"/>
-              </a:rPr>
-              <a:t>Supply</a:t>
-            </a:r>
-          </a:p>
-        </p:txBody>
-      </p:sp>
-      <p:sp>
-        <p:nvSpPr>
-          <p:cNvPr id="22" name="TextBox 21"/>
-          <p:cNvSpPr txBox="1"/>
-          <p:nvPr/>
-        </p:nvSpPr>
-        <p:spPr>
-          <a:xfrm>
-            <a:off x="10698480" y="4956048"/>
-            <a:ext cx="685800" cy="201168"/>
-          </a:xfrm>
-          <a:prstGeom prst="rect">
-            <a:avLst/>
-          </a:prstGeom>
-          <a:noFill/>
-        </p:spPr>
-        <p:txBody>
-          <a:bodyPr wrap="square">
-            <a:spAutoFit/>
-          </a:bodyPr>
-          <a:lstStyle/>
-          <a:p>
-            <a:pPr algn="ctr"/>
-            <a:r>
-              <a:rPr sz="800" b="1" i="0">
-                <a:solidFill>
-                  <a:srgbClr val="457B9D"/>
-                </a:solidFill>
-                <a:latin typeface="Aptos"/>
-              </a:rPr>
-              <a:t>Return</a:t>
-            </a:r>
-          </a:p>
-        </p:txBody>
-      </p:sp>
-      <p:sp>
-        <p:nvSpPr>
-          <p:cNvPr id="23" name="Oval 22"/>
-          <p:cNvSpPr/>
-          <p:nvPr/>
-        </p:nvSpPr>
-        <p:spPr>
-          <a:xfrm>
-            <a:off x="5989320" y="1325880"/>
-            <a:ext cx="749808" cy="749808"/>
-          </a:xfrm>
-          <a:prstGeom prst="ellipse">
-            <a:avLst/>
-          </a:prstGeom>
-          <a:solidFill>
-            <a:srgbClr val="E76F51"/>
-          </a:solidFill>
-          <a:ln>
-            <a:noFill/>
-          </a:ln>
-        </p:spPr>
-        <p:style>
-          <a:lnRef idx="1">
-            <a:schemeClr val="accent1"/>
-          </a:lnRef>
-          <a:fillRef idx="3">
-            <a:schemeClr val="accent1"/>
-          </a:fillRef>
-          <a:effectRef idx="2">
-            <a:schemeClr val="accent1"/>
-          </a:effectRef>
-          <a:fontRef idx="minor">
-            <a:schemeClr val="lt1"/>
-          </a:fontRef>
-        </p:style>
-        <p:txBody>
-          <a:bodyPr rtlCol="0" anchor="ctr"/>
-          <a:lstStyle/>
-          <a:p>
-            <a:pPr algn="ctr"/>
-          </a:p>
-        </p:txBody>
-      </p:sp>
-      <p:sp>
-        <p:nvSpPr>
-          <p:cNvPr id="24" name="TextBox 23"/>
-          <p:cNvSpPr txBox="1"/>
-          <p:nvPr/>
-        </p:nvSpPr>
-        <p:spPr>
-          <a:xfrm>
-            <a:off x="5989320" y="1536192"/>
-            <a:ext cx="749808" cy="201168"/>
-          </a:xfrm>
-          <a:prstGeom prst="rect">
-            <a:avLst/>
-          </a:prstGeom>
-          <a:noFill/>
-        </p:spPr>
-        <p:txBody>
-          <a:bodyPr wrap="square">
-            <a:spAutoFit/>
-          </a:bodyPr>
-          <a:lstStyle/>
-          <a:p>
-            <a:pPr algn="ctr"/>
-            <a:r>
-              <a:rPr sz="1300" b="1" i="0">
-                <a:solidFill>
-                  <a:srgbClr val="FFFFFF"/>
-                </a:solidFill>
-                <a:latin typeface="Aptos"/>
-              </a:rPr>
-              <a:t>T</a:t>
-            </a:r>
-          </a:p>
-        </p:txBody>
-      </p:sp>
-      <p:sp>
-        <p:nvSpPr>
-          <p:cNvPr id="25" name="TextBox 24"/>
-          <p:cNvSpPr txBox="1"/>
-          <p:nvPr/>
-        </p:nvSpPr>
-        <p:spPr>
-          <a:xfrm>
-            <a:off x="5605272" y="2130552"/>
-            <a:ext cx="1554480" cy="237744"/>
-          </a:xfrm>
-          <a:prstGeom prst="rect">
-            <a:avLst/>
-          </a:prstGeom>
-          <a:noFill/>
-        </p:spPr>
-        <p:txBody>
-          <a:bodyPr wrap="square">
-            <a:spAutoFit/>
-          </a:bodyPr>
-          <a:lstStyle/>
-          <a:p>
-            <a:pPr algn="ctr"/>
-            <a:r>
-              <a:rPr sz="950" b="1" i="0">
-                <a:solidFill>
-                  <a:srgbClr val="E76F51"/>
-                </a:solidFill>
-                <a:latin typeface="Aptos"/>
-              </a:rPr>
-              <a:t>Temperature</a:t>
-            </a:r>
-          </a:p>
-        </p:txBody>
-      </p:sp>
-      <p:cxnSp>
-        <p:nvCxnSpPr>
-          <p:cNvPr id="26" name="Connector 25"/>
-          <p:cNvCxnSpPr/>
-          <p:nvPr/>
-        </p:nvCxnSpPr>
-        <p:spPr>
-          <a:xfrm>
-            <a:off x="6364224" y="1700784"/>
-            <a:ext cx="2523744" cy="1389888"/>
-          </a:xfrm>
-          <a:prstGeom prst="line">
-            <a:avLst/>
-          </a:prstGeom>
-          <a:ln w="16510">
-            <a:solidFill>
-              <a:srgbClr val="E76F51"/>
-            </a:solidFill>
-          </a:ln>
-        </p:spPr>
-        <p:style>
-          <a:lnRef idx="2">
-            <a:schemeClr val="accent1"/>
-          </a:lnRef>
-          <a:fillRef idx="0">
-            <a:schemeClr val="accent1"/>
-          </a:fillRef>
-          <a:effectRef idx="1">
-            <a:schemeClr val="accent1"/>
-          </a:effectRef>
-          <a:fontRef idx="minor">
-            <a:schemeClr val="tx1"/>
-          </a:fontRef>
-        </p:style>
-      </p:cxnSp>
-      <p:sp>
-        <p:nvSpPr>
-          <p:cNvPr id="27" name="Oval 26"/>
-          <p:cNvSpPr/>
-          <p:nvPr/>
-        </p:nvSpPr>
-        <p:spPr>
-          <a:xfrm>
-            <a:off x="10927080" y="1325880"/>
-            <a:ext cx="749808" cy="749808"/>
-          </a:xfrm>
-          <a:prstGeom prst="ellipse">
-            <a:avLst/>
-          </a:prstGeom>
-          <a:solidFill>
-            <a:srgbClr val="457B9D"/>
-          </a:solidFill>
-          <a:ln>
-            <a:noFill/>
-          </a:ln>
-        </p:spPr>
-        <p:style>
-          <a:lnRef idx="1">
-            <a:schemeClr val="accent1"/>
-          </a:lnRef>
-          <a:fillRef idx="3">
-            <a:schemeClr val="accent1"/>
-          </a:fillRef>
-          <a:effectRef idx="2">
-            <a:schemeClr val="accent1"/>
-          </a:effectRef>
-          <a:fontRef idx="minor">
-            <a:schemeClr val="lt1"/>
-          </a:fontRef>
-        </p:style>
-        <p:txBody>
-          <a:bodyPr rtlCol="0" anchor="ctr"/>
-          <a:lstStyle/>
-          <a:p>
-            <a:pPr algn="ctr"/>
-          </a:p>
-        </p:txBody>
-      </p:sp>
-      <p:sp>
-        <p:nvSpPr>
-          <p:cNvPr id="28" name="TextBox 27"/>
-          <p:cNvSpPr txBox="1"/>
-          <p:nvPr/>
-        </p:nvSpPr>
-        <p:spPr>
-          <a:xfrm>
-            <a:off x="10927080" y="1536192"/>
-            <a:ext cx="749808" cy="201168"/>
-          </a:xfrm>
-          <a:prstGeom prst="rect">
-            <a:avLst/>
-          </a:prstGeom>
-          <a:noFill/>
-        </p:spPr>
-        <p:txBody>
-          <a:bodyPr wrap="square">
-            <a:spAutoFit/>
-          </a:bodyPr>
-          <a:lstStyle/>
-          <a:p>
-            <a:pPr algn="ctr"/>
-            <a:r>
-              <a:rPr sz="1300" b="1" i="0">
-                <a:solidFill>
-                  <a:srgbClr val="FFFFFF"/>
-                </a:solidFill>
-                <a:latin typeface="Aptos"/>
-              </a:rPr>
-              <a:t>RH</a:t>
-            </a:r>
-          </a:p>
-        </p:txBody>
-      </p:sp>
-      <p:sp>
-        <p:nvSpPr>
-          <p:cNvPr id="29" name="TextBox 28"/>
-          <p:cNvSpPr txBox="1"/>
-          <p:nvPr/>
-        </p:nvSpPr>
-        <p:spPr>
-          <a:xfrm>
-            <a:off x="10543032" y="2130552"/>
-            <a:ext cx="1554480" cy="237744"/>
-          </a:xfrm>
-          <a:prstGeom prst="rect">
-            <a:avLst/>
-          </a:prstGeom>
-          <a:noFill/>
-        </p:spPr>
-        <p:txBody>
-          <a:bodyPr wrap="square">
-            <a:spAutoFit/>
-          </a:bodyPr>
-          <a:lstStyle/>
-          <a:p>
-            <a:pPr algn="ctr"/>
-            <a:r>
-              <a:rPr sz="950" b="1" i="0">
-                <a:solidFill>
-                  <a:srgbClr val="457B9D"/>
-                </a:solidFill>
-                <a:latin typeface="Aptos"/>
-              </a:rPr>
-              <a:t>Humidity</a:t>
-            </a:r>
-          </a:p>
-        </p:txBody>
-      </p:sp>
-      <p:cxnSp>
-        <p:nvCxnSpPr>
-          <p:cNvPr id="30" name="Connector 29"/>
-          <p:cNvCxnSpPr/>
-          <p:nvPr/>
-        </p:nvCxnSpPr>
-        <p:spPr>
-          <a:xfrm flipH="1">
-            <a:off x="8887968" y="1700784"/>
-            <a:ext cx="2414016" cy="1389888"/>
-          </a:xfrm>
-          <a:prstGeom prst="line">
-            <a:avLst/>
-          </a:prstGeom>
-          <a:ln w="16510">
-            <a:solidFill>
-              <a:srgbClr val="457B9D"/>
-            </a:solidFill>
-          </a:ln>
-        </p:spPr>
-        <p:style>
-          <a:lnRef idx="2">
-            <a:schemeClr val="accent1"/>
-          </a:lnRef>
-          <a:fillRef idx="0">
-            <a:schemeClr val="accent1"/>
-          </a:fillRef>
-          <a:effectRef idx="1">
-            <a:schemeClr val="accent1"/>
-          </a:effectRef>
-          <a:fontRef idx="minor">
-            <a:schemeClr val="tx1"/>
-          </a:fontRef>
-        </p:style>
-      </p:cxnSp>
-      <p:sp>
-        <p:nvSpPr>
-          <p:cNvPr id="31" name="Oval 30"/>
-          <p:cNvSpPr/>
-          <p:nvPr/>
-        </p:nvSpPr>
-        <p:spPr>
-          <a:xfrm>
-            <a:off x="5989320" y="4709160"/>
-            <a:ext cx="749808" cy="749808"/>
-          </a:xfrm>
-          <a:prstGeom prst="ellipse">
-            <a:avLst/>
-          </a:prstGeom>
-          <a:solidFill>
-            <a:srgbClr val="2A9D8F"/>
-          </a:solidFill>
-          <a:ln>
-            <a:noFill/>
-          </a:ln>
-        </p:spPr>
-        <p:style>
-          <a:lnRef idx="1">
-            <a:schemeClr val="accent1"/>
-          </a:lnRef>
-          <a:fillRef idx="3">
-            <a:schemeClr val="accent1"/>
-          </a:fillRef>
-          <a:effectRef idx="2">
-            <a:schemeClr val="accent1"/>
-          </a:effectRef>
-          <a:fontRef idx="minor">
-            <a:schemeClr val="lt1"/>
-          </a:fontRef>
-        </p:style>
-        <p:txBody>
-          <a:bodyPr rtlCol="0" anchor="ctr"/>
-          <a:lstStyle/>
-          <a:p>
-            <a:pPr algn="ctr"/>
-          </a:p>
-        </p:txBody>
-      </p:sp>
-      <p:sp>
-        <p:nvSpPr>
-          <p:cNvPr id="32" name="TextBox 31"/>
-          <p:cNvSpPr txBox="1"/>
-          <p:nvPr/>
-        </p:nvSpPr>
-        <p:spPr>
-          <a:xfrm>
-            <a:off x="5989320" y="4919472"/>
-            <a:ext cx="749808" cy="201168"/>
-          </a:xfrm>
-          <a:prstGeom prst="rect">
-            <a:avLst/>
-          </a:prstGeom>
-          <a:noFill/>
-        </p:spPr>
-        <p:txBody>
-          <a:bodyPr wrap="square">
-            <a:spAutoFit/>
-          </a:bodyPr>
-          <a:lstStyle/>
-          <a:p>
-            <a:pPr algn="ctr"/>
-            <a:r>
-              <a:rPr sz="1300" b="1" i="0">
-                <a:solidFill>
-                  <a:srgbClr val="FFFFFF"/>
-                </a:solidFill>
-                <a:latin typeface="Aptos"/>
-              </a:rPr>
-              <a:t>↻</a:t>
-            </a:r>
-          </a:p>
-        </p:txBody>
-      </p:sp>
-      <p:sp>
-        <p:nvSpPr>
-          <p:cNvPr id="33" name="TextBox 32"/>
-          <p:cNvSpPr txBox="1"/>
-          <p:nvPr/>
-        </p:nvSpPr>
-        <p:spPr>
-          <a:xfrm>
-            <a:off x="5605272" y="5513832"/>
-            <a:ext cx="1554480" cy="237744"/>
-          </a:xfrm>
-          <a:prstGeom prst="rect">
-            <a:avLst/>
-          </a:prstGeom>
-          <a:noFill/>
-        </p:spPr>
-        <p:txBody>
-          <a:bodyPr wrap="square">
-            <a:spAutoFit/>
-          </a:bodyPr>
-          <a:lstStyle/>
-          <a:p>
-            <a:pPr algn="ctr"/>
-            <a:r>
-              <a:rPr sz="950" b="1" i="0">
-                <a:solidFill>
-                  <a:srgbClr val="2A9D8F"/>
-                </a:solidFill>
-                <a:latin typeface="Aptos"/>
-              </a:rPr>
-              <a:t>Air circulation</a:t>
-            </a:r>
-          </a:p>
-        </p:txBody>
-      </p:sp>
-      <p:cxnSp>
-        <p:nvCxnSpPr>
-          <p:cNvPr id="34" name="Connector 33"/>
-          <p:cNvCxnSpPr/>
-          <p:nvPr/>
-        </p:nvCxnSpPr>
-        <p:spPr>
-          <a:xfrm flipV="1">
-            <a:off x="6364224" y="3090672"/>
-            <a:ext cx="2523744" cy="1993392"/>
-          </a:xfrm>
-          <a:prstGeom prst="line">
-            <a:avLst/>
-          </a:prstGeom>
-          <a:ln w="16510">
-            <a:solidFill>
-              <a:srgbClr val="2A9D8F"/>
-            </a:solidFill>
-          </a:ln>
-        </p:spPr>
-        <p:style>
-          <a:lnRef idx="2">
-            <a:schemeClr val="accent1"/>
-          </a:lnRef>
-          <a:fillRef idx="0">
-            <a:schemeClr val="accent1"/>
-          </a:fillRef>
-          <a:effectRef idx="1">
-            <a:schemeClr val="accent1"/>
-          </a:effectRef>
-          <a:fontRef idx="minor">
-            <a:schemeClr val="tx1"/>
-          </a:fontRef>
-        </p:style>
-      </p:cxnSp>
-      <p:sp>
-        <p:nvSpPr>
-          <p:cNvPr id="35" name="Oval 34"/>
-          <p:cNvSpPr/>
-          <p:nvPr/>
-        </p:nvSpPr>
-        <p:spPr>
-          <a:xfrm>
-            <a:off x="10927080" y="4709160"/>
-            <a:ext cx="749808" cy="749808"/>
-          </a:xfrm>
-          <a:prstGeom prst="ellipse">
-            <a:avLst/>
-          </a:prstGeom>
-          <a:solidFill>
-            <a:srgbClr val="4CAF50"/>
-          </a:solidFill>
-          <a:ln>
-            <a:noFill/>
-          </a:ln>
-        </p:spPr>
-        <p:style>
-          <a:lnRef idx="1">
-            <a:schemeClr val="accent1"/>
-          </a:lnRef>
-          <a:fillRef idx="3">
-            <a:schemeClr val="accent1"/>
-          </a:fillRef>
-          <a:effectRef idx="2">
-            <a:schemeClr val="accent1"/>
-          </a:effectRef>
-          <a:fontRef idx="minor">
-            <a:schemeClr val="lt1"/>
-          </a:fontRef>
-        </p:style>
-        <p:txBody>
-          <a:bodyPr rtlCol="0" anchor="ctr"/>
-          <a:lstStyle/>
-          <a:p>
-            <a:pPr algn="ctr"/>
-          </a:p>
-        </p:txBody>
-      </p:sp>
-      <p:sp>
-        <p:nvSpPr>
-          <p:cNvPr id="36" name="TextBox 35"/>
-          <p:cNvSpPr txBox="1"/>
-          <p:nvPr/>
-        </p:nvSpPr>
-        <p:spPr>
-          <a:xfrm>
-            <a:off x="10927080" y="4919472"/>
-            <a:ext cx="749808" cy="201168"/>
-          </a:xfrm>
-          <a:prstGeom prst="rect">
-            <a:avLst/>
-          </a:prstGeom>
-          <a:noFill/>
-        </p:spPr>
-        <p:txBody>
-          <a:bodyPr wrap="square">
-            <a:spAutoFit/>
-          </a:bodyPr>
-          <a:lstStyle/>
-          <a:p>
-            <a:pPr algn="ctr"/>
-            <a:r>
-              <a:rPr sz="1300" b="1" i="0">
-                <a:solidFill>
-                  <a:srgbClr val="FFFFFF"/>
-                </a:solidFill>
-                <a:latin typeface="Aptos"/>
-              </a:rPr>
-              <a:t>●</a:t>
-            </a:r>
-          </a:p>
-        </p:txBody>
-      </p:sp>
-      <p:sp>
-        <p:nvSpPr>
-          <p:cNvPr id="37" name="TextBox 36"/>
-          <p:cNvSpPr txBox="1"/>
-          <p:nvPr/>
-        </p:nvSpPr>
-        <p:spPr>
-          <a:xfrm>
-            <a:off x="10543032" y="5513832"/>
-            <a:ext cx="1554480" cy="237744"/>
-          </a:xfrm>
-          <a:prstGeom prst="rect">
-            <a:avLst/>
-          </a:prstGeom>
-          <a:noFill/>
-        </p:spPr>
-        <p:txBody>
-          <a:bodyPr wrap="square">
-            <a:spAutoFit/>
-          </a:bodyPr>
-          <a:lstStyle/>
-          <a:p>
-            <a:pPr algn="ctr"/>
-            <a:r>
-              <a:rPr sz="950" b="1" i="0">
-                <a:solidFill>
-                  <a:srgbClr val="4CAF50"/>
-                </a:solidFill>
-                <a:latin typeface="Aptos"/>
-              </a:rPr>
-              <a:t>Air cleanliness</a:t>
-            </a:r>
-          </a:p>
-        </p:txBody>
-      </p:sp>
-      <p:cxnSp>
-        <p:nvCxnSpPr>
-          <p:cNvPr id="38" name="Connector 37"/>
-          <p:cNvCxnSpPr/>
-          <p:nvPr/>
-        </p:nvCxnSpPr>
-        <p:spPr>
-          <a:xfrm flipH="1" flipV="1">
-            <a:off x="8887968" y="3090672"/>
-            <a:ext cx="2414016" cy="1993392"/>
-          </a:xfrm>
-          <a:prstGeom prst="line">
-            <a:avLst/>
-          </a:prstGeom>
-          <a:ln w="16510">
-            <a:solidFill>
-              <a:srgbClr val="4CAF50"/>
-            </a:solidFill>
-          </a:ln>
-        </p:spPr>
-        <p:style>
-          <a:lnRef idx="2">
-            <a:schemeClr val="accent1"/>
-          </a:lnRef>
-          <a:fillRef idx="0">
-            <a:schemeClr val="accent1"/>
-          </a:fillRef>
-          <a:effectRef idx="1">
-            <a:schemeClr val="accent1"/>
-          </a:effectRef>
-          <a:fontRef idx="minor">
-            <a:schemeClr val="tx1"/>
-          </a:fontRef>
-        </p:style>
-      </p:cxnSp>
-      <p:sp>
-        <p:nvSpPr>
-          <p:cNvPr id="39" name="Oval 38"/>
-          <p:cNvSpPr/>
-          <p:nvPr/>
-        </p:nvSpPr>
-        <p:spPr>
-          <a:xfrm>
-            <a:off x="685800" y="5074920"/>
-            <a:ext cx="384048" cy="384048"/>
-          </a:xfrm>
-          <a:prstGeom prst="ellipse">
-            <a:avLst/>
-          </a:prstGeom>
-          <a:solidFill>
-            <a:srgbClr val="2A9D8F"/>
-          </a:solidFill>
-          <a:ln>
-            <a:noFill/>
-          </a:ln>
-        </p:spPr>
-        <p:style>
-          <a:lnRef idx="1">
-            <a:schemeClr val="accent1"/>
-          </a:lnRef>
-          <a:fillRef idx="3">
-            <a:schemeClr val="accent1"/>
-          </a:fillRef>
-          <a:effectRef idx="2">
-            <a:schemeClr val="accent1"/>
-          </a:effectRef>
-          <a:fontRef idx="minor">
-            <a:schemeClr val="lt1"/>
-          </a:fontRef>
-        </p:style>
-        <p:txBody>
-          <a:bodyPr rtlCol="0" anchor="ctr"/>
-          <a:lstStyle/>
-          <a:p>
-            <a:pPr algn="ctr"/>
-          </a:p>
-        </p:txBody>
-      </p:sp>
-      <p:sp>
-        <p:nvSpPr>
-          <p:cNvPr id="40" name="TextBox 39"/>
-          <p:cNvSpPr txBox="1"/>
-          <p:nvPr/>
-        </p:nvSpPr>
-        <p:spPr>
-          <a:xfrm>
-            <a:off x="685800" y="5184648"/>
-            <a:ext cx="384048" cy="100584"/>
-          </a:xfrm>
-          <a:prstGeom prst="rect">
-            <a:avLst/>
-          </a:prstGeom>
-          <a:noFill/>
-        </p:spPr>
-        <p:txBody>
-          <a:bodyPr wrap="square">
-            <a:spAutoFit/>
-          </a:bodyPr>
-          <a:lstStyle/>
-          <a:p>
-            <a:pPr algn="ctr"/>
-            <a:r>
-              <a:rPr sz="800" b="1" i="0">
-                <a:solidFill>
-                  <a:srgbClr val="FFFFFF"/>
-                </a:solidFill>
-                <a:latin typeface="Aptos"/>
-              </a:rPr>
-              <a:t>1</a:t>
-            </a:r>
-          </a:p>
-        </p:txBody>
-      </p:sp>
-      <p:sp>
-        <p:nvSpPr>
-          <p:cNvPr id="41" name="TextBox 40"/>
-          <p:cNvSpPr txBox="1"/>
-          <p:nvPr/>
-        </p:nvSpPr>
-        <p:spPr>
-          <a:xfrm>
-            <a:off x="1161288" y="5001768"/>
-            <a:ext cx="1097280" cy="219456"/>
-          </a:xfrm>
-          <a:prstGeom prst="rect">
-            <a:avLst/>
-          </a:prstGeom>
-          <a:noFill/>
-        </p:spPr>
-        <p:txBody>
-          <a:bodyPr wrap="square">
-            <a:spAutoFit/>
-          </a:bodyPr>
-          <a:lstStyle/>
-          <a:p>
-            <a:r>
-              <a:rPr sz="1100" b="1" i="0">
-                <a:solidFill>
-                  <a:srgbClr val="232D37"/>
-                </a:solidFill>
-                <a:latin typeface="Aptos"/>
-              </a:rPr>
-              <a:t>Comfort</a:t>
-            </a:r>
-          </a:p>
-        </p:txBody>
-      </p:sp>
-      <p:sp>
-        <p:nvSpPr>
-          <p:cNvPr id="42" name="TextBox 41"/>
-          <p:cNvSpPr txBox="1"/>
-          <p:nvPr/>
-        </p:nvSpPr>
-        <p:spPr>
-          <a:xfrm>
-            <a:off x="1161288" y="5276088"/>
-            <a:ext cx="1188720" cy="219456"/>
-          </a:xfrm>
-          <a:prstGeom prst="rect">
-            <a:avLst/>
-          </a:prstGeom>
-          <a:noFill/>
-        </p:spPr>
-        <p:txBody>
-          <a:bodyPr wrap="square">
-            <a:spAutoFit/>
-          </a:bodyPr>
-          <a:lstStyle/>
-          <a:p>
-            <a:r>
-              <a:rPr sz="750" b="0" i="0">
-                <a:solidFill>
-                  <a:srgbClr val="5A6973"/>
-                </a:solidFill>
-                <a:latin typeface="Aptos"/>
-              </a:rPr>
-              <a:t>human thermal comfort</a:t>
-            </a:r>
-          </a:p>
-        </p:txBody>
-      </p:sp>
-      <p:sp>
-        <p:nvSpPr>
-          <p:cNvPr id="43" name="Oval 42"/>
-          <p:cNvSpPr/>
-          <p:nvPr/>
-        </p:nvSpPr>
-        <p:spPr>
-          <a:xfrm>
-            <a:off x="2377440" y="5074920"/>
-            <a:ext cx="384048" cy="384048"/>
-          </a:xfrm>
-          <a:prstGeom prst="ellipse">
-            <a:avLst/>
-          </a:prstGeom>
-          <a:solidFill>
-            <a:srgbClr val="457B9D"/>
-          </a:solidFill>
-          <a:ln>
-            <a:noFill/>
-          </a:ln>
-        </p:spPr>
-        <p:style>
-          <a:lnRef idx="1">
-            <a:schemeClr val="accent1"/>
-          </a:lnRef>
-          <a:fillRef idx="3">
-            <a:schemeClr val="accent1"/>
-          </a:fillRef>
-          <a:effectRef idx="2">
-            <a:schemeClr val="accent1"/>
-          </a:effectRef>
-          <a:fontRef idx="minor">
-            <a:schemeClr val="lt1"/>
-          </a:fontRef>
-        </p:style>
-        <p:txBody>
-          <a:bodyPr rtlCol="0" anchor="ctr"/>
-          <a:lstStyle/>
-          <a:p>
-            <a:pPr algn="ctr"/>
-          </a:p>
-        </p:txBody>
-      </p:sp>
-      <p:sp>
-        <p:nvSpPr>
-          <p:cNvPr id="44" name="TextBox 43"/>
-          <p:cNvSpPr txBox="1"/>
-          <p:nvPr/>
-        </p:nvSpPr>
-        <p:spPr>
-          <a:xfrm>
-            <a:off x="2377440" y="5184648"/>
-            <a:ext cx="384048" cy="100584"/>
-          </a:xfrm>
-          <a:prstGeom prst="rect">
-            <a:avLst/>
-          </a:prstGeom>
-          <a:noFill/>
-        </p:spPr>
-        <p:txBody>
-          <a:bodyPr wrap="square">
-            <a:spAutoFit/>
-          </a:bodyPr>
-          <a:lstStyle/>
-          <a:p>
-            <a:pPr algn="ctr"/>
-            <a:r>
-              <a:rPr sz="800" b="1" i="0">
-                <a:solidFill>
-                  <a:srgbClr val="FFFFFF"/>
-                </a:solidFill>
-                <a:latin typeface="Aptos"/>
-              </a:rPr>
-              <a:t>2</a:t>
-            </a:r>
-          </a:p>
-        </p:txBody>
-      </p:sp>
-      <p:sp>
-        <p:nvSpPr>
-          <p:cNvPr id="45" name="TextBox 44"/>
-          <p:cNvSpPr txBox="1"/>
-          <p:nvPr/>
-        </p:nvSpPr>
-        <p:spPr>
-          <a:xfrm>
-            <a:off x="2852928" y="5001768"/>
-            <a:ext cx="1097280" cy="219456"/>
-          </a:xfrm>
-          <a:prstGeom prst="rect">
-            <a:avLst/>
-          </a:prstGeom>
-          <a:noFill/>
-        </p:spPr>
-        <p:txBody>
-          <a:bodyPr wrap="square">
-            <a:spAutoFit/>
-          </a:bodyPr>
-          <a:lstStyle/>
-          <a:p>
-            <a:r>
-              <a:rPr sz="1100" b="1" i="0">
-                <a:solidFill>
-                  <a:srgbClr val="232D37"/>
-                </a:solidFill>
-                <a:latin typeface="Aptos"/>
-              </a:rPr>
-              <a:t>Process</a:t>
-            </a:r>
-          </a:p>
-        </p:txBody>
-      </p:sp>
-      <p:sp>
-        <p:nvSpPr>
-          <p:cNvPr id="46" name="TextBox 45"/>
-          <p:cNvSpPr txBox="1"/>
-          <p:nvPr/>
-        </p:nvSpPr>
-        <p:spPr>
-          <a:xfrm>
-            <a:off x="2852928" y="5276088"/>
-            <a:ext cx="1188720" cy="219456"/>
-          </a:xfrm>
-          <a:prstGeom prst="rect">
-            <a:avLst/>
-          </a:prstGeom>
-          <a:noFill/>
-        </p:spPr>
-        <p:txBody>
-          <a:bodyPr wrap="square">
-            <a:spAutoFit/>
-          </a:bodyPr>
-          <a:lstStyle/>
-          <a:p>
-            <a:r>
-              <a:rPr sz="750" b="0" i="0">
-                <a:solidFill>
-                  <a:srgbClr val="5A6973"/>
-                </a:solidFill>
-                <a:latin typeface="Aptos"/>
-              </a:rPr>
-              <a:t>material / product need</a:t>
-            </a:r>
-          </a:p>
-        </p:txBody>
-      </p:sp>
-      <p:sp>
-        <p:nvSpPr>
-          <p:cNvPr id="47" name="Oval 46"/>
-          <p:cNvSpPr/>
-          <p:nvPr/>
-        </p:nvSpPr>
-        <p:spPr>
-          <a:xfrm>
-            <a:off x="4069080" y="5074920"/>
-            <a:ext cx="384048" cy="384048"/>
-          </a:xfrm>
-          <a:prstGeom prst="ellipse">
-            <a:avLst/>
-          </a:prstGeom>
-          <a:solidFill>
-            <a:srgbClr val="E76F51"/>
-          </a:solidFill>
-          <a:ln>
-            <a:noFill/>
-          </a:ln>
-        </p:spPr>
-        <p:style>
-          <a:lnRef idx="1">
-            <a:schemeClr val="accent1"/>
-          </a:lnRef>
-          <a:fillRef idx="3">
-            <a:schemeClr val="accent1"/>
-          </a:fillRef>
-          <a:effectRef idx="2">
-            <a:schemeClr val="accent1"/>
-          </a:effectRef>
-          <a:fontRef idx="minor">
-            <a:schemeClr val="lt1"/>
-          </a:fontRef>
-        </p:style>
-        <p:txBody>
-          <a:bodyPr rtlCol="0" anchor="ctr"/>
-          <a:lstStyle/>
-          <a:p>
-            <a:pPr algn="ctr"/>
-          </a:p>
-        </p:txBody>
-      </p:sp>
-      <p:sp>
-        <p:nvSpPr>
-          <p:cNvPr id="48" name="TextBox 47"/>
-          <p:cNvSpPr txBox="1"/>
-          <p:nvPr/>
-        </p:nvSpPr>
-        <p:spPr>
-          <a:xfrm>
-            <a:off x="4069080" y="5184648"/>
-            <a:ext cx="384048" cy="100584"/>
-          </a:xfrm>
-          <a:prstGeom prst="rect">
-            <a:avLst/>
-          </a:prstGeom>
-          <a:noFill/>
-        </p:spPr>
-        <p:txBody>
-          <a:bodyPr wrap="square">
-            <a:spAutoFit/>
-          </a:bodyPr>
-          <a:lstStyle/>
-          <a:p>
-            <a:pPr algn="ctr"/>
-            <a:r>
-              <a:rPr sz="800" b="1" i="0">
-                <a:solidFill>
-                  <a:srgbClr val="FFFFFF"/>
-                </a:solidFill>
-                <a:latin typeface="Aptos"/>
-              </a:rPr>
-              <a:t>3</a:t>
-            </a:r>
-          </a:p>
-        </p:txBody>
-      </p:sp>
-      <p:sp>
-        <p:nvSpPr>
-          <p:cNvPr id="49" name="TextBox 48"/>
-          <p:cNvSpPr txBox="1"/>
-          <p:nvPr/>
-        </p:nvSpPr>
-        <p:spPr>
-          <a:xfrm>
-            <a:off x="4544568" y="5001768"/>
-            <a:ext cx="1097280" cy="219456"/>
-          </a:xfrm>
-          <a:prstGeom prst="rect">
-            <a:avLst/>
-          </a:prstGeom>
-          <a:noFill/>
-        </p:spPr>
-        <p:txBody>
-          <a:bodyPr wrap="square">
-            <a:spAutoFit/>
-          </a:bodyPr>
-          <a:lstStyle/>
-          <a:p>
-            <a:r>
-              <a:rPr sz="1100" b="1" i="0">
-                <a:solidFill>
-                  <a:srgbClr val="232D37"/>
-                </a:solidFill>
-                <a:latin typeface="Aptos"/>
-              </a:rPr>
-              <a:t>Survey</a:t>
-            </a:r>
-          </a:p>
-        </p:txBody>
-      </p:sp>
-      <p:sp>
-        <p:nvSpPr>
-          <p:cNvPr id="50" name="TextBox 49"/>
-          <p:cNvSpPr txBox="1"/>
-          <p:nvPr/>
-        </p:nvSpPr>
-        <p:spPr>
-          <a:xfrm>
-            <a:off x="4544568" y="5276088"/>
-            <a:ext cx="1188720" cy="219456"/>
-          </a:xfrm>
-          <a:prstGeom prst="rect">
-            <a:avLst/>
-          </a:prstGeom>
-          <a:noFill/>
-        </p:spPr>
-        <p:txBody>
-          <a:bodyPr wrap="square">
-            <a:spAutoFit/>
-          </a:bodyPr>
-          <a:lstStyle/>
-          <a:p>
-            <a:r>
-              <a:rPr sz="750" b="0" i="0">
-                <a:solidFill>
-                  <a:srgbClr val="5A6973"/>
-                </a:solidFill>
-                <a:latin typeface="Aptos"/>
-              </a:rPr>
-              <a:t>data before design</a:t>
-            </a:r>
-          </a:p>
-        </p:txBody>
-      </p:sp>
-      <p:sp>
-        <p:nvSpPr>
-          <p:cNvPr id="51" name="TextBox 50"/>
-          <p:cNvSpPr txBox="1"/>
-          <p:nvPr/>
-        </p:nvSpPr>
-        <p:spPr>
-          <a:xfrm>
-            <a:off x="594360" y="6446520"/>
-            <a:ext cx="7315200" cy="201168"/>
-          </a:xfrm>
-          <a:prstGeom prst="rect">
-            <a:avLst/>
-          </a:prstGeom>
-          <a:noFill/>
-        </p:spPr>
-        <p:txBody>
-          <a:bodyPr wrap="square">
-            <a:spAutoFit/>
-          </a:bodyPr>
-          <a:lstStyle/>
-          <a:p>
-            <a:r>
-              <a:rPr sz="900" b="0" i="0">
+            <a:off x="502920" y="6473952"/>
+            <a:ext cx="7315200" cy="182880"/>
+          </a:xfrm>
+          <a:prstGeom prst="rect">
+            <a:avLst/>
+          </a:prstGeom>
+          <a:noFill/>
+        </p:spPr>
+        <p:txBody>
+          <a:bodyPr wrap="square">
+            <a:spAutoFit/>
+          </a:bodyPr>
+          <a:lstStyle/>
+          <a:p>
+            <a:r>
+              <a:rPr sz="850" b="0">
                 <a:solidFill>
                   <a:srgbClr val="78828C"/>
                 </a:solidFill>
@@ -4977,14 +3359,14 @@
       </p:sp>
       <p:sp>
         <p:nvSpPr>
-          <p:cNvPr id="52" name="TextBox 51"/>
-          <p:cNvSpPr txBox="1"/>
-          <p:nvPr/>
-        </p:nvSpPr>
-        <p:spPr>
-          <a:xfrm>
-            <a:off x="11292840" y="6446520"/>
-            <a:ext cx="502920" cy="201168"/>
+          <p:cNvPr id="9" name="TextBox 8"/>
+          <p:cNvSpPr txBox="1"/>
+          <p:nvPr/>
+        </p:nvSpPr>
+        <p:spPr>
+          <a:xfrm>
+            <a:off x="11292840" y="6473952"/>
+            <a:ext cx="502920" cy="182880"/>
           </a:xfrm>
           <a:prstGeom prst="rect">
             <a:avLst/>
@@ -4999,7 +3381,7 @@
           <a:p>
             <a:pPr algn="r"/>
             <a:r>
-              <a:rPr sz="900" b="0" i="0">
+              <a:rPr sz="850" b="0">
                 <a:solidFill>
                   <a:srgbClr val="78828C"/>
                 </a:solidFill>

--- a/05_Outputs/Air Conditioning/English Slides/Air Con Chapter 1 Topic 1.1 - Visual Lecture Deck CLEAN with TA Figures.pptx
+++ b/05_Outputs/Air Conditioning/English Slides/Air Con Chapter 1 Topic 1.1 - Visual Lecture Deck CLEAN with TA Figures.pptx
@@ -7736,16 +7736,83 @@
         <p:nvPr/>
       </p:nvGrpSpPr>
       <p:grpSpPr/>
-      <p:sp>
-        <p:nvSpPr>
-          <p:cNvPr id="2" name="Rectangle 1"/>
+      <p:pic>
+        <p:nvPicPr>
+          <p:cNvPr id="2" name="Picture 1" descr="cooling-only-vs-air-conditioning-infographic.png"/>
+          <p:cNvPicPr>
+            <a:picLocks noChangeAspect="1"/>
+          </p:cNvPicPr>
+          <p:nvPr/>
+        </p:nvPicPr>
+        <p:blipFill>
+          <a:blip r:embed="rId2"/>
+          <a:stretch>
+            <a:fillRect/>
+          </a:stretch>
+        </p:blipFill>
+        <p:spPr>
+          <a:xfrm>
+            <a:off x="772159" y="758952"/>
+            <a:ext cx="10647680" cy="5989320"/>
+          </a:xfrm>
+          <a:prstGeom prst="rect">
+            <a:avLst/>
+          </a:prstGeom>
+        </p:spPr>
+      </p:pic>
+      <p:sp>
+        <p:nvSpPr>
+          <p:cNvPr id="3" name="Rectangle 2"/>
           <p:cNvSpPr/>
           <p:nvPr/>
         </p:nvSpPr>
         <p:spPr>
           <a:xfrm>
             <a:off x="0" y="0"/>
-            <a:ext cx="12191999" cy="201168"/>
+            <a:ext cx="12191999" cy="749808"/>
+          </a:xfrm>
+          <a:prstGeom prst="rect">
+            <a:avLst/>
+          </a:prstGeom>
+          <a:solidFill>
+            <a:srgbClr val="F8FAFC"/>
+          </a:solidFill>
+          <a:ln>
+            <a:noFill/>
+          </a:ln>
+        </p:spPr>
+        <p:style>
+          <a:lnRef idx="1">
+            <a:schemeClr val="accent1"/>
+          </a:lnRef>
+          <a:fillRef idx="3">
+            <a:schemeClr val="accent1"/>
+          </a:fillRef>
+          <a:effectRef idx="2">
+            <a:schemeClr val="accent1"/>
+          </a:effectRef>
+          <a:fontRef idx="minor">
+            <a:schemeClr val="lt1"/>
+          </a:fontRef>
+        </p:style>
+        <p:txBody>
+          <a:bodyPr rtlCol="0" anchor="ctr"/>
+          <a:lstStyle/>
+          <a:p>
+            <a:pPr algn="ctr"/>
+          </a:p>
+        </p:txBody>
+      </p:sp>
+      <p:sp>
+        <p:nvSpPr>
+          <p:cNvPr id="4" name="Rectangle 3"/>
+          <p:cNvSpPr/>
+          <p:nvPr/>
+        </p:nvSpPr>
+        <p:spPr>
+          <a:xfrm>
+            <a:off x="0" y="0"/>
+            <a:ext cx="12191999" cy="164592"/>
           </a:xfrm>
           <a:prstGeom prst="rect">
             <a:avLst/>
@@ -7781,62 +7848,62 @@
       </p:sp>
       <p:sp>
         <p:nvSpPr>
-          <p:cNvPr id="3" name="TextBox 2"/>
-          <p:cNvSpPr txBox="1"/>
-          <p:nvPr/>
-        </p:nvSpPr>
-        <p:spPr>
-          <a:xfrm>
-            <a:off x="502920" y="457200"/>
-            <a:ext cx="11064240" cy="640080"/>
-          </a:xfrm>
-          <a:prstGeom prst="rect">
-            <a:avLst/>
-          </a:prstGeom>
-          <a:noFill/>
-        </p:spPr>
-        <p:txBody>
-          <a:bodyPr wrap="square">
-            <a:spAutoFit/>
-          </a:bodyPr>
-          <a:lstStyle/>
-          <a:p>
-            <a:r>
-              <a:rPr sz="3000" b="1" i="0">
+          <p:cNvPr id="5" name="TextBox 4"/>
+          <p:cNvSpPr txBox="1"/>
+          <p:nvPr/>
+        </p:nvSpPr>
+        <p:spPr>
+          <a:xfrm>
+            <a:off x="502920" y="256032"/>
+            <a:ext cx="5394960" cy="274320"/>
+          </a:xfrm>
+          <a:prstGeom prst="rect">
+            <a:avLst/>
+          </a:prstGeom>
+          <a:noFill/>
+        </p:spPr>
+        <p:txBody>
+          <a:bodyPr wrap="square">
+            <a:spAutoFit/>
+          </a:bodyPr>
+          <a:lstStyle/>
+          <a:p>
+            <a:r>
+              <a:rPr sz="1200" b="1">
                 <a:solidFill>
                   <a:srgbClr val="11374B"/>
                 </a:solidFill>
                 <a:latin typeface="Aptos"/>
               </a:rPr>
-              <a:t>Cooling alone is not air conditioning</a:t>
-            </a:r>
-          </a:p>
-        </p:txBody>
-      </p:sp>
-      <p:sp>
-        <p:nvSpPr>
-          <p:cNvPr id="4" name="TextBox 3"/>
-          <p:cNvSpPr txBox="1"/>
-          <p:nvPr/>
-        </p:nvSpPr>
-        <p:spPr>
-          <a:xfrm>
-            <a:off x="530352" y="1060704"/>
-            <a:ext cx="10972800" cy="365760"/>
-          </a:xfrm>
-          <a:prstGeom prst="rect">
-            <a:avLst/>
-          </a:prstGeom>
-          <a:noFill/>
-        </p:spPr>
-        <p:txBody>
-          <a:bodyPr wrap="square">
-            <a:spAutoFit/>
-          </a:bodyPr>
-          <a:lstStyle/>
-          <a:p>
-            <a:r>
-              <a:rPr sz="1400" b="0" i="0">
+              <a:t>1.1 | Cooling only is not air conditioning</a:t>
+            </a:r>
+          </a:p>
+        </p:txBody>
+      </p:sp>
+      <p:sp>
+        <p:nvSpPr>
+          <p:cNvPr id="6" name="TextBox 5"/>
+          <p:cNvSpPr txBox="1"/>
+          <p:nvPr/>
+        </p:nvSpPr>
+        <p:spPr>
+          <a:xfrm>
+            <a:off x="502920" y="475488"/>
+            <a:ext cx="6766560" cy="256032"/>
+          </a:xfrm>
+          <a:prstGeom prst="rect">
+            <a:avLst/>
+          </a:prstGeom>
+          <a:noFill/>
+        </p:spPr>
+        <p:txBody>
+          <a:bodyPr wrap="square">
+            <a:spAutoFit/>
+          </a:bodyPr>
+          <a:lstStyle/>
+          <a:p>
+            <a:r>
+              <a:rPr sz="1150" b="0">
                 <a:solidFill>
                   <a:srgbClr val="5A6973"/>
                 </a:solidFill>
@@ -7849,14 +7916,48 @@
       </p:sp>
       <p:sp>
         <p:nvSpPr>
-          <p:cNvPr id="5" name="TextBox 4"/>
-          <p:cNvSpPr txBox="1"/>
-          <p:nvPr/>
-        </p:nvSpPr>
-        <p:spPr>
-          <a:xfrm>
-            <a:off x="11292840" y="502920"/>
-            <a:ext cx="548640" cy="274320"/>
+          <p:cNvPr id="7" name="TextBox 6"/>
+          <p:cNvSpPr txBox="1"/>
+          <p:nvPr/>
+        </p:nvSpPr>
+        <p:spPr>
+          <a:xfrm>
+            <a:off x="502920" y="6473952"/>
+            <a:ext cx="7315200" cy="182880"/>
+          </a:xfrm>
+          <a:prstGeom prst="rect">
+            <a:avLst/>
+          </a:prstGeom>
+          <a:noFill/>
+        </p:spPr>
+        <p:txBody>
+          <a:bodyPr wrap="square">
+            <a:spAutoFit/>
+          </a:bodyPr>
+          <a:lstStyle/>
+          <a:p>
+            <a:r>
+              <a:rPr sz="850" b="0">
+                <a:solidFill>
+                  <a:srgbClr val="78828C"/>
+                </a:solidFill>
+                <a:latin typeface="Aptos"/>
+              </a:rPr>
+              <a:t>Air Conditioning · Chapter 1 · Topic 1.1</a:t>
+            </a:r>
+          </a:p>
+        </p:txBody>
+      </p:sp>
+      <p:sp>
+        <p:nvSpPr>
+          <p:cNvPr id="8" name="TextBox 7"/>
+          <p:cNvSpPr txBox="1"/>
+          <p:nvPr/>
+        </p:nvSpPr>
+        <p:spPr>
+          <a:xfrm>
+            <a:off x="11292840" y="6473952"/>
+            <a:ext cx="502920" cy="182880"/>
           </a:xfrm>
           <a:prstGeom prst="rect">
             <a:avLst/>
@@ -7871,669 +7972,13 @@
           <a:p>
             <a:pPr algn="r"/>
             <a:r>
-              <a:rPr sz="1100" b="0" i="0">
+              <a:rPr sz="850" b="0">
                 <a:solidFill>
                   <a:srgbClr val="78828C"/>
                 </a:solidFill>
                 <a:latin typeface="Aptos"/>
               </a:rPr>
               <a:t>2</a:t>
-            </a:r>
-          </a:p>
-        </p:txBody>
-      </p:sp>
-      <p:sp>
-        <p:nvSpPr>
-          <p:cNvPr id="6" name="TextBox 5"/>
-          <p:cNvSpPr txBox="1"/>
-          <p:nvPr/>
-        </p:nvSpPr>
-        <p:spPr>
-          <a:xfrm>
-            <a:off x="365760" y="6446520"/>
-            <a:ext cx="8229600" cy="228600"/>
-          </a:xfrm>
-          <a:prstGeom prst="rect">
-            <a:avLst/>
-          </a:prstGeom>
-          <a:noFill/>
-        </p:spPr>
-        <p:txBody>
-          <a:bodyPr wrap="square">
-            <a:spAutoFit/>
-          </a:bodyPr>
-          <a:lstStyle/>
-          <a:p>
-            <a:r>
-              <a:rPr sz="900" b="0" i="0">
-                <a:solidFill>
-                  <a:srgbClr val="78828C"/>
-                </a:solidFill>
-                <a:latin typeface="Aptos"/>
-              </a:rPr>
-              <a:t>Air Conditioning · Chapter 1 · Topic 1.1</a:t>
-            </a:r>
-          </a:p>
-        </p:txBody>
-      </p:sp>
-      <p:sp>
-        <p:nvSpPr>
-          <p:cNvPr id="7" name="TextBox 6"/>
-          <p:cNvSpPr txBox="1"/>
-          <p:nvPr/>
-        </p:nvSpPr>
-        <p:spPr>
-          <a:xfrm>
-            <a:off x="11292840" y="6446520"/>
-            <a:ext cx="502920" cy="228600"/>
-          </a:xfrm>
-          <a:prstGeom prst="rect">
-            <a:avLst/>
-          </a:prstGeom>
-          <a:noFill/>
-        </p:spPr>
-        <p:txBody>
-          <a:bodyPr wrap="square">
-            <a:spAutoFit/>
-          </a:bodyPr>
-          <a:lstStyle/>
-          <a:p>
-            <a:pPr algn="r"/>
-            <a:r>
-              <a:rPr sz="900" b="0" i="0">
-                <a:solidFill>
-                  <a:srgbClr val="78828C"/>
-                </a:solidFill>
-                <a:latin typeface="Aptos"/>
-              </a:rPr>
-              <a:t>2</a:t>
-            </a:r>
-          </a:p>
-        </p:txBody>
-      </p:sp>
-      <p:sp>
-        <p:nvSpPr>
-          <p:cNvPr id="8" name="Rounded Rectangle 7"/>
-          <p:cNvSpPr/>
-          <p:nvPr/>
-        </p:nvSpPr>
-        <p:spPr>
-          <a:xfrm>
-            <a:off x="731520" y="1691640"/>
-            <a:ext cx="5166360" cy="4343400"/>
-          </a:xfrm>
-          <a:prstGeom prst="roundRect">
-            <a:avLst/>
-          </a:prstGeom>
-          <a:solidFill>
-            <a:srgbClr val="FFFFFF"/>
-          </a:solidFill>
-          <a:ln w="12700">
-            <a:solidFill>
-              <a:srgbClr val="DCE2E8"/>
-            </a:solidFill>
-          </a:ln>
-        </p:spPr>
-        <p:style>
-          <a:lnRef idx="1">
-            <a:schemeClr val="accent1"/>
-          </a:lnRef>
-          <a:fillRef idx="3">
-            <a:schemeClr val="accent1"/>
-          </a:fillRef>
-          <a:effectRef idx="2">
-            <a:schemeClr val="accent1"/>
-          </a:effectRef>
-          <a:fontRef idx="minor">
-            <a:schemeClr val="lt1"/>
-          </a:fontRef>
-        </p:style>
-        <p:txBody>
-          <a:bodyPr rtlCol="0" anchor="ctr"/>
-          <a:lstStyle/>
-          <a:p>
-            <a:pPr algn="ctr"/>
-          </a:p>
-        </p:txBody>
-      </p:sp>
-      <p:sp>
-        <p:nvSpPr>
-          <p:cNvPr id="9" name="Rounded Rectangle 8"/>
-          <p:cNvSpPr/>
-          <p:nvPr/>
-        </p:nvSpPr>
-        <p:spPr>
-          <a:xfrm>
-            <a:off x="6309360" y="1691640"/>
-            <a:ext cx="5166360" cy="4343400"/>
-          </a:xfrm>
-          <a:prstGeom prst="roundRect">
-            <a:avLst/>
-          </a:prstGeom>
-          <a:solidFill>
-            <a:srgbClr val="FFFFFF"/>
-          </a:solidFill>
-          <a:ln w="12700">
-            <a:solidFill>
-              <a:srgbClr val="DCE2E8"/>
-            </a:solidFill>
-          </a:ln>
-        </p:spPr>
-        <p:style>
-          <a:lnRef idx="1">
-            <a:schemeClr val="accent1"/>
-          </a:lnRef>
-          <a:fillRef idx="3">
-            <a:schemeClr val="accent1"/>
-          </a:fillRef>
-          <a:effectRef idx="2">
-            <a:schemeClr val="accent1"/>
-          </a:effectRef>
-          <a:fontRef idx="minor">
-            <a:schemeClr val="lt1"/>
-          </a:fontRef>
-        </p:style>
-        <p:txBody>
-          <a:bodyPr rtlCol="0" anchor="ctr"/>
-          <a:lstStyle/>
-          <a:p>
-            <a:pPr algn="ctr"/>
-          </a:p>
-        </p:txBody>
-      </p:sp>
-      <p:sp>
-        <p:nvSpPr>
-          <p:cNvPr id="10" name="TextBox 9"/>
-          <p:cNvSpPr txBox="1"/>
-          <p:nvPr/>
-        </p:nvSpPr>
-        <p:spPr>
-          <a:xfrm>
-            <a:off x="1051560" y="1938528"/>
-            <a:ext cx="4480560" cy="320040"/>
-          </a:xfrm>
-          <a:prstGeom prst="rect">
-            <a:avLst/>
-          </a:prstGeom>
-          <a:noFill/>
-        </p:spPr>
-        <p:txBody>
-          <a:bodyPr wrap="square">
-            <a:spAutoFit/>
-          </a:bodyPr>
-          <a:lstStyle/>
-          <a:p>
-            <a:pPr algn="ctr"/>
-            <a:r>
-              <a:rPr sz="2200" b="1" i="0">
-                <a:solidFill>
-                  <a:srgbClr val="457B9D"/>
-                </a:solidFill>
-                <a:latin typeface="Aptos"/>
-              </a:rPr>
-              <a:t>Cooling only</a:t>
-            </a:r>
-          </a:p>
-        </p:txBody>
-      </p:sp>
-      <p:sp>
-        <p:nvSpPr>
-          <p:cNvPr id="11" name="TextBox 10"/>
-          <p:cNvSpPr txBox="1"/>
-          <p:nvPr/>
-        </p:nvSpPr>
-        <p:spPr>
-          <a:xfrm>
-            <a:off x="6629400" y="1938528"/>
-            <a:ext cx="4480560" cy="320040"/>
-          </a:xfrm>
-          <a:prstGeom prst="rect">
-            <a:avLst/>
-          </a:prstGeom>
-          <a:noFill/>
-        </p:spPr>
-        <p:txBody>
-          <a:bodyPr wrap="square">
-            <a:spAutoFit/>
-          </a:bodyPr>
-          <a:lstStyle/>
-          <a:p>
-            <a:pPr algn="ctr"/>
-            <a:r>
-              <a:rPr sz="2200" b="1" i="0">
-                <a:solidFill>
-                  <a:srgbClr val="2A9D8F"/>
-                </a:solidFill>
-                <a:latin typeface="Aptos"/>
-              </a:rPr>
-              <a:t>Air conditioning</a:t>
-            </a:r>
-          </a:p>
-        </p:txBody>
-      </p:sp>
-      <p:sp>
-        <p:nvSpPr>
-          <p:cNvPr id="12" name="Down Arrow 11"/>
-          <p:cNvSpPr/>
-          <p:nvPr/>
-        </p:nvSpPr>
-        <p:spPr>
-          <a:xfrm>
-            <a:off x="2697480" y="2697480"/>
-            <a:ext cx="1143000" cy="1143000"/>
-          </a:xfrm>
-          <a:prstGeom prst="downArrow">
-            <a:avLst/>
-          </a:prstGeom>
-          <a:solidFill>
-            <a:srgbClr val="457B9D"/>
-          </a:solidFill>
-          <a:ln>
-            <a:noFill/>
-          </a:ln>
-        </p:spPr>
-        <p:style>
-          <a:lnRef idx="1">
-            <a:schemeClr val="accent1"/>
-          </a:lnRef>
-          <a:fillRef idx="3">
-            <a:schemeClr val="accent1"/>
-          </a:fillRef>
-          <a:effectRef idx="2">
-            <a:schemeClr val="accent1"/>
-          </a:effectRef>
-          <a:fontRef idx="minor">
-            <a:schemeClr val="lt1"/>
-          </a:fontRef>
-        </p:style>
-        <p:txBody>
-          <a:bodyPr rtlCol="0" anchor="ctr"/>
-          <a:lstStyle/>
-          <a:p>
-            <a:pPr algn="ctr"/>
-          </a:p>
-        </p:txBody>
-      </p:sp>
-      <p:sp>
-        <p:nvSpPr>
-          <p:cNvPr id="13" name="TextBox 12"/>
-          <p:cNvSpPr txBox="1"/>
-          <p:nvPr/>
-        </p:nvSpPr>
-        <p:spPr>
-          <a:xfrm>
-            <a:off x="1234440" y="4160520"/>
-            <a:ext cx="4160520" cy="640080"/>
-          </a:xfrm>
-          <a:prstGeom prst="rect">
-            <a:avLst/>
-          </a:prstGeom>
-          <a:noFill/>
-        </p:spPr>
-        <p:txBody>
-          <a:bodyPr wrap="square">
-            <a:spAutoFit/>
-          </a:bodyPr>
-          <a:lstStyle/>
-          <a:p>
-            <a:pPr algn="ctr"/>
-            <a:r>
-              <a:rPr sz="1900" b="1" i="0">
-                <a:solidFill>
-                  <a:srgbClr val="232D37"/>
-                </a:solidFill>
-                <a:latin typeface="Aptos"/>
-              </a:rPr>
-              <a:t>One variable:
-lower air temperature</a:t>
-            </a:r>
-          </a:p>
-        </p:txBody>
-      </p:sp>
-      <p:sp>
-        <p:nvSpPr>
-          <p:cNvPr id="14" name="Oval 13"/>
-          <p:cNvSpPr/>
-          <p:nvPr/>
-        </p:nvSpPr>
-        <p:spPr>
-          <a:xfrm>
-            <a:off x="6995160" y="2743200"/>
-            <a:ext cx="731520" cy="731520"/>
-          </a:xfrm>
-          <a:prstGeom prst="ellipse">
-            <a:avLst/>
-          </a:prstGeom>
-          <a:solidFill>
-            <a:srgbClr val="E76F51"/>
-          </a:solidFill>
-          <a:ln>
-            <a:noFill/>
-          </a:ln>
-        </p:spPr>
-        <p:style>
-          <a:lnRef idx="1">
-            <a:schemeClr val="accent1"/>
-          </a:lnRef>
-          <a:fillRef idx="3">
-            <a:schemeClr val="accent1"/>
-          </a:fillRef>
-          <a:effectRef idx="2">
-            <a:schemeClr val="accent1"/>
-          </a:effectRef>
-          <a:fontRef idx="minor">
-            <a:schemeClr val="lt1"/>
-          </a:fontRef>
-        </p:style>
-        <p:txBody>
-          <a:bodyPr rtlCol="0" anchor="ctr"/>
-          <a:lstStyle/>
-          <a:p>
-            <a:pPr algn="ctr"/>
-          </a:p>
-        </p:txBody>
-      </p:sp>
-      <p:sp>
-        <p:nvSpPr>
-          <p:cNvPr id="15" name="TextBox 14"/>
-          <p:cNvSpPr txBox="1"/>
-          <p:nvPr/>
-        </p:nvSpPr>
-        <p:spPr>
-          <a:xfrm>
-            <a:off x="6995160" y="2971800"/>
-            <a:ext cx="731520" cy="182880"/>
-          </a:xfrm>
-          <a:prstGeom prst="rect">
-            <a:avLst/>
-          </a:prstGeom>
-          <a:noFill/>
-        </p:spPr>
-        <p:txBody>
-          <a:bodyPr wrap="square">
-            <a:spAutoFit/>
-          </a:bodyPr>
-          <a:lstStyle/>
-          <a:p>
-            <a:pPr algn="ctr"/>
-            <a:r>
-              <a:rPr sz="1000" b="1" i="0">
-                <a:solidFill>
-                  <a:srgbClr val="FFFFFF"/>
-                </a:solidFill>
-                <a:latin typeface="Aptos"/>
-              </a:rPr>
-              <a:t>T</a:t>
-            </a:r>
-          </a:p>
-        </p:txBody>
-      </p:sp>
-      <p:sp>
-        <p:nvSpPr>
-          <p:cNvPr id="16" name="Oval 15"/>
-          <p:cNvSpPr/>
-          <p:nvPr/>
-        </p:nvSpPr>
-        <p:spPr>
-          <a:xfrm>
-            <a:off x="7955280" y="2743200"/>
-            <a:ext cx="731520" cy="731520"/>
-          </a:xfrm>
-          <a:prstGeom prst="ellipse">
-            <a:avLst/>
-          </a:prstGeom>
-          <a:solidFill>
-            <a:srgbClr val="457B9D"/>
-          </a:solidFill>
-          <a:ln>
-            <a:noFill/>
-          </a:ln>
-        </p:spPr>
-        <p:style>
-          <a:lnRef idx="1">
-            <a:schemeClr val="accent1"/>
-          </a:lnRef>
-          <a:fillRef idx="3">
-            <a:schemeClr val="accent1"/>
-          </a:fillRef>
-          <a:effectRef idx="2">
-            <a:schemeClr val="accent1"/>
-          </a:effectRef>
-          <a:fontRef idx="minor">
-            <a:schemeClr val="lt1"/>
-          </a:fontRef>
-        </p:style>
-        <p:txBody>
-          <a:bodyPr rtlCol="0" anchor="ctr"/>
-          <a:lstStyle/>
-          <a:p>
-            <a:pPr algn="ctr"/>
-          </a:p>
-        </p:txBody>
-      </p:sp>
-      <p:sp>
-        <p:nvSpPr>
-          <p:cNvPr id="17" name="TextBox 16"/>
-          <p:cNvSpPr txBox="1"/>
-          <p:nvPr/>
-        </p:nvSpPr>
-        <p:spPr>
-          <a:xfrm>
-            <a:off x="7955280" y="2971800"/>
-            <a:ext cx="731520" cy="182880"/>
-          </a:xfrm>
-          <a:prstGeom prst="rect">
-            <a:avLst/>
-          </a:prstGeom>
-          <a:noFill/>
-        </p:spPr>
-        <p:txBody>
-          <a:bodyPr wrap="square">
-            <a:spAutoFit/>
-          </a:bodyPr>
-          <a:lstStyle/>
-          <a:p>
-            <a:pPr algn="ctr"/>
-            <a:r>
-              <a:rPr sz="1000" b="1" i="0">
-                <a:solidFill>
-                  <a:srgbClr val="FFFFFF"/>
-                </a:solidFill>
-                <a:latin typeface="Aptos"/>
-              </a:rPr>
-              <a:t>RH</a:t>
-            </a:r>
-          </a:p>
-        </p:txBody>
-      </p:sp>
-      <p:sp>
-        <p:nvSpPr>
-          <p:cNvPr id="18" name="Oval 17"/>
-          <p:cNvSpPr/>
-          <p:nvPr/>
-        </p:nvSpPr>
-        <p:spPr>
-          <a:xfrm>
-            <a:off x="8915400" y="2743200"/>
-            <a:ext cx="731520" cy="731520"/>
-          </a:xfrm>
-          <a:prstGeom prst="ellipse">
-            <a:avLst/>
-          </a:prstGeom>
-          <a:solidFill>
-            <a:srgbClr val="2A9D8F"/>
-          </a:solidFill>
-          <a:ln>
-            <a:noFill/>
-          </a:ln>
-        </p:spPr>
-        <p:style>
-          <a:lnRef idx="1">
-            <a:schemeClr val="accent1"/>
-          </a:lnRef>
-          <a:fillRef idx="3">
-            <a:schemeClr val="accent1"/>
-          </a:fillRef>
-          <a:effectRef idx="2">
-            <a:schemeClr val="accent1"/>
-          </a:effectRef>
-          <a:fontRef idx="minor">
-            <a:schemeClr val="lt1"/>
-          </a:fontRef>
-        </p:style>
-        <p:txBody>
-          <a:bodyPr rtlCol="0" anchor="ctr"/>
-          <a:lstStyle/>
-          <a:p>
-            <a:pPr algn="ctr"/>
-          </a:p>
-        </p:txBody>
-      </p:sp>
-      <p:sp>
-        <p:nvSpPr>
-          <p:cNvPr id="19" name="TextBox 18"/>
-          <p:cNvSpPr txBox="1"/>
-          <p:nvPr/>
-        </p:nvSpPr>
-        <p:spPr>
-          <a:xfrm>
-            <a:off x="8915400" y="2971800"/>
-            <a:ext cx="731520" cy="182880"/>
-          </a:xfrm>
-          <a:prstGeom prst="rect">
-            <a:avLst/>
-          </a:prstGeom>
-          <a:noFill/>
-        </p:spPr>
-        <p:txBody>
-          <a:bodyPr wrap="square">
-            <a:spAutoFit/>
-          </a:bodyPr>
-          <a:lstStyle/>
-          <a:p>
-            <a:pPr algn="ctr"/>
-            <a:r>
-              <a:rPr sz="1000" b="1" i="0">
-                <a:solidFill>
-                  <a:srgbClr val="FFFFFF"/>
-                </a:solidFill>
-                <a:latin typeface="Aptos"/>
-              </a:rPr>
-              <a:t>Air</a:t>
-            </a:r>
-          </a:p>
-        </p:txBody>
-      </p:sp>
-      <p:sp>
-        <p:nvSpPr>
-          <p:cNvPr id="20" name="Oval 19"/>
-          <p:cNvSpPr/>
-          <p:nvPr/>
-        </p:nvSpPr>
-        <p:spPr>
-          <a:xfrm>
-            <a:off x="9875520" y="2743200"/>
-            <a:ext cx="731520" cy="731520"/>
-          </a:xfrm>
-          <a:prstGeom prst="ellipse">
-            <a:avLst/>
-          </a:prstGeom>
-          <a:solidFill>
-            <a:srgbClr val="4CAF50"/>
-          </a:solidFill>
-          <a:ln>
-            <a:noFill/>
-          </a:ln>
-        </p:spPr>
-        <p:style>
-          <a:lnRef idx="1">
-            <a:schemeClr val="accent1"/>
-          </a:lnRef>
-          <a:fillRef idx="3">
-            <a:schemeClr val="accent1"/>
-          </a:fillRef>
-          <a:effectRef idx="2">
-            <a:schemeClr val="accent1"/>
-          </a:effectRef>
-          <a:fontRef idx="minor">
-            <a:schemeClr val="lt1"/>
-          </a:fontRef>
-        </p:style>
-        <p:txBody>
-          <a:bodyPr rtlCol="0" anchor="ctr"/>
-          <a:lstStyle/>
-          <a:p>
-            <a:pPr algn="ctr"/>
-          </a:p>
-        </p:txBody>
-      </p:sp>
-      <p:sp>
-        <p:nvSpPr>
-          <p:cNvPr id="21" name="TextBox 20"/>
-          <p:cNvSpPr txBox="1"/>
-          <p:nvPr/>
-        </p:nvSpPr>
-        <p:spPr>
-          <a:xfrm>
-            <a:off x="9875520" y="2971800"/>
-            <a:ext cx="731520" cy="182880"/>
-          </a:xfrm>
-          <a:prstGeom prst="rect">
-            <a:avLst/>
-          </a:prstGeom>
-          <a:noFill/>
-        </p:spPr>
-        <p:txBody>
-          <a:bodyPr wrap="square">
-            <a:spAutoFit/>
-          </a:bodyPr>
-          <a:lstStyle/>
-          <a:p>
-            <a:pPr algn="ctr"/>
-            <a:r>
-              <a:rPr sz="1000" b="1" i="0">
-                <a:solidFill>
-                  <a:srgbClr val="FFFFFF"/>
-                </a:solidFill>
-                <a:latin typeface="Aptos"/>
-              </a:rPr>
-              <a:t>Clean</a:t>
-            </a:r>
-          </a:p>
-        </p:txBody>
-      </p:sp>
-      <p:sp>
-        <p:nvSpPr>
-          <p:cNvPr id="22" name="TextBox 21"/>
-          <p:cNvSpPr txBox="1"/>
-          <p:nvPr/>
-        </p:nvSpPr>
-        <p:spPr>
-          <a:xfrm>
-            <a:off x="6903720" y="4160520"/>
-            <a:ext cx="3840480" cy="640080"/>
-          </a:xfrm>
-          <a:prstGeom prst="rect">
-            <a:avLst/>
-          </a:prstGeom>
-          <a:noFill/>
-        </p:spPr>
-        <p:txBody>
-          <a:bodyPr wrap="square">
-            <a:spAutoFit/>
-          </a:bodyPr>
-          <a:lstStyle/>
-          <a:p>
-            <a:pPr algn="ctr"/>
-            <a:r>
-              <a:rPr sz="1900" b="1" i="0">
-                <a:solidFill>
-                  <a:srgbClr val="232D37"/>
-                </a:solidFill>
-                <a:latin typeface="Aptos"/>
-              </a:rPr>
-              <a:t>Four variables:
-controlled together</a:t>
             </a:r>
           </a:p>
         </p:txBody>

--- a/05_Outputs/Air Conditioning/English Slides/Air Con Chapter 1 Topic 1.1 - Visual Lecture Deck CLEAN with TA Figures.pptx
+++ b/05_Outputs/Air Conditioning/English Slides/Air Con Chapter 1 Topic 1.1 - Visual Lecture Deck CLEAN with TA Figures.pptx
@@ -3110,9 +3110,888 @@
         <p:nvPr/>
       </p:nvGrpSpPr>
       <p:grpSpPr/>
+      <p:sp>
+        <p:nvSpPr>
+          <p:cNvPr id="2" name="Rectangle 1"/>
+          <p:cNvSpPr/>
+          <p:nvPr/>
+        </p:nvSpPr>
+        <p:spPr>
+          <a:xfrm>
+            <a:off x="0" y="0"/>
+            <a:ext cx="12191999" cy="201168"/>
+          </a:xfrm>
+          <a:prstGeom prst="rect">
+            <a:avLst/>
+          </a:prstGeom>
+          <a:solidFill>
+            <a:srgbClr val="11374B"/>
+          </a:solidFill>
+          <a:ln>
+            <a:noFill/>
+          </a:ln>
+        </p:spPr>
+        <p:style>
+          <a:lnRef idx="1">
+            <a:schemeClr val="accent1"/>
+          </a:lnRef>
+          <a:fillRef idx="3">
+            <a:schemeClr val="accent1"/>
+          </a:fillRef>
+          <a:effectRef idx="2">
+            <a:schemeClr val="accent1"/>
+          </a:effectRef>
+          <a:fontRef idx="minor">
+            <a:schemeClr val="lt1"/>
+          </a:fontRef>
+        </p:style>
+        <p:txBody>
+          <a:bodyPr rtlCol="0" anchor="ctr"/>
+          <a:lstStyle/>
+          <a:p>
+            <a:pPr algn="ctr"/>
+          </a:p>
+        </p:txBody>
+      </p:sp>
+      <p:sp>
+        <p:nvSpPr>
+          <p:cNvPr id="3" name="Right Triangle 2"/>
+          <p:cNvSpPr/>
+          <p:nvPr/>
+        </p:nvSpPr>
+        <p:spPr>
+          <a:xfrm>
+            <a:off x="9098280" y="201168"/>
+            <a:ext cx="3090672" cy="2176272"/>
+          </a:xfrm>
+          <a:prstGeom prst="rtTriangle">
+            <a:avLst/>
+          </a:prstGeom>
+          <a:solidFill>
+            <a:srgbClr val="E6F4F7"/>
+          </a:solidFill>
+          <a:ln>
+            <a:noFill/>
+          </a:ln>
+        </p:spPr>
+        <p:style>
+          <a:lnRef idx="1">
+            <a:schemeClr val="accent1"/>
+          </a:lnRef>
+          <a:fillRef idx="3">
+            <a:schemeClr val="accent1"/>
+          </a:fillRef>
+          <a:effectRef idx="2">
+            <a:schemeClr val="accent1"/>
+          </a:effectRef>
+          <a:fontRef idx="minor">
+            <a:schemeClr val="lt1"/>
+          </a:fontRef>
+        </p:style>
+        <p:txBody>
+          <a:bodyPr rtlCol="0" anchor="ctr"/>
+          <a:lstStyle/>
+          <a:p>
+            <a:pPr algn="ctr"/>
+          </a:p>
+        </p:txBody>
+      </p:sp>
+      <p:sp>
+        <p:nvSpPr>
+          <p:cNvPr id="4" name="Right Triangle 3"/>
+          <p:cNvSpPr/>
+          <p:nvPr/>
+        </p:nvSpPr>
+        <p:spPr>
+          <a:xfrm>
+            <a:off x="9692640" y="4434840"/>
+            <a:ext cx="2496312" cy="2423160"/>
+          </a:xfrm>
+          <a:prstGeom prst="rtTriangle">
+            <a:avLst/>
+          </a:prstGeom>
+          <a:solidFill>
+            <a:srgbClr val="FFEFE6"/>
+          </a:solidFill>
+          <a:ln>
+            <a:noFill/>
+          </a:ln>
+        </p:spPr>
+        <p:style>
+          <a:lnRef idx="1">
+            <a:schemeClr val="accent1"/>
+          </a:lnRef>
+          <a:fillRef idx="3">
+            <a:schemeClr val="accent1"/>
+          </a:fillRef>
+          <a:effectRef idx="2">
+            <a:schemeClr val="accent1"/>
+          </a:effectRef>
+          <a:fontRef idx="minor">
+            <a:schemeClr val="lt1"/>
+          </a:fontRef>
+        </p:style>
+        <p:txBody>
+          <a:bodyPr rtlCol="0" anchor="ctr"/>
+          <a:lstStyle/>
+          <a:p>
+            <a:pPr algn="ctr"/>
+          </a:p>
+        </p:txBody>
+      </p:sp>
+      <p:sp>
+        <p:nvSpPr>
+          <p:cNvPr id="5" name="TextBox 4"/>
+          <p:cNvSpPr txBox="1"/>
+          <p:nvPr/>
+        </p:nvSpPr>
+        <p:spPr>
+          <a:xfrm>
+            <a:off x="594360" y="749808"/>
+            <a:ext cx="5303520" cy="274320"/>
+          </a:xfrm>
+          <a:prstGeom prst="rect">
+            <a:avLst/>
+          </a:prstGeom>
+          <a:noFill/>
+        </p:spPr>
+        <p:txBody>
+          <a:bodyPr wrap="square">
+            <a:spAutoFit/>
+          </a:bodyPr>
+          <a:lstStyle/>
+          <a:p>
+            <a:r>
+              <a:rPr sz="1200" b="1" i="0">
+                <a:solidFill>
+                  <a:srgbClr val="2A9D8F"/>
+                </a:solidFill>
+                <a:latin typeface="Aptos"/>
+              </a:rPr>
+              <a:t>AIR CONDITIONING · CHAPTER 1</a:t>
+            </a:r>
+          </a:p>
+        </p:txBody>
+      </p:sp>
+      <p:sp>
+        <p:nvSpPr>
+          <p:cNvPr id="6" name="TextBox 5"/>
+          <p:cNvSpPr txBox="1"/>
+          <p:nvPr/>
+        </p:nvSpPr>
+        <p:spPr>
+          <a:xfrm>
+            <a:off x="594360" y="1170432"/>
+            <a:ext cx="5349240" cy="868680"/>
+          </a:xfrm>
+          <a:prstGeom prst="rect">
+            <a:avLst/>
+          </a:prstGeom>
+          <a:noFill/>
+        </p:spPr>
+        <p:txBody>
+          <a:bodyPr wrap="square">
+            <a:spAutoFit/>
+          </a:bodyPr>
+          <a:lstStyle/>
+          <a:p>
+            <a:r>
+              <a:rPr sz="3800" b="1" i="0">
+                <a:solidFill>
+                  <a:srgbClr val="11374B"/>
+                </a:solidFill>
+                <a:latin typeface="Aptos"/>
+              </a:rPr>
+              <a:t>1.1 Air
+Conditioning</a:t>
+            </a:r>
+          </a:p>
+        </p:txBody>
+      </p:sp>
+      <p:sp>
+        <p:nvSpPr>
+          <p:cNvPr id="7" name="TextBox 6"/>
+          <p:cNvSpPr txBox="1"/>
+          <p:nvPr/>
+        </p:nvSpPr>
+        <p:spPr>
+          <a:xfrm>
+            <a:off x="621792" y="2331720"/>
+            <a:ext cx="5166360" cy="365760"/>
+          </a:xfrm>
+          <a:prstGeom prst="rect">
+            <a:avLst/>
+          </a:prstGeom>
+          <a:noFill/>
+        </p:spPr>
+        <p:txBody>
+          <a:bodyPr wrap="square">
+            <a:spAutoFit/>
+          </a:bodyPr>
+          <a:lstStyle/>
+          <a:p>
+            <a:r>
+              <a:rPr sz="1800" b="0" i="0">
+                <a:solidFill>
+                  <a:srgbClr val="5A6973"/>
+                </a:solidFill>
+                <a:latin typeface="Aptos"/>
+              </a:rPr>
+              <a:t>Definition, Purpose, and Scope</a:t>
+            </a:r>
+          </a:p>
+        </p:txBody>
+      </p:sp>
+      <p:sp>
+        <p:nvSpPr>
+          <p:cNvPr id="8" name="TextBox 7"/>
+          <p:cNvSpPr txBox="1"/>
+          <p:nvPr/>
+        </p:nvSpPr>
+        <p:spPr>
+          <a:xfrm>
+            <a:off x="640080" y="2971800"/>
+            <a:ext cx="5257800" cy="777240"/>
+          </a:xfrm>
+          <a:prstGeom prst="rect">
+            <a:avLst/>
+          </a:prstGeom>
+          <a:noFill/>
+        </p:spPr>
+        <p:txBody>
+          <a:bodyPr wrap="square">
+            <a:spAutoFit/>
+          </a:bodyPr>
+          <a:lstStyle/>
+          <a:p>
+            <a:r>
+              <a:rPr sz="2000" b="1" i="0">
+                <a:solidFill>
+                  <a:srgbClr val="232D37"/>
+                </a:solidFill>
+                <a:latin typeface="Aptos"/>
+              </a:rPr>
+              <a:t>Air conditioning is not simply cooling. It is the simultaneous control of the indoor environment.</a:t>
+            </a:r>
+          </a:p>
+        </p:txBody>
+      </p:sp>
+      <p:sp>
+        <p:nvSpPr>
+          <p:cNvPr id="9" name="Rounded Rectangle 8"/>
+          <p:cNvSpPr/>
+          <p:nvPr/>
+        </p:nvSpPr>
+        <p:spPr>
+          <a:xfrm>
+            <a:off x="658368" y="4133087"/>
+            <a:ext cx="2212848" cy="393192"/>
+          </a:xfrm>
+          <a:prstGeom prst="roundRect">
+            <a:avLst/>
+          </a:prstGeom>
+          <a:solidFill>
+            <a:srgbClr val="FFFFFF"/>
+          </a:solidFill>
+          <a:ln w="12700">
+            <a:solidFill>
+              <a:srgbClr val="E76F51"/>
+            </a:solidFill>
+          </a:ln>
+        </p:spPr>
+        <p:style>
+          <a:lnRef idx="1">
+            <a:schemeClr val="accent1"/>
+          </a:lnRef>
+          <a:fillRef idx="3">
+            <a:schemeClr val="accent1"/>
+          </a:fillRef>
+          <a:effectRef idx="2">
+            <a:schemeClr val="accent1"/>
+          </a:effectRef>
+          <a:fontRef idx="minor">
+            <a:schemeClr val="lt1"/>
+          </a:fontRef>
+        </p:style>
+        <p:txBody>
+          <a:bodyPr rtlCol="0" anchor="ctr"/>
+          <a:lstStyle/>
+          <a:p>
+            <a:pPr algn="ctr"/>
+          </a:p>
+        </p:txBody>
+      </p:sp>
+      <p:sp>
+        <p:nvSpPr>
+          <p:cNvPr id="10" name="Oval 9"/>
+          <p:cNvSpPr/>
+          <p:nvPr/>
+        </p:nvSpPr>
+        <p:spPr>
+          <a:xfrm>
+            <a:off x="777240" y="4233672"/>
+            <a:ext cx="182880" cy="182880"/>
+          </a:xfrm>
+          <a:prstGeom prst="ellipse">
+            <a:avLst/>
+          </a:prstGeom>
+          <a:solidFill>
+            <a:srgbClr val="E76F51"/>
+          </a:solidFill>
+          <a:ln>
+            <a:noFill/>
+          </a:ln>
+        </p:spPr>
+        <p:style>
+          <a:lnRef idx="1">
+            <a:schemeClr val="accent1"/>
+          </a:lnRef>
+          <a:fillRef idx="3">
+            <a:schemeClr val="accent1"/>
+          </a:fillRef>
+          <a:effectRef idx="2">
+            <a:schemeClr val="accent1"/>
+          </a:effectRef>
+          <a:fontRef idx="minor">
+            <a:schemeClr val="lt1"/>
+          </a:fontRef>
+        </p:style>
+        <p:txBody>
+          <a:bodyPr rtlCol="0" anchor="ctr"/>
+          <a:lstStyle/>
+          <a:p>
+            <a:pPr algn="ctr"/>
+          </a:p>
+        </p:txBody>
+      </p:sp>
+      <p:sp>
+        <p:nvSpPr>
+          <p:cNvPr id="11" name="TextBox 10"/>
+          <p:cNvSpPr txBox="1"/>
+          <p:nvPr/>
+        </p:nvSpPr>
+        <p:spPr>
+          <a:xfrm>
+            <a:off x="1042415" y="4233672"/>
+            <a:ext cx="1664208" cy="146304"/>
+          </a:xfrm>
+          <a:prstGeom prst="rect">
+            <a:avLst/>
+          </a:prstGeom>
+          <a:noFill/>
+        </p:spPr>
+        <p:txBody>
+          <a:bodyPr wrap="square">
+            <a:spAutoFit/>
+          </a:bodyPr>
+          <a:lstStyle/>
+          <a:p>
+            <a:r>
+              <a:rPr sz="850" b="1" i="0">
+                <a:solidFill>
+                  <a:srgbClr val="E76F51"/>
+                </a:solidFill>
+                <a:latin typeface="Aptos"/>
+              </a:rPr>
+              <a:t>Temperature</a:t>
+            </a:r>
+          </a:p>
+        </p:txBody>
+      </p:sp>
+      <p:sp>
+        <p:nvSpPr>
+          <p:cNvPr id="12" name="Rounded Rectangle 11"/>
+          <p:cNvSpPr/>
+          <p:nvPr/>
+        </p:nvSpPr>
+        <p:spPr>
+          <a:xfrm>
+            <a:off x="3145536" y="4133087"/>
+            <a:ext cx="2212848" cy="393192"/>
+          </a:xfrm>
+          <a:prstGeom prst="roundRect">
+            <a:avLst/>
+          </a:prstGeom>
+          <a:solidFill>
+            <a:srgbClr val="FFFFFF"/>
+          </a:solidFill>
+          <a:ln w="12700">
+            <a:solidFill>
+              <a:srgbClr val="457B9D"/>
+            </a:solidFill>
+          </a:ln>
+        </p:spPr>
+        <p:style>
+          <a:lnRef idx="1">
+            <a:schemeClr val="accent1"/>
+          </a:lnRef>
+          <a:fillRef idx="3">
+            <a:schemeClr val="accent1"/>
+          </a:fillRef>
+          <a:effectRef idx="2">
+            <a:schemeClr val="accent1"/>
+          </a:effectRef>
+          <a:fontRef idx="minor">
+            <a:schemeClr val="lt1"/>
+          </a:fontRef>
+        </p:style>
+        <p:txBody>
+          <a:bodyPr rtlCol="0" anchor="ctr"/>
+          <a:lstStyle/>
+          <a:p>
+            <a:pPr algn="ctr"/>
+          </a:p>
+        </p:txBody>
+      </p:sp>
+      <p:sp>
+        <p:nvSpPr>
+          <p:cNvPr id="13" name="Oval 12"/>
+          <p:cNvSpPr/>
+          <p:nvPr/>
+        </p:nvSpPr>
+        <p:spPr>
+          <a:xfrm>
+            <a:off x="3264408" y="4233672"/>
+            <a:ext cx="182880" cy="182880"/>
+          </a:xfrm>
+          <a:prstGeom prst="ellipse">
+            <a:avLst/>
+          </a:prstGeom>
+          <a:solidFill>
+            <a:srgbClr val="457B9D"/>
+          </a:solidFill>
+          <a:ln>
+            <a:noFill/>
+          </a:ln>
+        </p:spPr>
+        <p:style>
+          <a:lnRef idx="1">
+            <a:schemeClr val="accent1"/>
+          </a:lnRef>
+          <a:fillRef idx="3">
+            <a:schemeClr val="accent1"/>
+          </a:fillRef>
+          <a:effectRef idx="2">
+            <a:schemeClr val="accent1"/>
+          </a:effectRef>
+          <a:fontRef idx="minor">
+            <a:schemeClr val="lt1"/>
+          </a:fontRef>
+        </p:style>
+        <p:txBody>
+          <a:bodyPr rtlCol="0" anchor="ctr"/>
+          <a:lstStyle/>
+          <a:p>
+            <a:pPr algn="ctr"/>
+          </a:p>
+        </p:txBody>
+      </p:sp>
+      <p:sp>
+        <p:nvSpPr>
+          <p:cNvPr id="14" name="TextBox 13"/>
+          <p:cNvSpPr txBox="1"/>
+          <p:nvPr/>
+        </p:nvSpPr>
+        <p:spPr>
+          <a:xfrm>
+            <a:off x="3529584" y="4233672"/>
+            <a:ext cx="1664208" cy="146304"/>
+          </a:xfrm>
+          <a:prstGeom prst="rect">
+            <a:avLst/>
+          </a:prstGeom>
+          <a:noFill/>
+        </p:spPr>
+        <p:txBody>
+          <a:bodyPr wrap="square">
+            <a:spAutoFit/>
+          </a:bodyPr>
+          <a:lstStyle/>
+          <a:p>
+            <a:r>
+              <a:rPr sz="850" b="1" i="0">
+                <a:solidFill>
+                  <a:srgbClr val="457B9D"/>
+                </a:solidFill>
+                <a:latin typeface="Aptos"/>
+              </a:rPr>
+              <a:t>Humidity</a:t>
+            </a:r>
+          </a:p>
+        </p:txBody>
+      </p:sp>
+      <p:sp>
+        <p:nvSpPr>
+          <p:cNvPr id="15" name="Rounded Rectangle 14"/>
+          <p:cNvSpPr/>
+          <p:nvPr/>
+        </p:nvSpPr>
+        <p:spPr>
+          <a:xfrm>
+            <a:off x="658368" y="4700016"/>
+            <a:ext cx="2212848" cy="393192"/>
+          </a:xfrm>
+          <a:prstGeom prst="roundRect">
+            <a:avLst/>
+          </a:prstGeom>
+          <a:solidFill>
+            <a:srgbClr val="FFFFFF"/>
+          </a:solidFill>
+          <a:ln w="12700">
+            <a:solidFill>
+              <a:srgbClr val="2A9D8F"/>
+            </a:solidFill>
+          </a:ln>
+        </p:spPr>
+        <p:style>
+          <a:lnRef idx="1">
+            <a:schemeClr val="accent1"/>
+          </a:lnRef>
+          <a:fillRef idx="3">
+            <a:schemeClr val="accent1"/>
+          </a:fillRef>
+          <a:effectRef idx="2">
+            <a:schemeClr val="accent1"/>
+          </a:effectRef>
+          <a:fontRef idx="minor">
+            <a:schemeClr val="lt1"/>
+          </a:fontRef>
+        </p:style>
+        <p:txBody>
+          <a:bodyPr rtlCol="0" anchor="ctr"/>
+          <a:lstStyle/>
+          <a:p>
+            <a:pPr algn="ctr"/>
+          </a:p>
+        </p:txBody>
+      </p:sp>
+      <p:sp>
+        <p:nvSpPr>
+          <p:cNvPr id="16" name="Oval 15"/>
+          <p:cNvSpPr/>
+          <p:nvPr/>
+        </p:nvSpPr>
+        <p:spPr>
+          <a:xfrm>
+            <a:off x="777240" y="4800600"/>
+            <a:ext cx="182880" cy="182880"/>
+          </a:xfrm>
+          <a:prstGeom prst="ellipse">
+            <a:avLst/>
+          </a:prstGeom>
+          <a:solidFill>
+            <a:srgbClr val="2A9D8F"/>
+          </a:solidFill>
+          <a:ln>
+            <a:noFill/>
+          </a:ln>
+        </p:spPr>
+        <p:style>
+          <a:lnRef idx="1">
+            <a:schemeClr val="accent1"/>
+          </a:lnRef>
+          <a:fillRef idx="3">
+            <a:schemeClr val="accent1"/>
+          </a:fillRef>
+          <a:effectRef idx="2">
+            <a:schemeClr val="accent1"/>
+          </a:effectRef>
+          <a:fontRef idx="minor">
+            <a:schemeClr val="lt1"/>
+          </a:fontRef>
+        </p:style>
+        <p:txBody>
+          <a:bodyPr rtlCol="0" anchor="ctr"/>
+          <a:lstStyle/>
+          <a:p>
+            <a:pPr algn="ctr"/>
+          </a:p>
+        </p:txBody>
+      </p:sp>
+      <p:sp>
+        <p:nvSpPr>
+          <p:cNvPr id="17" name="TextBox 16"/>
+          <p:cNvSpPr txBox="1"/>
+          <p:nvPr/>
+        </p:nvSpPr>
+        <p:spPr>
+          <a:xfrm>
+            <a:off x="1042415" y="4800600"/>
+            <a:ext cx="1664208" cy="146304"/>
+          </a:xfrm>
+          <a:prstGeom prst="rect">
+            <a:avLst/>
+          </a:prstGeom>
+          <a:noFill/>
+        </p:spPr>
+        <p:txBody>
+          <a:bodyPr wrap="square">
+            <a:spAutoFit/>
+          </a:bodyPr>
+          <a:lstStyle/>
+          <a:p>
+            <a:r>
+              <a:rPr sz="850" b="1" i="0">
+                <a:solidFill>
+                  <a:srgbClr val="2A9D8F"/>
+                </a:solidFill>
+                <a:latin typeface="Aptos"/>
+              </a:rPr>
+              <a:t>Air circulation</a:t>
+            </a:r>
+          </a:p>
+        </p:txBody>
+      </p:sp>
+      <p:sp>
+        <p:nvSpPr>
+          <p:cNvPr id="18" name="Rounded Rectangle 17"/>
+          <p:cNvSpPr/>
+          <p:nvPr/>
+        </p:nvSpPr>
+        <p:spPr>
+          <a:xfrm>
+            <a:off x="3145536" y="4700016"/>
+            <a:ext cx="2212848" cy="393192"/>
+          </a:xfrm>
+          <a:prstGeom prst="roundRect">
+            <a:avLst/>
+          </a:prstGeom>
+          <a:solidFill>
+            <a:srgbClr val="FFFFFF"/>
+          </a:solidFill>
+          <a:ln w="12700">
+            <a:solidFill>
+              <a:srgbClr val="4CAF50"/>
+            </a:solidFill>
+          </a:ln>
+        </p:spPr>
+        <p:style>
+          <a:lnRef idx="1">
+            <a:schemeClr val="accent1"/>
+          </a:lnRef>
+          <a:fillRef idx="3">
+            <a:schemeClr val="accent1"/>
+          </a:fillRef>
+          <a:effectRef idx="2">
+            <a:schemeClr val="accent1"/>
+          </a:effectRef>
+          <a:fontRef idx="minor">
+            <a:schemeClr val="lt1"/>
+          </a:fontRef>
+        </p:style>
+        <p:txBody>
+          <a:bodyPr rtlCol="0" anchor="ctr"/>
+          <a:lstStyle/>
+          <a:p>
+            <a:pPr algn="ctr"/>
+          </a:p>
+        </p:txBody>
+      </p:sp>
+      <p:sp>
+        <p:nvSpPr>
+          <p:cNvPr id="19" name="Oval 18"/>
+          <p:cNvSpPr/>
+          <p:nvPr/>
+        </p:nvSpPr>
+        <p:spPr>
+          <a:xfrm>
+            <a:off x="3264408" y="4800600"/>
+            <a:ext cx="182880" cy="182880"/>
+          </a:xfrm>
+          <a:prstGeom prst="ellipse">
+            <a:avLst/>
+          </a:prstGeom>
+          <a:solidFill>
+            <a:srgbClr val="4CAF50"/>
+          </a:solidFill>
+          <a:ln>
+            <a:noFill/>
+          </a:ln>
+        </p:spPr>
+        <p:style>
+          <a:lnRef idx="1">
+            <a:schemeClr val="accent1"/>
+          </a:lnRef>
+          <a:fillRef idx="3">
+            <a:schemeClr val="accent1"/>
+          </a:fillRef>
+          <a:effectRef idx="2">
+            <a:schemeClr val="accent1"/>
+          </a:effectRef>
+          <a:fontRef idx="minor">
+            <a:schemeClr val="lt1"/>
+          </a:fontRef>
+        </p:style>
+        <p:txBody>
+          <a:bodyPr rtlCol="0" anchor="ctr"/>
+          <a:lstStyle/>
+          <a:p>
+            <a:pPr algn="ctr"/>
+          </a:p>
+        </p:txBody>
+      </p:sp>
+      <p:sp>
+        <p:nvSpPr>
+          <p:cNvPr id="20" name="TextBox 19"/>
+          <p:cNvSpPr txBox="1"/>
+          <p:nvPr/>
+        </p:nvSpPr>
+        <p:spPr>
+          <a:xfrm>
+            <a:off x="3529584" y="4800600"/>
+            <a:ext cx="1664208" cy="146304"/>
+          </a:xfrm>
+          <a:prstGeom prst="rect">
+            <a:avLst/>
+          </a:prstGeom>
+          <a:noFill/>
+        </p:spPr>
+        <p:txBody>
+          <a:bodyPr wrap="square">
+            <a:spAutoFit/>
+          </a:bodyPr>
+          <a:lstStyle/>
+          <a:p>
+            <a:r>
+              <a:rPr sz="850" b="1" i="0">
+                <a:solidFill>
+                  <a:srgbClr val="4CAF50"/>
+                </a:solidFill>
+                <a:latin typeface="Aptos"/>
+              </a:rPr>
+              <a:t>Air cleanliness</a:t>
+            </a:r>
+          </a:p>
+        </p:txBody>
+      </p:sp>
+      <p:sp>
+        <p:nvSpPr>
+          <p:cNvPr id="21" name="Rounded Rectangle 20"/>
+          <p:cNvSpPr/>
+          <p:nvPr/>
+        </p:nvSpPr>
+        <p:spPr>
+          <a:xfrm>
+            <a:off x="640080" y="5440680"/>
+            <a:ext cx="5074920" cy="457200"/>
+          </a:xfrm>
+          <a:prstGeom prst="roundRect">
+            <a:avLst/>
+          </a:prstGeom>
+          <a:solidFill>
+            <a:srgbClr val="E6F4F7"/>
+          </a:solidFill>
+          <a:ln w="12700">
+            <a:solidFill>
+              <a:srgbClr val="B9D9E0"/>
+            </a:solidFill>
+          </a:ln>
+        </p:spPr>
+        <p:style>
+          <a:lnRef idx="1">
+            <a:schemeClr val="accent1"/>
+          </a:lnRef>
+          <a:fillRef idx="3">
+            <a:schemeClr val="accent1"/>
+          </a:fillRef>
+          <a:effectRef idx="2">
+            <a:schemeClr val="accent1"/>
+          </a:effectRef>
+          <a:fontRef idx="minor">
+            <a:schemeClr val="lt1"/>
+          </a:fontRef>
+        </p:style>
+        <p:txBody>
+          <a:bodyPr rtlCol="0" anchor="ctr"/>
+          <a:lstStyle/>
+          <a:p>
+            <a:pPr algn="ctr"/>
+          </a:p>
+        </p:txBody>
+      </p:sp>
+      <p:sp>
+        <p:nvSpPr>
+          <p:cNvPr id="22" name="TextBox 21"/>
+          <p:cNvSpPr txBox="1"/>
+          <p:nvPr/>
+        </p:nvSpPr>
+        <p:spPr>
+          <a:xfrm>
+            <a:off x="868680" y="5577840"/>
+            <a:ext cx="4617720" cy="146304"/>
+          </a:xfrm>
+          <a:prstGeom prst="rect">
+            <a:avLst/>
+          </a:prstGeom>
+          <a:noFill/>
+        </p:spPr>
+        <p:txBody>
+          <a:bodyPr wrap="square">
+            <a:spAutoFit/>
+          </a:bodyPr>
+          <a:lstStyle/>
+          <a:p>
+            <a:pPr algn="ctr"/>
+            <a:r>
+              <a:rPr sz="1050" b="1" i="0">
+                <a:solidFill>
+                  <a:srgbClr val="11374B"/>
+                </a:solidFill>
+                <a:latin typeface="Aptos"/>
+              </a:rPr>
+              <a:t>Teaching focus: cooling-mode AC for Thailand</a:t>
+            </a:r>
+          </a:p>
+        </p:txBody>
+      </p:sp>
+      <p:sp>
+        <p:nvSpPr>
+          <p:cNvPr id="23" name="Rounded Rectangle 22"/>
+          <p:cNvSpPr/>
+          <p:nvPr/>
+        </p:nvSpPr>
+        <p:spPr>
+          <a:xfrm>
+            <a:off x="6172200" y="932688"/>
+            <a:ext cx="5440680" cy="5349240"/>
+          </a:xfrm>
+          <a:prstGeom prst="roundRect">
+            <a:avLst/>
+          </a:prstGeom>
+          <a:solidFill>
+            <a:srgbClr val="FFFFFF"/>
+          </a:solidFill>
+          <a:ln w="12700">
+            <a:solidFill>
+              <a:srgbClr val="DCE2E8"/>
+            </a:solidFill>
+          </a:ln>
+        </p:spPr>
+        <p:style>
+          <a:lnRef idx="1">
+            <a:schemeClr val="accent1"/>
+          </a:lnRef>
+          <a:fillRef idx="3">
+            <a:schemeClr val="accent1"/>
+          </a:fillRef>
+          <a:effectRef idx="2">
+            <a:schemeClr val="accent1"/>
+          </a:effectRef>
+          <a:fontRef idx="minor">
+            <a:schemeClr val="lt1"/>
+          </a:fontRef>
+        </p:style>
+        <p:txBody>
+          <a:bodyPr rtlCol="0" anchor="ctr"/>
+          <a:lstStyle/>
+          <a:p>
+            <a:pPr algn="ctr"/>
+          </a:p>
+        </p:txBody>
+      </p:sp>
       <p:pic>
         <p:nvPicPr>
-          <p:cNvPr id="2" name="Picture 1" descr="conditioned-space-engineering-infographic.png"/>
+          <p:cNvPr id="24" name="Picture 23" descr="image.png"/>
           <p:cNvPicPr>
             <a:picLocks noChangeAspect="1"/>
           </p:cNvPicPr>
@@ -3126,8 +4005,8 @@
         </p:blipFill>
         <p:spPr>
           <a:xfrm>
-            <a:off x="1107556" y="941832"/>
-            <a:ext cx="9992127" cy="5623560"/>
+            <a:off x="6355080" y="2142651"/>
+            <a:ext cx="5074920" cy="2856160"/>
           </a:xfrm>
           <a:prstGeom prst="rect">
             <a:avLst/>
@@ -3136,202 +4015,13 @@
       </p:pic>
       <p:sp>
         <p:nvSpPr>
-          <p:cNvPr id="3" name="Rectangle 2"/>
-          <p:cNvSpPr/>
-          <p:nvPr/>
-        </p:nvSpPr>
-        <p:spPr>
-          <a:xfrm>
-            <a:off x="0" y="0"/>
-            <a:ext cx="12191999" cy="749808"/>
-          </a:xfrm>
-          <a:prstGeom prst="rect">
-            <a:avLst/>
-          </a:prstGeom>
-          <a:solidFill>
-            <a:srgbClr val="F8FAFC"/>
-          </a:solidFill>
-          <a:ln>
-            <a:noFill/>
-          </a:ln>
-        </p:spPr>
-        <p:style>
-          <a:lnRef idx="1">
-            <a:schemeClr val="accent1"/>
-          </a:lnRef>
-          <a:fillRef idx="3">
-            <a:schemeClr val="accent1"/>
-          </a:fillRef>
-          <a:effectRef idx="2">
-            <a:schemeClr val="accent1"/>
-          </a:effectRef>
-          <a:fontRef idx="minor">
-            <a:schemeClr val="lt1"/>
-          </a:fontRef>
-        </p:style>
-        <p:txBody>
-          <a:bodyPr rtlCol="0" anchor="ctr"/>
-          <a:lstStyle/>
-          <a:p>
-            <a:pPr algn="ctr"/>
-          </a:p>
-        </p:txBody>
-      </p:sp>
-      <p:sp>
-        <p:nvSpPr>
-          <p:cNvPr id="4" name="Rectangle 3"/>
-          <p:cNvSpPr/>
-          <p:nvPr/>
-        </p:nvSpPr>
-        <p:spPr>
-          <a:xfrm>
-            <a:off x="0" y="0"/>
-            <a:ext cx="12191999" cy="164592"/>
-          </a:xfrm>
-          <a:prstGeom prst="rect">
-            <a:avLst/>
-          </a:prstGeom>
-          <a:solidFill>
-            <a:srgbClr val="11374B"/>
-          </a:solidFill>
-          <a:ln>
-            <a:noFill/>
-          </a:ln>
-        </p:spPr>
-        <p:style>
-          <a:lnRef idx="1">
-            <a:schemeClr val="accent1"/>
-          </a:lnRef>
-          <a:fillRef idx="3">
-            <a:schemeClr val="accent1"/>
-          </a:fillRef>
-          <a:effectRef idx="2">
-            <a:schemeClr val="accent1"/>
-          </a:effectRef>
-          <a:fontRef idx="minor">
-            <a:schemeClr val="lt1"/>
-          </a:fontRef>
-        </p:style>
-        <p:txBody>
-          <a:bodyPr rtlCol="0" anchor="ctr"/>
-          <a:lstStyle/>
-          <a:p>
-            <a:pPr algn="ctr"/>
-          </a:p>
-        </p:txBody>
-      </p:sp>
-      <p:sp>
-        <p:nvSpPr>
-          <p:cNvPr id="5" name="TextBox 4"/>
-          <p:cNvSpPr txBox="1"/>
-          <p:nvPr/>
-        </p:nvSpPr>
-        <p:spPr>
-          <a:xfrm>
-            <a:off x="502920" y="256032"/>
-            <a:ext cx="5394960" cy="274320"/>
-          </a:xfrm>
-          <a:prstGeom prst="rect">
-            <a:avLst/>
-          </a:prstGeom>
-          <a:noFill/>
-        </p:spPr>
-        <p:txBody>
-          <a:bodyPr wrap="square">
-            <a:spAutoFit/>
-          </a:bodyPr>
-          <a:lstStyle/>
-          <a:p>
-            <a:r>
-              <a:rPr sz="1050" b="1">
-                <a:solidFill>
-                  <a:srgbClr val="2A9D8F"/>
-                </a:solidFill>
-                <a:latin typeface="Aptos"/>
-              </a:rPr>
-              <a:t>AIR CONDITIONING · CHAPTER 1</a:t>
-            </a:r>
-          </a:p>
-        </p:txBody>
-      </p:sp>
-      <p:sp>
-        <p:nvSpPr>
-          <p:cNvPr id="6" name="TextBox 5"/>
-          <p:cNvSpPr txBox="1"/>
-          <p:nvPr/>
-        </p:nvSpPr>
-        <p:spPr>
-          <a:xfrm>
-            <a:off x="502920" y="438912"/>
-            <a:ext cx="6035040" cy="320040"/>
-          </a:xfrm>
-          <a:prstGeom prst="rect">
-            <a:avLst/>
-          </a:prstGeom>
-          <a:noFill/>
-        </p:spPr>
-        <p:txBody>
-          <a:bodyPr wrap="square">
-            <a:spAutoFit/>
-          </a:bodyPr>
-          <a:lstStyle/>
-          <a:p>
-            <a:r>
-              <a:rPr sz="1800" b="1">
-                <a:solidFill>
-                  <a:srgbClr val="11374B"/>
-                </a:solidFill>
-                <a:latin typeface="Aptos"/>
-              </a:rPr>
-              <a:t>1.1 Air Conditioning</a:t>
-            </a:r>
-          </a:p>
-        </p:txBody>
-      </p:sp>
-      <p:sp>
-        <p:nvSpPr>
-          <p:cNvPr id="7" name="TextBox 6"/>
-          <p:cNvSpPr txBox="1"/>
-          <p:nvPr/>
-        </p:nvSpPr>
-        <p:spPr>
-          <a:xfrm>
-            <a:off x="6400800" y="438912"/>
-            <a:ext cx="5257800" cy="274320"/>
-          </a:xfrm>
-          <a:prstGeom prst="rect">
-            <a:avLst/>
-          </a:prstGeom>
-          <a:noFill/>
-        </p:spPr>
-        <p:txBody>
-          <a:bodyPr wrap="square">
-            <a:spAutoFit/>
-          </a:bodyPr>
-          <a:lstStyle/>
-          <a:p>
-            <a:pPr algn="r"/>
-            <a:r>
-              <a:rPr sz="1200" b="0">
-                <a:solidFill>
-                  <a:srgbClr val="5A6973"/>
-                </a:solidFill>
-                <a:latin typeface="Aptos"/>
-              </a:rPr>
-              <a:t>Definition, Purpose, and Scope</a:t>
-            </a:r>
-          </a:p>
-        </p:txBody>
-      </p:sp>
-      <p:sp>
-        <p:nvSpPr>
-          <p:cNvPr id="8" name="TextBox 7"/>
-          <p:cNvSpPr txBox="1"/>
-          <p:nvPr/>
-        </p:nvSpPr>
-        <p:spPr>
-          <a:xfrm>
-            <a:off x="502920" y="6473952"/>
+          <p:cNvPr id="25" name="TextBox 24"/>
+          <p:cNvSpPr txBox="1"/>
+          <p:nvPr/>
+        </p:nvSpPr>
+        <p:spPr>
+          <a:xfrm>
+            <a:off x="594360" y="6446520"/>
             <a:ext cx="7315200" cy="182880"/>
           </a:xfrm>
           <a:prstGeom prst="rect">
@@ -3346,7 +4036,7 @@
           <a:lstStyle/>
           <a:p>
             <a:r>
-              <a:rPr sz="850" b="0">
+              <a:rPr sz="850" b="0" i="0">
                 <a:solidFill>
                   <a:srgbClr val="78828C"/>
                 </a:solidFill>
@@ -3359,13 +4049,13 @@
       </p:sp>
       <p:sp>
         <p:nvSpPr>
-          <p:cNvPr id="9" name="TextBox 8"/>
-          <p:cNvSpPr txBox="1"/>
-          <p:nvPr/>
-        </p:nvSpPr>
-        <p:spPr>
-          <a:xfrm>
-            <a:off x="11292840" y="6473952"/>
+          <p:cNvPr id="26" name="TextBox 25"/>
+          <p:cNvSpPr txBox="1"/>
+          <p:nvPr/>
+        </p:nvSpPr>
+        <p:spPr>
+          <a:xfrm>
+            <a:off x="11292840" y="6446520"/>
             <a:ext cx="502920" cy="182880"/>
           </a:xfrm>
           <a:prstGeom prst="rect">
@@ -3381,7 +4071,7 @@
           <a:p>
             <a:pPr algn="r"/>
             <a:r>
-              <a:rPr sz="850" b="0">
+              <a:rPr sz="850" b="0" i="0">
                 <a:solidFill>
                   <a:srgbClr val="78828C"/>
                 </a:solidFill>

--- a/05_Outputs/Air Conditioning/English Slides/Air Con Chapter 1 Topic 1.1 - Visual Lecture Deck CLEAN with TA Figures.pptx
+++ b/05_Outputs/Air Conditioning/English Slides/Air Con Chapter 1 Topic 1.1 - Visual Lecture Deck CLEAN with TA Figures.pptx
@@ -5,23 +5,23 @@
     <p:sldMasterId id="2147483648" r:id="rId1"/>
   </p:sldMasterIdLst>
   <p:sldIdLst>
-    <p:sldId id="256" r:id="rId7"/>
-    <p:sldId id="257" r:id="rId8"/>
-    <p:sldId id="258" r:id="rId9"/>
-    <p:sldId id="259" r:id="rId10"/>
-    <p:sldId id="260" r:id="rId11"/>
-    <p:sldId id="261" r:id="rId12"/>
-    <p:sldId id="262" r:id="rId13"/>
-    <p:sldId id="263" r:id="rId14"/>
-    <p:sldId id="264" r:id="rId15"/>
-    <p:sldId id="265" r:id="rId16"/>
-    <p:sldId id="266" r:id="rId17"/>
-    <p:sldId id="267" r:id="rId18"/>
-    <p:sldId id="268" r:id="rId19"/>
-    <p:sldId id="269" r:id="rId20"/>
-    <p:sldId id="270" r:id="rId21"/>
+    <p:sldId id="256" r:id="rId2"/>
+    <p:sldId id="257" r:id="rId3"/>
+    <p:sldId id="258" r:id="rId4"/>
+    <p:sldId id="259" r:id="rId5"/>
+    <p:sldId id="260" r:id="rId6"/>
+    <p:sldId id="261" r:id="rId7"/>
+    <p:sldId id="262" r:id="rId8"/>
+    <p:sldId id="263" r:id="rId9"/>
+    <p:sldId id="264" r:id="rId10"/>
+    <p:sldId id="265" r:id="rId11"/>
+    <p:sldId id="266" r:id="rId12"/>
+    <p:sldId id="267" r:id="rId13"/>
+    <p:sldId id="268" r:id="rId14"/>
+    <p:sldId id="269" r:id="rId15"/>
+    <p:sldId id="270" r:id="rId16"/>
   </p:sldIdLst>
-  <p:sldSz cx="12191999" cy="6858000" type="screen4x3"/>
+  <p:sldSz cx="12192000" cy="6858000"/>
   <p:notesSz cx="6858000" cy="9144000"/>
   <p:defaultTextStyle>
     <a:defPPr>
@@ -118,6 +118,22 @@
       </a:defRPr>
     </a:lvl9pPr>
   </p:defaultTextStyle>
+  <p:extLst>
+    <p:ext uri="{EFAFB233-063F-42B5-8137-9DF3F51BA10A}">
+      <p15:sldGuideLst xmlns:p15="http://schemas.microsoft.com/office/powerpoint/2012/main">
+        <p15:guide id="1" orient="horz" pos="2160">
+          <p15:clr>
+            <a:srgbClr val="A4A3A4"/>
+          </p15:clr>
+        </p15:guide>
+        <p15:guide id="2" pos="2880">
+          <p15:clr>
+            <a:srgbClr val="A4A3A4"/>
+          </p15:clr>
+        </p15:guide>
+      </p15:sldGuideLst>
+    </p:ext>
+  </p:extLst>
 </p:presentation>
 </file>
 
@@ -159,10 +175,9 @@
           <a:lstStyle/>
           <a:p>
             <a:r>
-              <a:rPr lang="en-US" smtClean="0"/>
+              <a:rPr lang="en-US"/>
               <a:t>Click to edit Master title style</a:t>
             </a:r>
-            <a:endParaRPr lang="en-US"/>
           </a:p>
         </p:txBody>
       </p:sp>
@@ -278,10 +293,9 @@
           </a:lstStyle>
           <a:p>
             <a:r>
-              <a:rPr lang="en-US" smtClean="0"/>
+              <a:rPr lang="en-US"/>
               <a:t>Click to edit Master subtitle style</a:t>
             </a:r>
-            <a:endParaRPr lang="en-US"/>
           </a:p>
         </p:txBody>
       </p:sp>
@@ -302,7 +316,7 @@
           <a:p>
             <a:fld id="{5BCAD085-E8A6-8845-BD4E-CB4CCA059FC4}" type="datetimeFigureOut">
               <a:rPr lang="en-US" smtClean="0"/>
-              <a:t>1/27/13</a:t>
+              <a:t>6/14/26</a:t>
             </a:fld>
             <a:endParaRPr lang="en-US"/>
           </a:p>
@@ -396,10 +410,9 @@
           <a:lstStyle/>
           <a:p>
             <a:r>
-              <a:rPr lang="en-US" smtClean="0"/>
+              <a:rPr lang="en-US"/>
               <a:t>Click to edit Master title style</a:t>
             </a:r>
-            <a:endParaRPr lang="en-US"/>
           </a:p>
         </p:txBody>
       </p:sp>
@@ -420,38 +433,37 @@
           <a:p>
             <a:pPr lvl="0"/>
             <a:r>
-              <a:rPr lang="en-US" smtClean="0"/>
+              <a:rPr lang="en-US"/>
               <a:t>Click to edit Master text styles</a:t>
             </a:r>
           </a:p>
           <a:p>
             <a:pPr lvl="1"/>
             <a:r>
-              <a:rPr lang="en-US" smtClean="0"/>
+              <a:rPr lang="en-US"/>
               <a:t>Second level</a:t>
             </a:r>
           </a:p>
           <a:p>
             <a:pPr lvl="2"/>
             <a:r>
-              <a:rPr lang="en-US" smtClean="0"/>
+              <a:rPr lang="en-US"/>
               <a:t>Third level</a:t>
             </a:r>
           </a:p>
           <a:p>
             <a:pPr lvl="3"/>
             <a:r>
-              <a:rPr lang="en-US" smtClean="0"/>
+              <a:rPr lang="en-US"/>
               <a:t>Fourth level</a:t>
             </a:r>
           </a:p>
           <a:p>
             <a:pPr lvl="4"/>
             <a:r>
-              <a:rPr lang="en-US" smtClean="0"/>
+              <a:rPr lang="en-US"/>
               <a:t>Fifth level</a:t>
             </a:r>
-            <a:endParaRPr lang="en-US"/>
           </a:p>
         </p:txBody>
       </p:sp>
@@ -472,7 +484,7 @@
           <a:p>
             <a:fld id="{5BCAD085-E8A6-8845-BD4E-CB4CCA059FC4}" type="datetimeFigureOut">
               <a:rPr lang="en-US" smtClean="0"/>
-              <a:t>1/27/13</a:t>
+              <a:t>6/14/26</a:t>
             </a:fld>
             <a:endParaRPr lang="en-US"/>
           </a:p>
@@ -571,10 +583,9 @@
           <a:lstStyle/>
           <a:p>
             <a:r>
-              <a:rPr lang="en-US" smtClean="0"/>
+              <a:rPr lang="en-US"/>
               <a:t>Click to edit Master title style</a:t>
             </a:r>
-            <a:endParaRPr lang="en-US"/>
           </a:p>
         </p:txBody>
       </p:sp>
@@ -600,38 +611,37 @@
           <a:p>
             <a:pPr lvl="0"/>
             <a:r>
-              <a:rPr lang="en-US" smtClean="0"/>
+              <a:rPr lang="en-US"/>
               <a:t>Click to edit Master text styles</a:t>
             </a:r>
           </a:p>
           <a:p>
             <a:pPr lvl="1"/>
             <a:r>
-              <a:rPr lang="en-US" smtClean="0"/>
+              <a:rPr lang="en-US"/>
               <a:t>Second level</a:t>
             </a:r>
           </a:p>
           <a:p>
             <a:pPr lvl="2"/>
             <a:r>
-              <a:rPr lang="en-US" smtClean="0"/>
+              <a:rPr lang="en-US"/>
               <a:t>Third level</a:t>
             </a:r>
           </a:p>
           <a:p>
             <a:pPr lvl="3"/>
             <a:r>
-              <a:rPr lang="en-US" smtClean="0"/>
+              <a:rPr lang="en-US"/>
               <a:t>Fourth level</a:t>
             </a:r>
           </a:p>
           <a:p>
             <a:pPr lvl="4"/>
             <a:r>
-              <a:rPr lang="en-US" smtClean="0"/>
+              <a:rPr lang="en-US"/>
               <a:t>Fifth level</a:t>
             </a:r>
-            <a:endParaRPr lang="en-US"/>
           </a:p>
         </p:txBody>
       </p:sp>
@@ -652,7 +662,7 @@
           <a:p>
             <a:fld id="{5BCAD085-E8A6-8845-BD4E-CB4CCA059FC4}" type="datetimeFigureOut">
               <a:rPr lang="en-US" smtClean="0"/>
-              <a:t>1/27/13</a:t>
+              <a:t>6/14/26</a:t>
             </a:fld>
             <a:endParaRPr lang="en-US"/>
           </a:p>
@@ -746,10 +756,9 @@
           <a:lstStyle/>
           <a:p>
             <a:r>
-              <a:rPr lang="en-US" smtClean="0"/>
+              <a:rPr lang="en-US"/>
               <a:t>Click to edit Master title style</a:t>
             </a:r>
-            <a:endParaRPr lang="en-US"/>
           </a:p>
         </p:txBody>
       </p:sp>
@@ -770,38 +779,37 @@
           <a:p>
             <a:pPr lvl="0"/>
             <a:r>
-              <a:rPr lang="en-US" smtClean="0"/>
+              <a:rPr lang="en-US"/>
               <a:t>Click to edit Master text styles</a:t>
             </a:r>
           </a:p>
           <a:p>
             <a:pPr lvl="1"/>
             <a:r>
-              <a:rPr lang="en-US" smtClean="0"/>
+              <a:rPr lang="en-US"/>
               <a:t>Second level</a:t>
             </a:r>
           </a:p>
           <a:p>
             <a:pPr lvl="2"/>
             <a:r>
-              <a:rPr lang="en-US" smtClean="0"/>
+              <a:rPr lang="en-US"/>
               <a:t>Third level</a:t>
             </a:r>
           </a:p>
           <a:p>
             <a:pPr lvl="3"/>
             <a:r>
-              <a:rPr lang="en-US" smtClean="0"/>
+              <a:rPr lang="en-US"/>
               <a:t>Fourth level</a:t>
             </a:r>
           </a:p>
           <a:p>
             <a:pPr lvl="4"/>
             <a:r>
-              <a:rPr lang="en-US" smtClean="0"/>
+              <a:rPr lang="en-US"/>
               <a:t>Fifth level</a:t>
             </a:r>
-            <a:endParaRPr lang="en-US"/>
           </a:p>
         </p:txBody>
       </p:sp>
@@ -822,7 +830,7 @@
           <a:p>
             <a:fld id="{5BCAD085-E8A6-8845-BD4E-CB4CCA059FC4}" type="datetimeFigureOut">
               <a:rPr lang="en-US" smtClean="0"/>
-              <a:t>1/27/13</a:t>
+              <a:t>6/14/26</a:t>
             </a:fld>
             <a:endParaRPr lang="en-US"/>
           </a:p>
@@ -925,10 +933,9 @@
           </a:lstStyle>
           <a:p>
             <a:r>
-              <a:rPr lang="en-US" smtClean="0"/>
+              <a:rPr lang="en-US"/>
               <a:t>Click to edit Master title style</a:t>
             </a:r>
-            <a:endParaRPr lang="en-US"/>
           </a:p>
         </p:txBody>
       </p:sp>
@@ -1045,7 +1052,7 @@
           <a:p>
             <a:pPr lvl="0"/>
             <a:r>
-              <a:rPr lang="en-US" smtClean="0"/>
+              <a:rPr lang="en-US"/>
               <a:t>Click to edit Master text styles</a:t>
             </a:r>
           </a:p>
@@ -1068,7 +1075,7 @@
           <a:p>
             <a:fld id="{5BCAD085-E8A6-8845-BD4E-CB4CCA059FC4}" type="datetimeFigureOut">
               <a:rPr lang="en-US" smtClean="0"/>
-              <a:t>1/27/13</a:t>
+              <a:t>6/14/26</a:t>
             </a:fld>
             <a:endParaRPr lang="en-US"/>
           </a:p>
@@ -1162,10 +1169,9 @@
           <a:lstStyle/>
           <a:p>
             <a:r>
-              <a:rPr lang="en-US" smtClean="0"/>
+              <a:rPr lang="en-US"/>
               <a:t>Click to edit Master title style</a:t>
             </a:r>
-            <a:endParaRPr lang="en-US"/>
           </a:p>
         </p:txBody>
       </p:sp>
@@ -1219,38 +1225,37 @@
           <a:p>
             <a:pPr lvl="0"/>
             <a:r>
-              <a:rPr lang="en-US" smtClean="0"/>
+              <a:rPr lang="en-US"/>
               <a:t>Click to edit Master text styles</a:t>
             </a:r>
           </a:p>
           <a:p>
             <a:pPr lvl="1"/>
             <a:r>
-              <a:rPr lang="en-US" smtClean="0"/>
+              <a:rPr lang="en-US"/>
               <a:t>Second level</a:t>
             </a:r>
           </a:p>
           <a:p>
             <a:pPr lvl="2"/>
             <a:r>
-              <a:rPr lang="en-US" smtClean="0"/>
+              <a:rPr lang="en-US"/>
               <a:t>Third level</a:t>
             </a:r>
           </a:p>
           <a:p>
             <a:pPr lvl="3"/>
             <a:r>
-              <a:rPr lang="en-US" smtClean="0"/>
+              <a:rPr lang="en-US"/>
               <a:t>Fourth level</a:t>
             </a:r>
           </a:p>
           <a:p>
             <a:pPr lvl="4"/>
             <a:r>
-              <a:rPr lang="en-US" smtClean="0"/>
+              <a:rPr lang="en-US"/>
               <a:t>Fifth level</a:t>
             </a:r>
-            <a:endParaRPr lang="en-US"/>
           </a:p>
         </p:txBody>
       </p:sp>
@@ -1304,38 +1309,37 @@
           <a:p>
             <a:pPr lvl="0"/>
             <a:r>
-              <a:rPr lang="en-US" smtClean="0"/>
+              <a:rPr lang="en-US"/>
               <a:t>Click to edit Master text styles</a:t>
             </a:r>
           </a:p>
           <a:p>
             <a:pPr lvl="1"/>
             <a:r>
-              <a:rPr lang="en-US" smtClean="0"/>
+              <a:rPr lang="en-US"/>
               <a:t>Second level</a:t>
             </a:r>
           </a:p>
           <a:p>
             <a:pPr lvl="2"/>
             <a:r>
-              <a:rPr lang="en-US" smtClean="0"/>
+              <a:rPr lang="en-US"/>
               <a:t>Third level</a:t>
             </a:r>
           </a:p>
           <a:p>
             <a:pPr lvl="3"/>
             <a:r>
-              <a:rPr lang="en-US" smtClean="0"/>
+              <a:rPr lang="en-US"/>
               <a:t>Fourth level</a:t>
             </a:r>
           </a:p>
           <a:p>
             <a:pPr lvl="4"/>
             <a:r>
-              <a:rPr lang="en-US" smtClean="0"/>
+              <a:rPr lang="en-US"/>
               <a:t>Fifth level</a:t>
             </a:r>
-            <a:endParaRPr lang="en-US"/>
           </a:p>
         </p:txBody>
       </p:sp>
@@ -1356,7 +1360,7 @@
           <a:p>
             <a:fld id="{5BCAD085-E8A6-8845-BD4E-CB4CCA059FC4}" type="datetimeFigureOut">
               <a:rPr lang="en-US" smtClean="0"/>
-              <a:t>1/27/13</a:t>
+              <a:t>6/14/26</a:t>
             </a:fld>
             <a:endParaRPr lang="en-US"/>
           </a:p>
@@ -1454,10 +1458,9 @@
           </a:lstStyle>
           <a:p>
             <a:r>
-              <a:rPr lang="en-US" smtClean="0"/>
+              <a:rPr lang="en-US"/>
               <a:t>Click to edit Master title style</a:t>
             </a:r>
-            <a:endParaRPr lang="en-US"/>
           </a:p>
         </p:txBody>
       </p:sp>
@@ -1520,7 +1523,7 @@
           <a:p>
             <a:pPr lvl="0"/>
             <a:r>
-              <a:rPr lang="en-US" smtClean="0"/>
+              <a:rPr lang="en-US"/>
               <a:t>Click to edit Master text styles</a:t>
             </a:r>
           </a:p>
@@ -1576,38 +1579,37 @@
           <a:p>
             <a:pPr lvl="0"/>
             <a:r>
-              <a:rPr lang="en-US" smtClean="0"/>
+              <a:rPr lang="en-US"/>
               <a:t>Click to edit Master text styles</a:t>
             </a:r>
           </a:p>
           <a:p>
             <a:pPr lvl="1"/>
             <a:r>
-              <a:rPr lang="en-US" smtClean="0"/>
+              <a:rPr lang="en-US"/>
               <a:t>Second level</a:t>
             </a:r>
           </a:p>
           <a:p>
             <a:pPr lvl="2"/>
             <a:r>
-              <a:rPr lang="en-US" smtClean="0"/>
+              <a:rPr lang="en-US"/>
               <a:t>Third level</a:t>
             </a:r>
           </a:p>
           <a:p>
             <a:pPr lvl="3"/>
             <a:r>
-              <a:rPr lang="en-US" smtClean="0"/>
+              <a:rPr lang="en-US"/>
               <a:t>Fourth level</a:t>
             </a:r>
           </a:p>
           <a:p>
             <a:pPr lvl="4"/>
             <a:r>
-              <a:rPr lang="en-US" smtClean="0"/>
+              <a:rPr lang="en-US"/>
               <a:t>Fifth level</a:t>
             </a:r>
-            <a:endParaRPr lang="en-US"/>
           </a:p>
         </p:txBody>
       </p:sp>
@@ -1670,7 +1672,7 @@
           <a:p>
             <a:pPr lvl="0"/>
             <a:r>
-              <a:rPr lang="en-US" smtClean="0"/>
+              <a:rPr lang="en-US"/>
               <a:t>Click to edit Master text styles</a:t>
             </a:r>
           </a:p>
@@ -1726,38 +1728,37 @@
           <a:p>
             <a:pPr lvl="0"/>
             <a:r>
-              <a:rPr lang="en-US" smtClean="0"/>
+              <a:rPr lang="en-US"/>
               <a:t>Click to edit Master text styles</a:t>
             </a:r>
           </a:p>
           <a:p>
             <a:pPr lvl="1"/>
             <a:r>
-              <a:rPr lang="en-US" smtClean="0"/>
+              <a:rPr lang="en-US"/>
               <a:t>Second level</a:t>
             </a:r>
           </a:p>
           <a:p>
             <a:pPr lvl="2"/>
             <a:r>
-              <a:rPr lang="en-US" smtClean="0"/>
+              <a:rPr lang="en-US"/>
               <a:t>Third level</a:t>
             </a:r>
           </a:p>
           <a:p>
             <a:pPr lvl="3"/>
             <a:r>
-              <a:rPr lang="en-US" smtClean="0"/>
+              <a:rPr lang="en-US"/>
               <a:t>Fourth level</a:t>
             </a:r>
           </a:p>
           <a:p>
             <a:pPr lvl="4"/>
             <a:r>
-              <a:rPr lang="en-US" smtClean="0"/>
+              <a:rPr lang="en-US"/>
               <a:t>Fifth level</a:t>
             </a:r>
-            <a:endParaRPr lang="en-US"/>
           </a:p>
         </p:txBody>
       </p:sp>
@@ -1778,7 +1779,7 @@
           <a:p>
             <a:fld id="{5BCAD085-E8A6-8845-BD4E-CB4CCA059FC4}" type="datetimeFigureOut">
               <a:rPr lang="en-US" smtClean="0"/>
-              <a:t>1/27/13</a:t>
+              <a:t>6/14/26</a:t>
             </a:fld>
             <a:endParaRPr lang="en-US"/>
           </a:p>
@@ -1872,10 +1873,9 @@
           <a:lstStyle/>
           <a:p>
             <a:r>
-              <a:rPr lang="en-US" smtClean="0"/>
+              <a:rPr lang="en-US"/>
               <a:t>Click to edit Master title style</a:t>
             </a:r>
-            <a:endParaRPr lang="en-US"/>
           </a:p>
         </p:txBody>
       </p:sp>
@@ -1896,7 +1896,7 @@
           <a:p>
             <a:fld id="{5BCAD085-E8A6-8845-BD4E-CB4CCA059FC4}" type="datetimeFigureOut">
               <a:rPr lang="en-US" smtClean="0"/>
-              <a:t>1/27/13</a:t>
+              <a:t>6/14/26</a:t>
             </a:fld>
             <a:endParaRPr lang="en-US"/>
           </a:p>
@@ -1991,7 +1991,7 @@
           <a:p>
             <a:fld id="{5BCAD085-E8A6-8845-BD4E-CB4CCA059FC4}" type="datetimeFigureOut">
               <a:rPr lang="en-US" smtClean="0"/>
-              <a:t>1/27/13</a:t>
+              <a:t>6/14/26</a:t>
             </a:fld>
             <a:endParaRPr lang="en-US"/>
           </a:p>
@@ -2094,10 +2094,9 @@
           </a:lstStyle>
           <a:p>
             <a:r>
-              <a:rPr lang="en-US" smtClean="0"/>
+              <a:rPr lang="en-US"/>
               <a:t>Click to edit Master title style</a:t>
             </a:r>
-            <a:endParaRPr lang="en-US"/>
           </a:p>
         </p:txBody>
       </p:sp>
@@ -2151,38 +2150,37 @@
           <a:p>
             <a:pPr lvl="0"/>
             <a:r>
-              <a:rPr lang="en-US" smtClean="0"/>
+              <a:rPr lang="en-US"/>
               <a:t>Click to edit Master text styles</a:t>
             </a:r>
           </a:p>
           <a:p>
             <a:pPr lvl="1"/>
             <a:r>
-              <a:rPr lang="en-US" smtClean="0"/>
+              <a:rPr lang="en-US"/>
               <a:t>Second level</a:t>
             </a:r>
           </a:p>
           <a:p>
             <a:pPr lvl="2"/>
             <a:r>
-              <a:rPr lang="en-US" smtClean="0"/>
+              <a:rPr lang="en-US"/>
               <a:t>Third level</a:t>
             </a:r>
           </a:p>
           <a:p>
             <a:pPr lvl="3"/>
             <a:r>
-              <a:rPr lang="en-US" smtClean="0"/>
+              <a:rPr lang="en-US"/>
               <a:t>Fourth level</a:t>
             </a:r>
           </a:p>
           <a:p>
             <a:pPr lvl="4"/>
             <a:r>
-              <a:rPr lang="en-US" smtClean="0"/>
+              <a:rPr lang="en-US"/>
               <a:t>Fifth level</a:t>
             </a:r>
-            <a:endParaRPr lang="en-US"/>
           </a:p>
         </p:txBody>
       </p:sp>
@@ -2245,7 +2243,7 @@
           <a:p>
             <a:pPr lvl="0"/>
             <a:r>
-              <a:rPr lang="en-US" smtClean="0"/>
+              <a:rPr lang="en-US"/>
               <a:t>Click to edit Master text styles</a:t>
             </a:r>
           </a:p>
@@ -2268,7 +2266,7 @@
           <a:p>
             <a:fld id="{5BCAD085-E8A6-8845-BD4E-CB4CCA059FC4}" type="datetimeFigureOut">
               <a:rPr lang="en-US" smtClean="0"/>
-              <a:t>1/27/13</a:t>
+              <a:t>6/14/26</a:t>
             </a:fld>
             <a:endParaRPr lang="en-US"/>
           </a:p>
@@ -2371,10 +2369,9 @@
           </a:lstStyle>
           <a:p>
             <a:r>
-              <a:rPr lang="en-US" smtClean="0"/>
+              <a:rPr lang="en-US"/>
               <a:t>Click to edit Master title style</a:t>
             </a:r>
-            <a:endParaRPr lang="en-US"/>
           </a:p>
         </p:txBody>
       </p:sp>
@@ -2498,7 +2495,7 @@
           <a:p>
             <a:pPr lvl="0"/>
             <a:r>
-              <a:rPr lang="en-US" smtClean="0"/>
+              <a:rPr lang="en-US"/>
               <a:t>Click to edit Master text styles</a:t>
             </a:r>
           </a:p>
@@ -2521,7 +2518,7 @@
           <a:p>
             <a:fld id="{5BCAD085-E8A6-8845-BD4E-CB4CCA059FC4}" type="datetimeFigureOut">
               <a:rPr lang="en-US" smtClean="0"/>
-              <a:t>1/27/13</a:t>
+              <a:t>6/14/26</a:t>
             </a:fld>
             <a:endParaRPr lang="en-US"/>
           </a:p>
@@ -2630,10 +2627,9 @@
           <a:lstStyle/>
           <a:p>
             <a:r>
-              <a:rPr lang="en-US" smtClean="0"/>
+              <a:rPr lang="en-US"/>
               <a:t>Click to edit Master title style</a:t>
             </a:r>
-            <a:endParaRPr lang="en-US"/>
           </a:p>
         </p:txBody>
       </p:sp>
@@ -2664,38 +2660,37 @@
           <a:p>
             <a:pPr lvl="0"/>
             <a:r>
-              <a:rPr lang="en-US" smtClean="0"/>
+              <a:rPr lang="en-US"/>
               <a:t>Click to edit Master text styles</a:t>
             </a:r>
           </a:p>
           <a:p>
             <a:pPr lvl="1"/>
             <a:r>
-              <a:rPr lang="en-US" smtClean="0"/>
+              <a:rPr lang="en-US"/>
               <a:t>Second level</a:t>
             </a:r>
           </a:p>
           <a:p>
             <a:pPr lvl="2"/>
             <a:r>
-              <a:rPr lang="en-US" smtClean="0"/>
+              <a:rPr lang="en-US"/>
               <a:t>Third level</a:t>
             </a:r>
           </a:p>
           <a:p>
             <a:pPr lvl="3"/>
             <a:r>
-              <a:rPr lang="en-US" smtClean="0"/>
+              <a:rPr lang="en-US"/>
               <a:t>Fourth level</a:t>
             </a:r>
           </a:p>
           <a:p>
             <a:pPr lvl="4"/>
             <a:r>
-              <a:rPr lang="en-US" smtClean="0"/>
+              <a:rPr lang="en-US"/>
               <a:t>Fifth level</a:t>
             </a:r>
-            <a:endParaRPr lang="en-US"/>
           </a:p>
         </p:txBody>
       </p:sp>
@@ -2734,7 +2729,7 @@
           <a:p>
             <a:fld id="{5BCAD085-E8A6-8845-BD4E-CB4CCA059FC4}" type="datetimeFigureOut">
               <a:rPr lang="en-US" smtClean="0"/>
-              <a:t>1/27/13</a:t>
+              <a:t>6/14/26</a:t>
             </a:fld>
             <a:endParaRPr lang="en-US"/>
           </a:p>
@@ -3093,7 +3088,7 @@
 </file>
 
 <file path=ppt/slides/slide1.xml><?xml version="1.0" encoding="utf-8"?>
-<p:sld xmlns:a="http://schemas.openxmlformats.org/drawingml/2006/main" xmlns:p="http://schemas.openxmlformats.org/presentationml/2006/main" xmlns:r="http://schemas.openxmlformats.org/officeDocument/2006/relationships">
+<p:sld xmlns:a="http://schemas.openxmlformats.org/drawingml/2006/main" xmlns:r="http://schemas.openxmlformats.org/officeDocument/2006/relationships" xmlns:p="http://schemas.openxmlformats.org/presentationml/2006/main">
   <p:cSld>
     <p:bg>
       <p:bgPr>
@@ -3109,7 +3104,14 @@
         <p:cNvGrpSpPr/>
         <p:nvPr/>
       </p:nvGrpSpPr>
-      <p:grpSpPr/>
+      <p:grpSpPr>
+        <a:xfrm>
+          <a:off x="0" y="0"/>
+          <a:ext cx="0" cy="0"/>
+          <a:chOff x="0" y="0"/>
+          <a:chExt cx="0" cy="0"/>
+        </a:xfrm>
+      </p:grpSpPr>
       <p:sp>
         <p:nvSpPr>
           <p:cNvPr id="2" name="Rectangle 1"/>
@@ -3150,6 +3152,7 @@
           <a:lstStyle/>
           <a:p>
             <a:pPr algn="ctr"/>
+            <a:endParaRPr/>
           </a:p>
         </p:txBody>
       </p:sp>
@@ -3193,6 +3196,7 @@
           <a:lstStyle/>
           <a:p>
             <a:pPr algn="ctr"/>
+            <a:endParaRPr/>
           </a:p>
         </p:txBody>
       </p:sp>
@@ -3236,6 +3240,7 @@
           <a:lstStyle/>
           <a:p>
             <a:pPr algn="ctr"/>
+            <a:endParaRPr/>
           </a:p>
         </p:txBody>
       </p:sp>
@@ -3418,6 +3423,7 @@
           <a:lstStyle/>
           <a:p>
             <a:pPr algn="ctr"/>
+            <a:endParaRPr/>
           </a:p>
         </p:txBody>
       </p:sp>
@@ -3461,6 +3467,7 @@
           <a:lstStyle/>
           <a:p>
             <a:pPr algn="ctr"/>
+            <a:endParaRPr/>
           </a:p>
         </p:txBody>
       </p:sp>
@@ -3540,6 +3547,7 @@
           <a:lstStyle/>
           <a:p>
             <a:pPr algn="ctr"/>
+            <a:endParaRPr/>
           </a:p>
         </p:txBody>
       </p:sp>
@@ -3583,6 +3591,7 @@
           <a:lstStyle/>
           <a:p>
             <a:pPr algn="ctr"/>
+            <a:endParaRPr/>
           </a:p>
         </p:txBody>
       </p:sp>
@@ -3662,6 +3671,7 @@
           <a:lstStyle/>
           <a:p>
             <a:pPr algn="ctr"/>
+            <a:endParaRPr/>
           </a:p>
         </p:txBody>
       </p:sp>
@@ -3705,6 +3715,7 @@
           <a:lstStyle/>
           <a:p>
             <a:pPr algn="ctr"/>
+            <a:endParaRPr/>
           </a:p>
         </p:txBody>
       </p:sp>
@@ -3784,6 +3795,7 @@
           <a:lstStyle/>
           <a:p>
             <a:pPr algn="ctr"/>
+            <a:endParaRPr/>
           </a:p>
         </p:txBody>
       </p:sp>
@@ -3827,6 +3839,7 @@
           <a:lstStyle/>
           <a:p>
             <a:pPr algn="ctr"/>
+            <a:endParaRPr/>
           </a:p>
         </p:txBody>
       </p:sp>
@@ -3906,6 +3919,7 @@
           <a:lstStyle/>
           <a:p>
             <a:pPr algn="ctr"/>
+            <a:endParaRPr/>
           </a:p>
         </p:txBody>
       </p:sp>
@@ -3986,6 +4000,7 @@
           <a:lstStyle/>
           <a:p>
             <a:pPr algn="ctr"/>
+            <a:endParaRPr/>
           </a:p>
         </p:txBody>
       </p:sp>
@@ -4091,7 +4106,7 @@
 </file>
 
 <file path=ppt/slides/slide10.xml><?xml version="1.0" encoding="utf-8"?>
-<p:sld xmlns:a="http://schemas.openxmlformats.org/drawingml/2006/main" xmlns:p="http://schemas.openxmlformats.org/presentationml/2006/main" xmlns:r="http://schemas.openxmlformats.org/officeDocument/2006/relationships">
+<p:sld xmlns:a="http://schemas.openxmlformats.org/drawingml/2006/main" xmlns:r="http://schemas.openxmlformats.org/officeDocument/2006/relationships" xmlns:p="http://schemas.openxmlformats.org/presentationml/2006/main">
   <p:cSld>
     <p:bg>
       <p:bgPr>
@@ -4107,7 +4122,14 @@
         <p:cNvGrpSpPr/>
         <p:nvPr/>
       </p:nvGrpSpPr>
-      <p:grpSpPr/>
+      <p:grpSpPr>
+        <a:xfrm>
+          <a:off x="0" y="0"/>
+          <a:ext cx="0" cy="0"/>
+          <a:chOff x="0" y="0"/>
+          <a:chExt cx="0" cy="0"/>
+        </a:xfrm>
+      </p:grpSpPr>
       <p:sp>
         <p:nvSpPr>
           <p:cNvPr id="2" name="Rectangle 1"/>
@@ -4148,6 +4170,7 @@
           <a:lstStyle/>
           <a:p>
             <a:pPr algn="ctr"/>
+            <a:endParaRPr/>
           </a:p>
         </p:txBody>
       </p:sp>
@@ -4365,6 +4388,7 @@
           <a:lstStyle/>
           <a:p>
             <a:pPr algn="ctr"/>
+            <a:endParaRPr/>
           </a:p>
         </p:txBody>
       </p:sp>
@@ -4618,6 +4642,7 @@
           <a:lstStyle/>
           <a:p>
             <a:pPr algn="ctr"/>
+            <a:endParaRPr/>
           </a:p>
         </p:txBody>
       </p:sp>
@@ -4661,6 +4686,7 @@
           <a:lstStyle/>
           <a:p>
             <a:pPr algn="ctr"/>
+            <a:endParaRPr/>
           </a:p>
         </p:txBody>
       </p:sp>
@@ -4704,6 +4730,7 @@
           <a:lstStyle/>
           <a:p>
             <a:pPr algn="ctr"/>
+            <a:endParaRPr/>
           </a:p>
         </p:txBody>
       </p:sp>
@@ -4747,6 +4774,7 @@
           <a:lstStyle/>
           <a:p>
             <a:pPr algn="ctr"/>
+            <a:endParaRPr/>
           </a:p>
         </p:txBody>
       </p:sp>
@@ -4790,6 +4818,7 @@
           <a:lstStyle/>
           <a:p>
             <a:pPr algn="ctr"/>
+            <a:endParaRPr/>
           </a:p>
         </p:txBody>
       </p:sp>
@@ -5009,6 +5038,7 @@
           <a:lstStyle/>
           <a:p>
             <a:pPr algn="ctr"/>
+            <a:endParaRPr/>
           </a:p>
         </p:txBody>
       </p:sp>
@@ -5126,7 +5156,7 @@
 </file>
 
 <file path=ppt/slides/slide11.xml><?xml version="1.0" encoding="utf-8"?>
-<p:sld xmlns:a="http://schemas.openxmlformats.org/drawingml/2006/main" xmlns:p="http://schemas.openxmlformats.org/presentationml/2006/main" xmlns:r="http://schemas.openxmlformats.org/officeDocument/2006/relationships">
+<p:sld xmlns:a="http://schemas.openxmlformats.org/drawingml/2006/main" xmlns:r="http://schemas.openxmlformats.org/officeDocument/2006/relationships" xmlns:p="http://schemas.openxmlformats.org/presentationml/2006/main">
   <p:cSld>
     <p:bg>
       <p:bgPr>
@@ -5142,7 +5172,14 @@
         <p:cNvGrpSpPr/>
         <p:nvPr/>
       </p:nvGrpSpPr>
-      <p:grpSpPr/>
+      <p:grpSpPr>
+        <a:xfrm>
+          <a:off x="0" y="0"/>
+          <a:ext cx="0" cy="0"/>
+          <a:chOff x="0" y="0"/>
+          <a:chExt cx="0" cy="0"/>
+        </a:xfrm>
+      </p:grpSpPr>
       <p:sp>
         <p:nvSpPr>
           <p:cNvPr id="2" name="Rectangle 1"/>
@@ -5183,6 +5220,7 @@
           <a:lstStyle/>
           <a:p>
             <a:pPr algn="ctr"/>
+            <a:endParaRPr/>
           </a:p>
         </p:txBody>
       </p:sp>
@@ -5360,14 +5398,14 @@
       </p:sp>
       <p:sp>
         <p:nvSpPr>
-          <p:cNvPr id="8" name="Rectangle 7"/>
+          <p:cNvPr id="10" name="Rectangle 9"/>
           <p:cNvSpPr/>
           <p:nvPr/>
         </p:nvSpPr>
         <p:spPr>
           <a:xfrm>
-            <a:off x="621792" y="1691640"/>
-            <a:ext cx="4572000" cy="4434840"/>
+            <a:off x="5440680" y="1691640"/>
+            <a:ext cx="6126480" cy="4434840"/>
           </a:xfrm>
           <a:prstGeom prst="rect">
             <a:avLst/>
@@ -5400,76 +5438,46 @@
           <a:lstStyle/>
           <a:p>
             <a:pPr algn="ctr"/>
-          </a:p>
-        </p:txBody>
-      </p:sp>
-      <p:sp>
-        <p:nvSpPr>
-          <p:cNvPr id="9" name="TextBox 8"/>
-          <p:cNvSpPr txBox="1"/>
-          <p:nvPr/>
-        </p:nvSpPr>
-        <p:spPr>
-          <a:xfrm>
-            <a:off x="896112" y="1965960"/>
-            <a:ext cx="4023360" cy="3840480"/>
-          </a:xfrm>
-          <a:prstGeom prst="rect">
-            <a:avLst/>
-          </a:prstGeom>
-          <a:noFill/>
-        </p:spPr>
-        <p:txBody>
-          <a:bodyPr wrap="square">
-            <a:spAutoFit/>
-          </a:bodyPr>
-          <a:lstStyle/>
-          <a:p>
-            <a:pPr>
-              <a:spcAft>
-                <a:spcPts val="1000"/>
-              </a:spcAft>
-              <a:defRPr sz="1800">
-                <a:solidFill>
-                  <a:srgbClr val="232D37"/>
-                </a:solidFill>
-                <a:latin typeface="Aptos"/>
-              </a:defRPr>
-            </a:pPr>
-            <a:r>
-              <a:t>Survey = measure + collect + verify project data</a:t>
-            </a:r>
-          </a:p>
-          <a:p>
-            <a:pPr>
-              <a:spcAft>
-                <a:spcPts val="1000"/>
-              </a:spcAft>
-              <a:defRPr sz="1800">
-                <a:solidFill>
-                  <a:srgbClr val="232D37"/>
-                </a:solidFill>
-                <a:latin typeface="Aptos"/>
-              </a:defRPr>
-            </a:pPr>
-            <a:r>
-              <a:t>Good survey data reduce over-sizing, under-sizing, and design uncertainty.</a:t>
-            </a:r>
-          </a:p>
-        </p:txBody>
-      </p:sp>
-      <p:sp>
-        <p:nvSpPr>
-          <p:cNvPr id="10" name="Rectangle 9"/>
+            <a:endParaRPr/>
+          </a:p>
+        </p:txBody>
+      </p:sp>
+      <p:pic>
+        <p:nvPicPr>
+          <p:cNvPr id="11" name="Picture 10" descr="fig_07_design_workflow_en.png"/>
+          <p:cNvPicPr>
+            <a:picLocks noChangeAspect="1"/>
+          </p:cNvPicPr>
+          <p:nvPr/>
+        </p:nvPicPr>
+        <p:blipFill>
+          <a:blip r:embed="rId2"/>
+          <a:stretch>
+            <a:fillRect/>
+          </a:stretch>
+        </p:blipFill>
+        <p:spPr>
+          <a:xfrm>
+            <a:off x="6120601" y="1874519"/>
+            <a:ext cx="4766636" cy="4069080"/>
+          </a:xfrm>
+          <a:prstGeom prst="rect">
+            <a:avLst/>
+          </a:prstGeom>
+        </p:spPr>
+      </p:pic>
+      <p:sp>
+        <p:nvSpPr>
+          <p:cNvPr id="12" name="Rounded Rectangle 11"/>
           <p:cNvSpPr/>
           <p:nvPr/>
         </p:nvSpPr>
         <p:spPr>
           <a:xfrm>
-            <a:off x="5440680" y="1691640"/>
-            <a:ext cx="6126480" cy="4434840"/>
-          </a:xfrm>
-          <a:prstGeom prst="rect">
+            <a:off x="621792" y="1664208"/>
+            <a:ext cx="4590288" cy="4443984"/>
+          </a:xfrm>
+          <a:prstGeom prst="roundRect">
             <a:avLst/>
           </a:prstGeom>
           <a:solidFill>
@@ -5503,30 +5511,690 @@
           </a:p>
         </p:txBody>
       </p:sp>
-      <p:pic>
-        <p:nvPicPr>
-          <p:cNvPr id="11" name="Picture 10" descr="fig_07_design_workflow_en.png"/>
-          <p:cNvPicPr>
-            <a:picLocks noChangeAspect="1"/>
-          </p:cNvPicPr>
-          <p:nvPr/>
-        </p:nvPicPr>
-        <p:blipFill>
-          <a:blip r:embed="rId2"/>
-          <a:stretch>
-            <a:fillRect/>
-          </a:stretch>
-        </p:blipFill>
-        <p:spPr>
-          <a:xfrm>
-            <a:off x="6120601" y="1874519"/>
-            <a:ext cx="4766636" cy="4069080"/>
-          </a:xfrm>
-          <a:prstGeom prst="rect">
-            <a:avLst/>
-          </a:prstGeom>
-        </p:spPr>
-      </p:pic>
+      <p:sp>
+        <p:nvSpPr>
+          <p:cNvPr id="13" name="Rectangle 12"/>
+          <p:cNvSpPr/>
+          <p:nvPr/>
+        </p:nvSpPr>
+        <p:spPr>
+          <a:xfrm>
+            <a:off x="621792" y="1664208"/>
+            <a:ext cx="109728" cy="4443984"/>
+          </a:xfrm>
+          <a:prstGeom prst="rect">
+            <a:avLst/>
+          </a:prstGeom>
+          <a:solidFill>
+            <a:srgbClr val="2A9D8F"/>
+          </a:solidFill>
+          <a:ln>
+            <a:noFill/>
+          </a:ln>
+        </p:spPr>
+        <p:style>
+          <a:lnRef idx="1">
+            <a:schemeClr val="accent1"/>
+          </a:lnRef>
+          <a:fillRef idx="3">
+            <a:schemeClr val="accent1"/>
+          </a:fillRef>
+          <a:effectRef idx="2">
+            <a:schemeClr val="accent1"/>
+          </a:effectRef>
+          <a:fontRef idx="minor">
+            <a:schemeClr val="lt1"/>
+          </a:fontRef>
+        </p:style>
+        <p:txBody>
+          <a:bodyPr rtlCol="0" anchor="ctr"/>
+          <a:lstStyle/>
+          <a:p>
+            <a:pPr algn="ctr"/>
+          </a:p>
+        </p:txBody>
+      </p:sp>
+      <p:sp>
+        <p:nvSpPr>
+          <p:cNvPr id="14" name="TextBox 13"/>
+          <p:cNvSpPr txBox="1"/>
+          <p:nvPr/>
+        </p:nvSpPr>
+        <p:spPr>
+          <a:xfrm>
+            <a:off x="896112" y="1892807"/>
+            <a:ext cx="3886200" cy="210312"/>
+          </a:xfrm>
+          <a:prstGeom prst="rect">
+            <a:avLst/>
+          </a:prstGeom>
+          <a:noFill/>
+        </p:spPr>
+        <p:txBody>
+          <a:bodyPr wrap="square" lIns="27432" rIns="27432" tIns="9144" bIns="9144">
+            <a:noAutofit/>
+          </a:bodyPr>
+          <a:lstStyle/>
+          <a:p>
+            <a:r>
+              <a:rPr sz="950" b="1" i="0">
+                <a:solidFill>
+                  <a:srgbClr val="2A9D8F"/>
+                </a:solidFill>
+                <a:latin typeface="Aptos Display"/>
+              </a:rPr>
+              <a:t>FIRST ENGINEERING STEP</a:t>
+            </a:r>
+          </a:p>
+        </p:txBody>
+      </p:sp>
+      <p:sp>
+        <p:nvSpPr>
+          <p:cNvPr id="15" name="TextBox 14"/>
+          <p:cNvSpPr txBox="1"/>
+          <p:nvPr/>
+        </p:nvSpPr>
+        <p:spPr>
+          <a:xfrm>
+            <a:off x="896112" y="2139696"/>
+            <a:ext cx="3886200" cy="603504"/>
+          </a:xfrm>
+          <a:prstGeom prst="rect">
+            <a:avLst/>
+          </a:prstGeom>
+          <a:noFill/>
+        </p:spPr>
+        <p:txBody>
+          <a:bodyPr wrap="square" lIns="27432" rIns="27432" tIns="9144" bIns="9144">
+            <a:noAutofit/>
+          </a:bodyPr>
+          <a:lstStyle/>
+          <a:p>
+            <a:r>
+              <a:rPr sz="2100" b="1" i="0">
+                <a:solidFill>
+                  <a:srgbClr val="11374B"/>
+                </a:solidFill>
+                <a:latin typeface="Aptos Display"/>
+              </a:rPr>
+              <a:t>Survey before calculating</a:t>
+            </a:r>
+          </a:p>
+        </p:txBody>
+      </p:sp>
+      <p:sp>
+        <p:nvSpPr>
+          <p:cNvPr id="16" name="Rounded Rectangle 15"/>
+          <p:cNvSpPr/>
+          <p:nvPr/>
+        </p:nvSpPr>
+        <p:spPr>
+          <a:xfrm>
+            <a:off x="896112" y="2926080"/>
+            <a:ext cx="3913632" cy="786384"/>
+          </a:xfrm>
+          <a:prstGeom prst="roundRect">
+            <a:avLst/>
+          </a:prstGeom>
+          <a:solidFill>
+            <a:srgbClr val="EBF4FA"/>
+          </a:solidFill>
+          <a:ln w="12700">
+            <a:solidFill>
+              <a:srgbClr val="E6EBF0"/>
+            </a:solidFill>
+          </a:ln>
+        </p:spPr>
+        <p:style>
+          <a:lnRef idx="1">
+            <a:schemeClr val="accent1"/>
+          </a:lnRef>
+          <a:fillRef idx="3">
+            <a:schemeClr val="accent1"/>
+          </a:fillRef>
+          <a:effectRef idx="2">
+            <a:schemeClr val="accent1"/>
+          </a:effectRef>
+          <a:fontRef idx="minor">
+            <a:schemeClr val="lt1"/>
+          </a:fontRef>
+        </p:style>
+        <p:txBody>
+          <a:bodyPr rtlCol="0" anchor="ctr"/>
+          <a:lstStyle/>
+          <a:p>
+            <a:pPr algn="ctr"/>
+          </a:p>
+        </p:txBody>
+      </p:sp>
+      <p:sp>
+        <p:nvSpPr>
+          <p:cNvPr id="17" name="Oval 16"/>
+          <p:cNvSpPr/>
+          <p:nvPr/>
+        </p:nvSpPr>
+        <p:spPr>
+          <a:xfrm>
+            <a:off x="1060704" y="3090672"/>
+            <a:ext cx="384048" cy="384048"/>
+          </a:xfrm>
+          <a:prstGeom prst="ellipse">
+            <a:avLst/>
+          </a:prstGeom>
+          <a:solidFill>
+            <a:srgbClr val="457B9D"/>
+          </a:solidFill>
+          <a:ln>
+            <a:noFill/>
+          </a:ln>
+        </p:spPr>
+        <p:style>
+          <a:lnRef idx="1">
+            <a:schemeClr val="accent1"/>
+          </a:lnRef>
+          <a:fillRef idx="3">
+            <a:schemeClr val="accent1"/>
+          </a:fillRef>
+          <a:effectRef idx="2">
+            <a:schemeClr val="accent1"/>
+          </a:effectRef>
+          <a:fontRef idx="minor">
+            <a:schemeClr val="lt1"/>
+          </a:fontRef>
+        </p:style>
+        <p:txBody>
+          <a:bodyPr rtlCol="0" anchor="ctr"/>
+          <a:lstStyle/>
+          <a:p>
+            <a:pPr algn="ctr"/>
+          </a:p>
+        </p:txBody>
+      </p:sp>
+      <p:sp>
+        <p:nvSpPr>
+          <p:cNvPr id="18" name="TextBox 17"/>
+          <p:cNvSpPr txBox="1"/>
+          <p:nvPr/>
+        </p:nvSpPr>
+        <p:spPr>
+          <a:xfrm>
+            <a:off x="1060704" y="3182112"/>
+            <a:ext cx="384048" cy="109728"/>
+          </a:xfrm>
+          <a:prstGeom prst="rect">
+            <a:avLst/>
+          </a:prstGeom>
+          <a:noFill/>
+        </p:spPr>
+        <p:txBody>
+          <a:bodyPr wrap="square" lIns="27432" rIns="27432" tIns="9144" bIns="9144">
+            <a:noAutofit/>
+          </a:bodyPr>
+          <a:lstStyle/>
+          <a:p>
+            <a:pPr algn="ctr"/>
+            <a:r>
+              <a:rPr sz="850" b="1" i="0">
+                <a:solidFill>
+                  <a:srgbClr val="FFFFFF"/>
+                </a:solidFill>
+                <a:latin typeface="Aptos Display"/>
+              </a:rPr>
+              <a:t>1</a:t>
+            </a:r>
+          </a:p>
+        </p:txBody>
+      </p:sp>
+      <p:sp>
+        <p:nvSpPr>
+          <p:cNvPr id="19" name="TextBox 18"/>
+          <p:cNvSpPr txBox="1"/>
+          <p:nvPr/>
+        </p:nvSpPr>
+        <p:spPr>
+          <a:xfrm>
+            <a:off x="1600200" y="3054096"/>
+            <a:ext cx="2834640" cy="201168"/>
+          </a:xfrm>
+          <a:prstGeom prst="rect">
+            <a:avLst/>
+          </a:prstGeom>
+          <a:noFill/>
+        </p:spPr>
+        <p:txBody>
+          <a:bodyPr wrap="square" lIns="27432" rIns="27432" tIns="9144" bIns="9144">
+            <a:noAutofit/>
+          </a:bodyPr>
+          <a:lstStyle/>
+          <a:p>
+            <a:r>
+              <a:rPr sz="1350" b="1" i="0">
+                <a:solidFill>
+                  <a:srgbClr val="232D37"/>
+                </a:solidFill>
+                <a:latin typeface="Aptos Display"/>
+              </a:rPr>
+              <a:t>Measure</a:t>
+            </a:r>
+          </a:p>
+        </p:txBody>
+      </p:sp>
+      <p:sp>
+        <p:nvSpPr>
+          <p:cNvPr id="20" name="TextBox 19"/>
+          <p:cNvSpPr txBox="1"/>
+          <p:nvPr/>
+        </p:nvSpPr>
+        <p:spPr>
+          <a:xfrm>
+            <a:off x="1600200" y="3319272"/>
+            <a:ext cx="2971800" cy="237744"/>
+          </a:xfrm>
+          <a:prstGeom prst="rect">
+            <a:avLst/>
+          </a:prstGeom>
+          <a:noFill/>
+        </p:spPr>
+        <p:txBody>
+          <a:bodyPr wrap="square" lIns="27432" rIns="27432" tIns="9144" bIns="9144">
+            <a:noAutofit/>
+          </a:bodyPr>
+          <a:lstStyle/>
+          <a:p>
+            <a:r>
+              <a:rPr sz="980" b="0" i="0">
+                <a:solidFill>
+                  <a:srgbClr val="5A6973"/>
+                </a:solidFill>
+                <a:latin typeface="Aptos"/>
+              </a:rPr>
+              <a:t>room size and envelope data</a:t>
+            </a:r>
+          </a:p>
+        </p:txBody>
+      </p:sp>
+      <p:sp>
+        <p:nvSpPr>
+          <p:cNvPr id="21" name="Rounded Rectangle 20"/>
+          <p:cNvSpPr/>
+          <p:nvPr/>
+        </p:nvSpPr>
+        <p:spPr>
+          <a:xfrm>
+            <a:off x="896112" y="3858768"/>
+            <a:ext cx="3913632" cy="786384"/>
+          </a:xfrm>
+          <a:prstGeom prst="roundRect">
+            <a:avLst/>
+          </a:prstGeom>
+          <a:solidFill>
+            <a:srgbClr val="E6F4F7"/>
+          </a:solidFill>
+          <a:ln w="12700">
+            <a:solidFill>
+              <a:srgbClr val="E6EBF0"/>
+            </a:solidFill>
+          </a:ln>
+        </p:spPr>
+        <p:style>
+          <a:lnRef idx="1">
+            <a:schemeClr val="accent1"/>
+          </a:lnRef>
+          <a:fillRef idx="3">
+            <a:schemeClr val="accent1"/>
+          </a:fillRef>
+          <a:effectRef idx="2">
+            <a:schemeClr val="accent1"/>
+          </a:effectRef>
+          <a:fontRef idx="minor">
+            <a:schemeClr val="lt1"/>
+          </a:fontRef>
+        </p:style>
+        <p:txBody>
+          <a:bodyPr rtlCol="0" anchor="ctr"/>
+          <a:lstStyle/>
+          <a:p>
+            <a:pPr algn="ctr"/>
+          </a:p>
+        </p:txBody>
+      </p:sp>
+      <p:sp>
+        <p:nvSpPr>
+          <p:cNvPr id="22" name="Oval 21"/>
+          <p:cNvSpPr/>
+          <p:nvPr/>
+        </p:nvSpPr>
+        <p:spPr>
+          <a:xfrm>
+            <a:off x="1060704" y="4023360"/>
+            <a:ext cx="384048" cy="384048"/>
+          </a:xfrm>
+          <a:prstGeom prst="ellipse">
+            <a:avLst/>
+          </a:prstGeom>
+          <a:solidFill>
+            <a:srgbClr val="2A9D8F"/>
+          </a:solidFill>
+          <a:ln>
+            <a:noFill/>
+          </a:ln>
+        </p:spPr>
+        <p:style>
+          <a:lnRef idx="1">
+            <a:schemeClr val="accent1"/>
+          </a:lnRef>
+          <a:fillRef idx="3">
+            <a:schemeClr val="accent1"/>
+          </a:fillRef>
+          <a:effectRef idx="2">
+            <a:schemeClr val="accent1"/>
+          </a:effectRef>
+          <a:fontRef idx="minor">
+            <a:schemeClr val="lt1"/>
+          </a:fontRef>
+        </p:style>
+        <p:txBody>
+          <a:bodyPr rtlCol="0" anchor="ctr"/>
+          <a:lstStyle/>
+          <a:p>
+            <a:pPr algn="ctr"/>
+          </a:p>
+        </p:txBody>
+      </p:sp>
+      <p:sp>
+        <p:nvSpPr>
+          <p:cNvPr id="23" name="TextBox 22"/>
+          <p:cNvSpPr txBox="1"/>
+          <p:nvPr/>
+        </p:nvSpPr>
+        <p:spPr>
+          <a:xfrm>
+            <a:off x="1060704" y="4114800"/>
+            <a:ext cx="384048" cy="109728"/>
+          </a:xfrm>
+          <a:prstGeom prst="rect">
+            <a:avLst/>
+          </a:prstGeom>
+          <a:noFill/>
+        </p:spPr>
+        <p:txBody>
+          <a:bodyPr wrap="square" lIns="27432" rIns="27432" tIns="9144" bIns="9144">
+            <a:noAutofit/>
+          </a:bodyPr>
+          <a:lstStyle/>
+          <a:p>
+            <a:pPr algn="ctr"/>
+            <a:r>
+              <a:rPr sz="850" b="1" i="0">
+                <a:solidFill>
+                  <a:srgbClr val="FFFFFF"/>
+                </a:solidFill>
+                <a:latin typeface="Aptos Display"/>
+              </a:rPr>
+              <a:t>2</a:t>
+            </a:r>
+          </a:p>
+        </p:txBody>
+      </p:sp>
+      <p:sp>
+        <p:nvSpPr>
+          <p:cNvPr id="24" name="TextBox 23"/>
+          <p:cNvSpPr txBox="1"/>
+          <p:nvPr/>
+        </p:nvSpPr>
+        <p:spPr>
+          <a:xfrm>
+            <a:off x="1600200" y="3986784"/>
+            <a:ext cx="2834640" cy="201168"/>
+          </a:xfrm>
+          <a:prstGeom prst="rect">
+            <a:avLst/>
+          </a:prstGeom>
+          <a:noFill/>
+        </p:spPr>
+        <p:txBody>
+          <a:bodyPr wrap="square" lIns="27432" rIns="27432" tIns="9144" bIns="9144">
+            <a:noAutofit/>
+          </a:bodyPr>
+          <a:lstStyle/>
+          <a:p>
+            <a:r>
+              <a:rPr sz="1350" b="1" i="0">
+                <a:solidFill>
+                  <a:srgbClr val="232D37"/>
+                </a:solidFill>
+                <a:latin typeface="Aptos Display"/>
+              </a:rPr>
+              <a:t>Collect</a:t>
+            </a:r>
+          </a:p>
+        </p:txBody>
+      </p:sp>
+      <p:sp>
+        <p:nvSpPr>
+          <p:cNvPr id="25" name="TextBox 24"/>
+          <p:cNvSpPr txBox="1"/>
+          <p:nvPr/>
+        </p:nvSpPr>
+        <p:spPr>
+          <a:xfrm>
+            <a:off x="1600200" y="4251960"/>
+            <a:ext cx="2971800" cy="237744"/>
+          </a:xfrm>
+          <a:prstGeom prst="rect">
+            <a:avLst/>
+          </a:prstGeom>
+          <a:noFill/>
+        </p:spPr>
+        <p:txBody>
+          <a:bodyPr wrap="square" lIns="27432" rIns="27432" tIns="9144" bIns="9144">
+            <a:noAutofit/>
+          </a:bodyPr>
+          <a:lstStyle/>
+          <a:p>
+            <a:r>
+              <a:rPr sz="980" b="0" i="0">
+                <a:solidFill>
+                  <a:srgbClr val="5A6973"/>
+                </a:solidFill>
+                <a:latin typeface="Aptos"/>
+              </a:rPr>
+              <a:t>loads, schedules, ventilation needs</a:t>
+            </a:r>
+          </a:p>
+        </p:txBody>
+      </p:sp>
+      <p:sp>
+        <p:nvSpPr>
+          <p:cNvPr id="26" name="Rounded Rectangle 25"/>
+          <p:cNvSpPr/>
+          <p:nvPr/>
+        </p:nvSpPr>
+        <p:spPr>
+          <a:xfrm>
+            <a:off x="896112" y="4791456"/>
+            <a:ext cx="3913632" cy="786384"/>
+          </a:xfrm>
+          <a:prstGeom prst="roundRect">
+            <a:avLst/>
+          </a:prstGeom>
+          <a:solidFill>
+            <a:srgbClr val="FFF1E8"/>
+          </a:solidFill>
+          <a:ln w="12700">
+            <a:solidFill>
+              <a:srgbClr val="E6EBF0"/>
+            </a:solidFill>
+          </a:ln>
+        </p:spPr>
+        <p:style>
+          <a:lnRef idx="1">
+            <a:schemeClr val="accent1"/>
+          </a:lnRef>
+          <a:fillRef idx="3">
+            <a:schemeClr val="accent1"/>
+          </a:fillRef>
+          <a:effectRef idx="2">
+            <a:schemeClr val="accent1"/>
+          </a:effectRef>
+          <a:fontRef idx="minor">
+            <a:schemeClr val="lt1"/>
+          </a:fontRef>
+        </p:style>
+        <p:txBody>
+          <a:bodyPr rtlCol="0" anchor="ctr"/>
+          <a:lstStyle/>
+          <a:p>
+            <a:pPr algn="ctr"/>
+          </a:p>
+        </p:txBody>
+      </p:sp>
+      <p:sp>
+        <p:nvSpPr>
+          <p:cNvPr id="27" name="Oval 26"/>
+          <p:cNvSpPr/>
+          <p:nvPr/>
+        </p:nvSpPr>
+        <p:spPr>
+          <a:xfrm>
+            <a:off x="1060704" y="4956048"/>
+            <a:ext cx="384048" cy="384048"/>
+          </a:xfrm>
+          <a:prstGeom prst="ellipse">
+            <a:avLst/>
+          </a:prstGeom>
+          <a:solidFill>
+            <a:srgbClr val="E76F51"/>
+          </a:solidFill>
+          <a:ln>
+            <a:noFill/>
+          </a:ln>
+        </p:spPr>
+        <p:style>
+          <a:lnRef idx="1">
+            <a:schemeClr val="accent1"/>
+          </a:lnRef>
+          <a:fillRef idx="3">
+            <a:schemeClr val="accent1"/>
+          </a:fillRef>
+          <a:effectRef idx="2">
+            <a:schemeClr val="accent1"/>
+          </a:effectRef>
+          <a:fontRef idx="minor">
+            <a:schemeClr val="lt1"/>
+          </a:fontRef>
+        </p:style>
+        <p:txBody>
+          <a:bodyPr rtlCol="0" anchor="ctr"/>
+          <a:lstStyle/>
+          <a:p>
+            <a:pPr algn="ctr"/>
+          </a:p>
+        </p:txBody>
+      </p:sp>
+      <p:sp>
+        <p:nvSpPr>
+          <p:cNvPr id="28" name="TextBox 27"/>
+          <p:cNvSpPr txBox="1"/>
+          <p:nvPr/>
+        </p:nvSpPr>
+        <p:spPr>
+          <a:xfrm>
+            <a:off x="1060704" y="5047488"/>
+            <a:ext cx="384048" cy="109728"/>
+          </a:xfrm>
+          <a:prstGeom prst="rect">
+            <a:avLst/>
+          </a:prstGeom>
+          <a:noFill/>
+        </p:spPr>
+        <p:txBody>
+          <a:bodyPr wrap="square" lIns="27432" rIns="27432" tIns="9144" bIns="9144">
+            <a:noAutofit/>
+          </a:bodyPr>
+          <a:lstStyle/>
+          <a:p>
+            <a:pPr algn="ctr"/>
+            <a:r>
+              <a:rPr sz="850" b="1" i="0">
+                <a:solidFill>
+                  <a:srgbClr val="FFFFFF"/>
+                </a:solidFill>
+                <a:latin typeface="Aptos Display"/>
+              </a:rPr>
+              <a:t>3</a:t>
+            </a:r>
+          </a:p>
+        </p:txBody>
+      </p:sp>
+      <p:sp>
+        <p:nvSpPr>
+          <p:cNvPr id="29" name="TextBox 28"/>
+          <p:cNvSpPr txBox="1"/>
+          <p:nvPr/>
+        </p:nvSpPr>
+        <p:spPr>
+          <a:xfrm>
+            <a:off x="1600200" y="4919472"/>
+            <a:ext cx="2834640" cy="201168"/>
+          </a:xfrm>
+          <a:prstGeom prst="rect">
+            <a:avLst/>
+          </a:prstGeom>
+          <a:noFill/>
+        </p:spPr>
+        <p:txBody>
+          <a:bodyPr wrap="square" lIns="27432" rIns="27432" tIns="9144" bIns="9144">
+            <a:noAutofit/>
+          </a:bodyPr>
+          <a:lstStyle/>
+          <a:p>
+            <a:r>
+              <a:rPr sz="1350" b="1" i="0">
+                <a:solidFill>
+                  <a:srgbClr val="232D37"/>
+                </a:solidFill>
+                <a:latin typeface="Aptos Display"/>
+              </a:rPr>
+              <a:t>Verify</a:t>
+            </a:r>
+          </a:p>
+        </p:txBody>
+      </p:sp>
+      <p:sp>
+        <p:nvSpPr>
+          <p:cNvPr id="30" name="TextBox 29"/>
+          <p:cNvSpPr txBox="1"/>
+          <p:nvPr/>
+        </p:nvSpPr>
+        <p:spPr>
+          <a:xfrm>
+            <a:off x="1600200" y="5184648"/>
+            <a:ext cx="2971800" cy="237744"/>
+          </a:xfrm>
+          <a:prstGeom prst="rect">
+            <a:avLst/>
+          </a:prstGeom>
+          <a:noFill/>
+        </p:spPr>
+        <p:txBody>
+          <a:bodyPr wrap="square" lIns="27432" rIns="27432" tIns="9144" bIns="9144">
+            <a:noAutofit/>
+          </a:bodyPr>
+          <a:lstStyle/>
+          <a:p>
+            <a:r>
+              <a:rPr sz="980" b="0" i="0">
+                <a:solidFill>
+                  <a:srgbClr val="5A6973"/>
+                </a:solidFill>
+                <a:latin typeface="Aptos"/>
+              </a:rPr>
+              <a:t>reduce over/under-sizing risk</a:t>
+            </a:r>
+          </a:p>
+        </p:txBody>
+      </p:sp>
     </p:spTree>
   </p:cSld>
   <p:clrMapOvr>
@@ -5536,7 +6204,7 @@
 </file>
 
 <file path=ppt/slides/slide12.xml><?xml version="1.0" encoding="utf-8"?>
-<p:sld xmlns:a="http://schemas.openxmlformats.org/drawingml/2006/main" xmlns:p="http://schemas.openxmlformats.org/presentationml/2006/main" xmlns:r="http://schemas.openxmlformats.org/officeDocument/2006/relationships">
+<p:sld xmlns:a="http://schemas.openxmlformats.org/drawingml/2006/main" xmlns:r="http://schemas.openxmlformats.org/officeDocument/2006/relationships" xmlns:p="http://schemas.openxmlformats.org/presentationml/2006/main">
   <p:cSld>
     <p:bg>
       <p:bgPr>
@@ -5552,7 +6220,14 @@
         <p:cNvGrpSpPr/>
         <p:nvPr/>
       </p:nvGrpSpPr>
-      <p:grpSpPr/>
+      <p:grpSpPr>
+        <a:xfrm>
+          <a:off x="0" y="0"/>
+          <a:ext cx="0" cy="0"/>
+          <a:chOff x="0" y="0"/>
+          <a:chExt cx="0" cy="0"/>
+        </a:xfrm>
+      </p:grpSpPr>
       <p:sp>
         <p:nvSpPr>
           <p:cNvPr id="2" name="Rectangle 1"/>
@@ -5593,6 +6268,7 @@
           <a:lstStyle/>
           <a:p>
             <a:pPr algn="ctr"/>
+            <a:endParaRPr/>
           </a:p>
         </p:txBody>
       </p:sp>
@@ -5770,14 +6446,14 @@
       </p:sp>
       <p:sp>
         <p:nvSpPr>
-          <p:cNvPr id="8" name="Rectangle 7"/>
+          <p:cNvPr id="10" name="Rectangle 9"/>
           <p:cNvSpPr/>
           <p:nvPr/>
         </p:nvSpPr>
         <p:spPr>
           <a:xfrm>
-            <a:off x="621792" y="1691640"/>
-            <a:ext cx="4572000" cy="4434840"/>
+            <a:off x="5440680" y="1691640"/>
+            <a:ext cx="6126480" cy="4434840"/>
           </a:xfrm>
           <a:prstGeom prst="rect">
             <a:avLst/>
@@ -5810,76 +6486,46 @@
           <a:lstStyle/>
           <a:p>
             <a:pPr algn="ctr"/>
-          </a:p>
-        </p:txBody>
-      </p:sp>
-      <p:sp>
-        <p:nvSpPr>
-          <p:cNvPr id="9" name="TextBox 8"/>
-          <p:cNvSpPr txBox="1"/>
-          <p:nvPr/>
-        </p:nvSpPr>
-        <p:spPr>
-          <a:xfrm>
-            <a:off x="896112" y="1965960"/>
-            <a:ext cx="4023360" cy="3840480"/>
-          </a:xfrm>
-          <a:prstGeom prst="rect">
-            <a:avLst/>
-          </a:prstGeom>
-          <a:noFill/>
-        </p:spPr>
-        <p:txBody>
-          <a:bodyPr wrap="square">
-            <a:spAutoFit/>
-          </a:bodyPr>
-          <a:lstStyle/>
-          <a:p>
-            <a:pPr>
-              <a:spcAft>
-                <a:spcPts val="1000"/>
-              </a:spcAft>
-              <a:defRPr sz="1800">
-                <a:solidFill>
-                  <a:srgbClr val="232D37"/>
-                </a:solidFill>
-                <a:latin typeface="Aptos"/>
-              </a:defRPr>
-            </a:pPr>
-            <a:r>
-              <a:t>External: location, orientation, solar exposure, shading, outdoor unit location</a:t>
-            </a:r>
-          </a:p>
-          <a:p>
-            <a:pPr>
-              <a:spcAft>
-                <a:spcPts val="1000"/>
-              </a:spcAft>
-              <a:defRPr sz="1800">
-                <a:solidFill>
-                  <a:srgbClr val="232D37"/>
-                </a:solidFill>
-                <a:latin typeface="Aptos"/>
-              </a:defRPr>
-            </a:pPr>
-            <a:r>
-              <a:t>Internal: room size, occupancy, lighting, equipment, ventilation, schedule</a:t>
-            </a:r>
-          </a:p>
-        </p:txBody>
-      </p:sp>
-      <p:sp>
-        <p:nvSpPr>
-          <p:cNvPr id="10" name="Rectangle 9"/>
+            <a:endParaRPr/>
+          </a:p>
+        </p:txBody>
+      </p:sp>
+      <p:pic>
+        <p:nvPicPr>
+          <p:cNvPr id="11" name="Picture 10" descr="fig_04_circulation_compare_en.png"/>
+          <p:cNvPicPr>
+            <a:picLocks noChangeAspect="1"/>
+          </p:cNvPicPr>
+          <p:nvPr/>
+        </p:nvPicPr>
+        <p:blipFill>
+          <a:blip r:embed="rId2"/>
+          <a:stretch>
+            <a:fillRect/>
+          </a:stretch>
+        </p:blipFill>
+        <p:spPr>
+          <a:xfrm>
+            <a:off x="5623560" y="2321169"/>
+            <a:ext cx="5760720" cy="3175781"/>
+          </a:xfrm>
+          <a:prstGeom prst="rect">
+            <a:avLst/>
+          </a:prstGeom>
+        </p:spPr>
+      </p:pic>
+      <p:sp>
+        <p:nvSpPr>
+          <p:cNvPr id="12" name="Rounded Rectangle 11"/>
           <p:cNvSpPr/>
           <p:nvPr/>
         </p:nvSpPr>
         <p:spPr>
           <a:xfrm>
-            <a:off x="5440680" y="1691640"/>
-            <a:ext cx="6126480" cy="4434840"/>
-          </a:xfrm>
-          <a:prstGeom prst="rect">
+            <a:off x="621792" y="1664208"/>
+            <a:ext cx="4590288" cy="4443984"/>
+          </a:xfrm>
+          <a:prstGeom prst="roundRect">
             <a:avLst/>
           </a:prstGeom>
           <a:solidFill>
@@ -5913,30 +6559,499 @@
           </a:p>
         </p:txBody>
       </p:sp>
-      <p:pic>
-        <p:nvPicPr>
-          <p:cNvPr id="11" name="Picture 10" descr="fig_04_circulation_compare_en.png"/>
-          <p:cNvPicPr>
-            <a:picLocks noChangeAspect="1"/>
-          </p:cNvPicPr>
-          <p:nvPr/>
-        </p:nvPicPr>
-        <p:blipFill>
-          <a:blip r:embed="rId2"/>
-          <a:stretch>
-            <a:fillRect/>
-          </a:stretch>
-        </p:blipFill>
-        <p:spPr>
-          <a:xfrm>
-            <a:off x="5623560" y="2321169"/>
-            <a:ext cx="5760720" cy="3175781"/>
-          </a:xfrm>
-          <a:prstGeom prst="rect">
-            <a:avLst/>
-          </a:prstGeom>
-        </p:spPr>
-      </p:pic>
+      <p:sp>
+        <p:nvSpPr>
+          <p:cNvPr id="13" name="Rectangle 12"/>
+          <p:cNvSpPr/>
+          <p:nvPr/>
+        </p:nvSpPr>
+        <p:spPr>
+          <a:xfrm>
+            <a:off x="621792" y="1664208"/>
+            <a:ext cx="109728" cy="4443984"/>
+          </a:xfrm>
+          <a:prstGeom prst="rect">
+            <a:avLst/>
+          </a:prstGeom>
+          <a:solidFill>
+            <a:srgbClr val="2A9D8F"/>
+          </a:solidFill>
+          <a:ln>
+            <a:noFill/>
+          </a:ln>
+        </p:spPr>
+        <p:style>
+          <a:lnRef idx="1">
+            <a:schemeClr val="accent1"/>
+          </a:lnRef>
+          <a:fillRef idx="3">
+            <a:schemeClr val="accent1"/>
+          </a:fillRef>
+          <a:effectRef idx="2">
+            <a:schemeClr val="accent1"/>
+          </a:effectRef>
+          <a:fontRef idx="minor">
+            <a:schemeClr val="lt1"/>
+          </a:fontRef>
+        </p:style>
+        <p:txBody>
+          <a:bodyPr rtlCol="0" anchor="ctr"/>
+          <a:lstStyle/>
+          <a:p>
+            <a:pPr algn="ctr"/>
+          </a:p>
+        </p:txBody>
+      </p:sp>
+      <p:sp>
+        <p:nvSpPr>
+          <p:cNvPr id="14" name="TextBox 13"/>
+          <p:cNvSpPr txBox="1"/>
+          <p:nvPr/>
+        </p:nvSpPr>
+        <p:spPr>
+          <a:xfrm>
+            <a:off x="896112" y="1892807"/>
+            <a:ext cx="3886200" cy="210312"/>
+          </a:xfrm>
+          <a:prstGeom prst="rect">
+            <a:avLst/>
+          </a:prstGeom>
+          <a:noFill/>
+        </p:spPr>
+        <p:txBody>
+          <a:bodyPr wrap="square" lIns="27432" rIns="27432" tIns="9144" bIns="9144">
+            <a:noAutofit/>
+          </a:bodyPr>
+          <a:lstStyle/>
+          <a:p>
+            <a:r>
+              <a:rPr sz="950" b="1" i="0">
+                <a:solidFill>
+                  <a:srgbClr val="2A9D8F"/>
+                </a:solidFill>
+                <a:latin typeface="Aptos Display"/>
+              </a:rPr>
+              <a:t>SURVEY CHECKLIST</a:t>
+            </a:r>
+          </a:p>
+        </p:txBody>
+      </p:sp>
+      <p:sp>
+        <p:nvSpPr>
+          <p:cNvPr id="15" name="TextBox 14"/>
+          <p:cNvSpPr txBox="1"/>
+          <p:nvPr/>
+        </p:nvSpPr>
+        <p:spPr>
+          <a:xfrm>
+            <a:off x="896112" y="2139696"/>
+            <a:ext cx="3886200" cy="603504"/>
+          </a:xfrm>
+          <a:prstGeom prst="rect">
+            <a:avLst/>
+          </a:prstGeom>
+          <a:noFill/>
+        </p:spPr>
+        <p:txBody>
+          <a:bodyPr wrap="square" lIns="27432" rIns="27432" tIns="9144" bIns="9144">
+            <a:noAutofit/>
+          </a:bodyPr>
+          <a:lstStyle/>
+          <a:p>
+            <a:r>
+              <a:rPr sz="2100" b="1" i="0">
+                <a:solidFill>
+                  <a:srgbClr val="11374B"/>
+                </a:solidFill>
+                <a:latin typeface="Aptos Display"/>
+              </a:rPr>
+              <a:t>External + internal inputs</a:t>
+            </a:r>
+          </a:p>
+        </p:txBody>
+      </p:sp>
+      <p:sp>
+        <p:nvSpPr>
+          <p:cNvPr id="16" name="Rounded Rectangle 15"/>
+          <p:cNvSpPr/>
+          <p:nvPr/>
+        </p:nvSpPr>
+        <p:spPr>
+          <a:xfrm>
+            <a:off x="896112" y="2926080"/>
+            <a:ext cx="3913632" cy="786384"/>
+          </a:xfrm>
+          <a:prstGeom prst="roundRect">
+            <a:avLst/>
+          </a:prstGeom>
+          <a:solidFill>
+            <a:srgbClr val="FFF1E8"/>
+          </a:solidFill>
+          <a:ln w="12700">
+            <a:solidFill>
+              <a:srgbClr val="E6EBF0"/>
+            </a:solidFill>
+          </a:ln>
+        </p:spPr>
+        <p:style>
+          <a:lnRef idx="1">
+            <a:schemeClr val="accent1"/>
+          </a:lnRef>
+          <a:fillRef idx="3">
+            <a:schemeClr val="accent1"/>
+          </a:fillRef>
+          <a:effectRef idx="2">
+            <a:schemeClr val="accent1"/>
+          </a:effectRef>
+          <a:fontRef idx="minor">
+            <a:schemeClr val="lt1"/>
+          </a:fontRef>
+        </p:style>
+        <p:txBody>
+          <a:bodyPr rtlCol="0" anchor="ctr"/>
+          <a:lstStyle/>
+          <a:p>
+            <a:pPr algn="ctr"/>
+          </a:p>
+        </p:txBody>
+      </p:sp>
+      <p:sp>
+        <p:nvSpPr>
+          <p:cNvPr id="17" name="Oval 16"/>
+          <p:cNvSpPr/>
+          <p:nvPr/>
+        </p:nvSpPr>
+        <p:spPr>
+          <a:xfrm>
+            <a:off x="1060704" y="3090672"/>
+            <a:ext cx="384048" cy="384048"/>
+          </a:xfrm>
+          <a:prstGeom prst="ellipse">
+            <a:avLst/>
+          </a:prstGeom>
+          <a:solidFill>
+            <a:srgbClr val="E76F51"/>
+          </a:solidFill>
+          <a:ln>
+            <a:noFill/>
+          </a:ln>
+        </p:spPr>
+        <p:style>
+          <a:lnRef idx="1">
+            <a:schemeClr val="accent1"/>
+          </a:lnRef>
+          <a:fillRef idx="3">
+            <a:schemeClr val="accent1"/>
+          </a:fillRef>
+          <a:effectRef idx="2">
+            <a:schemeClr val="accent1"/>
+          </a:effectRef>
+          <a:fontRef idx="minor">
+            <a:schemeClr val="lt1"/>
+          </a:fontRef>
+        </p:style>
+        <p:txBody>
+          <a:bodyPr rtlCol="0" anchor="ctr"/>
+          <a:lstStyle/>
+          <a:p>
+            <a:pPr algn="ctr"/>
+          </a:p>
+        </p:txBody>
+      </p:sp>
+      <p:sp>
+        <p:nvSpPr>
+          <p:cNvPr id="18" name="TextBox 17"/>
+          <p:cNvSpPr txBox="1"/>
+          <p:nvPr/>
+        </p:nvSpPr>
+        <p:spPr>
+          <a:xfrm>
+            <a:off x="1060704" y="3182112"/>
+            <a:ext cx="384048" cy="109728"/>
+          </a:xfrm>
+          <a:prstGeom prst="rect">
+            <a:avLst/>
+          </a:prstGeom>
+          <a:noFill/>
+        </p:spPr>
+        <p:txBody>
+          <a:bodyPr wrap="square" lIns="27432" rIns="27432" tIns="9144" bIns="9144">
+            <a:noAutofit/>
+          </a:bodyPr>
+          <a:lstStyle/>
+          <a:p>
+            <a:pPr algn="ctr"/>
+            <a:r>
+              <a:rPr sz="850" b="1" i="0">
+                <a:solidFill>
+                  <a:srgbClr val="FFFFFF"/>
+                </a:solidFill>
+                <a:latin typeface="Aptos Display"/>
+              </a:rPr>
+              <a:t>1</a:t>
+            </a:r>
+          </a:p>
+        </p:txBody>
+      </p:sp>
+      <p:sp>
+        <p:nvSpPr>
+          <p:cNvPr id="19" name="TextBox 18"/>
+          <p:cNvSpPr txBox="1"/>
+          <p:nvPr/>
+        </p:nvSpPr>
+        <p:spPr>
+          <a:xfrm>
+            <a:off x="1600200" y="3054096"/>
+            <a:ext cx="2834640" cy="201168"/>
+          </a:xfrm>
+          <a:prstGeom prst="rect">
+            <a:avLst/>
+          </a:prstGeom>
+          <a:noFill/>
+        </p:spPr>
+        <p:txBody>
+          <a:bodyPr wrap="square" lIns="27432" rIns="27432" tIns="9144" bIns="9144">
+            <a:noAutofit/>
+          </a:bodyPr>
+          <a:lstStyle/>
+          <a:p>
+            <a:r>
+              <a:rPr sz="1350" b="1" i="0">
+                <a:solidFill>
+                  <a:srgbClr val="232D37"/>
+                </a:solidFill>
+                <a:latin typeface="Aptos Display"/>
+              </a:rPr>
+              <a:t>External data</a:t>
+            </a:r>
+          </a:p>
+        </p:txBody>
+      </p:sp>
+      <p:sp>
+        <p:nvSpPr>
+          <p:cNvPr id="20" name="TextBox 19"/>
+          <p:cNvSpPr txBox="1"/>
+          <p:nvPr/>
+        </p:nvSpPr>
+        <p:spPr>
+          <a:xfrm>
+            <a:off x="1600200" y="3319272"/>
+            <a:ext cx="2971800" cy="237744"/>
+          </a:xfrm>
+          <a:prstGeom prst="rect">
+            <a:avLst/>
+          </a:prstGeom>
+          <a:noFill/>
+        </p:spPr>
+        <p:txBody>
+          <a:bodyPr wrap="square" lIns="27432" rIns="27432" tIns="9144" bIns="9144">
+            <a:noAutofit/>
+          </a:bodyPr>
+          <a:lstStyle/>
+          <a:p>
+            <a:r>
+              <a:rPr sz="980" b="0" i="0">
+                <a:solidFill>
+                  <a:srgbClr val="5A6973"/>
+                </a:solidFill>
+                <a:latin typeface="Aptos"/>
+              </a:rPr>
+              <a:t>location, orientation, solar exposure, shading</a:t>
+            </a:r>
+          </a:p>
+        </p:txBody>
+      </p:sp>
+      <p:sp>
+        <p:nvSpPr>
+          <p:cNvPr id="21" name="Rounded Rectangle 20"/>
+          <p:cNvSpPr/>
+          <p:nvPr/>
+        </p:nvSpPr>
+        <p:spPr>
+          <a:xfrm>
+            <a:off x="896112" y="3858768"/>
+            <a:ext cx="3913632" cy="786384"/>
+          </a:xfrm>
+          <a:prstGeom prst="roundRect">
+            <a:avLst/>
+          </a:prstGeom>
+          <a:solidFill>
+            <a:srgbClr val="E6F4F7"/>
+          </a:solidFill>
+          <a:ln w="12700">
+            <a:solidFill>
+              <a:srgbClr val="E6EBF0"/>
+            </a:solidFill>
+          </a:ln>
+        </p:spPr>
+        <p:style>
+          <a:lnRef idx="1">
+            <a:schemeClr val="accent1"/>
+          </a:lnRef>
+          <a:fillRef idx="3">
+            <a:schemeClr val="accent1"/>
+          </a:fillRef>
+          <a:effectRef idx="2">
+            <a:schemeClr val="accent1"/>
+          </a:effectRef>
+          <a:fontRef idx="minor">
+            <a:schemeClr val="lt1"/>
+          </a:fontRef>
+        </p:style>
+        <p:txBody>
+          <a:bodyPr rtlCol="0" anchor="ctr"/>
+          <a:lstStyle/>
+          <a:p>
+            <a:pPr algn="ctr"/>
+          </a:p>
+        </p:txBody>
+      </p:sp>
+      <p:sp>
+        <p:nvSpPr>
+          <p:cNvPr id="22" name="Oval 21"/>
+          <p:cNvSpPr/>
+          <p:nvPr/>
+        </p:nvSpPr>
+        <p:spPr>
+          <a:xfrm>
+            <a:off x="1060704" y="4023360"/>
+            <a:ext cx="384048" cy="384048"/>
+          </a:xfrm>
+          <a:prstGeom prst="ellipse">
+            <a:avLst/>
+          </a:prstGeom>
+          <a:solidFill>
+            <a:srgbClr val="2A9D8F"/>
+          </a:solidFill>
+          <a:ln>
+            <a:noFill/>
+          </a:ln>
+        </p:spPr>
+        <p:style>
+          <a:lnRef idx="1">
+            <a:schemeClr val="accent1"/>
+          </a:lnRef>
+          <a:fillRef idx="3">
+            <a:schemeClr val="accent1"/>
+          </a:fillRef>
+          <a:effectRef idx="2">
+            <a:schemeClr val="accent1"/>
+          </a:effectRef>
+          <a:fontRef idx="minor">
+            <a:schemeClr val="lt1"/>
+          </a:fontRef>
+        </p:style>
+        <p:txBody>
+          <a:bodyPr rtlCol="0" anchor="ctr"/>
+          <a:lstStyle/>
+          <a:p>
+            <a:pPr algn="ctr"/>
+          </a:p>
+        </p:txBody>
+      </p:sp>
+      <p:sp>
+        <p:nvSpPr>
+          <p:cNvPr id="23" name="TextBox 22"/>
+          <p:cNvSpPr txBox="1"/>
+          <p:nvPr/>
+        </p:nvSpPr>
+        <p:spPr>
+          <a:xfrm>
+            <a:off x="1060704" y="4114800"/>
+            <a:ext cx="384048" cy="109728"/>
+          </a:xfrm>
+          <a:prstGeom prst="rect">
+            <a:avLst/>
+          </a:prstGeom>
+          <a:noFill/>
+        </p:spPr>
+        <p:txBody>
+          <a:bodyPr wrap="square" lIns="27432" rIns="27432" tIns="9144" bIns="9144">
+            <a:noAutofit/>
+          </a:bodyPr>
+          <a:lstStyle/>
+          <a:p>
+            <a:pPr algn="ctr"/>
+            <a:r>
+              <a:rPr sz="850" b="1" i="0">
+                <a:solidFill>
+                  <a:srgbClr val="FFFFFF"/>
+                </a:solidFill>
+                <a:latin typeface="Aptos Display"/>
+              </a:rPr>
+              <a:t>2</a:t>
+            </a:r>
+          </a:p>
+        </p:txBody>
+      </p:sp>
+      <p:sp>
+        <p:nvSpPr>
+          <p:cNvPr id="24" name="TextBox 23"/>
+          <p:cNvSpPr txBox="1"/>
+          <p:nvPr/>
+        </p:nvSpPr>
+        <p:spPr>
+          <a:xfrm>
+            <a:off x="1600200" y="3986784"/>
+            <a:ext cx="2834640" cy="201168"/>
+          </a:xfrm>
+          <a:prstGeom prst="rect">
+            <a:avLst/>
+          </a:prstGeom>
+          <a:noFill/>
+        </p:spPr>
+        <p:txBody>
+          <a:bodyPr wrap="square" lIns="27432" rIns="27432" tIns="9144" bIns="9144">
+            <a:noAutofit/>
+          </a:bodyPr>
+          <a:lstStyle/>
+          <a:p>
+            <a:r>
+              <a:rPr sz="1350" b="1" i="0">
+                <a:solidFill>
+                  <a:srgbClr val="232D37"/>
+                </a:solidFill>
+                <a:latin typeface="Aptos Display"/>
+              </a:rPr>
+              <a:t>Internal data</a:t>
+            </a:r>
+          </a:p>
+        </p:txBody>
+      </p:sp>
+      <p:sp>
+        <p:nvSpPr>
+          <p:cNvPr id="25" name="TextBox 24"/>
+          <p:cNvSpPr txBox="1"/>
+          <p:nvPr/>
+        </p:nvSpPr>
+        <p:spPr>
+          <a:xfrm>
+            <a:off x="1600200" y="4251960"/>
+            <a:ext cx="2971800" cy="237744"/>
+          </a:xfrm>
+          <a:prstGeom prst="rect">
+            <a:avLst/>
+          </a:prstGeom>
+          <a:noFill/>
+        </p:spPr>
+        <p:txBody>
+          <a:bodyPr wrap="square" lIns="27432" rIns="27432" tIns="9144" bIns="9144">
+            <a:noAutofit/>
+          </a:bodyPr>
+          <a:lstStyle/>
+          <a:p>
+            <a:r>
+              <a:rPr sz="980" b="0" i="0">
+                <a:solidFill>
+                  <a:srgbClr val="5A6973"/>
+                </a:solidFill>
+                <a:latin typeface="Aptos"/>
+              </a:rPr>
+              <a:t>room size, occupancy, lighting, equipment, schedule</a:t>
+            </a:r>
+          </a:p>
+        </p:txBody>
+      </p:sp>
     </p:spTree>
   </p:cSld>
   <p:clrMapOvr>
@@ -5946,7 +7061,7 @@
 </file>
 
 <file path=ppt/slides/slide13.xml><?xml version="1.0" encoding="utf-8"?>
-<p:sld xmlns:a="http://schemas.openxmlformats.org/drawingml/2006/main" xmlns:p="http://schemas.openxmlformats.org/presentationml/2006/main" xmlns:r="http://schemas.openxmlformats.org/officeDocument/2006/relationships">
+<p:sld xmlns:a="http://schemas.openxmlformats.org/drawingml/2006/main" xmlns:r="http://schemas.openxmlformats.org/officeDocument/2006/relationships" xmlns:p="http://schemas.openxmlformats.org/presentationml/2006/main">
   <p:cSld>
     <p:bg>
       <p:bgPr>
@@ -5962,7 +7077,14 @@
         <p:cNvGrpSpPr/>
         <p:nvPr/>
       </p:nvGrpSpPr>
-      <p:grpSpPr/>
+      <p:grpSpPr>
+        <a:xfrm>
+          <a:off x="0" y="0"/>
+          <a:ext cx="0" cy="0"/>
+          <a:chOff x="0" y="0"/>
+          <a:chExt cx="0" cy="0"/>
+        </a:xfrm>
+      </p:grpSpPr>
       <p:sp>
         <p:nvSpPr>
           <p:cNvPr id="2" name="Rectangle 1"/>
@@ -6003,6 +7125,7 @@
           <a:lstStyle/>
           <a:p>
             <a:pPr algn="ctr"/>
+            <a:endParaRPr/>
           </a:p>
         </p:txBody>
       </p:sp>
@@ -6220,6 +7343,7 @@
           <a:lstStyle/>
           <a:p>
             <a:pPr algn="ctr"/>
+            <a:endParaRPr/>
           </a:p>
         </p:txBody>
       </p:sp>
@@ -6300,6 +7424,7 @@
           <a:lstStyle/>
           <a:p>
             <a:pPr algn="ctr"/>
+            <a:endParaRPr/>
           </a:p>
         </p:txBody>
       </p:sp>
@@ -6343,6 +7468,7 @@
           <a:lstStyle/>
           <a:p>
             <a:pPr algn="ctr"/>
+            <a:endParaRPr/>
           </a:p>
         </p:txBody>
       </p:sp>
@@ -6491,6 +7617,7 @@
           <a:lstStyle/>
           <a:p>
             <a:pPr algn="ctr"/>
+            <a:endParaRPr/>
           </a:p>
         </p:txBody>
       </p:sp>
@@ -6534,6 +7661,7 @@
           <a:lstStyle/>
           <a:p>
             <a:pPr algn="ctr"/>
+            <a:endParaRPr/>
           </a:p>
         </p:txBody>
       </p:sp>
@@ -6682,6 +7810,7 @@
           <a:lstStyle/>
           <a:p>
             <a:pPr algn="ctr"/>
+            <a:endParaRPr/>
           </a:p>
         </p:txBody>
       </p:sp>
@@ -6725,6 +7854,7 @@
           <a:lstStyle/>
           <a:p>
             <a:pPr algn="ctr"/>
+            <a:endParaRPr/>
           </a:p>
         </p:txBody>
       </p:sp>
@@ -6875,7 +8005,7 @@
 </file>
 
 <file path=ppt/slides/slide14.xml><?xml version="1.0" encoding="utf-8"?>
-<p:sld xmlns:a="http://schemas.openxmlformats.org/drawingml/2006/main" xmlns:p="http://schemas.openxmlformats.org/presentationml/2006/main" xmlns:r="http://schemas.openxmlformats.org/officeDocument/2006/relationships">
+<p:sld xmlns:a="http://schemas.openxmlformats.org/drawingml/2006/main" xmlns:r="http://schemas.openxmlformats.org/officeDocument/2006/relationships" xmlns:p="http://schemas.openxmlformats.org/presentationml/2006/main">
   <p:cSld>
     <p:bg>
       <p:bgPr>
@@ -6891,7 +8021,14 @@
         <p:cNvGrpSpPr/>
         <p:nvPr/>
       </p:nvGrpSpPr>
-      <p:grpSpPr/>
+      <p:grpSpPr>
+        <a:xfrm>
+          <a:off x="0" y="0"/>
+          <a:ext cx="0" cy="0"/>
+          <a:chOff x="0" y="0"/>
+          <a:chExt cx="0" cy="0"/>
+        </a:xfrm>
+      </p:grpSpPr>
       <p:sp>
         <p:nvSpPr>
           <p:cNvPr id="2" name="Rectangle 1"/>
@@ -6932,6 +8069,7 @@
           <a:lstStyle/>
           <a:p>
             <a:pPr algn="ctr"/>
+            <a:endParaRPr/>
           </a:p>
         </p:txBody>
       </p:sp>
@@ -7149,6 +8287,7 @@
           <a:lstStyle/>
           <a:p>
             <a:pPr algn="ctr"/>
+            <a:endParaRPr/>
           </a:p>
         </p:txBody>
       </p:sp>
@@ -7262,6 +8401,7 @@
           <a:lstStyle/>
           <a:p>
             <a:pPr algn="ctr"/>
+            <a:endParaRPr/>
           </a:p>
         </p:txBody>
       </p:sp>
@@ -7340,6 +8480,7 @@
           <a:lstStyle/>
           <a:p>
             <a:pPr algn="ctr"/>
+            <a:endParaRPr/>
           </a:p>
         </p:txBody>
       </p:sp>
@@ -7418,6 +8559,7 @@
           <a:lstStyle/>
           <a:p>
             <a:pPr algn="ctr"/>
+            <a:endParaRPr/>
           </a:p>
         </p:txBody>
       </p:sp>
@@ -7496,6 +8638,7 @@
           <a:lstStyle/>
           <a:p>
             <a:pPr algn="ctr"/>
+            <a:endParaRPr/>
           </a:p>
         </p:txBody>
       </p:sp>
@@ -7578,7 +8721,7 @@
 </file>
 
 <file path=ppt/slides/slide15.xml><?xml version="1.0" encoding="utf-8"?>
-<p:sld xmlns:a="http://schemas.openxmlformats.org/drawingml/2006/main" xmlns:p="http://schemas.openxmlformats.org/presentationml/2006/main" xmlns:r="http://schemas.openxmlformats.org/officeDocument/2006/relationships">
+<p:sld xmlns:a="http://schemas.openxmlformats.org/drawingml/2006/main" xmlns:r="http://schemas.openxmlformats.org/officeDocument/2006/relationships" xmlns:p="http://schemas.openxmlformats.org/presentationml/2006/main">
   <p:cSld>
     <p:bg>
       <p:bgPr>
@@ -7594,7 +8737,14 @@
         <p:cNvGrpSpPr/>
         <p:nvPr/>
       </p:nvGrpSpPr>
-      <p:grpSpPr/>
+      <p:grpSpPr>
+        <a:xfrm>
+          <a:off x="0" y="0"/>
+          <a:ext cx="0" cy="0"/>
+          <a:chOff x="0" y="0"/>
+          <a:chExt cx="0" cy="0"/>
+        </a:xfrm>
+      </p:grpSpPr>
       <p:sp>
         <p:nvSpPr>
           <p:cNvPr id="2" name="Rectangle 1"/>
@@ -7635,6 +8785,7 @@
           <a:lstStyle/>
           <a:p>
             <a:pPr algn="ctr"/>
+            <a:endParaRPr/>
           </a:p>
         </p:txBody>
       </p:sp>
@@ -7818,6 +8969,7 @@
           <a:lstStyle/>
           <a:p>
             <a:pPr algn="ctr"/>
+            <a:endParaRPr/>
           </a:p>
         </p:txBody>
       </p:sp>
@@ -7863,6 +9015,7 @@
           <a:lstStyle/>
           <a:p>
             <a:pPr algn="ctr"/>
+            <a:endParaRPr/>
           </a:p>
         </p:txBody>
       </p:sp>
@@ -7906,6 +9059,7 @@
           <a:lstStyle/>
           <a:p>
             <a:pPr algn="ctr"/>
+            <a:endParaRPr/>
           </a:p>
         </p:txBody>
       </p:sp>
@@ -8056,6 +9210,7 @@
           <a:lstStyle/>
           <a:p>
             <a:pPr algn="ctr"/>
+            <a:endParaRPr/>
           </a:p>
         </p:txBody>
       </p:sp>
@@ -8099,6 +9254,7 @@
           <a:lstStyle/>
           <a:p>
             <a:pPr algn="ctr"/>
+            <a:endParaRPr/>
           </a:p>
         </p:txBody>
       </p:sp>
@@ -8249,6 +9405,7 @@
           <a:lstStyle/>
           <a:p>
             <a:pPr algn="ctr"/>
+            <a:endParaRPr/>
           </a:p>
         </p:txBody>
       </p:sp>
@@ -8292,6 +9449,7 @@
           <a:lstStyle/>
           <a:p>
             <a:pPr algn="ctr"/>
+            <a:endParaRPr/>
           </a:p>
         </p:txBody>
       </p:sp>
@@ -8409,7 +9567,7 @@
 </file>
 
 <file path=ppt/slides/slide2.xml><?xml version="1.0" encoding="utf-8"?>
-<p:sld xmlns:a="http://schemas.openxmlformats.org/drawingml/2006/main" xmlns:p="http://schemas.openxmlformats.org/presentationml/2006/main" xmlns:r="http://schemas.openxmlformats.org/officeDocument/2006/relationships">
+<p:sld xmlns:a="http://schemas.openxmlformats.org/drawingml/2006/main" xmlns:r="http://schemas.openxmlformats.org/officeDocument/2006/relationships" xmlns:p="http://schemas.openxmlformats.org/presentationml/2006/main">
   <p:cSld>
     <p:bg>
       <p:bgPr>
@@ -8425,7 +9583,14 @@
         <p:cNvGrpSpPr/>
         <p:nvPr/>
       </p:nvGrpSpPr>
-      <p:grpSpPr/>
+      <p:grpSpPr>
+        <a:xfrm>
+          <a:off x="0" y="0"/>
+          <a:ext cx="0" cy="0"/>
+          <a:chOff x="0" y="0"/>
+          <a:chExt cx="0" cy="0"/>
+        </a:xfrm>
+      </p:grpSpPr>
       <p:pic>
         <p:nvPicPr>
           <p:cNvPr id="2" name="Picture 1" descr="cooling-only-vs-air-conditioning-infographic.png"/>
@@ -8490,6 +9655,7 @@
           <a:lstStyle/>
           <a:p>
             <a:pPr algn="ctr"/>
+            <a:endParaRPr/>
           </a:p>
         </p:txBody>
       </p:sp>
@@ -8533,6 +9699,7 @@
           <a:lstStyle/>
           <a:p>
             <a:pPr algn="ctr"/>
+            <a:endParaRPr/>
           </a:p>
         </p:txBody>
       </p:sp>
@@ -8682,7 +9849,7 @@
 </file>
 
 <file path=ppt/slides/slide3.xml><?xml version="1.0" encoding="utf-8"?>
-<p:sld xmlns:a="http://schemas.openxmlformats.org/drawingml/2006/main" xmlns:p="http://schemas.openxmlformats.org/presentationml/2006/main" xmlns:r="http://schemas.openxmlformats.org/officeDocument/2006/relationships">
+<p:sld xmlns:a="http://schemas.openxmlformats.org/drawingml/2006/main" xmlns:r="http://schemas.openxmlformats.org/officeDocument/2006/relationships" xmlns:p="http://schemas.openxmlformats.org/presentationml/2006/main">
   <p:cSld>
     <p:bg>
       <p:bgPr>
@@ -8698,7 +9865,14 @@
         <p:cNvGrpSpPr/>
         <p:nvPr/>
       </p:nvGrpSpPr>
-      <p:grpSpPr/>
+      <p:grpSpPr>
+        <a:xfrm>
+          <a:off x="0" y="0"/>
+          <a:ext cx="0" cy="0"/>
+          <a:chOff x="0" y="0"/>
+          <a:chExt cx="0" cy="0"/>
+        </a:xfrm>
+      </p:grpSpPr>
       <p:sp>
         <p:nvSpPr>
           <p:cNvPr id="2" name="Rectangle 1"/>
@@ -8739,6 +9913,7 @@
           <a:lstStyle/>
           <a:p>
             <a:pPr algn="ctr"/>
+            <a:endParaRPr/>
           </a:p>
         </p:txBody>
       </p:sp>
@@ -8916,14 +10091,14 @@
       </p:sp>
       <p:sp>
         <p:nvSpPr>
-          <p:cNvPr id="8" name="Rectangle 7"/>
+          <p:cNvPr id="10" name="Rectangle 9"/>
           <p:cNvSpPr/>
           <p:nvPr/>
         </p:nvSpPr>
         <p:spPr>
           <a:xfrm>
-            <a:off x="621792" y="1691640"/>
-            <a:ext cx="4572000" cy="4434840"/>
+            <a:off x="5440680" y="1691640"/>
+            <a:ext cx="6126480" cy="4434840"/>
           </a:xfrm>
           <a:prstGeom prst="rect">
             <a:avLst/>
@@ -8956,108 +10131,46 @@
           <a:lstStyle/>
           <a:p>
             <a:pPr algn="ctr"/>
-          </a:p>
-        </p:txBody>
-      </p:sp>
-      <p:sp>
-        <p:nvSpPr>
-          <p:cNvPr id="9" name="TextBox 8"/>
-          <p:cNvSpPr txBox="1"/>
-          <p:nvPr/>
-        </p:nvSpPr>
-        <p:spPr>
-          <a:xfrm>
-            <a:off x="896112" y="1965960"/>
-            <a:ext cx="4023360" cy="3840480"/>
-          </a:xfrm>
-          <a:prstGeom prst="rect">
-            <a:avLst/>
-          </a:prstGeom>
-          <a:noFill/>
-        </p:spPr>
-        <p:txBody>
-          <a:bodyPr wrap="square">
-            <a:spAutoFit/>
-          </a:bodyPr>
-          <a:lstStyle/>
-          <a:p>
-            <a:pPr>
-              <a:spcAft>
-                <a:spcPts val="1000"/>
-              </a:spcAft>
-              <a:defRPr sz="1800">
-                <a:solidFill>
-                  <a:srgbClr val="232D37"/>
-                </a:solidFill>
-                <a:latin typeface="Aptos"/>
-              </a:defRPr>
-            </a:pPr>
-            <a:r>
-              <a:t>Temperature</a:t>
-            </a:r>
-          </a:p>
-          <a:p>
-            <a:pPr>
-              <a:spcAft>
-                <a:spcPts val="1000"/>
-              </a:spcAft>
-              <a:defRPr sz="1800">
-                <a:solidFill>
-                  <a:srgbClr val="232D37"/>
-                </a:solidFill>
-                <a:latin typeface="Aptos"/>
-              </a:defRPr>
-            </a:pPr>
-            <a:r>
-              <a:t>Humidity</a:t>
-            </a:r>
-          </a:p>
-          <a:p>
-            <a:pPr>
-              <a:spcAft>
-                <a:spcPts val="1000"/>
-              </a:spcAft>
-              <a:defRPr sz="1800">
-                <a:solidFill>
-                  <a:srgbClr val="232D37"/>
-                </a:solidFill>
-                <a:latin typeface="Aptos"/>
-              </a:defRPr>
-            </a:pPr>
-            <a:r>
-              <a:t>Air circulation</a:t>
-            </a:r>
-          </a:p>
-          <a:p>
-            <a:pPr>
-              <a:spcAft>
-                <a:spcPts val="1000"/>
-              </a:spcAft>
-              <a:defRPr sz="1800">
-                <a:solidFill>
-                  <a:srgbClr val="232D37"/>
-                </a:solidFill>
-                <a:latin typeface="Aptos"/>
-              </a:defRPr>
-            </a:pPr>
-            <a:r>
-              <a:t>Air cleanliness</a:t>
-            </a:r>
-          </a:p>
-        </p:txBody>
-      </p:sp>
-      <p:sp>
-        <p:nvSpPr>
-          <p:cNvPr id="10" name="Rectangle 9"/>
+            <a:endParaRPr/>
+          </a:p>
+        </p:txBody>
+      </p:sp>
+      <p:pic>
+        <p:nvPicPr>
+          <p:cNvPr id="11" name="Picture 10" descr="fig_01_four_params_en.png"/>
+          <p:cNvPicPr>
+            <a:picLocks noChangeAspect="1"/>
+          </p:cNvPicPr>
+          <p:nvPr/>
+        </p:nvPicPr>
+        <p:blipFill>
+          <a:blip r:embed="rId2"/>
+          <a:stretch>
+            <a:fillRect/>
+          </a:stretch>
+        </p:blipFill>
+        <p:spPr>
+          <a:xfrm>
+            <a:off x="5627501" y="1874519"/>
+            <a:ext cx="5752837" cy="4069080"/>
+          </a:xfrm>
+          <a:prstGeom prst="rect">
+            <a:avLst/>
+          </a:prstGeom>
+        </p:spPr>
+      </p:pic>
+      <p:sp>
+        <p:nvSpPr>
+          <p:cNvPr id="12" name="Rounded Rectangle 11"/>
           <p:cNvSpPr/>
           <p:nvPr/>
         </p:nvSpPr>
         <p:spPr>
           <a:xfrm>
-            <a:off x="5440680" y="1691640"/>
-            <a:ext cx="6126480" cy="4434840"/>
-          </a:xfrm>
-          <a:prstGeom prst="rect">
+            <a:off x="621792" y="1664208"/>
+            <a:ext cx="4590288" cy="4443984"/>
+          </a:xfrm>
+          <a:prstGeom prst="roundRect">
             <a:avLst/>
           </a:prstGeom>
           <a:solidFill>
@@ -9091,30 +10204,881 @@
           </a:p>
         </p:txBody>
       </p:sp>
-      <p:pic>
-        <p:nvPicPr>
-          <p:cNvPr id="11" name="Picture 10" descr="fig_01_four_params_en.png"/>
-          <p:cNvPicPr>
-            <a:picLocks noChangeAspect="1"/>
-          </p:cNvPicPr>
-          <p:nvPr/>
-        </p:nvPicPr>
-        <p:blipFill>
-          <a:blip r:embed="rId2"/>
-          <a:stretch>
-            <a:fillRect/>
-          </a:stretch>
-        </p:blipFill>
-        <p:spPr>
-          <a:xfrm>
-            <a:off x="5627501" y="1874519"/>
-            <a:ext cx="5752837" cy="4069080"/>
-          </a:xfrm>
-          <a:prstGeom prst="rect">
-            <a:avLst/>
-          </a:prstGeom>
-        </p:spPr>
-      </p:pic>
+      <p:sp>
+        <p:nvSpPr>
+          <p:cNvPr id="13" name="Rectangle 12"/>
+          <p:cNvSpPr/>
+          <p:nvPr/>
+        </p:nvSpPr>
+        <p:spPr>
+          <a:xfrm>
+            <a:off x="621792" y="1664208"/>
+            <a:ext cx="109728" cy="4443984"/>
+          </a:xfrm>
+          <a:prstGeom prst="rect">
+            <a:avLst/>
+          </a:prstGeom>
+          <a:solidFill>
+            <a:srgbClr val="2A9D8F"/>
+          </a:solidFill>
+          <a:ln>
+            <a:noFill/>
+          </a:ln>
+        </p:spPr>
+        <p:style>
+          <a:lnRef idx="1">
+            <a:schemeClr val="accent1"/>
+          </a:lnRef>
+          <a:fillRef idx="3">
+            <a:schemeClr val="accent1"/>
+          </a:fillRef>
+          <a:effectRef idx="2">
+            <a:schemeClr val="accent1"/>
+          </a:effectRef>
+          <a:fontRef idx="minor">
+            <a:schemeClr val="lt1"/>
+          </a:fontRef>
+        </p:style>
+        <p:txBody>
+          <a:bodyPr rtlCol="0" anchor="ctr"/>
+          <a:lstStyle/>
+          <a:p>
+            <a:pPr algn="ctr"/>
+          </a:p>
+        </p:txBody>
+      </p:sp>
+      <p:sp>
+        <p:nvSpPr>
+          <p:cNvPr id="14" name="TextBox 13"/>
+          <p:cNvSpPr txBox="1"/>
+          <p:nvPr/>
+        </p:nvSpPr>
+        <p:spPr>
+          <a:xfrm>
+            <a:off x="896112" y="1892807"/>
+            <a:ext cx="3886200" cy="210312"/>
+          </a:xfrm>
+          <a:prstGeom prst="rect">
+            <a:avLst/>
+          </a:prstGeom>
+          <a:noFill/>
+        </p:spPr>
+        <p:txBody>
+          <a:bodyPr wrap="square" lIns="27432" rIns="27432" tIns="9144" bIns="9144">
+            <a:noAutofit/>
+          </a:bodyPr>
+          <a:lstStyle/>
+          <a:p>
+            <a:r>
+              <a:rPr sz="950" b="1" i="0">
+                <a:solidFill>
+                  <a:srgbClr val="2A9D8F"/>
+                </a:solidFill>
+                <a:latin typeface="Aptos Display"/>
+              </a:rPr>
+              <a:t>CORE DEFINITION</a:t>
+            </a:r>
+          </a:p>
+        </p:txBody>
+      </p:sp>
+      <p:sp>
+        <p:nvSpPr>
+          <p:cNvPr id="15" name="TextBox 14"/>
+          <p:cNvSpPr txBox="1"/>
+          <p:nvPr/>
+        </p:nvSpPr>
+        <p:spPr>
+          <a:xfrm>
+            <a:off x="896112" y="2139696"/>
+            <a:ext cx="3886200" cy="603504"/>
+          </a:xfrm>
+          <a:prstGeom prst="rect">
+            <a:avLst/>
+          </a:prstGeom>
+          <a:noFill/>
+        </p:spPr>
+        <p:txBody>
+          <a:bodyPr wrap="square" lIns="27432" rIns="27432" tIns="9144" bIns="9144">
+            <a:noAutofit/>
+          </a:bodyPr>
+          <a:lstStyle/>
+          <a:p>
+            <a:r>
+              <a:rPr sz="2100" b="1" i="0">
+                <a:solidFill>
+                  <a:srgbClr val="11374B"/>
+                </a:solidFill>
+                <a:latin typeface="Aptos Display"/>
+              </a:rPr>
+              <a:t>Control these together</a:t>
+            </a:r>
+          </a:p>
+        </p:txBody>
+      </p:sp>
+      <p:sp>
+        <p:nvSpPr>
+          <p:cNvPr id="16" name="Rounded Rectangle 15"/>
+          <p:cNvSpPr/>
+          <p:nvPr/>
+        </p:nvSpPr>
+        <p:spPr>
+          <a:xfrm>
+            <a:off x="896112" y="2788920"/>
+            <a:ext cx="3913632" cy="658368"/>
+          </a:xfrm>
+          <a:prstGeom prst="roundRect">
+            <a:avLst/>
+          </a:prstGeom>
+          <a:solidFill>
+            <a:srgbClr val="FFF1E8"/>
+          </a:solidFill>
+          <a:ln w="12700">
+            <a:solidFill>
+              <a:srgbClr val="E6EBF0"/>
+            </a:solidFill>
+          </a:ln>
+        </p:spPr>
+        <p:style>
+          <a:lnRef idx="1">
+            <a:schemeClr val="accent1"/>
+          </a:lnRef>
+          <a:fillRef idx="3">
+            <a:schemeClr val="accent1"/>
+          </a:fillRef>
+          <a:effectRef idx="2">
+            <a:schemeClr val="accent1"/>
+          </a:effectRef>
+          <a:fontRef idx="minor">
+            <a:schemeClr val="lt1"/>
+          </a:fontRef>
+        </p:style>
+        <p:txBody>
+          <a:bodyPr rtlCol="0" anchor="ctr"/>
+          <a:lstStyle/>
+          <a:p>
+            <a:pPr algn="ctr"/>
+          </a:p>
+        </p:txBody>
+      </p:sp>
+      <p:sp>
+        <p:nvSpPr>
+          <p:cNvPr id="17" name="Oval 16"/>
+          <p:cNvSpPr/>
+          <p:nvPr/>
+        </p:nvSpPr>
+        <p:spPr>
+          <a:xfrm>
+            <a:off x="1060704" y="2953512"/>
+            <a:ext cx="384048" cy="384048"/>
+          </a:xfrm>
+          <a:prstGeom prst="ellipse">
+            <a:avLst/>
+          </a:prstGeom>
+          <a:solidFill>
+            <a:srgbClr val="E76F51"/>
+          </a:solidFill>
+          <a:ln>
+            <a:noFill/>
+          </a:ln>
+        </p:spPr>
+        <p:style>
+          <a:lnRef idx="1">
+            <a:schemeClr val="accent1"/>
+          </a:lnRef>
+          <a:fillRef idx="3">
+            <a:schemeClr val="accent1"/>
+          </a:fillRef>
+          <a:effectRef idx="2">
+            <a:schemeClr val="accent1"/>
+          </a:effectRef>
+          <a:fontRef idx="minor">
+            <a:schemeClr val="lt1"/>
+          </a:fontRef>
+        </p:style>
+        <p:txBody>
+          <a:bodyPr rtlCol="0" anchor="ctr"/>
+          <a:lstStyle/>
+          <a:p>
+            <a:pPr algn="ctr"/>
+          </a:p>
+        </p:txBody>
+      </p:sp>
+      <p:sp>
+        <p:nvSpPr>
+          <p:cNvPr id="18" name="TextBox 17"/>
+          <p:cNvSpPr txBox="1"/>
+          <p:nvPr/>
+        </p:nvSpPr>
+        <p:spPr>
+          <a:xfrm>
+            <a:off x="1060704" y="3044952"/>
+            <a:ext cx="384048" cy="109728"/>
+          </a:xfrm>
+          <a:prstGeom prst="rect">
+            <a:avLst/>
+          </a:prstGeom>
+          <a:noFill/>
+        </p:spPr>
+        <p:txBody>
+          <a:bodyPr wrap="square" lIns="27432" rIns="27432" tIns="9144" bIns="9144">
+            <a:noAutofit/>
+          </a:bodyPr>
+          <a:lstStyle/>
+          <a:p>
+            <a:pPr algn="ctr"/>
+            <a:r>
+              <a:rPr sz="850" b="1" i="0">
+                <a:solidFill>
+                  <a:srgbClr val="FFFFFF"/>
+                </a:solidFill>
+                <a:latin typeface="Aptos Display"/>
+              </a:rPr>
+              <a:t>1</a:t>
+            </a:r>
+          </a:p>
+        </p:txBody>
+      </p:sp>
+      <p:sp>
+        <p:nvSpPr>
+          <p:cNvPr id="19" name="TextBox 18"/>
+          <p:cNvSpPr txBox="1"/>
+          <p:nvPr/>
+        </p:nvSpPr>
+        <p:spPr>
+          <a:xfrm>
+            <a:off x="1600200" y="2916936"/>
+            <a:ext cx="2834640" cy="201168"/>
+          </a:xfrm>
+          <a:prstGeom prst="rect">
+            <a:avLst/>
+          </a:prstGeom>
+          <a:noFill/>
+        </p:spPr>
+        <p:txBody>
+          <a:bodyPr wrap="square" lIns="27432" rIns="27432" tIns="9144" bIns="9144">
+            <a:noAutofit/>
+          </a:bodyPr>
+          <a:lstStyle/>
+          <a:p>
+            <a:r>
+              <a:rPr sz="1350" b="1" i="0">
+                <a:solidFill>
+                  <a:srgbClr val="232D37"/>
+                </a:solidFill>
+                <a:latin typeface="Aptos Display"/>
+              </a:rPr>
+              <a:t>Temperature</a:t>
+            </a:r>
+          </a:p>
+        </p:txBody>
+      </p:sp>
+      <p:sp>
+        <p:nvSpPr>
+          <p:cNvPr id="20" name="TextBox 19"/>
+          <p:cNvSpPr txBox="1"/>
+          <p:nvPr/>
+        </p:nvSpPr>
+        <p:spPr>
+          <a:xfrm>
+            <a:off x="1600200" y="3182112"/>
+            <a:ext cx="2971800" cy="237744"/>
+          </a:xfrm>
+          <a:prstGeom prst="rect">
+            <a:avLst/>
+          </a:prstGeom>
+          <a:noFill/>
+        </p:spPr>
+        <p:txBody>
+          <a:bodyPr wrap="square" lIns="27432" rIns="27432" tIns="9144" bIns="9144">
+            <a:noAutofit/>
+          </a:bodyPr>
+          <a:lstStyle/>
+          <a:p>
+            <a:r>
+              <a:rPr sz="980" b="0" i="0">
+                <a:solidFill>
+                  <a:srgbClr val="5A6973"/>
+                </a:solidFill>
+                <a:latin typeface="Aptos"/>
+              </a:rPr>
+              <a:t>sensible heat balance</a:t>
+            </a:r>
+          </a:p>
+        </p:txBody>
+      </p:sp>
+      <p:sp>
+        <p:nvSpPr>
+          <p:cNvPr id="21" name="Rounded Rectangle 20"/>
+          <p:cNvSpPr/>
+          <p:nvPr/>
+        </p:nvSpPr>
+        <p:spPr>
+          <a:xfrm>
+            <a:off x="896112" y="3547872"/>
+            <a:ext cx="3913632" cy="658368"/>
+          </a:xfrm>
+          <a:prstGeom prst="roundRect">
+            <a:avLst/>
+          </a:prstGeom>
+          <a:solidFill>
+            <a:srgbClr val="EBF4FA"/>
+          </a:solidFill>
+          <a:ln w="12700">
+            <a:solidFill>
+              <a:srgbClr val="E6EBF0"/>
+            </a:solidFill>
+          </a:ln>
+        </p:spPr>
+        <p:style>
+          <a:lnRef idx="1">
+            <a:schemeClr val="accent1"/>
+          </a:lnRef>
+          <a:fillRef idx="3">
+            <a:schemeClr val="accent1"/>
+          </a:fillRef>
+          <a:effectRef idx="2">
+            <a:schemeClr val="accent1"/>
+          </a:effectRef>
+          <a:fontRef idx="minor">
+            <a:schemeClr val="lt1"/>
+          </a:fontRef>
+        </p:style>
+        <p:txBody>
+          <a:bodyPr rtlCol="0" anchor="ctr"/>
+          <a:lstStyle/>
+          <a:p>
+            <a:pPr algn="ctr"/>
+          </a:p>
+        </p:txBody>
+      </p:sp>
+      <p:sp>
+        <p:nvSpPr>
+          <p:cNvPr id="22" name="Oval 21"/>
+          <p:cNvSpPr/>
+          <p:nvPr/>
+        </p:nvSpPr>
+        <p:spPr>
+          <a:xfrm>
+            <a:off x="1060704" y="3712463"/>
+            <a:ext cx="384048" cy="384048"/>
+          </a:xfrm>
+          <a:prstGeom prst="ellipse">
+            <a:avLst/>
+          </a:prstGeom>
+          <a:solidFill>
+            <a:srgbClr val="457B9D"/>
+          </a:solidFill>
+          <a:ln>
+            <a:noFill/>
+          </a:ln>
+        </p:spPr>
+        <p:style>
+          <a:lnRef idx="1">
+            <a:schemeClr val="accent1"/>
+          </a:lnRef>
+          <a:fillRef idx="3">
+            <a:schemeClr val="accent1"/>
+          </a:fillRef>
+          <a:effectRef idx="2">
+            <a:schemeClr val="accent1"/>
+          </a:effectRef>
+          <a:fontRef idx="minor">
+            <a:schemeClr val="lt1"/>
+          </a:fontRef>
+        </p:style>
+        <p:txBody>
+          <a:bodyPr rtlCol="0" anchor="ctr"/>
+          <a:lstStyle/>
+          <a:p>
+            <a:pPr algn="ctr"/>
+          </a:p>
+        </p:txBody>
+      </p:sp>
+      <p:sp>
+        <p:nvSpPr>
+          <p:cNvPr id="23" name="TextBox 22"/>
+          <p:cNvSpPr txBox="1"/>
+          <p:nvPr/>
+        </p:nvSpPr>
+        <p:spPr>
+          <a:xfrm>
+            <a:off x="1060704" y="3803904"/>
+            <a:ext cx="384048" cy="109728"/>
+          </a:xfrm>
+          <a:prstGeom prst="rect">
+            <a:avLst/>
+          </a:prstGeom>
+          <a:noFill/>
+        </p:spPr>
+        <p:txBody>
+          <a:bodyPr wrap="square" lIns="27432" rIns="27432" tIns="9144" bIns="9144">
+            <a:noAutofit/>
+          </a:bodyPr>
+          <a:lstStyle/>
+          <a:p>
+            <a:pPr algn="ctr"/>
+            <a:r>
+              <a:rPr sz="850" b="1" i="0">
+                <a:solidFill>
+                  <a:srgbClr val="FFFFFF"/>
+                </a:solidFill>
+                <a:latin typeface="Aptos Display"/>
+              </a:rPr>
+              <a:t>2</a:t>
+            </a:r>
+          </a:p>
+        </p:txBody>
+      </p:sp>
+      <p:sp>
+        <p:nvSpPr>
+          <p:cNvPr id="24" name="TextBox 23"/>
+          <p:cNvSpPr txBox="1"/>
+          <p:nvPr/>
+        </p:nvSpPr>
+        <p:spPr>
+          <a:xfrm>
+            <a:off x="1600200" y="3675887"/>
+            <a:ext cx="2834640" cy="201168"/>
+          </a:xfrm>
+          <a:prstGeom prst="rect">
+            <a:avLst/>
+          </a:prstGeom>
+          <a:noFill/>
+        </p:spPr>
+        <p:txBody>
+          <a:bodyPr wrap="square" lIns="27432" rIns="27432" tIns="9144" bIns="9144">
+            <a:noAutofit/>
+          </a:bodyPr>
+          <a:lstStyle/>
+          <a:p>
+            <a:r>
+              <a:rPr sz="1350" b="1" i="0">
+                <a:solidFill>
+                  <a:srgbClr val="232D37"/>
+                </a:solidFill>
+                <a:latin typeface="Aptos Display"/>
+              </a:rPr>
+              <a:t>Humidity</a:t>
+            </a:r>
+          </a:p>
+        </p:txBody>
+      </p:sp>
+      <p:sp>
+        <p:nvSpPr>
+          <p:cNvPr id="25" name="TextBox 24"/>
+          <p:cNvSpPr txBox="1"/>
+          <p:nvPr/>
+        </p:nvSpPr>
+        <p:spPr>
+          <a:xfrm>
+            <a:off x="1600200" y="3941063"/>
+            <a:ext cx="2971800" cy="237744"/>
+          </a:xfrm>
+          <a:prstGeom prst="rect">
+            <a:avLst/>
+          </a:prstGeom>
+          <a:noFill/>
+        </p:spPr>
+        <p:txBody>
+          <a:bodyPr wrap="square" lIns="27432" rIns="27432" tIns="9144" bIns="9144">
+            <a:noAutofit/>
+          </a:bodyPr>
+          <a:lstStyle/>
+          <a:p>
+            <a:r>
+              <a:rPr sz="980" b="0" i="0">
+                <a:solidFill>
+                  <a:srgbClr val="5A6973"/>
+                </a:solidFill>
+                <a:latin typeface="Aptos"/>
+              </a:rPr>
+              <a:t>latent moisture control</a:t>
+            </a:r>
+          </a:p>
+        </p:txBody>
+      </p:sp>
+      <p:sp>
+        <p:nvSpPr>
+          <p:cNvPr id="26" name="Rounded Rectangle 25"/>
+          <p:cNvSpPr/>
+          <p:nvPr/>
+        </p:nvSpPr>
+        <p:spPr>
+          <a:xfrm>
+            <a:off x="896112" y="4306824"/>
+            <a:ext cx="3913632" cy="658368"/>
+          </a:xfrm>
+          <a:prstGeom prst="roundRect">
+            <a:avLst/>
+          </a:prstGeom>
+          <a:solidFill>
+            <a:srgbClr val="E6F4F7"/>
+          </a:solidFill>
+          <a:ln w="12700">
+            <a:solidFill>
+              <a:srgbClr val="E6EBF0"/>
+            </a:solidFill>
+          </a:ln>
+        </p:spPr>
+        <p:style>
+          <a:lnRef idx="1">
+            <a:schemeClr val="accent1"/>
+          </a:lnRef>
+          <a:fillRef idx="3">
+            <a:schemeClr val="accent1"/>
+          </a:fillRef>
+          <a:effectRef idx="2">
+            <a:schemeClr val="accent1"/>
+          </a:effectRef>
+          <a:fontRef idx="minor">
+            <a:schemeClr val="lt1"/>
+          </a:fontRef>
+        </p:style>
+        <p:txBody>
+          <a:bodyPr rtlCol="0" anchor="ctr"/>
+          <a:lstStyle/>
+          <a:p>
+            <a:pPr algn="ctr"/>
+          </a:p>
+        </p:txBody>
+      </p:sp>
+      <p:sp>
+        <p:nvSpPr>
+          <p:cNvPr id="27" name="Oval 26"/>
+          <p:cNvSpPr/>
+          <p:nvPr/>
+        </p:nvSpPr>
+        <p:spPr>
+          <a:xfrm>
+            <a:off x="1060704" y="4471416"/>
+            <a:ext cx="384048" cy="384048"/>
+          </a:xfrm>
+          <a:prstGeom prst="ellipse">
+            <a:avLst/>
+          </a:prstGeom>
+          <a:solidFill>
+            <a:srgbClr val="2A9D8F"/>
+          </a:solidFill>
+          <a:ln>
+            <a:noFill/>
+          </a:ln>
+        </p:spPr>
+        <p:style>
+          <a:lnRef idx="1">
+            <a:schemeClr val="accent1"/>
+          </a:lnRef>
+          <a:fillRef idx="3">
+            <a:schemeClr val="accent1"/>
+          </a:fillRef>
+          <a:effectRef idx="2">
+            <a:schemeClr val="accent1"/>
+          </a:effectRef>
+          <a:fontRef idx="minor">
+            <a:schemeClr val="lt1"/>
+          </a:fontRef>
+        </p:style>
+        <p:txBody>
+          <a:bodyPr rtlCol="0" anchor="ctr"/>
+          <a:lstStyle/>
+          <a:p>
+            <a:pPr algn="ctr"/>
+          </a:p>
+        </p:txBody>
+      </p:sp>
+      <p:sp>
+        <p:nvSpPr>
+          <p:cNvPr id="28" name="TextBox 27"/>
+          <p:cNvSpPr txBox="1"/>
+          <p:nvPr/>
+        </p:nvSpPr>
+        <p:spPr>
+          <a:xfrm>
+            <a:off x="1060704" y="4562856"/>
+            <a:ext cx="384048" cy="109728"/>
+          </a:xfrm>
+          <a:prstGeom prst="rect">
+            <a:avLst/>
+          </a:prstGeom>
+          <a:noFill/>
+        </p:spPr>
+        <p:txBody>
+          <a:bodyPr wrap="square" lIns="27432" rIns="27432" tIns="9144" bIns="9144">
+            <a:noAutofit/>
+          </a:bodyPr>
+          <a:lstStyle/>
+          <a:p>
+            <a:pPr algn="ctr"/>
+            <a:r>
+              <a:rPr sz="850" b="1" i="0">
+                <a:solidFill>
+                  <a:srgbClr val="FFFFFF"/>
+                </a:solidFill>
+                <a:latin typeface="Aptos Display"/>
+              </a:rPr>
+              <a:t>3</a:t>
+            </a:r>
+          </a:p>
+        </p:txBody>
+      </p:sp>
+      <p:sp>
+        <p:nvSpPr>
+          <p:cNvPr id="29" name="TextBox 28"/>
+          <p:cNvSpPr txBox="1"/>
+          <p:nvPr/>
+        </p:nvSpPr>
+        <p:spPr>
+          <a:xfrm>
+            <a:off x="1600200" y="4434840"/>
+            <a:ext cx="2834640" cy="201168"/>
+          </a:xfrm>
+          <a:prstGeom prst="rect">
+            <a:avLst/>
+          </a:prstGeom>
+          <a:noFill/>
+        </p:spPr>
+        <p:txBody>
+          <a:bodyPr wrap="square" lIns="27432" rIns="27432" tIns="9144" bIns="9144">
+            <a:noAutofit/>
+          </a:bodyPr>
+          <a:lstStyle/>
+          <a:p>
+            <a:r>
+              <a:rPr sz="1350" b="1" i="0">
+                <a:solidFill>
+                  <a:srgbClr val="232D37"/>
+                </a:solidFill>
+                <a:latin typeface="Aptos Display"/>
+              </a:rPr>
+              <a:t>Air circulation</a:t>
+            </a:r>
+          </a:p>
+        </p:txBody>
+      </p:sp>
+      <p:sp>
+        <p:nvSpPr>
+          <p:cNvPr id="30" name="TextBox 29"/>
+          <p:cNvSpPr txBox="1"/>
+          <p:nvPr/>
+        </p:nvSpPr>
+        <p:spPr>
+          <a:xfrm>
+            <a:off x="1600200" y="4700016"/>
+            <a:ext cx="2971800" cy="237744"/>
+          </a:xfrm>
+          <a:prstGeom prst="rect">
+            <a:avLst/>
+          </a:prstGeom>
+          <a:noFill/>
+        </p:spPr>
+        <p:txBody>
+          <a:bodyPr wrap="square" lIns="27432" rIns="27432" tIns="9144" bIns="9144">
+            <a:noAutofit/>
+          </a:bodyPr>
+          <a:lstStyle/>
+          <a:p>
+            <a:r>
+              <a:rPr sz="980" b="0" i="0">
+                <a:solidFill>
+                  <a:srgbClr val="5A6973"/>
+                </a:solidFill>
+                <a:latin typeface="Aptos"/>
+              </a:rPr>
+              <a:t>mixing + distribution</a:t>
+            </a:r>
+          </a:p>
+        </p:txBody>
+      </p:sp>
+      <p:sp>
+        <p:nvSpPr>
+          <p:cNvPr id="31" name="Rounded Rectangle 30"/>
+          <p:cNvSpPr/>
+          <p:nvPr/>
+        </p:nvSpPr>
+        <p:spPr>
+          <a:xfrm>
+            <a:off x="896112" y="5065775"/>
+            <a:ext cx="3913632" cy="658368"/>
+          </a:xfrm>
+          <a:prstGeom prst="roundRect">
+            <a:avLst/>
+          </a:prstGeom>
+          <a:solidFill>
+            <a:srgbClr val="ECF8EE"/>
+          </a:solidFill>
+          <a:ln w="12700">
+            <a:solidFill>
+              <a:srgbClr val="E6EBF0"/>
+            </a:solidFill>
+          </a:ln>
+        </p:spPr>
+        <p:style>
+          <a:lnRef idx="1">
+            <a:schemeClr val="accent1"/>
+          </a:lnRef>
+          <a:fillRef idx="3">
+            <a:schemeClr val="accent1"/>
+          </a:fillRef>
+          <a:effectRef idx="2">
+            <a:schemeClr val="accent1"/>
+          </a:effectRef>
+          <a:fontRef idx="minor">
+            <a:schemeClr val="lt1"/>
+          </a:fontRef>
+        </p:style>
+        <p:txBody>
+          <a:bodyPr rtlCol="0" anchor="ctr"/>
+          <a:lstStyle/>
+          <a:p>
+            <a:pPr algn="ctr"/>
+          </a:p>
+        </p:txBody>
+      </p:sp>
+      <p:sp>
+        <p:nvSpPr>
+          <p:cNvPr id="32" name="Oval 31"/>
+          <p:cNvSpPr/>
+          <p:nvPr/>
+        </p:nvSpPr>
+        <p:spPr>
+          <a:xfrm>
+            <a:off x="1060704" y="5230367"/>
+            <a:ext cx="384048" cy="384048"/>
+          </a:xfrm>
+          <a:prstGeom prst="ellipse">
+            <a:avLst/>
+          </a:prstGeom>
+          <a:solidFill>
+            <a:srgbClr val="4CAF50"/>
+          </a:solidFill>
+          <a:ln>
+            <a:noFill/>
+          </a:ln>
+        </p:spPr>
+        <p:style>
+          <a:lnRef idx="1">
+            <a:schemeClr val="accent1"/>
+          </a:lnRef>
+          <a:fillRef idx="3">
+            <a:schemeClr val="accent1"/>
+          </a:fillRef>
+          <a:effectRef idx="2">
+            <a:schemeClr val="accent1"/>
+          </a:effectRef>
+          <a:fontRef idx="minor">
+            <a:schemeClr val="lt1"/>
+          </a:fontRef>
+        </p:style>
+        <p:txBody>
+          <a:bodyPr rtlCol="0" anchor="ctr"/>
+          <a:lstStyle/>
+          <a:p>
+            <a:pPr algn="ctr"/>
+          </a:p>
+        </p:txBody>
+      </p:sp>
+      <p:sp>
+        <p:nvSpPr>
+          <p:cNvPr id="33" name="TextBox 32"/>
+          <p:cNvSpPr txBox="1"/>
+          <p:nvPr/>
+        </p:nvSpPr>
+        <p:spPr>
+          <a:xfrm>
+            <a:off x="1060704" y="5321807"/>
+            <a:ext cx="384048" cy="109728"/>
+          </a:xfrm>
+          <a:prstGeom prst="rect">
+            <a:avLst/>
+          </a:prstGeom>
+          <a:noFill/>
+        </p:spPr>
+        <p:txBody>
+          <a:bodyPr wrap="square" lIns="27432" rIns="27432" tIns="9144" bIns="9144">
+            <a:noAutofit/>
+          </a:bodyPr>
+          <a:lstStyle/>
+          <a:p>
+            <a:pPr algn="ctr"/>
+            <a:r>
+              <a:rPr sz="850" b="1" i="0">
+                <a:solidFill>
+                  <a:srgbClr val="FFFFFF"/>
+                </a:solidFill>
+                <a:latin typeface="Aptos Display"/>
+              </a:rPr>
+              <a:t>4</a:t>
+            </a:r>
+          </a:p>
+        </p:txBody>
+      </p:sp>
+      <p:sp>
+        <p:nvSpPr>
+          <p:cNvPr id="34" name="TextBox 33"/>
+          <p:cNvSpPr txBox="1"/>
+          <p:nvPr/>
+        </p:nvSpPr>
+        <p:spPr>
+          <a:xfrm>
+            <a:off x="1600200" y="5193791"/>
+            <a:ext cx="2834640" cy="201168"/>
+          </a:xfrm>
+          <a:prstGeom prst="rect">
+            <a:avLst/>
+          </a:prstGeom>
+          <a:noFill/>
+        </p:spPr>
+        <p:txBody>
+          <a:bodyPr wrap="square" lIns="27432" rIns="27432" tIns="9144" bIns="9144">
+            <a:noAutofit/>
+          </a:bodyPr>
+          <a:lstStyle/>
+          <a:p>
+            <a:r>
+              <a:rPr sz="1350" b="1" i="0">
+                <a:solidFill>
+                  <a:srgbClr val="232D37"/>
+                </a:solidFill>
+                <a:latin typeface="Aptos Display"/>
+              </a:rPr>
+              <a:t>Air cleanliness</a:t>
+            </a:r>
+          </a:p>
+        </p:txBody>
+      </p:sp>
+      <p:sp>
+        <p:nvSpPr>
+          <p:cNvPr id="35" name="TextBox 34"/>
+          <p:cNvSpPr txBox="1"/>
+          <p:nvPr/>
+        </p:nvSpPr>
+        <p:spPr>
+          <a:xfrm>
+            <a:off x="1600200" y="5458967"/>
+            <a:ext cx="2971800" cy="237744"/>
+          </a:xfrm>
+          <a:prstGeom prst="rect">
+            <a:avLst/>
+          </a:prstGeom>
+          <a:noFill/>
+        </p:spPr>
+        <p:txBody>
+          <a:bodyPr wrap="square" lIns="27432" rIns="27432" tIns="9144" bIns="9144">
+            <a:noAutofit/>
+          </a:bodyPr>
+          <a:lstStyle/>
+          <a:p>
+            <a:r>
+              <a:rPr sz="980" b="0" i="0">
+                <a:solidFill>
+                  <a:srgbClr val="5A6973"/>
+                </a:solidFill>
+                <a:latin typeface="Aptos"/>
+              </a:rPr>
+              <a:t>filtration + dilution</a:t>
+            </a:r>
+          </a:p>
+        </p:txBody>
+      </p:sp>
     </p:spTree>
   </p:cSld>
   <p:clrMapOvr>
@@ -9124,7 +11088,7 @@
 </file>
 
 <file path=ppt/slides/slide4.xml><?xml version="1.0" encoding="utf-8"?>
-<p:sld xmlns:a="http://schemas.openxmlformats.org/drawingml/2006/main" xmlns:p="http://schemas.openxmlformats.org/presentationml/2006/main" xmlns:r="http://schemas.openxmlformats.org/officeDocument/2006/relationships">
+<p:sld xmlns:a="http://schemas.openxmlformats.org/drawingml/2006/main" xmlns:r="http://schemas.openxmlformats.org/officeDocument/2006/relationships" xmlns:p="http://schemas.openxmlformats.org/presentationml/2006/main">
   <p:cSld>
     <p:bg>
       <p:bgPr>
@@ -9140,7 +11104,14 @@
         <p:cNvGrpSpPr/>
         <p:nvPr/>
       </p:nvGrpSpPr>
-      <p:grpSpPr/>
+      <p:grpSpPr>
+        <a:xfrm>
+          <a:off x="0" y="0"/>
+          <a:ext cx="0" cy="0"/>
+          <a:chOff x="0" y="0"/>
+          <a:chExt cx="0" cy="0"/>
+        </a:xfrm>
+      </p:grpSpPr>
       <p:sp>
         <p:nvSpPr>
           <p:cNvPr id="2" name="Rectangle 1"/>
@@ -9181,6 +11152,7 @@
           <a:lstStyle/>
           <a:p>
             <a:pPr algn="ctr"/>
+            <a:endParaRPr/>
           </a:p>
         </p:txBody>
       </p:sp>
@@ -9358,14 +11330,14 @@
       </p:sp>
       <p:sp>
         <p:nvSpPr>
-          <p:cNvPr id="8" name="Rectangle 7"/>
+          <p:cNvPr id="10" name="Rectangle 9"/>
           <p:cNvSpPr/>
           <p:nvPr/>
         </p:nvSpPr>
         <p:spPr>
           <a:xfrm>
-            <a:off x="621792" y="1691640"/>
-            <a:ext cx="4572000" cy="4434840"/>
+            <a:off x="5440680" y="1691640"/>
+            <a:ext cx="6126480" cy="4434840"/>
           </a:xfrm>
           <a:prstGeom prst="rect">
             <a:avLst/>
@@ -9398,76 +11370,46 @@
           <a:lstStyle/>
           <a:p>
             <a:pPr algn="ctr"/>
-          </a:p>
-        </p:txBody>
-      </p:sp>
-      <p:sp>
-        <p:nvSpPr>
-          <p:cNvPr id="9" name="TextBox 8"/>
-          <p:cNvSpPr txBox="1"/>
-          <p:nvPr/>
-        </p:nvSpPr>
-        <p:spPr>
-          <a:xfrm>
-            <a:off x="896112" y="1965960"/>
-            <a:ext cx="4023360" cy="3840480"/>
-          </a:xfrm>
-          <a:prstGeom prst="rect">
-            <a:avLst/>
-          </a:prstGeom>
-          <a:noFill/>
-        </p:spPr>
-        <p:txBody>
-          <a:bodyPr wrap="square">
-            <a:spAutoFit/>
-          </a:bodyPr>
-          <a:lstStyle/>
-          <a:p>
-            <a:pPr>
-              <a:spcAft>
-                <a:spcPts val="1000"/>
-              </a:spcAft>
-              <a:defRPr sz="1800">
-                <a:solidFill>
-                  <a:srgbClr val="232D37"/>
-                </a:solidFill>
-                <a:latin typeface="Aptos"/>
-              </a:defRPr>
-            </a:pPr>
-            <a:r>
-              <a:t>Example: 25 °C but high humidity can still feel sticky.</a:t>
-            </a:r>
-          </a:p>
-          <a:p>
-            <a:pPr>
-              <a:spcAft>
-                <a:spcPts val="1000"/>
-              </a:spcAft>
-              <a:defRPr sz="1800">
-                <a:solidFill>
-                  <a:srgbClr val="232D37"/>
-                </a:solidFill>
-                <a:latin typeface="Aptos"/>
-              </a:defRPr>
-            </a:pPr>
-            <a:r>
-              <a:t>Example: poor ventilation can allow CO₂ or VOCs to accumulate.</a:t>
-            </a:r>
-          </a:p>
-        </p:txBody>
-      </p:sp>
-      <p:sp>
-        <p:nvSpPr>
-          <p:cNvPr id="10" name="Rectangle 9"/>
+            <a:endParaRPr/>
+          </a:p>
+        </p:txBody>
+      </p:sp>
+      <p:pic>
+        <p:nvPicPr>
+          <p:cNvPr id="11" name="Picture 10" descr="fig_05_air_processing_en.png"/>
+          <p:cNvPicPr>
+            <a:picLocks noChangeAspect="1"/>
+          </p:cNvPicPr>
+          <p:nvPr/>
+        </p:nvPicPr>
+        <p:blipFill>
+          <a:blip r:embed="rId2"/>
+          <a:stretch>
+            <a:fillRect/>
+          </a:stretch>
+        </p:blipFill>
+        <p:spPr>
+          <a:xfrm>
+            <a:off x="5888082" y="1874519"/>
+            <a:ext cx="5231674" cy="4069080"/>
+          </a:xfrm>
+          <a:prstGeom prst="rect">
+            <a:avLst/>
+          </a:prstGeom>
+        </p:spPr>
+      </p:pic>
+      <p:sp>
+        <p:nvSpPr>
+          <p:cNvPr id="12" name="Rounded Rectangle 11"/>
           <p:cNvSpPr/>
           <p:nvPr/>
         </p:nvSpPr>
         <p:spPr>
           <a:xfrm>
-            <a:off x="5440680" y="1691640"/>
-            <a:ext cx="6126480" cy="4434840"/>
-          </a:xfrm>
-          <a:prstGeom prst="rect">
+            <a:off x="621792" y="1664208"/>
+            <a:ext cx="4590288" cy="4443984"/>
+          </a:xfrm>
+          <a:prstGeom prst="roundRect">
             <a:avLst/>
           </a:prstGeom>
           <a:solidFill>
@@ -9501,30 +11443,690 @@
           </a:p>
         </p:txBody>
       </p:sp>
-      <p:pic>
-        <p:nvPicPr>
-          <p:cNvPr id="11" name="Picture 10" descr="fig_05_air_processing_en.png"/>
-          <p:cNvPicPr>
-            <a:picLocks noChangeAspect="1"/>
-          </p:cNvPicPr>
-          <p:nvPr/>
-        </p:nvPicPr>
-        <p:blipFill>
-          <a:blip r:embed="rId2"/>
-          <a:stretch>
-            <a:fillRect/>
-          </a:stretch>
-        </p:blipFill>
-        <p:spPr>
-          <a:xfrm>
-            <a:off x="5888082" y="1874519"/>
-            <a:ext cx="5231674" cy="4069080"/>
-          </a:xfrm>
-          <a:prstGeom prst="rect">
-            <a:avLst/>
-          </a:prstGeom>
-        </p:spPr>
-      </p:pic>
+      <p:sp>
+        <p:nvSpPr>
+          <p:cNvPr id="13" name="Rectangle 12"/>
+          <p:cNvSpPr/>
+          <p:nvPr/>
+        </p:nvSpPr>
+        <p:spPr>
+          <a:xfrm>
+            <a:off x="621792" y="1664208"/>
+            <a:ext cx="109728" cy="4443984"/>
+          </a:xfrm>
+          <a:prstGeom prst="rect">
+            <a:avLst/>
+          </a:prstGeom>
+          <a:solidFill>
+            <a:srgbClr val="2A9D8F"/>
+          </a:solidFill>
+          <a:ln>
+            <a:noFill/>
+          </a:ln>
+        </p:spPr>
+        <p:style>
+          <a:lnRef idx="1">
+            <a:schemeClr val="accent1"/>
+          </a:lnRef>
+          <a:fillRef idx="3">
+            <a:schemeClr val="accent1"/>
+          </a:fillRef>
+          <a:effectRef idx="2">
+            <a:schemeClr val="accent1"/>
+          </a:effectRef>
+          <a:fontRef idx="minor">
+            <a:schemeClr val="lt1"/>
+          </a:fontRef>
+        </p:style>
+        <p:txBody>
+          <a:bodyPr rtlCol="0" anchor="ctr"/>
+          <a:lstStyle/>
+          <a:p>
+            <a:pPr algn="ctr"/>
+          </a:p>
+        </p:txBody>
+      </p:sp>
+      <p:sp>
+        <p:nvSpPr>
+          <p:cNvPr id="14" name="TextBox 13"/>
+          <p:cNvSpPr txBox="1"/>
+          <p:nvPr/>
+        </p:nvSpPr>
+        <p:spPr>
+          <a:xfrm>
+            <a:off x="896112" y="1892807"/>
+            <a:ext cx="3886200" cy="210312"/>
+          </a:xfrm>
+          <a:prstGeom prst="rect">
+            <a:avLst/>
+          </a:prstGeom>
+          <a:noFill/>
+        </p:spPr>
+        <p:txBody>
+          <a:bodyPr wrap="square" lIns="27432" rIns="27432" tIns="9144" bIns="9144">
+            <a:noAutofit/>
+          </a:bodyPr>
+          <a:lstStyle/>
+          <a:p>
+            <a:r>
+              <a:rPr sz="950" b="1" i="0">
+                <a:solidFill>
+                  <a:srgbClr val="2A9D8F"/>
+                </a:solidFill>
+                <a:latin typeface="Aptos Display"/>
+              </a:rPr>
+              <a:t>WHY IT MATTERS</a:t>
+            </a:r>
+          </a:p>
+        </p:txBody>
+      </p:sp>
+      <p:sp>
+        <p:nvSpPr>
+          <p:cNvPr id="15" name="TextBox 14"/>
+          <p:cNvSpPr txBox="1"/>
+          <p:nvPr/>
+        </p:nvSpPr>
+        <p:spPr>
+          <a:xfrm>
+            <a:off x="896112" y="2139696"/>
+            <a:ext cx="3886200" cy="603504"/>
+          </a:xfrm>
+          <a:prstGeom prst="rect">
+            <a:avLst/>
+          </a:prstGeom>
+          <a:noFill/>
+        </p:spPr>
+        <p:txBody>
+          <a:bodyPr wrap="square" lIns="27432" rIns="27432" tIns="9144" bIns="9144">
+            <a:noAutofit/>
+          </a:bodyPr>
+          <a:lstStyle/>
+          <a:p>
+            <a:r>
+              <a:rPr sz="2100" b="1" i="0">
+                <a:solidFill>
+                  <a:srgbClr val="11374B"/>
+                </a:solidFill>
+                <a:latin typeface="Aptos Display"/>
+              </a:rPr>
+              <a:t>One weak control can ruin comfort</a:t>
+            </a:r>
+          </a:p>
+        </p:txBody>
+      </p:sp>
+      <p:sp>
+        <p:nvSpPr>
+          <p:cNvPr id="16" name="Rounded Rectangle 15"/>
+          <p:cNvSpPr/>
+          <p:nvPr/>
+        </p:nvSpPr>
+        <p:spPr>
+          <a:xfrm>
+            <a:off x="896112" y="2926080"/>
+            <a:ext cx="3913632" cy="786384"/>
+          </a:xfrm>
+          <a:prstGeom prst="roundRect">
+            <a:avLst/>
+          </a:prstGeom>
+          <a:solidFill>
+            <a:srgbClr val="EBF4FA"/>
+          </a:solidFill>
+          <a:ln w="12700">
+            <a:solidFill>
+              <a:srgbClr val="E6EBF0"/>
+            </a:solidFill>
+          </a:ln>
+        </p:spPr>
+        <p:style>
+          <a:lnRef idx="1">
+            <a:schemeClr val="accent1"/>
+          </a:lnRef>
+          <a:fillRef idx="3">
+            <a:schemeClr val="accent1"/>
+          </a:fillRef>
+          <a:effectRef idx="2">
+            <a:schemeClr val="accent1"/>
+          </a:effectRef>
+          <a:fontRef idx="minor">
+            <a:schemeClr val="lt1"/>
+          </a:fontRef>
+        </p:style>
+        <p:txBody>
+          <a:bodyPr rtlCol="0" anchor="ctr"/>
+          <a:lstStyle/>
+          <a:p>
+            <a:pPr algn="ctr"/>
+          </a:p>
+        </p:txBody>
+      </p:sp>
+      <p:sp>
+        <p:nvSpPr>
+          <p:cNvPr id="17" name="Oval 16"/>
+          <p:cNvSpPr/>
+          <p:nvPr/>
+        </p:nvSpPr>
+        <p:spPr>
+          <a:xfrm>
+            <a:off x="1060704" y="3090672"/>
+            <a:ext cx="384048" cy="384048"/>
+          </a:xfrm>
+          <a:prstGeom prst="ellipse">
+            <a:avLst/>
+          </a:prstGeom>
+          <a:solidFill>
+            <a:srgbClr val="457B9D"/>
+          </a:solidFill>
+          <a:ln>
+            <a:noFill/>
+          </a:ln>
+        </p:spPr>
+        <p:style>
+          <a:lnRef idx="1">
+            <a:schemeClr val="accent1"/>
+          </a:lnRef>
+          <a:fillRef idx="3">
+            <a:schemeClr val="accent1"/>
+          </a:fillRef>
+          <a:effectRef idx="2">
+            <a:schemeClr val="accent1"/>
+          </a:effectRef>
+          <a:fontRef idx="minor">
+            <a:schemeClr val="lt1"/>
+          </a:fontRef>
+        </p:style>
+        <p:txBody>
+          <a:bodyPr rtlCol="0" anchor="ctr"/>
+          <a:lstStyle/>
+          <a:p>
+            <a:pPr algn="ctr"/>
+          </a:p>
+        </p:txBody>
+      </p:sp>
+      <p:sp>
+        <p:nvSpPr>
+          <p:cNvPr id="18" name="TextBox 17"/>
+          <p:cNvSpPr txBox="1"/>
+          <p:nvPr/>
+        </p:nvSpPr>
+        <p:spPr>
+          <a:xfrm>
+            <a:off x="1060704" y="3182112"/>
+            <a:ext cx="384048" cy="109728"/>
+          </a:xfrm>
+          <a:prstGeom prst="rect">
+            <a:avLst/>
+          </a:prstGeom>
+          <a:noFill/>
+        </p:spPr>
+        <p:txBody>
+          <a:bodyPr wrap="square" lIns="27432" rIns="27432" tIns="9144" bIns="9144">
+            <a:noAutofit/>
+          </a:bodyPr>
+          <a:lstStyle/>
+          <a:p>
+            <a:pPr algn="ctr"/>
+            <a:r>
+              <a:rPr sz="850" b="1" i="0">
+                <a:solidFill>
+                  <a:srgbClr val="FFFFFF"/>
+                </a:solidFill>
+                <a:latin typeface="Aptos Display"/>
+              </a:rPr>
+              <a:t>1</a:t>
+            </a:r>
+          </a:p>
+        </p:txBody>
+      </p:sp>
+      <p:sp>
+        <p:nvSpPr>
+          <p:cNvPr id="19" name="TextBox 18"/>
+          <p:cNvSpPr txBox="1"/>
+          <p:nvPr/>
+        </p:nvSpPr>
+        <p:spPr>
+          <a:xfrm>
+            <a:off x="1600200" y="3054096"/>
+            <a:ext cx="2834640" cy="201168"/>
+          </a:xfrm>
+          <a:prstGeom prst="rect">
+            <a:avLst/>
+          </a:prstGeom>
+          <a:noFill/>
+        </p:spPr>
+        <p:txBody>
+          <a:bodyPr wrap="square" lIns="27432" rIns="27432" tIns="9144" bIns="9144">
+            <a:noAutofit/>
+          </a:bodyPr>
+          <a:lstStyle/>
+          <a:p>
+            <a:r>
+              <a:rPr sz="1350" b="1" i="0">
+                <a:solidFill>
+                  <a:srgbClr val="232D37"/>
+                </a:solidFill>
+                <a:latin typeface="Aptos Display"/>
+              </a:rPr>
+              <a:t>Sticky at 25 °C</a:t>
+            </a:r>
+          </a:p>
+        </p:txBody>
+      </p:sp>
+      <p:sp>
+        <p:nvSpPr>
+          <p:cNvPr id="20" name="TextBox 19"/>
+          <p:cNvSpPr txBox="1"/>
+          <p:nvPr/>
+        </p:nvSpPr>
+        <p:spPr>
+          <a:xfrm>
+            <a:off x="1600200" y="3319272"/>
+            <a:ext cx="2971800" cy="237744"/>
+          </a:xfrm>
+          <a:prstGeom prst="rect">
+            <a:avLst/>
+          </a:prstGeom>
+          <a:noFill/>
+        </p:spPr>
+        <p:txBody>
+          <a:bodyPr wrap="square" lIns="27432" rIns="27432" tIns="9144" bIns="9144">
+            <a:noAutofit/>
+          </a:bodyPr>
+          <a:lstStyle/>
+          <a:p>
+            <a:r>
+              <a:rPr sz="980" b="0" i="0">
+                <a:solidFill>
+                  <a:srgbClr val="5A6973"/>
+                </a:solidFill>
+                <a:latin typeface="Aptos"/>
+              </a:rPr>
+              <a:t>humidity is still too high</a:t>
+            </a:r>
+          </a:p>
+        </p:txBody>
+      </p:sp>
+      <p:sp>
+        <p:nvSpPr>
+          <p:cNvPr id="21" name="Rounded Rectangle 20"/>
+          <p:cNvSpPr/>
+          <p:nvPr/>
+        </p:nvSpPr>
+        <p:spPr>
+          <a:xfrm>
+            <a:off x="896112" y="3858768"/>
+            <a:ext cx="3913632" cy="786384"/>
+          </a:xfrm>
+          <a:prstGeom prst="roundRect">
+            <a:avLst/>
+          </a:prstGeom>
+          <a:solidFill>
+            <a:srgbClr val="E6F4F7"/>
+          </a:solidFill>
+          <a:ln w="12700">
+            <a:solidFill>
+              <a:srgbClr val="E6EBF0"/>
+            </a:solidFill>
+          </a:ln>
+        </p:spPr>
+        <p:style>
+          <a:lnRef idx="1">
+            <a:schemeClr val="accent1"/>
+          </a:lnRef>
+          <a:fillRef idx="3">
+            <a:schemeClr val="accent1"/>
+          </a:fillRef>
+          <a:effectRef idx="2">
+            <a:schemeClr val="accent1"/>
+          </a:effectRef>
+          <a:fontRef idx="minor">
+            <a:schemeClr val="lt1"/>
+          </a:fontRef>
+        </p:style>
+        <p:txBody>
+          <a:bodyPr rtlCol="0" anchor="ctr"/>
+          <a:lstStyle/>
+          <a:p>
+            <a:pPr algn="ctr"/>
+          </a:p>
+        </p:txBody>
+      </p:sp>
+      <p:sp>
+        <p:nvSpPr>
+          <p:cNvPr id="22" name="Oval 21"/>
+          <p:cNvSpPr/>
+          <p:nvPr/>
+        </p:nvSpPr>
+        <p:spPr>
+          <a:xfrm>
+            <a:off x="1060704" y="4023360"/>
+            <a:ext cx="384048" cy="384048"/>
+          </a:xfrm>
+          <a:prstGeom prst="ellipse">
+            <a:avLst/>
+          </a:prstGeom>
+          <a:solidFill>
+            <a:srgbClr val="2A9D8F"/>
+          </a:solidFill>
+          <a:ln>
+            <a:noFill/>
+          </a:ln>
+        </p:spPr>
+        <p:style>
+          <a:lnRef idx="1">
+            <a:schemeClr val="accent1"/>
+          </a:lnRef>
+          <a:fillRef idx="3">
+            <a:schemeClr val="accent1"/>
+          </a:fillRef>
+          <a:effectRef idx="2">
+            <a:schemeClr val="accent1"/>
+          </a:effectRef>
+          <a:fontRef idx="minor">
+            <a:schemeClr val="lt1"/>
+          </a:fontRef>
+        </p:style>
+        <p:txBody>
+          <a:bodyPr rtlCol="0" anchor="ctr"/>
+          <a:lstStyle/>
+          <a:p>
+            <a:pPr algn="ctr"/>
+          </a:p>
+        </p:txBody>
+      </p:sp>
+      <p:sp>
+        <p:nvSpPr>
+          <p:cNvPr id="23" name="TextBox 22"/>
+          <p:cNvSpPr txBox="1"/>
+          <p:nvPr/>
+        </p:nvSpPr>
+        <p:spPr>
+          <a:xfrm>
+            <a:off x="1060704" y="4114800"/>
+            <a:ext cx="384048" cy="109728"/>
+          </a:xfrm>
+          <a:prstGeom prst="rect">
+            <a:avLst/>
+          </a:prstGeom>
+          <a:noFill/>
+        </p:spPr>
+        <p:txBody>
+          <a:bodyPr wrap="square" lIns="27432" rIns="27432" tIns="9144" bIns="9144">
+            <a:noAutofit/>
+          </a:bodyPr>
+          <a:lstStyle/>
+          <a:p>
+            <a:pPr algn="ctr"/>
+            <a:r>
+              <a:rPr sz="850" b="1" i="0">
+                <a:solidFill>
+                  <a:srgbClr val="FFFFFF"/>
+                </a:solidFill>
+                <a:latin typeface="Aptos Display"/>
+              </a:rPr>
+              <a:t>2</a:t>
+            </a:r>
+          </a:p>
+        </p:txBody>
+      </p:sp>
+      <p:sp>
+        <p:nvSpPr>
+          <p:cNvPr id="24" name="TextBox 23"/>
+          <p:cNvSpPr txBox="1"/>
+          <p:nvPr/>
+        </p:nvSpPr>
+        <p:spPr>
+          <a:xfrm>
+            <a:off x="1600200" y="3986784"/>
+            <a:ext cx="2834640" cy="201168"/>
+          </a:xfrm>
+          <a:prstGeom prst="rect">
+            <a:avLst/>
+          </a:prstGeom>
+          <a:noFill/>
+        </p:spPr>
+        <p:txBody>
+          <a:bodyPr wrap="square" lIns="27432" rIns="27432" tIns="9144" bIns="9144">
+            <a:noAutofit/>
+          </a:bodyPr>
+          <a:lstStyle/>
+          <a:p>
+            <a:r>
+              <a:rPr sz="1350" b="1" i="0">
+                <a:solidFill>
+                  <a:srgbClr val="232D37"/>
+                </a:solidFill>
+                <a:latin typeface="Aptos Display"/>
+              </a:rPr>
+              <a:t>Stale or smelly air</a:t>
+            </a:r>
+          </a:p>
+        </p:txBody>
+      </p:sp>
+      <p:sp>
+        <p:nvSpPr>
+          <p:cNvPr id="25" name="TextBox 24"/>
+          <p:cNvSpPr txBox="1"/>
+          <p:nvPr/>
+        </p:nvSpPr>
+        <p:spPr>
+          <a:xfrm>
+            <a:off x="1600200" y="4251960"/>
+            <a:ext cx="2971800" cy="237744"/>
+          </a:xfrm>
+          <a:prstGeom prst="rect">
+            <a:avLst/>
+          </a:prstGeom>
+          <a:noFill/>
+        </p:spPr>
+        <p:txBody>
+          <a:bodyPr wrap="square" lIns="27432" rIns="27432" tIns="9144" bIns="9144">
+            <a:noAutofit/>
+          </a:bodyPr>
+          <a:lstStyle/>
+          <a:p>
+            <a:r>
+              <a:rPr sz="980" b="0" i="0">
+                <a:solidFill>
+                  <a:srgbClr val="5A6973"/>
+                </a:solidFill>
+                <a:latin typeface="Aptos"/>
+              </a:rPr>
+              <a:t>ventilation/cleanliness is weak</a:t>
+            </a:r>
+          </a:p>
+        </p:txBody>
+      </p:sp>
+      <p:sp>
+        <p:nvSpPr>
+          <p:cNvPr id="26" name="Rounded Rectangle 25"/>
+          <p:cNvSpPr/>
+          <p:nvPr/>
+        </p:nvSpPr>
+        <p:spPr>
+          <a:xfrm>
+            <a:off x="896112" y="4791456"/>
+            <a:ext cx="3913632" cy="786384"/>
+          </a:xfrm>
+          <a:prstGeom prst="roundRect">
+            <a:avLst/>
+          </a:prstGeom>
+          <a:solidFill>
+            <a:srgbClr val="FFF1E8"/>
+          </a:solidFill>
+          <a:ln w="12700">
+            <a:solidFill>
+              <a:srgbClr val="E6EBF0"/>
+            </a:solidFill>
+          </a:ln>
+        </p:spPr>
+        <p:style>
+          <a:lnRef idx="1">
+            <a:schemeClr val="accent1"/>
+          </a:lnRef>
+          <a:fillRef idx="3">
+            <a:schemeClr val="accent1"/>
+          </a:fillRef>
+          <a:effectRef idx="2">
+            <a:schemeClr val="accent1"/>
+          </a:effectRef>
+          <a:fontRef idx="minor">
+            <a:schemeClr val="lt1"/>
+          </a:fontRef>
+        </p:style>
+        <p:txBody>
+          <a:bodyPr rtlCol="0" anchor="ctr"/>
+          <a:lstStyle/>
+          <a:p>
+            <a:pPr algn="ctr"/>
+          </a:p>
+        </p:txBody>
+      </p:sp>
+      <p:sp>
+        <p:nvSpPr>
+          <p:cNvPr id="27" name="Oval 26"/>
+          <p:cNvSpPr/>
+          <p:nvPr/>
+        </p:nvSpPr>
+        <p:spPr>
+          <a:xfrm>
+            <a:off x="1060704" y="4956048"/>
+            <a:ext cx="384048" cy="384048"/>
+          </a:xfrm>
+          <a:prstGeom prst="ellipse">
+            <a:avLst/>
+          </a:prstGeom>
+          <a:solidFill>
+            <a:srgbClr val="E76F51"/>
+          </a:solidFill>
+          <a:ln>
+            <a:noFill/>
+          </a:ln>
+        </p:spPr>
+        <p:style>
+          <a:lnRef idx="1">
+            <a:schemeClr val="accent1"/>
+          </a:lnRef>
+          <a:fillRef idx="3">
+            <a:schemeClr val="accent1"/>
+          </a:fillRef>
+          <a:effectRef idx="2">
+            <a:schemeClr val="accent1"/>
+          </a:effectRef>
+          <a:fontRef idx="minor">
+            <a:schemeClr val="lt1"/>
+          </a:fontRef>
+        </p:style>
+        <p:txBody>
+          <a:bodyPr rtlCol="0" anchor="ctr"/>
+          <a:lstStyle/>
+          <a:p>
+            <a:pPr algn="ctr"/>
+          </a:p>
+        </p:txBody>
+      </p:sp>
+      <p:sp>
+        <p:nvSpPr>
+          <p:cNvPr id="28" name="TextBox 27"/>
+          <p:cNvSpPr txBox="1"/>
+          <p:nvPr/>
+        </p:nvSpPr>
+        <p:spPr>
+          <a:xfrm>
+            <a:off x="1060704" y="5047488"/>
+            <a:ext cx="384048" cy="109728"/>
+          </a:xfrm>
+          <a:prstGeom prst="rect">
+            <a:avLst/>
+          </a:prstGeom>
+          <a:noFill/>
+        </p:spPr>
+        <p:txBody>
+          <a:bodyPr wrap="square" lIns="27432" rIns="27432" tIns="9144" bIns="9144">
+            <a:noAutofit/>
+          </a:bodyPr>
+          <a:lstStyle/>
+          <a:p>
+            <a:pPr algn="ctr"/>
+            <a:r>
+              <a:rPr sz="850" b="1" i="0">
+                <a:solidFill>
+                  <a:srgbClr val="FFFFFF"/>
+                </a:solidFill>
+                <a:latin typeface="Aptos Display"/>
+              </a:rPr>
+              <a:t>3</a:t>
+            </a:r>
+          </a:p>
+        </p:txBody>
+      </p:sp>
+      <p:sp>
+        <p:nvSpPr>
+          <p:cNvPr id="29" name="TextBox 28"/>
+          <p:cNvSpPr txBox="1"/>
+          <p:nvPr/>
+        </p:nvSpPr>
+        <p:spPr>
+          <a:xfrm>
+            <a:off x="1600200" y="4919472"/>
+            <a:ext cx="2834640" cy="201168"/>
+          </a:xfrm>
+          <a:prstGeom prst="rect">
+            <a:avLst/>
+          </a:prstGeom>
+          <a:noFill/>
+        </p:spPr>
+        <p:txBody>
+          <a:bodyPr wrap="square" lIns="27432" rIns="27432" tIns="9144" bIns="9144">
+            <a:noAutofit/>
+          </a:bodyPr>
+          <a:lstStyle/>
+          <a:p>
+            <a:r>
+              <a:rPr sz="1350" b="1" i="0">
+                <a:solidFill>
+                  <a:srgbClr val="232D37"/>
+                </a:solidFill>
+                <a:latin typeface="Aptos Display"/>
+              </a:rPr>
+              <a:t>Uneven room comfort</a:t>
+            </a:r>
+          </a:p>
+        </p:txBody>
+      </p:sp>
+      <p:sp>
+        <p:nvSpPr>
+          <p:cNvPr id="30" name="TextBox 29"/>
+          <p:cNvSpPr txBox="1"/>
+          <p:nvPr/>
+        </p:nvSpPr>
+        <p:spPr>
+          <a:xfrm>
+            <a:off x="1600200" y="5184648"/>
+            <a:ext cx="2971800" cy="237744"/>
+          </a:xfrm>
+          <a:prstGeom prst="rect">
+            <a:avLst/>
+          </a:prstGeom>
+          <a:noFill/>
+        </p:spPr>
+        <p:txBody>
+          <a:bodyPr wrap="square" lIns="27432" rIns="27432" tIns="9144" bIns="9144">
+            <a:noAutofit/>
+          </a:bodyPr>
+          <a:lstStyle/>
+          <a:p>
+            <a:r>
+              <a:rPr sz="980" b="0" i="0">
+                <a:solidFill>
+                  <a:srgbClr val="5A6973"/>
+                </a:solidFill>
+                <a:latin typeface="Aptos"/>
+              </a:rPr>
+              <a:t>poor air distribution</a:t>
+            </a:r>
+          </a:p>
+        </p:txBody>
+      </p:sp>
     </p:spTree>
   </p:cSld>
   <p:clrMapOvr>
@@ -9534,7 +12136,7 @@
 </file>
 
 <file path=ppt/slides/slide5.xml><?xml version="1.0" encoding="utf-8"?>
-<p:sld xmlns:a="http://schemas.openxmlformats.org/drawingml/2006/main" xmlns:p="http://schemas.openxmlformats.org/presentationml/2006/main" xmlns:r="http://schemas.openxmlformats.org/officeDocument/2006/relationships">
+<p:sld xmlns:a="http://schemas.openxmlformats.org/drawingml/2006/main" xmlns:r="http://schemas.openxmlformats.org/officeDocument/2006/relationships" xmlns:p="http://schemas.openxmlformats.org/presentationml/2006/main">
   <p:cSld>
     <p:bg>
       <p:bgPr>
@@ -9550,7 +12152,14 @@
         <p:cNvGrpSpPr/>
         <p:nvPr/>
       </p:nvGrpSpPr>
-      <p:grpSpPr/>
+      <p:grpSpPr>
+        <a:xfrm>
+          <a:off x="0" y="0"/>
+          <a:ext cx="0" cy="0"/>
+          <a:chOff x="0" y="0"/>
+          <a:chExt cx="0" cy="0"/>
+        </a:xfrm>
+      </p:grpSpPr>
       <p:sp>
         <p:nvSpPr>
           <p:cNvPr id="2" name="Rectangle 1"/>
@@ -9591,6 +12200,7 @@
           <a:lstStyle/>
           <a:p>
             <a:pPr algn="ctr"/>
+            <a:endParaRPr/>
           </a:p>
         </p:txBody>
       </p:sp>
@@ -9768,14 +12378,14 @@
       </p:sp>
       <p:sp>
         <p:nvSpPr>
-          <p:cNvPr id="8" name="Rectangle 7"/>
+          <p:cNvPr id="10" name="Rectangle 9"/>
           <p:cNvSpPr/>
           <p:nvPr/>
         </p:nvSpPr>
         <p:spPr>
           <a:xfrm>
-            <a:off x="621792" y="1691640"/>
-            <a:ext cx="4572000" cy="4434840"/>
+            <a:off x="5440680" y="1691640"/>
+            <a:ext cx="6126480" cy="4434840"/>
           </a:xfrm>
           <a:prstGeom prst="rect">
             <a:avLst/>
@@ -9808,76 +12418,46 @@
           <a:lstStyle/>
           <a:p>
             <a:pPr algn="ctr"/>
-          </a:p>
-        </p:txBody>
-      </p:sp>
-      <p:sp>
-        <p:nvSpPr>
-          <p:cNvPr id="9" name="TextBox 8"/>
-          <p:cNvSpPr txBox="1"/>
-          <p:nvPr/>
-        </p:nvSpPr>
-        <p:spPr>
-          <a:xfrm>
-            <a:off x="896112" y="1965960"/>
-            <a:ext cx="4023360" cy="3840480"/>
-          </a:xfrm>
-          <a:prstGeom prst="rect">
-            <a:avLst/>
-          </a:prstGeom>
-          <a:noFill/>
-        </p:spPr>
-        <p:txBody>
-          <a:bodyPr wrap="square">
-            <a:spAutoFit/>
-          </a:bodyPr>
-          <a:lstStyle/>
-          <a:p>
-            <a:pPr>
-              <a:spcAft>
-                <a:spcPts val="1000"/>
-              </a:spcAft>
-              <a:defRPr sz="1800">
-                <a:solidFill>
-                  <a:srgbClr val="232D37"/>
-                </a:solidFill>
-                <a:latin typeface="Aptos"/>
-              </a:defRPr>
-            </a:pPr>
-            <a:r>
-              <a:t>Comfort AC: human thermal comfort</a:t>
-            </a:r>
-          </a:p>
-          <a:p>
-            <a:pPr>
-              <a:spcAft>
-                <a:spcPts val="1000"/>
-              </a:spcAft>
-              <a:defRPr sz="1800">
-                <a:solidFill>
-                  <a:srgbClr val="232D37"/>
-                </a:solidFill>
-                <a:latin typeface="Aptos"/>
-              </a:defRPr>
-            </a:pPr>
-            <a:r>
-              <a:t>Process AC: product, material, or process requirement</a:t>
-            </a:r>
-          </a:p>
-        </p:txBody>
-      </p:sp>
-      <p:sp>
-        <p:nvSpPr>
-          <p:cNvPr id="10" name="Rectangle 9"/>
+            <a:endParaRPr/>
+          </a:p>
+        </p:txBody>
+      </p:sp>
+      <p:pic>
+        <p:nvPicPr>
+          <p:cNvPr id="11" name="Picture 10" descr="fig_06_classification_en.png"/>
+          <p:cNvPicPr>
+            <a:picLocks noChangeAspect="1"/>
+          </p:cNvPicPr>
+          <p:nvPr/>
+        </p:nvPicPr>
+        <p:blipFill>
+          <a:blip r:embed="rId2"/>
+          <a:stretch>
+            <a:fillRect/>
+          </a:stretch>
+        </p:blipFill>
+        <p:spPr>
+          <a:xfrm>
+            <a:off x="5623560" y="2180844"/>
+            <a:ext cx="5760720" cy="3456432"/>
+          </a:xfrm>
+          <a:prstGeom prst="rect">
+            <a:avLst/>
+          </a:prstGeom>
+        </p:spPr>
+      </p:pic>
+      <p:sp>
+        <p:nvSpPr>
+          <p:cNvPr id="12" name="Rounded Rectangle 11"/>
           <p:cNvSpPr/>
           <p:nvPr/>
         </p:nvSpPr>
         <p:spPr>
           <a:xfrm>
-            <a:off x="5440680" y="1691640"/>
-            <a:ext cx="6126480" cy="4434840"/>
-          </a:xfrm>
-          <a:prstGeom prst="rect">
+            <a:off x="621792" y="1664208"/>
+            <a:ext cx="4590288" cy="4443984"/>
+          </a:xfrm>
+          <a:prstGeom prst="roundRect">
             <a:avLst/>
           </a:prstGeom>
           <a:solidFill>
@@ -9911,30 +12491,499 @@
           </a:p>
         </p:txBody>
       </p:sp>
-      <p:pic>
-        <p:nvPicPr>
-          <p:cNvPr id="11" name="Picture 10" descr="fig_06_classification_en.png"/>
-          <p:cNvPicPr>
-            <a:picLocks noChangeAspect="1"/>
-          </p:cNvPicPr>
-          <p:nvPr/>
-        </p:nvPicPr>
-        <p:blipFill>
-          <a:blip r:embed="rId2"/>
-          <a:stretch>
-            <a:fillRect/>
-          </a:stretch>
-        </p:blipFill>
-        <p:spPr>
-          <a:xfrm>
-            <a:off x="5623560" y="2180844"/>
-            <a:ext cx="5760720" cy="3456432"/>
-          </a:xfrm>
-          <a:prstGeom prst="rect">
-            <a:avLst/>
-          </a:prstGeom>
-        </p:spPr>
-      </p:pic>
+      <p:sp>
+        <p:nvSpPr>
+          <p:cNvPr id="13" name="Rectangle 12"/>
+          <p:cNvSpPr/>
+          <p:nvPr/>
+        </p:nvSpPr>
+        <p:spPr>
+          <a:xfrm>
+            <a:off x="621792" y="1664208"/>
+            <a:ext cx="109728" cy="4443984"/>
+          </a:xfrm>
+          <a:prstGeom prst="rect">
+            <a:avLst/>
+          </a:prstGeom>
+          <a:solidFill>
+            <a:srgbClr val="2A9D8F"/>
+          </a:solidFill>
+          <a:ln>
+            <a:noFill/>
+          </a:ln>
+        </p:spPr>
+        <p:style>
+          <a:lnRef idx="1">
+            <a:schemeClr val="accent1"/>
+          </a:lnRef>
+          <a:fillRef idx="3">
+            <a:schemeClr val="accent1"/>
+          </a:fillRef>
+          <a:effectRef idx="2">
+            <a:schemeClr val="accent1"/>
+          </a:effectRef>
+          <a:fontRef idx="minor">
+            <a:schemeClr val="lt1"/>
+          </a:fontRef>
+        </p:style>
+        <p:txBody>
+          <a:bodyPr rtlCol="0" anchor="ctr"/>
+          <a:lstStyle/>
+          <a:p>
+            <a:pPr algn="ctr"/>
+          </a:p>
+        </p:txBody>
+      </p:sp>
+      <p:sp>
+        <p:nvSpPr>
+          <p:cNvPr id="14" name="TextBox 13"/>
+          <p:cNvSpPr txBox="1"/>
+          <p:nvPr/>
+        </p:nvSpPr>
+        <p:spPr>
+          <a:xfrm>
+            <a:off x="896112" y="1892807"/>
+            <a:ext cx="3886200" cy="210312"/>
+          </a:xfrm>
+          <a:prstGeom prst="rect">
+            <a:avLst/>
+          </a:prstGeom>
+          <a:noFill/>
+        </p:spPr>
+        <p:txBody>
+          <a:bodyPr wrap="square" lIns="27432" rIns="27432" tIns="9144" bIns="9144">
+            <a:noAutofit/>
+          </a:bodyPr>
+          <a:lstStyle/>
+          <a:p>
+            <a:r>
+              <a:rPr sz="950" b="1" i="0">
+                <a:solidFill>
+                  <a:srgbClr val="2A9D8F"/>
+                </a:solidFill>
+                <a:latin typeface="Aptos Display"/>
+              </a:rPr>
+              <a:t>DESIGN TARGET</a:t>
+            </a:r>
+          </a:p>
+        </p:txBody>
+      </p:sp>
+      <p:sp>
+        <p:nvSpPr>
+          <p:cNvPr id="15" name="TextBox 14"/>
+          <p:cNvSpPr txBox="1"/>
+          <p:nvPr/>
+        </p:nvSpPr>
+        <p:spPr>
+          <a:xfrm>
+            <a:off x="896112" y="2139696"/>
+            <a:ext cx="3886200" cy="603504"/>
+          </a:xfrm>
+          <a:prstGeom prst="rect">
+            <a:avLst/>
+          </a:prstGeom>
+          <a:noFill/>
+        </p:spPr>
+        <p:txBody>
+          <a:bodyPr wrap="square" lIns="27432" rIns="27432" tIns="9144" bIns="9144">
+            <a:noAutofit/>
+          </a:bodyPr>
+          <a:lstStyle/>
+          <a:p>
+            <a:r>
+              <a:rPr sz="2100" b="1" i="0">
+                <a:solidFill>
+                  <a:srgbClr val="11374B"/>
+                </a:solidFill>
+                <a:latin typeface="Aptos Display"/>
+              </a:rPr>
+              <a:t>Purpose changes the setpoint</a:t>
+            </a:r>
+          </a:p>
+        </p:txBody>
+      </p:sp>
+      <p:sp>
+        <p:nvSpPr>
+          <p:cNvPr id="16" name="Rounded Rectangle 15"/>
+          <p:cNvSpPr/>
+          <p:nvPr/>
+        </p:nvSpPr>
+        <p:spPr>
+          <a:xfrm>
+            <a:off x="896112" y="2926080"/>
+            <a:ext cx="3913632" cy="786384"/>
+          </a:xfrm>
+          <a:prstGeom prst="roundRect">
+            <a:avLst/>
+          </a:prstGeom>
+          <a:solidFill>
+            <a:srgbClr val="E6F4F7"/>
+          </a:solidFill>
+          <a:ln w="12700">
+            <a:solidFill>
+              <a:srgbClr val="E6EBF0"/>
+            </a:solidFill>
+          </a:ln>
+        </p:spPr>
+        <p:style>
+          <a:lnRef idx="1">
+            <a:schemeClr val="accent1"/>
+          </a:lnRef>
+          <a:fillRef idx="3">
+            <a:schemeClr val="accent1"/>
+          </a:fillRef>
+          <a:effectRef idx="2">
+            <a:schemeClr val="accent1"/>
+          </a:effectRef>
+          <a:fontRef idx="minor">
+            <a:schemeClr val="lt1"/>
+          </a:fontRef>
+        </p:style>
+        <p:txBody>
+          <a:bodyPr rtlCol="0" anchor="ctr"/>
+          <a:lstStyle/>
+          <a:p>
+            <a:pPr algn="ctr"/>
+          </a:p>
+        </p:txBody>
+      </p:sp>
+      <p:sp>
+        <p:nvSpPr>
+          <p:cNvPr id="17" name="Oval 16"/>
+          <p:cNvSpPr/>
+          <p:nvPr/>
+        </p:nvSpPr>
+        <p:spPr>
+          <a:xfrm>
+            <a:off x="1060704" y="3090672"/>
+            <a:ext cx="384048" cy="384048"/>
+          </a:xfrm>
+          <a:prstGeom prst="ellipse">
+            <a:avLst/>
+          </a:prstGeom>
+          <a:solidFill>
+            <a:srgbClr val="2A9D8F"/>
+          </a:solidFill>
+          <a:ln>
+            <a:noFill/>
+          </a:ln>
+        </p:spPr>
+        <p:style>
+          <a:lnRef idx="1">
+            <a:schemeClr val="accent1"/>
+          </a:lnRef>
+          <a:fillRef idx="3">
+            <a:schemeClr val="accent1"/>
+          </a:fillRef>
+          <a:effectRef idx="2">
+            <a:schemeClr val="accent1"/>
+          </a:effectRef>
+          <a:fontRef idx="minor">
+            <a:schemeClr val="lt1"/>
+          </a:fontRef>
+        </p:style>
+        <p:txBody>
+          <a:bodyPr rtlCol="0" anchor="ctr"/>
+          <a:lstStyle/>
+          <a:p>
+            <a:pPr algn="ctr"/>
+          </a:p>
+        </p:txBody>
+      </p:sp>
+      <p:sp>
+        <p:nvSpPr>
+          <p:cNvPr id="18" name="TextBox 17"/>
+          <p:cNvSpPr txBox="1"/>
+          <p:nvPr/>
+        </p:nvSpPr>
+        <p:spPr>
+          <a:xfrm>
+            <a:off x="1060704" y="3182112"/>
+            <a:ext cx="384048" cy="109728"/>
+          </a:xfrm>
+          <a:prstGeom prst="rect">
+            <a:avLst/>
+          </a:prstGeom>
+          <a:noFill/>
+        </p:spPr>
+        <p:txBody>
+          <a:bodyPr wrap="square" lIns="27432" rIns="27432" tIns="9144" bIns="9144">
+            <a:noAutofit/>
+          </a:bodyPr>
+          <a:lstStyle/>
+          <a:p>
+            <a:pPr algn="ctr"/>
+            <a:r>
+              <a:rPr sz="850" b="1" i="0">
+                <a:solidFill>
+                  <a:srgbClr val="FFFFFF"/>
+                </a:solidFill>
+                <a:latin typeface="Aptos Display"/>
+              </a:rPr>
+              <a:t>1</a:t>
+            </a:r>
+          </a:p>
+        </p:txBody>
+      </p:sp>
+      <p:sp>
+        <p:nvSpPr>
+          <p:cNvPr id="19" name="TextBox 18"/>
+          <p:cNvSpPr txBox="1"/>
+          <p:nvPr/>
+        </p:nvSpPr>
+        <p:spPr>
+          <a:xfrm>
+            <a:off x="1600200" y="3054096"/>
+            <a:ext cx="2834640" cy="201168"/>
+          </a:xfrm>
+          <a:prstGeom prst="rect">
+            <a:avLst/>
+          </a:prstGeom>
+          <a:noFill/>
+        </p:spPr>
+        <p:txBody>
+          <a:bodyPr wrap="square" lIns="27432" rIns="27432" tIns="9144" bIns="9144">
+            <a:noAutofit/>
+          </a:bodyPr>
+          <a:lstStyle/>
+          <a:p>
+            <a:r>
+              <a:rPr sz="1350" b="1" i="0">
+                <a:solidFill>
+                  <a:srgbClr val="232D37"/>
+                </a:solidFill>
+                <a:latin typeface="Aptos Display"/>
+              </a:rPr>
+              <a:t>Comfort AC</a:t>
+            </a:r>
+          </a:p>
+        </p:txBody>
+      </p:sp>
+      <p:sp>
+        <p:nvSpPr>
+          <p:cNvPr id="20" name="TextBox 19"/>
+          <p:cNvSpPr txBox="1"/>
+          <p:nvPr/>
+        </p:nvSpPr>
+        <p:spPr>
+          <a:xfrm>
+            <a:off x="1600200" y="3319272"/>
+            <a:ext cx="2971800" cy="237744"/>
+          </a:xfrm>
+          <a:prstGeom prst="rect">
+            <a:avLst/>
+          </a:prstGeom>
+          <a:noFill/>
+        </p:spPr>
+        <p:txBody>
+          <a:bodyPr wrap="square" lIns="27432" rIns="27432" tIns="9144" bIns="9144">
+            <a:noAutofit/>
+          </a:bodyPr>
+          <a:lstStyle/>
+          <a:p>
+            <a:r>
+              <a:rPr sz="980" b="0" i="0">
+                <a:solidFill>
+                  <a:srgbClr val="5A6973"/>
+                </a:solidFill>
+                <a:latin typeface="Aptos"/>
+              </a:rPr>
+              <a:t>human thermal comfort</a:t>
+            </a:r>
+          </a:p>
+        </p:txBody>
+      </p:sp>
+      <p:sp>
+        <p:nvSpPr>
+          <p:cNvPr id="21" name="Rounded Rectangle 20"/>
+          <p:cNvSpPr/>
+          <p:nvPr/>
+        </p:nvSpPr>
+        <p:spPr>
+          <a:xfrm>
+            <a:off x="896112" y="3858768"/>
+            <a:ext cx="3913632" cy="786384"/>
+          </a:xfrm>
+          <a:prstGeom prst="roundRect">
+            <a:avLst/>
+          </a:prstGeom>
+          <a:solidFill>
+            <a:srgbClr val="FFF1E8"/>
+          </a:solidFill>
+          <a:ln w="12700">
+            <a:solidFill>
+              <a:srgbClr val="E6EBF0"/>
+            </a:solidFill>
+          </a:ln>
+        </p:spPr>
+        <p:style>
+          <a:lnRef idx="1">
+            <a:schemeClr val="accent1"/>
+          </a:lnRef>
+          <a:fillRef idx="3">
+            <a:schemeClr val="accent1"/>
+          </a:fillRef>
+          <a:effectRef idx="2">
+            <a:schemeClr val="accent1"/>
+          </a:effectRef>
+          <a:fontRef idx="minor">
+            <a:schemeClr val="lt1"/>
+          </a:fontRef>
+        </p:style>
+        <p:txBody>
+          <a:bodyPr rtlCol="0" anchor="ctr"/>
+          <a:lstStyle/>
+          <a:p>
+            <a:pPr algn="ctr"/>
+          </a:p>
+        </p:txBody>
+      </p:sp>
+      <p:sp>
+        <p:nvSpPr>
+          <p:cNvPr id="22" name="Oval 21"/>
+          <p:cNvSpPr/>
+          <p:nvPr/>
+        </p:nvSpPr>
+        <p:spPr>
+          <a:xfrm>
+            <a:off x="1060704" y="4023360"/>
+            <a:ext cx="384048" cy="384048"/>
+          </a:xfrm>
+          <a:prstGeom prst="ellipse">
+            <a:avLst/>
+          </a:prstGeom>
+          <a:solidFill>
+            <a:srgbClr val="E76F51"/>
+          </a:solidFill>
+          <a:ln>
+            <a:noFill/>
+          </a:ln>
+        </p:spPr>
+        <p:style>
+          <a:lnRef idx="1">
+            <a:schemeClr val="accent1"/>
+          </a:lnRef>
+          <a:fillRef idx="3">
+            <a:schemeClr val="accent1"/>
+          </a:fillRef>
+          <a:effectRef idx="2">
+            <a:schemeClr val="accent1"/>
+          </a:effectRef>
+          <a:fontRef idx="minor">
+            <a:schemeClr val="lt1"/>
+          </a:fontRef>
+        </p:style>
+        <p:txBody>
+          <a:bodyPr rtlCol="0" anchor="ctr"/>
+          <a:lstStyle/>
+          <a:p>
+            <a:pPr algn="ctr"/>
+          </a:p>
+        </p:txBody>
+      </p:sp>
+      <p:sp>
+        <p:nvSpPr>
+          <p:cNvPr id="23" name="TextBox 22"/>
+          <p:cNvSpPr txBox="1"/>
+          <p:nvPr/>
+        </p:nvSpPr>
+        <p:spPr>
+          <a:xfrm>
+            <a:off x="1060704" y="4114800"/>
+            <a:ext cx="384048" cy="109728"/>
+          </a:xfrm>
+          <a:prstGeom prst="rect">
+            <a:avLst/>
+          </a:prstGeom>
+          <a:noFill/>
+        </p:spPr>
+        <p:txBody>
+          <a:bodyPr wrap="square" lIns="27432" rIns="27432" tIns="9144" bIns="9144">
+            <a:noAutofit/>
+          </a:bodyPr>
+          <a:lstStyle/>
+          <a:p>
+            <a:pPr algn="ctr"/>
+            <a:r>
+              <a:rPr sz="850" b="1" i="0">
+                <a:solidFill>
+                  <a:srgbClr val="FFFFFF"/>
+                </a:solidFill>
+                <a:latin typeface="Aptos Display"/>
+              </a:rPr>
+              <a:t>2</a:t>
+            </a:r>
+          </a:p>
+        </p:txBody>
+      </p:sp>
+      <p:sp>
+        <p:nvSpPr>
+          <p:cNvPr id="24" name="TextBox 23"/>
+          <p:cNvSpPr txBox="1"/>
+          <p:nvPr/>
+        </p:nvSpPr>
+        <p:spPr>
+          <a:xfrm>
+            <a:off x="1600200" y="3986784"/>
+            <a:ext cx="2834640" cy="201168"/>
+          </a:xfrm>
+          <a:prstGeom prst="rect">
+            <a:avLst/>
+          </a:prstGeom>
+          <a:noFill/>
+        </p:spPr>
+        <p:txBody>
+          <a:bodyPr wrap="square" lIns="27432" rIns="27432" tIns="9144" bIns="9144">
+            <a:noAutofit/>
+          </a:bodyPr>
+          <a:lstStyle/>
+          <a:p>
+            <a:r>
+              <a:rPr sz="1350" b="1" i="0">
+                <a:solidFill>
+                  <a:srgbClr val="232D37"/>
+                </a:solidFill>
+                <a:latin typeface="Aptos Display"/>
+              </a:rPr>
+              <a:t>Process AC</a:t>
+            </a:r>
+          </a:p>
+        </p:txBody>
+      </p:sp>
+      <p:sp>
+        <p:nvSpPr>
+          <p:cNvPr id="25" name="TextBox 24"/>
+          <p:cNvSpPr txBox="1"/>
+          <p:nvPr/>
+        </p:nvSpPr>
+        <p:spPr>
+          <a:xfrm>
+            <a:off x="1600200" y="4251960"/>
+            <a:ext cx="2971800" cy="237744"/>
+          </a:xfrm>
+          <a:prstGeom prst="rect">
+            <a:avLst/>
+          </a:prstGeom>
+          <a:noFill/>
+        </p:spPr>
+        <p:txBody>
+          <a:bodyPr wrap="square" lIns="27432" rIns="27432" tIns="9144" bIns="9144">
+            <a:noAutofit/>
+          </a:bodyPr>
+          <a:lstStyle/>
+          <a:p>
+            <a:r>
+              <a:rPr sz="980" b="0" i="0">
+                <a:solidFill>
+                  <a:srgbClr val="5A6973"/>
+                </a:solidFill>
+                <a:latin typeface="Aptos"/>
+              </a:rPr>
+              <a:t>product, material, or process requirement</a:t>
+            </a:r>
+          </a:p>
+        </p:txBody>
+      </p:sp>
     </p:spTree>
   </p:cSld>
   <p:clrMapOvr>
@@ -9944,7 +12993,7 @@
 </file>
 
 <file path=ppt/slides/slide6.xml><?xml version="1.0" encoding="utf-8"?>
-<p:sld xmlns:a="http://schemas.openxmlformats.org/drawingml/2006/main" xmlns:p="http://schemas.openxmlformats.org/presentationml/2006/main" xmlns:r="http://schemas.openxmlformats.org/officeDocument/2006/relationships">
+<p:sld xmlns:a="http://schemas.openxmlformats.org/drawingml/2006/main" xmlns:r="http://schemas.openxmlformats.org/officeDocument/2006/relationships" xmlns:p="http://schemas.openxmlformats.org/presentationml/2006/main">
   <p:cSld>
     <p:bg>
       <p:bgPr>
@@ -9960,7 +13009,14 @@
         <p:cNvGrpSpPr/>
         <p:nvPr/>
       </p:nvGrpSpPr>
-      <p:grpSpPr/>
+      <p:grpSpPr>
+        <a:xfrm>
+          <a:off x="0" y="0"/>
+          <a:ext cx="0" cy="0"/>
+          <a:chOff x="0" y="0"/>
+          <a:chExt cx="0" cy="0"/>
+        </a:xfrm>
+      </p:grpSpPr>
       <p:sp>
         <p:nvSpPr>
           <p:cNvPr id="2" name="Rectangle 1"/>
@@ -10001,6 +13057,7 @@
           <a:lstStyle/>
           <a:p>
             <a:pPr algn="ctr"/>
+            <a:endParaRPr/>
           </a:p>
         </p:txBody>
       </p:sp>
@@ -10178,14 +13235,14 @@
       </p:sp>
       <p:sp>
         <p:nvSpPr>
-          <p:cNvPr id="8" name="Rectangle 7"/>
+          <p:cNvPr id="10" name="Rectangle 9"/>
           <p:cNvSpPr/>
           <p:nvPr/>
         </p:nvSpPr>
         <p:spPr>
           <a:xfrm>
-            <a:off x="621792" y="1691640"/>
-            <a:ext cx="4572000" cy="4434840"/>
+            <a:off x="5440680" y="1691640"/>
+            <a:ext cx="6126480" cy="4434840"/>
           </a:xfrm>
           <a:prstGeom prst="rect">
             <a:avLst/>
@@ -10218,108 +13275,46 @@
           <a:lstStyle/>
           <a:p>
             <a:pPr algn="ctr"/>
-          </a:p>
-        </p:txBody>
-      </p:sp>
-      <p:sp>
-        <p:nvSpPr>
-          <p:cNvPr id="9" name="TextBox 8"/>
-          <p:cNvSpPr txBox="1"/>
-          <p:nvPr/>
-        </p:nvSpPr>
-        <p:spPr>
-          <a:xfrm>
-            <a:off x="896112" y="1965960"/>
-            <a:ext cx="4023360" cy="3840480"/>
-          </a:xfrm>
-          <a:prstGeom prst="rect">
-            <a:avLst/>
-          </a:prstGeom>
-          <a:noFill/>
-        </p:spPr>
-        <p:txBody>
-          <a:bodyPr wrap="square">
-            <a:spAutoFit/>
-          </a:bodyPr>
-          <a:lstStyle/>
-          <a:p>
-            <a:pPr>
-              <a:spcAft>
-                <a:spcPts val="1000"/>
-              </a:spcAft>
-              <a:defRPr sz="1800">
-                <a:solidFill>
-                  <a:srgbClr val="232D37"/>
-                </a:solidFill>
-                <a:latin typeface="Aptos"/>
-              </a:defRPr>
-            </a:pPr>
-            <a:r>
-              <a:t>Convection</a:t>
-            </a:r>
-          </a:p>
-          <a:p>
-            <a:pPr>
-              <a:spcAft>
-                <a:spcPts val="1000"/>
-              </a:spcAft>
-              <a:defRPr sz="1800">
-                <a:solidFill>
-                  <a:srgbClr val="232D37"/>
-                </a:solidFill>
-                <a:latin typeface="Aptos"/>
-              </a:defRPr>
-            </a:pPr>
-            <a:r>
-              <a:t>Radiation</a:t>
-            </a:r>
-          </a:p>
-          <a:p>
-            <a:pPr>
-              <a:spcAft>
-                <a:spcPts val="1000"/>
-              </a:spcAft>
-              <a:defRPr sz="1800">
-                <a:solidFill>
-                  <a:srgbClr val="232D37"/>
-                </a:solidFill>
-                <a:latin typeface="Aptos"/>
-              </a:defRPr>
-            </a:pPr>
-            <a:r>
-              <a:t>Conduction</a:t>
-            </a:r>
-          </a:p>
-          <a:p>
-            <a:pPr>
-              <a:spcAft>
-                <a:spcPts val="1000"/>
-              </a:spcAft>
-              <a:defRPr sz="1800">
-                <a:solidFill>
-                  <a:srgbClr val="232D37"/>
-                </a:solidFill>
-                <a:latin typeface="Aptos"/>
-              </a:defRPr>
-            </a:pPr>
-            <a:r>
-              <a:t>Evaporation</a:t>
-            </a:r>
-          </a:p>
-        </p:txBody>
-      </p:sp>
-      <p:sp>
-        <p:nvSpPr>
-          <p:cNvPr id="10" name="Rectangle 9"/>
+            <a:endParaRPr/>
+          </a:p>
+        </p:txBody>
+      </p:sp>
+      <p:pic>
+        <p:nvPicPr>
+          <p:cNvPr id="11" name="Picture 10" descr="fig_02_temp_comfort_en.png"/>
+          <p:cNvPicPr>
+            <a:picLocks noChangeAspect="1"/>
+          </p:cNvPicPr>
+          <p:nvPr/>
+        </p:nvPicPr>
+        <p:blipFill>
+          <a:blip r:embed="rId2"/>
+          <a:stretch>
+            <a:fillRect/>
+          </a:stretch>
+        </p:blipFill>
+        <p:spPr>
+          <a:xfrm>
+            <a:off x="5623560" y="2284241"/>
+            <a:ext cx="5760720" cy="3249636"/>
+          </a:xfrm>
+          <a:prstGeom prst="rect">
+            <a:avLst/>
+          </a:prstGeom>
+        </p:spPr>
+      </p:pic>
+      <p:sp>
+        <p:nvSpPr>
+          <p:cNvPr id="12" name="Rounded Rectangle 11"/>
           <p:cNvSpPr/>
           <p:nvPr/>
         </p:nvSpPr>
         <p:spPr>
           <a:xfrm>
-            <a:off x="5440680" y="1691640"/>
-            <a:ext cx="6126480" cy="4434840"/>
-          </a:xfrm>
-          <a:prstGeom prst="rect">
+            <a:off x="621792" y="1664208"/>
+            <a:ext cx="4590288" cy="4443984"/>
+          </a:xfrm>
+          <a:prstGeom prst="roundRect">
             <a:avLst/>
           </a:prstGeom>
           <a:solidFill>
@@ -10353,30 +13348,881 @@
           </a:p>
         </p:txBody>
       </p:sp>
-      <p:pic>
-        <p:nvPicPr>
-          <p:cNvPr id="11" name="Picture 10" descr="fig_02_temp_comfort_en.png"/>
-          <p:cNvPicPr>
-            <a:picLocks noChangeAspect="1"/>
-          </p:cNvPicPr>
-          <p:nvPr/>
-        </p:nvPicPr>
-        <p:blipFill>
-          <a:blip r:embed="rId2"/>
-          <a:stretch>
-            <a:fillRect/>
-          </a:stretch>
-        </p:blipFill>
-        <p:spPr>
-          <a:xfrm>
-            <a:off x="5623560" y="2284241"/>
-            <a:ext cx="5760720" cy="3249636"/>
-          </a:xfrm>
-          <a:prstGeom prst="rect">
-            <a:avLst/>
-          </a:prstGeom>
-        </p:spPr>
-      </p:pic>
+      <p:sp>
+        <p:nvSpPr>
+          <p:cNvPr id="13" name="Rectangle 12"/>
+          <p:cNvSpPr/>
+          <p:nvPr/>
+        </p:nvSpPr>
+        <p:spPr>
+          <a:xfrm>
+            <a:off x="621792" y="1664208"/>
+            <a:ext cx="109728" cy="4443984"/>
+          </a:xfrm>
+          <a:prstGeom prst="rect">
+            <a:avLst/>
+          </a:prstGeom>
+          <a:solidFill>
+            <a:srgbClr val="2A9D8F"/>
+          </a:solidFill>
+          <a:ln>
+            <a:noFill/>
+          </a:ln>
+        </p:spPr>
+        <p:style>
+          <a:lnRef idx="1">
+            <a:schemeClr val="accent1"/>
+          </a:lnRef>
+          <a:fillRef idx="3">
+            <a:schemeClr val="accent1"/>
+          </a:fillRef>
+          <a:effectRef idx="2">
+            <a:schemeClr val="accent1"/>
+          </a:effectRef>
+          <a:fontRef idx="minor">
+            <a:schemeClr val="lt1"/>
+          </a:fontRef>
+        </p:style>
+        <p:txBody>
+          <a:bodyPr rtlCol="0" anchor="ctr"/>
+          <a:lstStyle/>
+          <a:p>
+            <a:pPr algn="ctr"/>
+          </a:p>
+        </p:txBody>
+      </p:sp>
+      <p:sp>
+        <p:nvSpPr>
+          <p:cNvPr id="14" name="TextBox 13"/>
+          <p:cNvSpPr txBox="1"/>
+          <p:nvPr/>
+        </p:nvSpPr>
+        <p:spPr>
+          <a:xfrm>
+            <a:off x="896112" y="1892807"/>
+            <a:ext cx="3886200" cy="210312"/>
+          </a:xfrm>
+          <a:prstGeom prst="rect">
+            <a:avLst/>
+          </a:prstGeom>
+          <a:noFill/>
+        </p:spPr>
+        <p:txBody>
+          <a:bodyPr wrap="square" lIns="27432" rIns="27432" tIns="9144" bIns="9144">
+            <a:noAutofit/>
+          </a:bodyPr>
+          <a:lstStyle/>
+          <a:p>
+            <a:r>
+              <a:rPr sz="950" b="1" i="0">
+                <a:solidFill>
+                  <a:srgbClr val="2A9D8F"/>
+                </a:solidFill>
+                <a:latin typeface="Aptos Display"/>
+              </a:rPr>
+              <a:t>COMFORT MECHANISMS</a:t>
+            </a:r>
+          </a:p>
+        </p:txBody>
+      </p:sp>
+      <p:sp>
+        <p:nvSpPr>
+          <p:cNvPr id="15" name="TextBox 14"/>
+          <p:cNvSpPr txBox="1"/>
+          <p:nvPr/>
+        </p:nvSpPr>
+        <p:spPr>
+          <a:xfrm>
+            <a:off x="896112" y="2139696"/>
+            <a:ext cx="3886200" cy="603504"/>
+          </a:xfrm>
+          <a:prstGeom prst="rect">
+            <a:avLst/>
+          </a:prstGeom>
+          <a:noFill/>
+        </p:spPr>
+        <p:txBody>
+          <a:bodyPr wrap="square" lIns="27432" rIns="27432" tIns="9144" bIns="9144">
+            <a:noAutofit/>
+          </a:bodyPr>
+          <a:lstStyle/>
+          <a:p>
+            <a:r>
+              <a:rPr sz="2100" b="1" i="0">
+                <a:solidFill>
+                  <a:srgbClr val="11374B"/>
+                </a:solidFill>
+                <a:latin typeface="Aptos Display"/>
+              </a:rPr>
+              <a:t>The body is the sensor</a:t>
+            </a:r>
+          </a:p>
+        </p:txBody>
+      </p:sp>
+      <p:sp>
+        <p:nvSpPr>
+          <p:cNvPr id="16" name="Rounded Rectangle 15"/>
+          <p:cNvSpPr/>
+          <p:nvPr/>
+        </p:nvSpPr>
+        <p:spPr>
+          <a:xfrm>
+            <a:off x="896112" y="2788920"/>
+            <a:ext cx="3913632" cy="658368"/>
+          </a:xfrm>
+          <a:prstGeom prst="roundRect">
+            <a:avLst/>
+          </a:prstGeom>
+          <a:solidFill>
+            <a:srgbClr val="E6F4F7"/>
+          </a:solidFill>
+          <a:ln w="12700">
+            <a:solidFill>
+              <a:srgbClr val="E6EBF0"/>
+            </a:solidFill>
+          </a:ln>
+        </p:spPr>
+        <p:style>
+          <a:lnRef idx="1">
+            <a:schemeClr val="accent1"/>
+          </a:lnRef>
+          <a:fillRef idx="3">
+            <a:schemeClr val="accent1"/>
+          </a:fillRef>
+          <a:effectRef idx="2">
+            <a:schemeClr val="accent1"/>
+          </a:effectRef>
+          <a:fontRef idx="minor">
+            <a:schemeClr val="lt1"/>
+          </a:fontRef>
+        </p:style>
+        <p:txBody>
+          <a:bodyPr rtlCol="0" anchor="ctr"/>
+          <a:lstStyle/>
+          <a:p>
+            <a:pPr algn="ctr"/>
+          </a:p>
+        </p:txBody>
+      </p:sp>
+      <p:sp>
+        <p:nvSpPr>
+          <p:cNvPr id="17" name="Oval 16"/>
+          <p:cNvSpPr/>
+          <p:nvPr/>
+        </p:nvSpPr>
+        <p:spPr>
+          <a:xfrm>
+            <a:off x="1060704" y="2953512"/>
+            <a:ext cx="384048" cy="384048"/>
+          </a:xfrm>
+          <a:prstGeom prst="ellipse">
+            <a:avLst/>
+          </a:prstGeom>
+          <a:solidFill>
+            <a:srgbClr val="2A9D8F"/>
+          </a:solidFill>
+          <a:ln>
+            <a:noFill/>
+          </a:ln>
+        </p:spPr>
+        <p:style>
+          <a:lnRef idx="1">
+            <a:schemeClr val="accent1"/>
+          </a:lnRef>
+          <a:fillRef idx="3">
+            <a:schemeClr val="accent1"/>
+          </a:fillRef>
+          <a:effectRef idx="2">
+            <a:schemeClr val="accent1"/>
+          </a:effectRef>
+          <a:fontRef idx="minor">
+            <a:schemeClr val="lt1"/>
+          </a:fontRef>
+        </p:style>
+        <p:txBody>
+          <a:bodyPr rtlCol="0" anchor="ctr"/>
+          <a:lstStyle/>
+          <a:p>
+            <a:pPr algn="ctr"/>
+          </a:p>
+        </p:txBody>
+      </p:sp>
+      <p:sp>
+        <p:nvSpPr>
+          <p:cNvPr id="18" name="TextBox 17"/>
+          <p:cNvSpPr txBox="1"/>
+          <p:nvPr/>
+        </p:nvSpPr>
+        <p:spPr>
+          <a:xfrm>
+            <a:off x="1060704" y="3044952"/>
+            <a:ext cx="384048" cy="109728"/>
+          </a:xfrm>
+          <a:prstGeom prst="rect">
+            <a:avLst/>
+          </a:prstGeom>
+          <a:noFill/>
+        </p:spPr>
+        <p:txBody>
+          <a:bodyPr wrap="square" lIns="27432" rIns="27432" tIns="9144" bIns="9144">
+            <a:noAutofit/>
+          </a:bodyPr>
+          <a:lstStyle/>
+          <a:p>
+            <a:pPr algn="ctr"/>
+            <a:r>
+              <a:rPr sz="850" b="1" i="0">
+                <a:solidFill>
+                  <a:srgbClr val="FFFFFF"/>
+                </a:solidFill>
+                <a:latin typeface="Aptos Display"/>
+              </a:rPr>
+              <a:t>1</a:t>
+            </a:r>
+          </a:p>
+        </p:txBody>
+      </p:sp>
+      <p:sp>
+        <p:nvSpPr>
+          <p:cNvPr id="19" name="TextBox 18"/>
+          <p:cNvSpPr txBox="1"/>
+          <p:nvPr/>
+        </p:nvSpPr>
+        <p:spPr>
+          <a:xfrm>
+            <a:off x="1600200" y="2916936"/>
+            <a:ext cx="2834640" cy="201168"/>
+          </a:xfrm>
+          <a:prstGeom prst="rect">
+            <a:avLst/>
+          </a:prstGeom>
+          <a:noFill/>
+        </p:spPr>
+        <p:txBody>
+          <a:bodyPr wrap="square" lIns="27432" rIns="27432" tIns="9144" bIns="9144">
+            <a:noAutofit/>
+          </a:bodyPr>
+          <a:lstStyle/>
+          <a:p>
+            <a:r>
+              <a:rPr sz="1350" b="1" i="0">
+                <a:solidFill>
+                  <a:srgbClr val="232D37"/>
+                </a:solidFill>
+                <a:latin typeface="Aptos Display"/>
+              </a:rPr>
+              <a:t>Convection</a:t>
+            </a:r>
+          </a:p>
+        </p:txBody>
+      </p:sp>
+      <p:sp>
+        <p:nvSpPr>
+          <p:cNvPr id="20" name="TextBox 19"/>
+          <p:cNvSpPr txBox="1"/>
+          <p:nvPr/>
+        </p:nvSpPr>
+        <p:spPr>
+          <a:xfrm>
+            <a:off x="1600200" y="3182112"/>
+            <a:ext cx="2971800" cy="237744"/>
+          </a:xfrm>
+          <a:prstGeom prst="rect">
+            <a:avLst/>
+          </a:prstGeom>
+          <a:noFill/>
+        </p:spPr>
+        <p:txBody>
+          <a:bodyPr wrap="square" lIns="27432" rIns="27432" tIns="9144" bIns="9144">
+            <a:noAutofit/>
+          </a:bodyPr>
+          <a:lstStyle/>
+          <a:p>
+            <a:r>
+              <a:rPr sz="980" b="0" i="0">
+                <a:solidFill>
+                  <a:srgbClr val="5A6973"/>
+                </a:solidFill>
+                <a:latin typeface="Aptos"/>
+              </a:rPr>
+              <a:t>heat transfer to moving air</a:t>
+            </a:r>
+          </a:p>
+        </p:txBody>
+      </p:sp>
+      <p:sp>
+        <p:nvSpPr>
+          <p:cNvPr id="21" name="Rounded Rectangle 20"/>
+          <p:cNvSpPr/>
+          <p:nvPr/>
+        </p:nvSpPr>
+        <p:spPr>
+          <a:xfrm>
+            <a:off x="896112" y="3547872"/>
+            <a:ext cx="3913632" cy="658368"/>
+          </a:xfrm>
+          <a:prstGeom prst="roundRect">
+            <a:avLst/>
+          </a:prstGeom>
+          <a:solidFill>
+            <a:srgbClr val="FFF1E8"/>
+          </a:solidFill>
+          <a:ln w="12700">
+            <a:solidFill>
+              <a:srgbClr val="E6EBF0"/>
+            </a:solidFill>
+          </a:ln>
+        </p:spPr>
+        <p:style>
+          <a:lnRef idx="1">
+            <a:schemeClr val="accent1"/>
+          </a:lnRef>
+          <a:fillRef idx="3">
+            <a:schemeClr val="accent1"/>
+          </a:fillRef>
+          <a:effectRef idx="2">
+            <a:schemeClr val="accent1"/>
+          </a:effectRef>
+          <a:fontRef idx="minor">
+            <a:schemeClr val="lt1"/>
+          </a:fontRef>
+        </p:style>
+        <p:txBody>
+          <a:bodyPr rtlCol="0" anchor="ctr"/>
+          <a:lstStyle/>
+          <a:p>
+            <a:pPr algn="ctr"/>
+          </a:p>
+        </p:txBody>
+      </p:sp>
+      <p:sp>
+        <p:nvSpPr>
+          <p:cNvPr id="22" name="Oval 21"/>
+          <p:cNvSpPr/>
+          <p:nvPr/>
+        </p:nvSpPr>
+        <p:spPr>
+          <a:xfrm>
+            <a:off x="1060704" y="3712463"/>
+            <a:ext cx="384048" cy="384048"/>
+          </a:xfrm>
+          <a:prstGeom prst="ellipse">
+            <a:avLst/>
+          </a:prstGeom>
+          <a:solidFill>
+            <a:srgbClr val="E76F51"/>
+          </a:solidFill>
+          <a:ln>
+            <a:noFill/>
+          </a:ln>
+        </p:spPr>
+        <p:style>
+          <a:lnRef idx="1">
+            <a:schemeClr val="accent1"/>
+          </a:lnRef>
+          <a:fillRef idx="3">
+            <a:schemeClr val="accent1"/>
+          </a:fillRef>
+          <a:effectRef idx="2">
+            <a:schemeClr val="accent1"/>
+          </a:effectRef>
+          <a:fontRef idx="minor">
+            <a:schemeClr val="lt1"/>
+          </a:fontRef>
+        </p:style>
+        <p:txBody>
+          <a:bodyPr rtlCol="0" anchor="ctr"/>
+          <a:lstStyle/>
+          <a:p>
+            <a:pPr algn="ctr"/>
+          </a:p>
+        </p:txBody>
+      </p:sp>
+      <p:sp>
+        <p:nvSpPr>
+          <p:cNvPr id="23" name="TextBox 22"/>
+          <p:cNvSpPr txBox="1"/>
+          <p:nvPr/>
+        </p:nvSpPr>
+        <p:spPr>
+          <a:xfrm>
+            <a:off x="1060704" y="3803904"/>
+            <a:ext cx="384048" cy="109728"/>
+          </a:xfrm>
+          <a:prstGeom prst="rect">
+            <a:avLst/>
+          </a:prstGeom>
+          <a:noFill/>
+        </p:spPr>
+        <p:txBody>
+          <a:bodyPr wrap="square" lIns="27432" rIns="27432" tIns="9144" bIns="9144">
+            <a:noAutofit/>
+          </a:bodyPr>
+          <a:lstStyle/>
+          <a:p>
+            <a:pPr algn="ctr"/>
+            <a:r>
+              <a:rPr sz="850" b="1" i="0">
+                <a:solidFill>
+                  <a:srgbClr val="FFFFFF"/>
+                </a:solidFill>
+                <a:latin typeface="Aptos Display"/>
+              </a:rPr>
+              <a:t>2</a:t>
+            </a:r>
+          </a:p>
+        </p:txBody>
+      </p:sp>
+      <p:sp>
+        <p:nvSpPr>
+          <p:cNvPr id="24" name="TextBox 23"/>
+          <p:cNvSpPr txBox="1"/>
+          <p:nvPr/>
+        </p:nvSpPr>
+        <p:spPr>
+          <a:xfrm>
+            <a:off x="1600200" y="3675887"/>
+            <a:ext cx="2834640" cy="201168"/>
+          </a:xfrm>
+          <a:prstGeom prst="rect">
+            <a:avLst/>
+          </a:prstGeom>
+          <a:noFill/>
+        </p:spPr>
+        <p:txBody>
+          <a:bodyPr wrap="square" lIns="27432" rIns="27432" tIns="9144" bIns="9144">
+            <a:noAutofit/>
+          </a:bodyPr>
+          <a:lstStyle/>
+          <a:p>
+            <a:r>
+              <a:rPr sz="1350" b="1" i="0">
+                <a:solidFill>
+                  <a:srgbClr val="232D37"/>
+                </a:solidFill>
+                <a:latin typeface="Aptos Display"/>
+              </a:rPr>
+              <a:t>Radiation</a:t>
+            </a:r>
+          </a:p>
+        </p:txBody>
+      </p:sp>
+      <p:sp>
+        <p:nvSpPr>
+          <p:cNvPr id="25" name="TextBox 24"/>
+          <p:cNvSpPr txBox="1"/>
+          <p:nvPr/>
+        </p:nvSpPr>
+        <p:spPr>
+          <a:xfrm>
+            <a:off x="1600200" y="3941063"/>
+            <a:ext cx="2971800" cy="237744"/>
+          </a:xfrm>
+          <a:prstGeom prst="rect">
+            <a:avLst/>
+          </a:prstGeom>
+          <a:noFill/>
+        </p:spPr>
+        <p:txBody>
+          <a:bodyPr wrap="square" lIns="27432" rIns="27432" tIns="9144" bIns="9144">
+            <a:noAutofit/>
+          </a:bodyPr>
+          <a:lstStyle/>
+          <a:p>
+            <a:r>
+              <a:rPr sz="980" b="0" i="0">
+                <a:solidFill>
+                  <a:srgbClr val="5A6973"/>
+                </a:solidFill>
+                <a:latin typeface="Aptos"/>
+              </a:rPr>
+              <a:t>exchange with surfaces</a:t>
+            </a:r>
+          </a:p>
+        </p:txBody>
+      </p:sp>
+      <p:sp>
+        <p:nvSpPr>
+          <p:cNvPr id="26" name="Rounded Rectangle 25"/>
+          <p:cNvSpPr/>
+          <p:nvPr/>
+        </p:nvSpPr>
+        <p:spPr>
+          <a:xfrm>
+            <a:off x="896112" y="4306824"/>
+            <a:ext cx="3913632" cy="658368"/>
+          </a:xfrm>
+          <a:prstGeom prst="roundRect">
+            <a:avLst/>
+          </a:prstGeom>
+          <a:solidFill>
+            <a:srgbClr val="EBF4FA"/>
+          </a:solidFill>
+          <a:ln w="12700">
+            <a:solidFill>
+              <a:srgbClr val="E6EBF0"/>
+            </a:solidFill>
+          </a:ln>
+        </p:spPr>
+        <p:style>
+          <a:lnRef idx="1">
+            <a:schemeClr val="accent1"/>
+          </a:lnRef>
+          <a:fillRef idx="3">
+            <a:schemeClr val="accent1"/>
+          </a:fillRef>
+          <a:effectRef idx="2">
+            <a:schemeClr val="accent1"/>
+          </a:effectRef>
+          <a:fontRef idx="minor">
+            <a:schemeClr val="lt1"/>
+          </a:fontRef>
+        </p:style>
+        <p:txBody>
+          <a:bodyPr rtlCol="0" anchor="ctr"/>
+          <a:lstStyle/>
+          <a:p>
+            <a:pPr algn="ctr"/>
+          </a:p>
+        </p:txBody>
+      </p:sp>
+      <p:sp>
+        <p:nvSpPr>
+          <p:cNvPr id="27" name="Oval 26"/>
+          <p:cNvSpPr/>
+          <p:nvPr/>
+        </p:nvSpPr>
+        <p:spPr>
+          <a:xfrm>
+            <a:off x="1060704" y="4471416"/>
+            <a:ext cx="384048" cy="384048"/>
+          </a:xfrm>
+          <a:prstGeom prst="ellipse">
+            <a:avLst/>
+          </a:prstGeom>
+          <a:solidFill>
+            <a:srgbClr val="457B9D"/>
+          </a:solidFill>
+          <a:ln>
+            <a:noFill/>
+          </a:ln>
+        </p:spPr>
+        <p:style>
+          <a:lnRef idx="1">
+            <a:schemeClr val="accent1"/>
+          </a:lnRef>
+          <a:fillRef idx="3">
+            <a:schemeClr val="accent1"/>
+          </a:fillRef>
+          <a:effectRef idx="2">
+            <a:schemeClr val="accent1"/>
+          </a:effectRef>
+          <a:fontRef idx="minor">
+            <a:schemeClr val="lt1"/>
+          </a:fontRef>
+        </p:style>
+        <p:txBody>
+          <a:bodyPr rtlCol="0" anchor="ctr"/>
+          <a:lstStyle/>
+          <a:p>
+            <a:pPr algn="ctr"/>
+          </a:p>
+        </p:txBody>
+      </p:sp>
+      <p:sp>
+        <p:nvSpPr>
+          <p:cNvPr id="28" name="TextBox 27"/>
+          <p:cNvSpPr txBox="1"/>
+          <p:nvPr/>
+        </p:nvSpPr>
+        <p:spPr>
+          <a:xfrm>
+            <a:off x="1060704" y="4562856"/>
+            <a:ext cx="384048" cy="109728"/>
+          </a:xfrm>
+          <a:prstGeom prst="rect">
+            <a:avLst/>
+          </a:prstGeom>
+          <a:noFill/>
+        </p:spPr>
+        <p:txBody>
+          <a:bodyPr wrap="square" lIns="27432" rIns="27432" tIns="9144" bIns="9144">
+            <a:noAutofit/>
+          </a:bodyPr>
+          <a:lstStyle/>
+          <a:p>
+            <a:pPr algn="ctr"/>
+            <a:r>
+              <a:rPr sz="850" b="1" i="0">
+                <a:solidFill>
+                  <a:srgbClr val="FFFFFF"/>
+                </a:solidFill>
+                <a:latin typeface="Aptos Display"/>
+              </a:rPr>
+              <a:t>3</a:t>
+            </a:r>
+          </a:p>
+        </p:txBody>
+      </p:sp>
+      <p:sp>
+        <p:nvSpPr>
+          <p:cNvPr id="29" name="TextBox 28"/>
+          <p:cNvSpPr txBox="1"/>
+          <p:nvPr/>
+        </p:nvSpPr>
+        <p:spPr>
+          <a:xfrm>
+            <a:off x="1600200" y="4434840"/>
+            <a:ext cx="2834640" cy="201168"/>
+          </a:xfrm>
+          <a:prstGeom prst="rect">
+            <a:avLst/>
+          </a:prstGeom>
+          <a:noFill/>
+        </p:spPr>
+        <p:txBody>
+          <a:bodyPr wrap="square" lIns="27432" rIns="27432" tIns="9144" bIns="9144">
+            <a:noAutofit/>
+          </a:bodyPr>
+          <a:lstStyle/>
+          <a:p>
+            <a:r>
+              <a:rPr sz="1350" b="1" i="0">
+                <a:solidFill>
+                  <a:srgbClr val="232D37"/>
+                </a:solidFill>
+                <a:latin typeface="Aptos Display"/>
+              </a:rPr>
+              <a:t>Conduction</a:t>
+            </a:r>
+          </a:p>
+        </p:txBody>
+      </p:sp>
+      <p:sp>
+        <p:nvSpPr>
+          <p:cNvPr id="30" name="TextBox 29"/>
+          <p:cNvSpPr txBox="1"/>
+          <p:nvPr/>
+        </p:nvSpPr>
+        <p:spPr>
+          <a:xfrm>
+            <a:off x="1600200" y="4700016"/>
+            <a:ext cx="2971800" cy="237744"/>
+          </a:xfrm>
+          <a:prstGeom prst="rect">
+            <a:avLst/>
+          </a:prstGeom>
+          <a:noFill/>
+        </p:spPr>
+        <p:txBody>
+          <a:bodyPr wrap="square" lIns="27432" rIns="27432" tIns="9144" bIns="9144">
+            <a:noAutofit/>
+          </a:bodyPr>
+          <a:lstStyle/>
+          <a:p>
+            <a:r>
+              <a:rPr sz="980" b="0" i="0">
+                <a:solidFill>
+                  <a:srgbClr val="5A6973"/>
+                </a:solidFill>
+                <a:latin typeface="Aptos"/>
+              </a:rPr>
+              <a:t>contact with materials</a:t>
+            </a:r>
+          </a:p>
+        </p:txBody>
+      </p:sp>
+      <p:sp>
+        <p:nvSpPr>
+          <p:cNvPr id="31" name="Rounded Rectangle 30"/>
+          <p:cNvSpPr/>
+          <p:nvPr/>
+        </p:nvSpPr>
+        <p:spPr>
+          <a:xfrm>
+            <a:off x="896112" y="5065775"/>
+            <a:ext cx="3913632" cy="658368"/>
+          </a:xfrm>
+          <a:prstGeom prst="roundRect">
+            <a:avLst/>
+          </a:prstGeom>
+          <a:solidFill>
+            <a:srgbClr val="ECF8EE"/>
+          </a:solidFill>
+          <a:ln w="12700">
+            <a:solidFill>
+              <a:srgbClr val="E6EBF0"/>
+            </a:solidFill>
+          </a:ln>
+        </p:spPr>
+        <p:style>
+          <a:lnRef idx="1">
+            <a:schemeClr val="accent1"/>
+          </a:lnRef>
+          <a:fillRef idx="3">
+            <a:schemeClr val="accent1"/>
+          </a:fillRef>
+          <a:effectRef idx="2">
+            <a:schemeClr val="accent1"/>
+          </a:effectRef>
+          <a:fontRef idx="minor">
+            <a:schemeClr val="lt1"/>
+          </a:fontRef>
+        </p:style>
+        <p:txBody>
+          <a:bodyPr rtlCol="0" anchor="ctr"/>
+          <a:lstStyle/>
+          <a:p>
+            <a:pPr algn="ctr"/>
+          </a:p>
+        </p:txBody>
+      </p:sp>
+      <p:sp>
+        <p:nvSpPr>
+          <p:cNvPr id="32" name="Oval 31"/>
+          <p:cNvSpPr/>
+          <p:nvPr/>
+        </p:nvSpPr>
+        <p:spPr>
+          <a:xfrm>
+            <a:off x="1060704" y="5230367"/>
+            <a:ext cx="384048" cy="384048"/>
+          </a:xfrm>
+          <a:prstGeom prst="ellipse">
+            <a:avLst/>
+          </a:prstGeom>
+          <a:solidFill>
+            <a:srgbClr val="4CAF50"/>
+          </a:solidFill>
+          <a:ln>
+            <a:noFill/>
+          </a:ln>
+        </p:spPr>
+        <p:style>
+          <a:lnRef idx="1">
+            <a:schemeClr val="accent1"/>
+          </a:lnRef>
+          <a:fillRef idx="3">
+            <a:schemeClr val="accent1"/>
+          </a:fillRef>
+          <a:effectRef idx="2">
+            <a:schemeClr val="accent1"/>
+          </a:effectRef>
+          <a:fontRef idx="minor">
+            <a:schemeClr val="lt1"/>
+          </a:fontRef>
+        </p:style>
+        <p:txBody>
+          <a:bodyPr rtlCol="0" anchor="ctr"/>
+          <a:lstStyle/>
+          <a:p>
+            <a:pPr algn="ctr"/>
+          </a:p>
+        </p:txBody>
+      </p:sp>
+      <p:sp>
+        <p:nvSpPr>
+          <p:cNvPr id="33" name="TextBox 32"/>
+          <p:cNvSpPr txBox="1"/>
+          <p:nvPr/>
+        </p:nvSpPr>
+        <p:spPr>
+          <a:xfrm>
+            <a:off x="1060704" y="5321807"/>
+            <a:ext cx="384048" cy="109728"/>
+          </a:xfrm>
+          <a:prstGeom prst="rect">
+            <a:avLst/>
+          </a:prstGeom>
+          <a:noFill/>
+        </p:spPr>
+        <p:txBody>
+          <a:bodyPr wrap="square" lIns="27432" rIns="27432" tIns="9144" bIns="9144">
+            <a:noAutofit/>
+          </a:bodyPr>
+          <a:lstStyle/>
+          <a:p>
+            <a:pPr algn="ctr"/>
+            <a:r>
+              <a:rPr sz="850" b="1" i="0">
+                <a:solidFill>
+                  <a:srgbClr val="FFFFFF"/>
+                </a:solidFill>
+                <a:latin typeface="Aptos Display"/>
+              </a:rPr>
+              <a:t>4</a:t>
+            </a:r>
+          </a:p>
+        </p:txBody>
+      </p:sp>
+      <p:sp>
+        <p:nvSpPr>
+          <p:cNvPr id="34" name="TextBox 33"/>
+          <p:cNvSpPr txBox="1"/>
+          <p:nvPr/>
+        </p:nvSpPr>
+        <p:spPr>
+          <a:xfrm>
+            <a:off x="1600200" y="5193791"/>
+            <a:ext cx="2834640" cy="201168"/>
+          </a:xfrm>
+          <a:prstGeom prst="rect">
+            <a:avLst/>
+          </a:prstGeom>
+          <a:noFill/>
+        </p:spPr>
+        <p:txBody>
+          <a:bodyPr wrap="square" lIns="27432" rIns="27432" tIns="9144" bIns="9144">
+            <a:noAutofit/>
+          </a:bodyPr>
+          <a:lstStyle/>
+          <a:p>
+            <a:r>
+              <a:rPr sz="1350" b="1" i="0">
+                <a:solidFill>
+                  <a:srgbClr val="232D37"/>
+                </a:solidFill>
+                <a:latin typeface="Aptos Display"/>
+              </a:rPr>
+              <a:t>Evaporation</a:t>
+            </a:r>
+          </a:p>
+        </p:txBody>
+      </p:sp>
+      <p:sp>
+        <p:nvSpPr>
+          <p:cNvPr id="35" name="TextBox 34"/>
+          <p:cNvSpPr txBox="1"/>
+          <p:nvPr/>
+        </p:nvSpPr>
+        <p:spPr>
+          <a:xfrm>
+            <a:off x="1600200" y="5458967"/>
+            <a:ext cx="2971800" cy="237744"/>
+          </a:xfrm>
+          <a:prstGeom prst="rect">
+            <a:avLst/>
+          </a:prstGeom>
+          <a:noFill/>
+        </p:spPr>
+        <p:txBody>
+          <a:bodyPr wrap="square" lIns="27432" rIns="27432" tIns="9144" bIns="9144">
+            <a:noAutofit/>
+          </a:bodyPr>
+          <a:lstStyle/>
+          <a:p>
+            <a:r>
+              <a:rPr sz="980" b="0" i="0">
+                <a:solidFill>
+                  <a:srgbClr val="5A6973"/>
+                </a:solidFill>
+                <a:latin typeface="Aptos"/>
+              </a:rPr>
+              <a:t>sweat + moisture removal</a:t>
+            </a:r>
+          </a:p>
+        </p:txBody>
+      </p:sp>
     </p:spTree>
   </p:cSld>
   <p:clrMapOvr>
@@ -10386,7 +14232,7 @@
 </file>
 
 <file path=ppt/slides/slide7.xml><?xml version="1.0" encoding="utf-8"?>
-<p:sld xmlns:a="http://schemas.openxmlformats.org/drawingml/2006/main" xmlns:p="http://schemas.openxmlformats.org/presentationml/2006/main" xmlns:r="http://schemas.openxmlformats.org/officeDocument/2006/relationships">
+<p:sld xmlns:a="http://schemas.openxmlformats.org/drawingml/2006/main" xmlns:r="http://schemas.openxmlformats.org/officeDocument/2006/relationships" xmlns:p="http://schemas.openxmlformats.org/presentationml/2006/main">
   <p:cSld>
     <p:bg>
       <p:bgPr>
@@ -10402,7 +14248,14 @@
         <p:cNvGrpSpPr/>
         <p:nvPr/>
       </p:nvGrpSpPr>
-      <p:grpSpPr/>
+      <p:grpSpPr>
+        <a:xfrm>
+          <a:off x="0" y="0"/>
+          <a:ext cx="0" cy="0"/>
+          <a:chOff x="0" y="0"/>
+          <a:chExt cx="0" cy="0"/>
+        </a:xfrm>
+      </p:grpSpPr>
       <p:sp>
         <p:nvSpPr>
           <p:cNvPr id="2" name="Rectangle 1"/>
@@ -10443,6 +14296,7 @@
           <a:lstStyle/>
           <a:p>
             <a:pPr algn="ctr"/>
+            <a:endParaRPr/>
           </a:p>
         </p:txBody>
       </p:sp>
@@ -10620,14 +14474,14 @@
       </p:sp>
       <p:sp>
         <p:nvSpPr>
-          <p:cNvPr id="8" name="Rectangle 7"/>
+          <p:cNvPr id="10" name="Rectangle 9"/>
           <p:cNvSpPr/>
           <p:nvPr/>
         </p:nvSpPr>
         <p:spPr>
           <a:xfrm>
-            <a:off x="621792" y="1691640"/>
-            <a:ext cx="4572000" cy="4434840"/>
+            <a:off x="5440680" y="1691640"/>
+            <a:ext cx="6126480" cy="4434840"/>
           </a:xfrm>
           <a:prstGeom prst="rect">
             <a:avLst/>
@@ -10660,92 +14514,46 @@
           <a:lstStyle/>
           <a:p>
             <a:pPr algn="ctr"/>
-          </a:p>
-        </p:txBody>
-      </p:sp>
-      <p:sp>
-        <p:nvSpPr>
-          <p:cNvPr id="9" name="TextBox 8"/>
-          <p:cNvSpPr txBox="1"/>
-          <p:nvPr/>
-        </p:nvSpPr>
-        <p:spPr>
-          <a:xfrm>
-            <a:off x="896112" y="1965960"/>
-            <a:ext cx="4023360" cy="3840480"/>
-          </a:xfrm>
-          <a:prstGeom prst="rect">
-            <a:avLst/>
-          </a:prstGeom>
-          <a:noFill/>
-        </p:spPr>
-        <p:txBody>
-          <a:bodyPr wrap="square">
-            <a:spAutoFit/>
-          </a:bodyPr>
-          <a:lstStyle/>
-          <a:p>
-            <a:pPr>
-              <a:spcAft>
-                <a:spcPts val="1000"/>
-              </a:spcAft>
-              <a:defRPr sz="1800">
-                <a:solidFill>
-                  <a:srgbClr val="232D37"/>
-                </a:solidFill>
-                <a:latin typeface="Aptos"/>
-              </a:defRPr>
-            </a:pPr>
-            <a:r>
-              <a:t>Textile mill: higher RH</a:t>
-            </a:r>
-          </a:p>
-          <a:p>
-            <a:pPr>
-              <a:spcAft>
-                <a:spcPts val="1000"/>
-              </a:spcAft>
-              <a:defRPr sz="1800">
-                <a:solidFill>
-                  <a:srgbClr val="232D37"/>
-                </a:solidFill>
-                <a:latin typeface="Aptos"/>
-              </a:defRPr>
-            </a:pPr>
-            <a:r>
-              <a:t>Paper storage: lower RH</a:t>
-            </a:r>
-          </a:p>
-          <a:p>
-            <a:pPr>
-              <a:spcAft>
-                <a:spcPts val="1000"/>
-              </a:spcAft>
-              <a:defRPr sz="1800">
-                <a:solidFill>
-                  <a:srgbClr val="232D37"/>
-                </a:solidFill>
-                <a:latin typeface="Aptos"/>
-              </a:defRPr>
-            </a:pPr>
-            <a:r>
-              <a:t>Seed storage: low temperature and humidity</a:t>
-            </a:r>
-          </a:p>
-        </p:txBody>
-      </p:sp>
-      <p:sp>
-        <p:nvSpPr>
-          <p:cNvPr id="10" name="Rectangle 9"/>
+            <a:endParaRPr/>
+          </a:p>
+        </p:txBody>
+      </p:sp>
+      <p:pic>
+        <p:nvPicPr>
+          <p:cNvPr id="11" name="Picture 10" descr="fig_03_humidity_en.png"/>
+          <p:cNvPicPr>
+            <a:picLocks noChangeAspect="1"/>
+          </p:cNvPicPr>
+          <p:nvPr/>
+        </p:nvPicPr>
+        <p:blipFill>
+          <a:blip r:embed="rId2"/>
+          <a:stretch>
+            <a:fillRect/>
+          </a:stretch>
+        </p:blipFill>
+        <p:spPr>
+          <a:xfrm>
+            <a:off x="5623560" y="2284241"/>
+            <a:ext cx="5760720" cy="3249636"/>
+          </a:xfrm>
+          <a:prstGeom prst="rect">
+            <a:avLst/>
+          </a:prstGeom>
+        </p:spPr>
+      </p:pic>
+      <p:sp>
+        <p:nvSpPr>
+          <p:cNvPr id="12" name="Rounded Rectangle 11"/>
           <p:cNvSpPr/>
           <p:nvPr/>
         </p:nvSpPr>
         <p:spPr>
           <a:xfrm>
-            <a:off x="5440680" y="1691640"/>
-            <a:ext cx="6126480" cy="4434840"/>
-          </a:xfrm>
-          <a:prstGeom prst="rect">
+            <a:off x="621792" y="1664208"/>
+            <a:ext cx="4590288" cy="4443984"/>
+          </a:xfrm>
+          <a:prstGeom prst="roundRect">
             <a:avLst/>
           </a:prstGeom>
           <a:solidFill>
@@ -10779,30 +14587,690 @@
           </a:p>
         </p:txBody>
       </p:sp>
-      <p:pic>
-        <p:nvPicPr>
-          <p:cNvPr id="11" name="Picture 10" descr="fig_03_humidity_en.png"/>
-          <p:cNvPicPr>
-            <a:picLocks noChangeAspect="1"/>
-          </p:cNvPicPr>
-          <p:nvPr/>
-        </p:nvPicPr>
-        <p:blipFill>
-          <a:blip r:embed="rId2"/>
-          <a:stretch>
-            <a:fillRect/>
-          </a:stretch>
-        </p:blipFill>
-        <p:spPr>
-          <a:xfrm>
-            <a:off x="5623560" y="2284241"/>
-            <a:ext cx="5760720" cy="3249636"/>
-          </a:xfrm>
-          <a:prstGeom prst="rect">
-            <a:avLst/>
-          </a:prstGeom>
-        </p:spPr>
-      </p:pic>
+      <p:sp>
+        <p:nvSpPr>
+          <p:cNvPr id="13" name="Rectangle 12"/>
+          <p:cNvSpPr/>
+          <p:nvPr/>
+        </p:nvSpPr>
+        <p:spPr>
+          <a:xfrm>
+            <a:off x="621792" y="1664208"/>
+            <a:ext cx="109728" cy="4443984"/>
+          </a:xfrm>
+          <a:prstGeom prst="rect">
+            <a:avLst/>
+          </a:prstGeom>
+          <a:solidFill>
+            <a:srgbClr val="2A9D8F"/>
+          </a:solidFill>
+          <a:ln>
+            <a:noFill/>
+          </a:ln>
+        </p:spPr>
+        <p:style>
+          <a:lnRef idx="1">
+            <a:schemeClr val="accent1"/>
+          </a:lnRef>
+          <a:fillRef idx="3">
+            <a:schemeClr val="accent1"/>
+          </a:fillRef>
+          <a:effectRef idx="2">
+            <a:schemeClr val="accent1"/>
+          </a:effectRef>
+          <a:fontRef idx="minor">
+            <a:schemeClr val="lt1"/>
+          </a:fontRef>
+        </p:style>
+        <p:txBody>
+          <a:bodyPr rtlCol="0" anchor="ctr"/>
+          <a:lstStyle/>
+          <a:p>
+            <a:pPr algn="ctr"/>
+          </a:p>
+        </p:txBody>
+      </p:sp>
+      <p:sp>
+        <p:nvSpPr>
+          <p:cNvPr id="14" name="TextBox 13"/>
+          <p:cNvSpPr txBox="1"/>
+          <p:nvPr/>
+        </p:nvSpPr>
+        <p:spPr>
+          <a:xfrm>
+            <a:off x="896112" y="1892807"/>
+            <a:ext cx="3886200" cy="210312"/>
+          </a:xfrm>
+          <a:prstGeom prst="rect">
+            <a:avLst/>
+          </a:prstGeom>
+          <a:noFill/>
+        </p:spPr>
+        <p:txBody>
+          <a:bodyPr wrap="square" lIns="27432" rIns="27432" tIns="9144" bIns="9144">
+            <a:noAutofit/>
+          </a:bodyPr>
+          <a:lstStyle/>
+          <a:p>
+            <a:r>
+              <a:rPr sz="950" b="1" i="0">
+                <a:solidFill>
+                  <a:srgbClr val="2A9D8F"/>
+                </a:solidFill>
+                <a:latin typeface="Aptos Display"/>
+              </a:rPr>
+              <a:t>PROCESS EXAMPLES</a:t>
+            </a:r>
+          </a:p>
+        </p:txBody>
+      </p:sp>
+      <p:sp>
+        <p:nvSpPr>
+          <p:cNvPr id="15" name="TextBox 14"/>
+          <p:cNvSpPr txBox="1"/>
+          <p:nvPr/>
+        </p:nvSpPr>
+        <p:spPr>
+          <a:xfrm>
+            <a:off x="896112" y="2139696"/>
+            <a:ext cx="3886200" cy="603504"/>
+          </a:xfrm>
+          <a:prstGeom prst="rect">
+            <a:avLst/>
+          </a:prstGeom>
+          <a:noFill/>
+        </p:spPr>
+        <p:txBody>
+          <a:bodyPr wrap="square" lIns="27432" rIns="27432" tIns="9144" bIns="9144">
+            <a:noAutofit/>
+          </a:bodyPr>
+          <a:lstStyle/>
+          <a:p>
+            <a:r>
+              <a:rPr sz="2100" b="1" i="0">
+                <a:solidFill>
+                  <a:srgbClr val="11374B"/>
+                </a:solidFill>
+                <a:latin typeface="Aptos Display"/>
+              </a:rPr>
+              <a:t>The product defines comfort</a:t>
+            </a:r>
+          </a:p>
+        </p:txBody>
+      </p:sp>
+      <p:sp>
+        <p:nvSpPr>
+          <p:cNvPr id="16" name="Rounded Rectangle 15"/>
+          <p:cNvSpPr/>
+          <p:nvPr/>
+        </p:nvSpPr>
+        <p:spPr>
+          <a:xfrm>
+            <a:off x="896112" y="2926080"/>
+            <a:ext cx="3913632" cy="786384"/>
+          </a:xfrm>
+          <a:prstGeom prst="roundRect">
+            <a:avLst/>
+          </a:prstGeom>
+          <a:solidFill>
+            <a:srgbClr val="EBF4FA"/>
+          </a:solidFill>
+          <a:ln w="12700">
+            <a:solidFill>
+              <a:srgbClr val="E6EBF0"/>
+            </a:solidFill>
+          </a:ln>
+        </p:spPr>
+        <p:style>
+          <a:lnRef idx="1">
+            <a:schemeClr val="accent1"/>
+          </a:lnRef>
+          <a:fillRef idx="3">
+            <a:schemeClr val="accent1"/>
+          </a:fillRef>
+          <a:effectRef idx="2">
+            <a:schemeClr val="accent1"/>
+          </a:effectRef>
+          <a:fontRef idx="minor">
+            <a:schemeClr val="lt1"/>
+          </a:fontRef>
+        </p:style>
+        <p:txBody>
+          <a:bodyPr rtlCol="0" anchor="ctr"/>
+          <a:lstStyle/>
+          <a:p>
+            <a:pPr algn="ctr"/>
+          </a:p>
+        </p:txBody>
+      </p:sp>
+      <p:sp>
+        <p:nvSpPr>
+          <p:cNvPr id="17" name="Oval 16"/>
+          <p:cNvSpPr/>
+          <p:nvPr/>
+        </p:nvSpPr>
+        <p:spPr>
+          <a:xfrm>
+            <a:off x="1060704" y="3090672"/>
+            <a:ext cx="384048" cy="384048"/>
+          </a:xfrm>
+          <a:prstGeom prst="ellipse">
+            <a:avLst/>
+          </a:prstGeom>
+          <a:solidFill>
+            <a:srgbClr val="457B9D"/>
+          </a:solidFill>
+          <a:ln>
+            <a:noFill/>
+          </a:ln>
+        </p:spPr>
+        <p:style>
+          <a:lnRef idx="1">
+            <a:schemeClr val="accent1"/>
+          </a:lnRef>
+          <a:fillRef idx="3">
+            <a:schemeClr val="accent1"/>
+          </a:fillRef>
+          <a:effectRef idx="2">
+            <a:schemeClr val="accent1"/>
+          </a:effectRef>
+          <a:fontRef idx="minor">
+            <a:schemeClr val="lt1"/>
+          </a:fontRef>
+        </p:style>
+        <p:txBody>
+          <a:bodyPr rtlCol="0" anchor="ctr"/>
+          <a:lstStyle/>
+          <a:p>
+            <a:pPr algn="ctr"/>
+          </a:p>
+        </p:txBody>
+      </p:sp>
+      <p:sp>
+        <p:nvSpPr>
+          <p:cNvPr id="18" name="TextBox 17"/>
+          <p:cNvSpPr txBox="1"/>
+          <p:nvPr/>
+        </p:nvSpPr>
+        <p:spPr>
+          <a:xfrm>
+            <a:off x="1060704" y="3182112"/>
+            <a:ext cx="384048" cy="109728"/>
+          </a:xfrm>
+          <a:prstGeom prst="rect">
+            <a:avLst/>
+          </a:prstGeom>
+          <a:noFill/>
+        </p:spPr>
+        <p:txBody>
+          <a:bodyPr wrap="square" lIns="27432" rIns="27432" tIns="9144" bIns="9144">
+            <a:noAutofit/>
+          </a:bodyPr>
+          <a:lstStyle/>
+          <a:p>
+            <a:pPr algn="ctr"/>
+            <a:r>
+              <a:rPr sz="850" b="1" i="0">
+                <a:solidFill>
+                  <a:srgbClr val="FFFFFF"/>
+                </a:solidFill>
+                <a:latin typeface="Aptos Display"/>
+              </a:rPr>
+              <a:t>1</a:t>
+            </a:r>
+          </a:p>
+        </p:txBody>
+      </p:sp>
+      <p:sp>
+        <p:nvSpPr>
+          <p:cNvPr id="19" name="TextBox 18"/>
+          <p:cNvSpPr txBox="1"/>
+          <p:nvPr/>
+        </p:nvSpPr>
+        <p:spPr>
+          <a:xfrm>
+            <a:off x="1600200" y="3054096"/>
+            <a:ext cx="2834640" cy="201168"/>
+          </a:xfrm>
+          <a:prstGeom prst="rect">
+            <a:avLst/>
+          </a:prstGeom>
+          <a:noFill/>
+        </p:spPr>
+        <p:txBody>
+          <a:bodyPr wrap="square" lIns="27432" rIns="27432" tIns="9144" bIns="9144">
+            <a:noAutofit/>
+          </a:bodyPr>
+          <a:lstStyle/>
+          <a:p>
+            <a:r>
+              <a:rPr sz="1350" b="1" i="0">
+                <a:solidFill>
+                  <a:srgbClr val="232D37"/>
+                </a:solidFill>
+                <a:latin typeface="Aptos Display"/>
+              </a:rPr>
+              <a:t>Textile mill</a:t>
+            </a:r>
+          </a:p>
+        </p:txBody>
+      </p:sp>
+      <p:sp>
+        <p:nvSpPr>
+          <p:cNvPr id="20" name="TextBox 19"/>
+          <p:cNvSpPr txBox="1"/>
+          <p:nvPr/>
+        </p:nvSpPr>
+        <p:spPr>
+          <a:xfrm>
+            <a:off x="1600200" y="3319272"/>
+            <a:ext cx="2971800" cy="237744"/>
+          </a:xfrm>
+          <a:prstGeom prst="rect">
+            <a:avLst/>
+          </a:prstGeom>
+          <a:noFill/>
+        </p:spPr>
+        <p:txBody>
+          <a:bodyPr wrap="square" lIns="27432" rIns="27432" tIns="9144" bIns="9144">
+            <a:noAutofit/>
+          </a:bodyPr>
+          <a:lstStyle/>
+          <a:p>
+            <a:r>
+              <a:rPr sz="980" b="0" i="0">
+                <a:solidFill>
+                  <a:srgbClr val="5A6973"/>
+                </a:solidFill>
+                <a:latin typeface="Aptos"/>
+              </a:rPr>
+              <a:t>higher RH for fibers</a:t>
+            </a:r>
+          </a:p>
+        </p:txBody>
+      </p:sp>
+      <p:sp>
+        <p:nvSpPr>
+          <p:cNvPr id="21" name="Rounded Rectangle 20"/>
+          <p:cNvSpPr/>
+          <p:nvPr/>
+        </p:nvSpPr>
+        <p:spPr>
+          <a:xfrm>
+            <a:off x="896112" y="3858768"/>
+            <a:ext cx="3913632" cy="786384"/>
+          </a:xfrm>
+          <a:prstGeom prst="roundRect">
+            <a:avLst/>
+          </a:prstGeom>
+          <a:solidFill>
+            <a:srgbClr val="E6F4F7"/>
+          </a:solidFill>
+          <a:ln w="12700">
+            <a:solidFill>
+              <a:srgbClr val="E6EBF0"/>
+            </a:solidFill>
+          </a:ln>
+        </p:spPr>
+        <p:style>
+          <a:lnRef idx="1">
+            <a:schemeClr val="accent1"/>
+          </a:lnRef>
+          <a:fillRef idx="3">
+            <a:schemeClr val="accent1"/>
+          </a:fillRef>
+          <a:effectRef idx="2">
+            <a:schemeClr val="accent1"/>
+          </a:effectRef>
+          <a:fontRef idx="minor">
+            <a:schemeClr val="lt1"/>
+          </a:fontRef>
+        </p:style>
+        <p:txBody>
+          <a:bodyPr rtlCol="0" anchor="ctr"/>
+          <a:lstStyle/>
+          <a:p>
+            <a:pPr algn="ctr"/>
+          </a:p>
+        </p:txBody>
+      </p:sp>
+      <p:sp>
+        <p:nvSpPr>
+          <p:cNvPr id="22" name="Oval 21"/>
+          <p:cNvSpPr/>
+          <p:nvPr/>
+        </p:nvSpPr>
+        <p:spPr>
+          <a:xfrm>
+            <a:off x="1060704" y="4023360"/>
+            <a:ext cx="384048" cy="384048"/>
+          </a:xfrm>
+          <a:prstGeom prst="ellipse">
+            <a:avLst/>
+          </a:prstGeom>
+          <a:solidFill>
+            <a:srgbClr val="2A9D8F"/>
+          </a:solidFill>
+          <a:ln>
+            <a:noFill/>
+          </a:ln>
+        </p:spPr>
+        <p:style>
+          <a:lnRef idx="1">
+            <a:schemeClr val="accent1"/>
+          </a:lnRef>
+          <a:fillRef idx="3">
+            <a:schemeClr val="accent1"/>
+          </a:fillRef>
+          <a:effectRef idx="2">
+            <a:schemeClr val="accent1"/>
+          </a:effectRef>
+          <a:fontRef idx="minor">
+            <a:schemeClr val="lt1"/>
+          </a:fontRef>
+        </p:style>
+        <p:txBody>
+          <a:bodyPr rtlCol="0" anchor="ctr"/>
+          <a:lstStyle/>
+          <a:p>
+            <a:pPr algn="ctr"/>
+          </a:p>
+        </p:txBody>
+      </p:sp>
+      <p:sp>
+        <p:nvSpPr>
+          <p:cNvPr id="23" name="TextBox 22"/>
+          <p:cNvSpPr txBox="1"/>
+          <p:nvPr/>
+        </p:nvSpPr>
+        <p:spPr>
+          <a:xfrm>
+            <a:off x="1060704" y="4114800"/>
+            <a:ext cx="384048" cy="109728"/>
+          </a:xfrm>
+          <a:prstGeom prst="rect">
+            <a:avLst/>
+          </a:prstGeom>
+          <a:noFill/>
+        </p:spPr>
+        <p:txBody>
+          <a:bodyPr wrap="square" lIns="27432" rIns="27432" tIns="9144" bIns="9144">
+            <a:noAutofit/>
+          </a:bodyPr>
+          <a:lstStyle/>
+          <a:p>
+            <a:pPr algn="ctr"/>
+            <a:r>
+              <a:rPr sz="850" b="1" i="0">
+                <a:solidFill>
+                  <a:srgbClr val="FFFFFF"/>
+                </a:solidFill>
+                <a:latin typeface="Aptos Display"/>
+              </a:rPr>
+              <a:t>2</a:t>
+            </a:r>
+          </a:p>
+        </p:txBody>
+      </p:sp>
+      <p:sp>
+        <p:nvSpPr>
+          <p:cNvPr id="24" name="TextBox 23"/>
+          <p:cNvSpPr txBox="1"/>
+          <p:nvPr/>
+        </p:nvSpPr>
+        <p:spPr>
+          <a:xfrm>
+            <a:off x="1600200" y="3986784"/>
+            <a:ext cx="2834640" cy="201168"/>
+          </a:xfrm>
+          <a:prstGeom prst="rect">
+            <a:avLst/>
+          </a:prstGeom>
+          <a:noFill/>
+        </p:spPr>
+        <p:txBody>
+          <a:bodyPr wrap="square" lIns="27432" rIns="27432" tIns="9144" bIns="9144">
+            <a:noAutofit/>
+          </a:bodyPr>
+          <a:lstStyle/>
+          <a:p>
+            <a:r>
+              <a:rPr sz="1350" b="1" i="0">
+                <a:solidFill>
+                  <a:srgbClr val="232D37"/>
+                </a:solidFill>
+                <a:latin typeface="Aptos Display"/>
+              </a:rPr>
+              <a:t>Paper storage</a:t>
+            </a:r>
+          </a:p>
+        </p:txBody>
+      </p:sp>
+      <p:sp>
+        <p:nvSpPr>
+          <p:cNvPr id="25" name="TextBox 24"/>
+          <p:cNvSpPr txBox="1"/>
+          <p:nvPr/>
+        </p:nvSpPr>
+        <p:spPr>
+          <a:xfrm>
+            <a:off x="1600200" y="4251960"/>
+            <a:ext cx="2971800" cy="237744"/>
+          </a:xfrm>
+          <a:prstGeom prst="rect">
+            <a:avLst/>
+          </a:prstGeom>
+          <a:noFill/>
+        </p:spPr>
+        <p:txBody>
+          <a:bodyPr wrap="square" lIns="27432" rIns="27432" tIns="9144" bIns="9144">
+            <a:noAutofit/>
+          </a:bodyPr>
+          <a:lstStyle/>
+          <a:p>
+            <a:r>
+              <a:rPr sz="980" b="0" i="0">
+                <a:solidFill>
+                  <a:srgbClr val="5A6973"/>
+                </a:solidFill>
+                <a:latin typeface="Aptos"/>
+              </a:rPr>
+              <a:t>lower RH to protect stock</a:t>
+            </a:r>
+          </a:p>
+        </p:txBody>
+      </p:sp>
+      <p:sp>
+        <p:nvSpPr>
+          <p:cNvPr id="26" name="Rounded Rectangle 25"/>
+          <p:cNvSpPr/>
+          <p:nvPr/>
+        </p:nvSpPr>
+        <p:spPr>
+          <a:xfrm>
+            <a:off x="896112" y="4791456"/>
+            <a:ext cx="3913632" cy="786384"/>
+          </a:xfrm>
+          <a:prstGeom prst="roundRect">
+            <a:avLst/>
+          </a:prstGeom>
+          <a:solidFill>
+            <a:srgbClr val="ECF8EE"/>
+          </a:solidFill>
+          <a:ln w="12700">
+            <a:solidFill>
+              <a:srgbClr val="E6EBF0"/>
+            </a:solidFill>
+          </a:ln>
+        </p:spPr>
+        <p:style>
+          <a:lnRef idx="1">
+            <a:schemeClr val="accent1"/>
+          </a:lnRef>
+          <a:fillRef idx="3">
+            <a:schemeClr val="accent1"/>
+          </a:fillRef>
+          <a:effectRef idx="2">
+            <a:schemeClr val="accent1"/>
+          </a:effectRef>
+          <a:fontRef idx="minor">
+            <a:schemeClr val="lt1"/>
+          </a:fontRef>
+        </p:style>
+        <p:txBody>
+          <a:bodyPr rtlCol="0" anchor="ctr"/>
+          <a:lstStyle/>
+          <a:p>
+            <a:pPr algn="ctr"/>
+          </a:p>
+        </p:txBody>
+      </p:sp>
+      <p:sp>
+        <p:nvSpPr>
+          <p:cNvPr id="27" name="Oval 26"/>
+          <p:cNvSpPr/>
+          <p:nvPr/>
+        </p:nvSpPr>
+        <p:spPr>
+          <a:xfrm>
+            <a:off x="1060704" y="4956048"/>
+            <a:ext cx="384048" cy="384048"/>
+          </a:xfrm>
+          <a:prstGeom prst="ellipse">
+            <a:avLst/>
+          </a:prstGeom>
+          <a:solidFill>
+            <a:srgbClr val="4CAF50"/>
+          </a:solidFill>
+          <a:ln>
+            <a:noFill/>
+          </a:ln>
+        </p:spPr>
+        <p:style>
+          <a:lnRef idx="1">
+            <a:schemeClr val="accent1"/>
+          </a:lnRef>
+          <a:fillRef idx="3">
+            <a:schemeClr val="accent1"/>
+          </a:fillRef>
+          <a:effectRef idx="2">
+            <a:schemeClr val="accent1"/>
+          </a:effectRef>
+          <a:fontRef idx="minor">
+            <a:schemeClr val="lt1"/>
+          </a:fontRef>
+        </p:style>
+        <p:txBody>
+          <a:bodyPr rtlCol="0" anchor="ctr"/>
+          <a:lstStyle/>
+          <a:p>
+            <a:pPr algn="ctr"/>
+          </a:p>
+        </p:txBody>
+      </p:sp>
+      <p:sp>
+        <p:nvSpPr>
+          <p:cNvPr id="28" name="TextBox 27"/>
+          <p:cNvSpPr txBox="1"/>
+          <p:nvPr/>
+        </p:nvSpPr>
+        <p:spPr>
+          <a:xfrm>
+            <a:off x="1060704" y="5047488"/>
+            <a:ext cx="384048" cy="109728"/>
+          </a:xfrm>
+          <a:prstGeom prst="rect">
+            <a:avLst/>
+          </a:prstGeom>
+          <a:noFill/>
+        </p:spPr>
+        <p:txBody>
+          <a:bodyPr wrap="square" lIns="27432" rIns="27432" tIns="9144" bIns="9144">
+            <a:noAutofit/>
+          </a:bodyPr>
+          <a:lstStyle/>
+          <a:p>
+            <a:pPr algn="ctr"/>
+            <a:r>
+              <a:rPr sz="850" b="1" i="0">
+                <a:solidFill>
+                  <a:srgbClr val="FFFFFF"/>
+                </a:solidFill>
+                <a:latin typeface="Aptos Display"/>
+              </a:rPr>
+              <a:t>3</a:t>
+            </a:r>
+          </a:p>
+        </p:txBody>
+      </p:sp>
+      <p:sp>
+        <p:nvSpPr>
+          <p:cNvPr id="29" name="TextBox 28"/>
+          <p:cNvSpPr txBox="1"/>
+          <p:nvPr/>
+        </p:nvSpPr>
+        <p:spPr>
+          <a:xfrm>
+            <a:off x="1600200" y="4919472"/>
+            <a:ext cx="2834640" cy="201168"/>
+          </a:xfrm>
+          <a:prstGeom prst="rect">
+            <a:avLst/>
+          </a:prstGeom>
+          <a:noFill/>
+        </p:spPr>
+        <p:txBody>
+          <a:bodyPr wrap="square" lIns="27432" rIns="27432" tIns="9144" bIns="9144">
+            <a:noAutofit/>
+          </a:bodyPr>
+          <a:lstStyle/>
+          <a:p>
+            <a:r>
+              <a:rPr sz="1350" b="1" i="0">
+                <a:solidFill>
+                  <a:srgbClr val="232D37"/>
+                </a:solidFill>
+                <a:latin typeface="Aptos Display"/>
+              </a:rPr>
+              <a:t>Seed storage</a:t>
+            </a:r>
+          </a:p>
+        </p:txBody>
+      </p:sp>
+      <p:sp>
+        <p:nvSpPr>
+          <p:cNvPr id="30" name="TextBox 29"/>
+          <p:cNvSpPr txBox="1"/>
+          <p:nvPr/>
+        </p:nvSpPr>
+        <p:spPr>
+          <a:xfrm>
+            <a:off x="1600200" y="5184648"/>
+            <a:ext cx="2971800" cy="237744"/>
+          </a:xfrm>
+          <a:prstGeom prst="rect">
+            <a:avLst/>
+          </a:prstGeom>
+          <a:noFill/>
+        </p:spPr>
+        <p:txBody>
+          <a:bodyPr wrap="square" lIns="27432" rIns="27432" tIns="9144" bIns="9144">
+            <a:noAutofit/>
+          </a:bodyPr>
+          <a:lstStyle/>
+          <a:p>
+            <a:r>
+              <a:rPr sz="980" b="0" i="0">
+                <a:solidFill>
+                  <a:srgbClr val="5A6973"/>
+                </a:solidFill>
+                <a:latin typeface="Aptos"/>
+              </a:rPr>
+              <a:t>low temperature + low humidity</a:t>
+            </a:r>
+          </a:p>
+        </p:txBody>
+      </p:sp>
     </p:spTree>
   </p:cSld>
   <p:clrMapOvr>
@@ -10812,7 +15280,7 @@
 </file>
 
 <file path=ppt/slides/slide8.xml><?xml version="1.0" encoding="utf-8"?>
-<p:sld xmlns:a="http://schemas.openxmlformats.org/drawingml/2006/main" xmlns:p="http://schemas.openxmlformats.org/presentationml/2006/main" xmlns:r="http://schemas.openxmlformats.org/officeDocument/2006/relationships">
+<p:sld xmlns:a="http://schemas.openxmlformats.org/drawingml/2006/main" xmlns:r="http://schemas.openxmlformats.org/officeDocument/2006/relationships" xmlns:p="http://schemas.openxmlformats.org/presentationml/2006/main">
   <p:cSld>
     <p:bg>
       <p:bgPr>
@@ -10828,7 +15296,14 @@
         <p:cNvGrpSpPr/>
         <p:nvPr/>
       </p:nvGrpSpPr>
-      <p:grpSpPr/>
+      <p:grpSpPr>
+        <a:xfrm>
+          <a:off x="0" y="0"/>
+          <a:ext cx="0" cy="0"/>
+          <a:chOff x="0" y="0"/>
+          <a:chExt cx="0" cy="0"/>
+        </a:xfrm>
+      </p:grpSpPr>
       <p:sp>
         <p:nvSpPr>
           <p:cNvPr id="2" name="Rectangle 1"/>
@@ -10869,6 +15344,7 @@
           <a:lstStyle/>
           <a:p>
             <a:pPr algn="ctr"/>
+            <a:endParaRPr/>
           </a:p>
         </p:txBody>
       </p:sp>
@@ -11086,95 +15562,7 @@
           <a:lstStyle/>
           <a:p>
             <a:pPr algn="ctr"/>
-          </a:p>
-        </p:txBody>
-      </p:sp>
-      <p:sp>
-        <p:nvSpPr>
-          <p:cNvPr id="9" name="TextBox 8"/>
-          <p:cNvSpPr txBox="1"/>
-          <p:nvPr/>
-        </p:nvSpPr>
-        <p:spPr>
-          <a:xfrm>
-            <a:off x="1005840" y="1965960"/>
-            <a:ext cx="3657600" cy="365760"/>
-          </a:xfrm>
-          <a:prstGeom prst="rect">
-            <a:avLst/>
-          </a:prstGeom>
-          <a:noFill/>
-        </p:spPr>
-        <p:txBody>
-          <a:bodyPr wrap="square">
-            <a:spAutoFit/>
-          </a:bodyPr>
-          <a:lstStyle/>
-          <a:p>
-            <a:r>
-              <a:rPr sz="2000" b="1" i="0">
-                <a:solidFill>
-                  <a:srgbClr val="11374B"/>
-                </a:solidFill>
-                <a:latin typeface="Aptos"/>
-              </a:rPr>
-              <a:t>Average load ≠ design load</a:t>
-            </a:r>
-          </a:p>
-        </p:txBody>
-      </p:sp>
-      <p:sp>
-        <p:nvSpPr>
-          <p:cNvPr id="10" name="TextBox 9"/>
-          <p:cNvSpPr txBox="1"/>
-          <p:nvPr/>
-        </p:nvSpPr>
-        <p:spPr>
-          <a:xfrm>
-            <a:off x="1005840" y="2514600"/>
-            <a:ext cx="3931920" cy="2377440"/>
-          </a:xfrm>
-          <a:prstGeom prst="rect">
-            <a:avLst/>
-          </a:prstGeom>
-          <a:noFill/>
-        </p:spPr>
-        <p:txBody>
-          <a:bodyPr wrap="square">
-            <a:spAutoFit/>
-          </a:bodyPr>
-          <a:lstStyle/>
-          <a:p>
-            <a:pPr>
-              <a:spcAft>
-                <a:spcPts val="1000"/>
-              </a:spcAft>
-              <a:defRPr sz="1700">
-                <a:solidFill>
-                  <a:srgbClr val="232D37"/>
-                </a:solidFill>
-                <a:latin typeface="Aptos"/>
-              </a:defRPr>
-            </a:pPr>
-            <a:r>
-              <a:t>Equipment must cover the maximum expected load.</a:t>
-            </a:r>
-          </a:p>
-          <a:p>
-            <a:pPr>
-              <a:spcAft>
-                <a:spcPts val="1000"/>
-              </a:spcAft>
-              <a:defRPr sz="1700">
-                <a:solidFill>
-                  <a:srgbClr val="232D37"/>
-                </a:solidFill>
-                <a:latin typeface="Aptos"/>
-              </a:defRPr>
-            </a:pPr>
-            <a:r>
-              <a:t>Average load can understate the required capacity.</a:t>
-            </a:r>
+            <a:endParaRPr/>
           </a:p>
         </p:txBody>
       </p:sp>
@@ -11463,6 +15851,7 @@
           <a:lstStyle/>
           <a:p>
             <a:pPr algn="ctr"/>
+            <a:endParaRPr/>
           </a:p>
         </p:txBody>
       </p:sp>
@@ -11506,6 +15895,7 @@
           <a:lstStyle/>
           <a:p>
             <a:pPr algn="ctr"/>
+            <a:endParaRPr/>
           </a:p>
         </p:txBody>
       </p:sp>
@@ -11549,6 +15939,7 @@
           <a:lstStyle/>
           <a:p>
             <a:pPr algn="ctr"/>
+            <a:endParaRPr/>
           </a:p>
         </p:txBody>
       </p:sp>
@@ -11592,6 +15983,7 @@
           <a:lstStyle/>
           <a:p>
             <a:pPr algn="ctr"/>
+            <a:endParaRPr/>
           </a:p>
         </p:txBody>
       </p:sp>
@@ -11635,6 +16027,7 @@
           <a:lstStyle/>
           <a:p>
             <a:pPr algn="ctr"/>
+            <a:endParaRPr/>
           </a:p>
         </p:txBody>
       </p:sp>
@@ -11678,6 +16071,7 @@
           <a:lstStyle/>
           <a:p>
             <a:pPr algn="ctr"/>
+            <a:endParaRPr/>
           </a:p>
         </p:txBody>
       </p:sp>
@@ -11815,6 +16209,474 @@
                 <a:latin typeface="Aptos"/>
               </a:rPr>
               <a:t>Time of day →</a:t>
+            </a:r>
+          </a:p>
+        </p:txBody>
+      </p:sp>
+      <p:sp>
+        <p:nvSpPr>
+          <p:cNvPr id="28" name="Rounded Rectangle 27"/>
+          <p:cNvSpPr/>
+          <p:nvPr/>
+        </p:nvSpPr>
+        <p:spPr>
+          <a:xfrm>
+            <a:off x="960120" y="1874519"/>
+            <a:ext cx="4069080" cy="2788920"/>
+          </a:xfrm>
+          <a:prstGeom prst="roundRect">
+            <a:avLst/>
+          </a:prstGeom>
+          <a:solidFill>
+            <a:srgbClr val="FFFFFF"/>
+          </a:solidFill>
+          <a:ln w="12700">
+            <a:solidFill>
+              <a:srgbClr val="DCE2E8"/>
+            </a:solidFill>
+          </a:ln>
+        </p:spPr>
+        <p:style>
+          <a:lnRef idx="1">
+            <a:schemeClr val="accent1"/>
+          </a:lnRef>
+          <a:fillRef idx="3">
+            <a:schemeClr val="accent1"/>
+          </a:fillRef>
+          <a:effectRef idx="2">
+            <a:schemeClr val="accent1"/>
+          </a:effectRef>
+          <a:fontRef idx="minor">
+            <a:schemeClr val="lt1"/>
+          </a:fontRef>
+        </p:style>
+        <p:txBody>
+          <a:bodyPr rtlCol="0" anchor="ctr"/>
+          <a:lstStyle/>
+          <a:p>
+            <a:pPr algn="ctr"/>
+          </a:p>
+        </p:txBody>
+      </p:sp>
+      <p:sp>
+        <p:nvSpPr>
+          <p:cNvPr id="29" name="Rectangle 28"/>
+          <p:cNvSpPr/>
+          <p:nvPr/>
+        </p:nvSpPr>
+        <p:spPr>
+          <a:xfrm>
+            <a:off x="960120" y="1874519"/>
+            <a:ext cx="109728" cy="2788920"/>
+          </a:xfrm>
+          <a:prstGeom prst="rect">
+            <a:avLst/>
+          </a:prstGeom>
+          <a:solidFill>
+            <a:srgbClr val="E76F51"/>
+          </a:solidFill>
+          <a:ln>
+            <a:noFill/>
+          </a:ln>
+        </p:spPr>
+        <p:style>
+          <a:lnRef idx="1">
+            <a:schemeClr val="accent1"/>
+          </a:lnRef>
+          <a:fillRef idx="3">
+            <a:schemeClr val="accent1"/>
+          </a:fillRef>
+          <a:effectRef idx="2">
+            <a:schemeClr val="accent1"/>
+          </a:effectRef>
+          <a:fontRef idx="minor">
+            <a:schemeClr val="lt1"/>
+          </a:fontRef>
+        </p:style>
+        <p:txBody>
+          <a:bodyPr rtlCol="0" anchor="ctr"/>
+          <a:lstStyle/>
+          <a:p>
+            <a:pPr algn="ctr"/>
+          </a:p>
+        </p:txBody>
+      </p:sp>
+      <p:sp>
+        <p:nvSpPr>
+          <p:cNvPr id="30" name="TextBox 29"/>
+          <p:cNvSpPr txBox="1"/>
+          <p:nvPr/>
+        </p:nvSpPr>
+        <p:spPr>
+          <a:xfrm>
+            <a:off x="1234440" y="2121408"/>
+            <a:ext cx="3337560" cy="201168"/>
+          </a:xfrm>
+          <a:prstGeom prst="rect">
+            <a:avLst/>
+          </a:prstGeom>
+          <a:noFill/>
+        </p:spPr>
+        <p:txBody>
+          <a:bodyPr wrap="square" lIns="27432" rIns="27432" tIns="9144" bIns="9144">
+            <a:noAutofit/>
+          </a:bodyPr>
+          <a:lstStyle/>
+          <a:p>
+            <a:r>
+              <a:rPr sz="950" b="1" i="0">
+                <a:solidFill>
+                  <a:srgbClr val="E76F51"/>
+                </a:solidFill>
+                <a:latin typeface="Aptos Display"/>
+              </a:rPr>
+              <a:t>SIZING PRINCIPLE</a:t>
+            </a:r>
+          </a:p>
+        </p:txBody>
+      </p:sp>
+      <p:sp>
+        <p:nvSpPr>
+          <p:cNvPr id="31" name="TextBox 30"/>
+          <p:cNvSpPr txBox="1"/>
+          <p:nvPr/>
+        </p:nvSpPr>
+        <p:spPr>
+          <a:xfrm>
+            <a:off x="1234440" y="2404872"/>
+            <a:ext cx="3474720" cy="493776"/>
+          </a:xfrm>
+          <a:prstGeom prst="rect">
+            <a:avLst/>
+          </a:prstGeom>
+          <a:noFill/>
+        </p:spPr>
+        <p:txBody>
+          <a:bodyPr wrap="square" lIns="27432" rIns="27432" tIns="9144" bIns="9144">
+            <a:noAutofit/>
+          </a:bodyPr>
+          <a:lstStyle/>
+          <a:p>
+            <a:r>
+              <a:rPr sz="2100" b="1" i="0">
+                <a:solidFill>
+                  <a:srgbClr val="11374B"/>
+                </a:solidFill>
+                <a:latin typeface="Aptos Display"/>
+              </a:rPr>
+              <a:t>Peak load sets capacity</a:t>
+            </a:r>
+          </a:p>
+        </p:txBody>
+      </p:sp>
+      <p:sp>
+        <p:nvSpPr>
+          <p:cNvPr id="32" name="Rounded Rectangle 31"/>
+          <p:cNvSpPr/>
+          <p:nvPr/>
+        </p:nvSpPr>
+        <p:spPr>
+          <a:xfrm>
+            <a:off x="1234440" y="3108960"/>
+            <a:ext cx="3429000" cy="566928"/>
+          </a:xfrm>
+          <a:prstGeom prst="roundRect">
+            <a:avLst/>
+          </a:prstGeom>
+          <a:solidFill>
+            <a:srgbClr val="FFF1E8"/>
+          </a:solidFill>
+          <a:ln w="12700">
+            <a:solidFill>
+              <a:srgbClr val="E6EBF0"/>
+            </a:solidFill>
+          </a:ln>
+        </p:spPr>
+        <p:style>
+          <a:lnRef idx="1">
+            <a:schemeClr val="accent1"/>
+          </a:lnRef>
+          <a:fillRef idx="3">
+            <a:schemeClr val="accent1"/>
+          </a:fillRef>
+          <a:effectRef idx="2">
+            <a:schemeClr val="accent1"/>
+          </a:effectRef>
+          <a:fontRef idx="minor">
+            <a:schemeClr val="lt1"/>
+          </a:fontRef>
+        </p:style>
+        <p:txBody>
+          <a:bodyPr rtlCol="0" anchor="ctr"/>
+          <a:lstStyle/>
+          <a:p>
+            <a:pPr algn="ctr"/>
+          </a:p>
+        </p:txBody>
+      </p:sp>
+      <p:sp>
+        <p:nvSpPr>
+          <p:cNvPr id="33" name="Oval 32"/>
+          <p:cNvSpPr/>
+          <p:nvPr/>
+        </p:nvSpPr>
+        <p:spPr>
+          <a:xfrm>
+            <a:off x="1389888" y="3246120"/>
+            <a:ext cx="292608" cy="292608"/>
+          </a:xfrm>
+          <a:prstGeom prst="ellipse">
+            <a:avLst/>
+          </a:prstGeom>
+          <a:solidFill>
+            <a:srgbClr val="E76F51"/>
+          </a:solidFill>
+          <a:ln>
+            <a:noFill/>
+          </a:ln>
+        </p:spPr>
+        <p:style>
+          <a:lnRef idx="1">
+            <a:schemeClr val="accent1"/>
+          </a:lnRef>
+          <a:fillRef idx="3">
+            <a:schemeClr val="accent1"/>
+          </a:fillRef>
+          <a:effectRef idx="2">
+            <a:schemeClr val="accent1"/>
+          </a:effectRef>
+          <a:fontRef idx="minor">
+            <a:schemeClr val="lt1"/>
+          </a:fontRef>
+        </p:style>
+        <p:txBody>
+          <a:bodyPr rtlCol="0" anchor="ctr"/>
+          <a:lstStyle/>
+          <a:p>
+            <a:pPr algn="ctr"/>
+          </a:p>
+        </p:txBody>
+      </p:sp>
+      <p:sp>
+        <p:nvSpPr>
+          <p:cNvPr id="34" name="TextBox 33"/>
+          <p:cNvSpPr txBox="1"/>
+          <p:nvPr/>
+        </p:nvSpPr>
+        <p:spPr>
+          <a:xfrm>
+            <a:off x="1783080" y="3200400"/>
+            <a:ext cx="2514600" cy="164592"/>
+          </a:xfrm>
+          <a:prstGeom prst="rect">
+            <a:avLst/>
+          </a:prstGeom>
+          <a:noFill/>
+        </p:spPr>
+        <p:txBody>
+          <a:bodyPr wrap="square" lIns="27432" rIns="27432" tIns="9144" bIns="9144">
+            <a:noAutofit/>
+          </a:bodyPr>
+          <a:lstStyle/>
+          <a:p>
+            <a:r>
+              <a:rPr sz="1150" b="1" i="0">
+                <a:solidFill>
+                  <a:srgbClr val="232D37"/>
+                </a:solidFill>
+                <a:latin typeface="Aptos Display"/>
+              </a:rPr>
+              <a:t>Design for maximum expected load</a:t>
+            </a:r>
+          </a:p>
+        </p:txBody>
+      </p:sp>
+      <p:sp>
+        <p:nvSpPr>
+          <p:cNvPr id="35" name="TextBox 34"/>
+          <p:cNvSpPr txBox="1"/>
+          <p:nvPr/>
+        </p:nvSpPr>
+        <p:spPr>
+          <a:xfrm>
+            <a:off x="1783080" y="3429000"/>
+            <a:ext cx="2514600" cy="146304"/>
+          </a:xfrm>
+          <a:prstGeom prst="rect">
+            <a:avLst/>
+          </a:prstGeom>
+          <a:noFill/>
+        </p:spPr>
+        <p:txBody>
+          <a:bodyPr wrap="square" lIns="27432" rIns="27432" tIns="9144" bIns="9144">
+            <a:noAutofit/>
+          </a:bodyPr>
+          <a:lstStyle/>
+          <a:p>
+            <a:r>
+              <a:rPr sz="850" b="0" i="0">
+                <a:solidFill>
+                  <a:srgbClr val="5A6973"/>
+                </a:solidFill>
+                <a:latin typeface="Aptos"/>
+              </a:rPr>
+              <a:t>not the daily average</a:t>
+            </a:r>
+          </a:p>
+        </p:txBody>
+      </p:sp>
+      <p:sp>
+        <p:nvSpPr>
+          <p:cNvPr id="36" name="Rounded Rectangle 35"/>
+          <p:cNvSpPr/>
+          <p:nvPr/>
+        </p:nvSpPr>
+        <p:spPr>
+          <a:xfrm>
+            <a:off x="1234440" y="3858768"/>
+            <a:ext cx="3429000" cy="566928"/>
+          </a:xfrm>
+          <a:prstGeom prst="roundRect">
+            <a:avLst/>
+          </a:prstGeom>
+          <a:solidFill>
+            <a:srgbClr val="EBF4FA"/>
+          </a:solidFill>
+          <a:ln w="12700">
+            <a:solidFill>
+              <a:srgbClr val="E6EBF0"/>
+            </a:solidFill>
+          </a:ln>
+        </p:spPr>
+        <p:style>
+          <a:lnRef idx="1">
+            <a:schemeClr val="accent1"/>
+          </a:lnRef>
+          <a:fillRef idx="3">
+            <a:schemeClr val="accent1"/>
+          </a:fillRef>
+          <a:effectRef idx="2">
+            <a:schemeClr val="accent1"/>
+          </a:effectRef>
+          <a:fontRef idx="minor">
+            <a:schemeClr val="lt1"/>
+          </a:fontRef>
+        </p:style>
+        <p:txBody>
+          <a:bodyPr rtlCol="0" anchor="ctr"/>
+          <a:lstStyle/>
+          <a:p>
+            <a:pPr algn="ctr"/>
+          </a:p>
+        </p:txBody>
+      </p:sp>
+      <p:sp>
+        <p:nvSpPr>
+          <p:cNvPr id="37" name="Oval 36"/>
+          <p:cNvSpPr/>
+          <p:nvPr/>
+        </p:nvSpPr>
+        <p:spPr>
+          <a:xfrm>
+            <a:off x="1389888" y="3995928"/>
+            <a:ext cx="292608" cy="292608"/>
+          </a:xfrm>
+          <a:prstGeom prst="ellipse">
+            <a:avLst/>
+          </a:prstGeom>
+          <a:solidFill>
+            <a:srgbClr val="457B9D"/>
+          </a:solidFill>
+          <a:ln>
+            <a:noFill/>
+          </a:ln>
+        </p:spPr>
+        <p:style>
+          <a:lnRef idx="1">
+            <a:schemeClr val="accent1"/>
+          </a:lnRef>
+          <a:fillRef idx="3">
+            <a:schemeClr val="accent1"/>
+          </a:fillRef>
+          <a:effectRef idx="2">
+            <a:schemeClr val="accent1"/>
+          </a:effectRef>
+          <a:fontRef idx="minor">
+            <a:schemeClr val="lt1"/>
+          </a:fontRef>
+        </p:style>
+        <p:txBody>
+          <a:bodyPr rtlCol="0" anchor="ctr"/>
+          <a:lstStyle/>
+          <a:p>
+            <a:pPr algn="ctr"/>
+          </a:p>
+        </p:txBody>
+      </p:sp>
+      <p:sp>
+        <p:nvSpPr>
+          <p:cNvPr id="38" name="TextBox 37"/>
+          <p:cNvSpPr txBox="1"/>
+          <p:nvPr/>
+        </p:nvSpPr>
+        <p:spPr>
+          <a:xfrm>
+            <a:off x="1783080" y="3950207"/>
+            <a:ext cx="2514600" cy="164592"/>
+          </a:xfrm>
+          <a:prstGeom prst="rect">
+            <a:avLst/>
+          </a:prstGeom>
+          <a:noFill/>
+        </p:spPr>
+        <p:txBody>
+          <a:bodyPr wrap="square" lIns="27432" rIns="27432" tIns="9144" bIns="9144">
+            <a:noAutofit/>
+          </a:bodyPr>
+          <a:lstStyle/>
+          <a:p>
+            <a:r>
+              <a:rPr sz="1150" b="1" i="0">
+                <a:solidFill>
+                  <a:srgbClr val="232D37"/>
+                </a:solidFill>
+                <a:latin typeface="Aptos Display"/>
+              </a:rPr>
+              <a:t>Average load can be misleading</a:t>
+            </a:r>
+          </a:p>
+        </p:txBody>
+      </p:sp>
+      <p:sp>
+        <p:nvSpPr>
+          <p:cNvPr id="39" name="TextBox 38"/>
+          <p:cNvSpPr txBox="1"/>
+          <p:nvPr/>
+        </p:nvSpPr>
+        <p:spPr>
+          <a:xfrm>
+            <a:off x="1783080" y="4178807"/>
+            <a:ext cx="2514600" cy="146304"/>
+          </a:xfrm>
+          <a:prstGeom prst="rect">
+            <a:avLst/>
+          </a:prstGeom>
+          <a:noFill/>
+        </p:spPr>
+        <p:txBody>
+          <a:bodyPr wrap="square" lIns="27432" rIns="27432" tIns="9144" bIns="9144">
+            <a:noAutofit/>
+          </a:bodyPr>
+          <a:lstStyle/>
+          <a:p>
+            <a:r>
+              <a:rPr sz="850" b="0" i="0">
+                <a:solidFill>
+                  <a:srgbClr val="5A6973"/>
+                </a:solidFill>
+                <a:latin typeface="Aptos"/>
+              </a:rPr>
+              <a:t>capacity may be undersized</a:t>
             </a:r>
           </a:p>
         </p:txBody>
@@ -11828,7 +16690,7 @@
 </file>
 
 <file path=ppt/slides/slide9.xml><?xml version="1.0" encoding="utf-8"?>
-<p:sld xmlns:a="http://schemas.openxmlformats.org/drawingml/2006/main" xmlns:p="http://schemas.openxmlformats.org/presentationml/2006/main" xmlns:r="http://schemas.openxmlformats.org/officeDocument/2006/relationships">
+<p:sld xmlns:a="http://schemas.openxmlformats.org/drawingml/2006/main" xmlns:r="http://schemas.openxmlformats.org/officeDocument/2006/relationships" xmlns:p="http://schemas.openxmlformats.org/presentationml/2006/main">
   <p:cSld>
     <p:bg>
       <p:bgPr>
@@ -11844,7 +16706,14 @@
         <p:cNvGrpSpPr/>
         <p:nvPr/>
       </p:nvGrpSpPr>
-      <p:grpSpPr/>
+      <p:grpSpPr>
+        <a:xfrm>
+          <a:off x="0" y="0"/>
+          <a:ext cx="0" cy="0"/>
+          <a:chOff x="0" y="0"/>
+          <a:chExt cx="0" cy="0"/>
+        </a:xfrm>
+      </p:grpSpPr>
       <p:sp>
         <p:nvSpPr>
           <p:cNvPr id="2" name="Rectangle 1"/>
@@ -11885,6 +16754,7 @@
           <a:lstStyle/>
           <a:p>
             <a:pPr algn="ctr"/>
+            <a:endParaRPr/>
           </a:p>
         </p:txBody>
       </p:sp>
@@ -12102,6 +16972,7 @@
           <a:lstStyle/>
           <a:p>
             <a:pPr algn="ctr"/>
+            <a:endParaRPr/>
           </a:p>
         </p:txBody>
       </p:sp>
@@ -12390,6 +17261,7 @@
           <a:lstStyle/>
           <a:p>
             <a:pPr algn="ctr"/>
+            <a:endParaRPr/>
           </a:p>
         </p:txBody>
       </p:sp>
@@ -12433,6 +17305,7 @@
           <a:lstStyle/>
           <a:p>
             <a:pPr algn="ctr"/>
+            <a:endParaRPr/>
           </a:p>
         </p:txBody>
       </p:sp>
@@ -12476,6 +17349,7 @@
           <a:lstStyle/>
           <a:p>
             <a:pPr algn="ctr"/>
+            <a:endParaRPr/>
           </a:p>
         </p:txBody>
       </p:sp>
@@ -12519,6 +17393,7 @@
           <a:lstStyle/>
           <a:p>
             <a:pPr algn="ctr"/>
+            <a:endParaRPr/>
           </a:p>
         </p:txBody>
       </p:sp>
@@ -12562,6 +17437,7 @@
           <a:lstStyle/>
           <a:p>
             <a:pPr algn="ctr"/>
+            <a:endParaRPr/>
           </a:p>
         </p:txBody>
       </p:sp>
@@ -12605,6 +17481,7 @@
           <a:lstStyle/>
           <a:p>
             <a:pPr algn="ctr"/>
+            <a:endParaRPr/>
           </a:p>
         </p:txBody>
       </p:sp>
@@ -12824,6 +17701,7 @@
           <a:lstStyle/>
           <a:p>
             <a:pPr algn="ctr"/>
+            <a:endParaRPr/>
           </a:p>
         </p:txBody>
       </p:sp>
